--- a/docs/BulkFill_스케줄링_발표자료.pptx
+++ b/docs/BulkFill_스케줄링_발표자료.pptx
@@ -19,6 +19,8 @@
     <p:sldId id="267" r:id="rId18"/>
     <p:sldId id="268" r:id="rId19"/>
     <p:sldId id="269" r:id="rId20"/>
+    <p:sldId id="270" r:id="rId21"/>
+    <p:sldId id="271" r:id="rId22"/>
   </p:sldIdLst>
   <p:sldSz cx="12191695" cy="6858000" type="screen4x3"/>
   <p:notesSz cx="6858000" cy="9144000"/>
@@ -532,6 +534,264 @@
 </c:chartSpace>
 </file>
 
+<file path=ppt/charts/chart3.xml><?xml version="1.0" encoding="utf-8"?>
+<c:chartSpace xmlns:c="http://schemas.openxmlformats.org/drawingml/2006/chart" xmlns:a="http://schemas.openxmlformats.org/drawingml/2006/main" xmlns:r="http://schemas.openxmlformats.org/officeDocument/2006/relationships">
+  <c:date1904 val="0"/>
+  <c:chart>
+    <c:title>
+      <c:tx>
+        <c:rich>
+          <a:bodyPr/>
+          <a:lstStyle/>
+          <a:p>
+            <a:pPr>
+              <a:defRPr sz="1300" b="1">
+                <a:solidFill>
+                  <a:srgbClr val="1B3255"/>
+                </a:solidFill>
+                <a:latin typeface="맑은 고딕"/>
+              </a:defRPr>
+            </a:pPr>
+            <a:r>
+              <a:t>10종 종합 — 생산률 · 평균 가동률</a:t>
+            </a:r>
+          </a:p>
+        </c:rich>
+      </c:tx>
+      <c:layout/>
+      <c:overlay val="0"/>
+    </c:title>
+    <c:autoTitleDeleted val="0"/>
+    <c:plotArea>
+      <c:barChart>
+        <c:barDir val="col"/>
+        <c:grouping val="clustered"/>
+        <c:ser>
+          <c:idx val="0"/>
+          <c:order val="0"/>
+          <c:tx>
+            <c:strRef>
+              <c:f>Sheet1!$B$1</c:f>
+              <c:strCache>
+                <c:ptCount val="1"/>
+                <c:pt idx="0">
+                  <c:v>생산률(%)</c:v>
+                </c:pt>
+              </c:strCache>
+            </c:strRef>
+          </c:tx>
+          <c:spPr>
+            <a:solidFill>
+              <a:srgbClr val="2E6FB0"/>
+            </a:solidFill>
+          </c:spPr>
+          <c:cat>
+            <c:strRef>
+              <c:f>Sheet1!$A$2:$A$4</c:f>
+              <c:strCache>
+                <c:ptCount val="3"/>
+                <c:pt idx="0">
+                  <c:v>Earliest-ST</c:v>
+                </c:pt>
+                <c:pt idx="1">
+                  <c:v>Min-Progress</c:v>
+                </c:pt>
+                <c:pt idx="2">
+                  <c:v>Bulk-Fill</c:v>
+                </c:pt>
+              </c:strCache>
+            </c:strRef>
+          </c:cat>
+          <c:val>
+            <c:numRef>
+              <c:f>Sheet1!$B$2:$B$4</c:f>
+              <c:numCache>
+                <c:formatCode>General</c:formatCode>
+                <c:ptCount val="3"/>
+                <c:pt idx="0">
+                  <c:v>72.7</c:v>
+                </c:pt>
+                <c:pt idx="1">
+                  <c:v>100.0</c:v>
+                </c:pt>
+                <c:pt idx="2">
+                  <c:v>98.8</c:v>
+                </c:pt>
+              </c:numCache>
+            </c:numRef>
+          </c:val>
+        </c:ser>
+        <c:ser>
+          <c:idx val="1"/>
+          <c:order val="1"/>
+          <c:tx>
+            <c:strRef>
+              <c:f>Sheet1!$C$1</c:f>
+              <c:strCache>
+                <c:ptCount val="1"/>
+                <c:pt idx="0">
+                  <c:v>평균 가동률(%)</c:v>
+                </c:pt>
+              </c:strCache>
+            </c:strRef>
+          </c:tx>
+          <c:spPr>
+            <a:solidFill>
+              <a:srgbClr val="4A6D8C"/>
+            </a:solidFill>
+          </c:spPr>
+          <c:cat>
+            <c:strRef>
+              <c:f>Sheet1!$A$2:$A$4</c:f>
+              <c:strCache>
+                <c:ptCount val="3"/>
+                <c:pt idx="0">
+                  <c:v>Earliest-ST</c:v>
+                </c:pt>
+                <c:pt idx="1">
+                  <c:v>Min-Progress</c:v>
+                </c:pt>
+                <c:pt idx="2">
+                  <c:v>Bulk-Fill</c:v>
+                </c:pt>
+              </c:strCache>
+            </c:strRef>
+          </c:cat>
+          <c:val>
+            <c:numRef>
+              <c:f>Sheet1!$C$2:$C$4</c:f>
+              <c:numCache>
+                <c:formatCode>General</c:formatCode>
+                <c:ptCount val="3"/>
+                <c:pt idx="0">
+                  <c:v>72.3</c:v>
+                </c:pt>
+                <c:pt idx="1">
+                  <c:v>100.0</c:v>
+                </c:pt>
+                <c:pt idx="2">
+                  <c:v>98.7</c:v>
+                </c:pt>
+              </c:numCache>
+            </c:numRef>
+          </c:val>
+        </c:ser>
+        <c:dLbls>
+          <c:numFmt formatCode="0&quot;%&quot;" sourceLinked="0"/>
+          <c:txPr>
+            <a:bodyPr/>
+            <a:lstStyle/>
+            <a:p>
+              <a:pPr>
+                <a:defRPr sz="950" b="1">
+                  <a:solidFill>
+                    <a:srgbClr val="1B3255"/>
+                  </a:solidFill>
+                  <a:latin typeface="맑은 고딕"/>
+                </a:defRPr>
+              </a:pPr>
+            </a:p>
+          </c:txPr>
+          <c:showLegendKey val="0"/>
+          <c:showVal val="1"/>
+          <c:showCatName val="0"/>
+          <c:showSerName val="0"/>
+          <c:showPercent val="0"/>
+          <c:showBubbleSize val="0"/>
+          <c:showLeaderLines val="1"/>
+        </c:dLbls>
+        <c:gapWidth val="90"/>
+        <c:axId val="-2068027336"/>
+        <c:axId val="-2113994440"/>
+      </c:barChart>
+      <c:catAx>
+        <c:axId val="-2068027336"/>
+        <c:scaling>
+          <c:orientation val="minMax"/>
+        </c:scaling>
+        <c:delete val="0"/>
+        <c:axPos val="b"/>
+        <c:majorTickMark val="out"/>
+        <c:minorTickMark val="none"/>
+        <c:tickLblPos val="nextTo"/>
+        <c:txPr>
+          <a:bodyPr/>
+          <a:lstStyle/>
+          <a:p>
+            <a:pPr>
+              <a:defRPr sz="1000">
+                <a:latin typeface="맑은 고딕"/>
+              </a:defRPr>
+            </a:pPr>
+          </a:p>
+        </c:txPr>
+        <c:crossAx val="-2113994440"/>
+        <c:crosses val="autoZero"/>
+        <c:auto val="1"/>
+        <c:lblAlgn val="ctr"/>
+        <c:lblOffset val="100"/>
+        <c:noMultiLvlLbl val="0"/>
+      </c:catAx>
+      <c:valAx>
+        <c:axId val="-2113994440"/>
+        <c:scaling>
+          <c:max val="110.0"/>
+          <c:min val="0.0"/>
+        </c:scaling>
+        <c:delete val="0"/>
+        <c:axPos val="l"/>
+        <c:majorGridlines/>
+        <c:majorTickMark val="out"/>
+        <c:minorTickMark val="none"/>
+        <c:tickLblPos val="nextTo"/>
+        <c:txPr>
+          <a:bodyPr/>
+          <a:lstStyle/>
+          <a:p>
+            <a:pPr>
+              <a:defRPr sz="900">
+                <a:latin typeface="맑은 고딕"/>
+              </a:defRPr>
+            </a:pPr>
+          </a:p>
+        </c:txPr>
+        <c:crossAx val="-2068027336"/>
+        <c:crosses val="autoZero"/>
+      </c:valAx>
+    </c:plotArea>
+    <c:legend>
+      <c:legendPos val="b"/>
+      <c:overlay val="0"/>
+      <c:txPr>
+        <a:bodyPr/>
+        <a:lstStyle/>
+        <a:p>
+          <a:pPr>
+            <a:defRPr sz="1000">
+              <a:latin typeface="맑은 고딕"/>
+            </a:defRPr>
+          </a:pPr>
+        </a:p>
+      </c:txPr>
+    </c:legend>
+    <c:dispBlanksAs val="gap"/>
+  </c:chart>
+  <c:txPr>
+    <a:bodyPr/>
+    <a:lstStyle/>
+    <a:p>
+      <a:pPr>
+        <a:defRPr sz="1800"/>
+      </a:pPr>
+      <a:endParaRPr lang="en-US"/>
+    </a:p>
+  </c:txPr>
+  <c:externalData r:id="rId1">
+    <c:autoUpdate val="0"/>
+  </c:externalData>
+</c:chartSpace>
+</file>
+
 <file path=ppt/slideLayouts/slideLayout1.xml><?xml version="1.0" encoding="utf-8"?>
 <p:sldLayout xmlns:a="http://schemas.openxmlformats.org/drawingml/2006/main" xmlns:r="http://schemas.openxmlformats.org/officeDocument/2006/relationships" xmlns:p="http://schemas.openxmlformats.org/presentationml/2006/main" type="title" preserve="1">
   <p:cSld name="Title Slide">
@@ -12243,7 +12503,7 @@
                 </a:solidFill>
                 <a:latin typeface="맑은 고딕"/>
               </a:rPr>
-              <a:t>CONCLUSION</a:t>
+              <a:t>04  알고리즘 KPI 비교 및 효과성 검증</a:t>
             </a:r>
           </a:p>
         </p:txBody>
@@ -12288,7 +12548,7 @@
                 </a:solidFill>
                 <a:latin typeface="맑은 고딕"/>
               </a:rPr>
-              <a:t>결론 및 기대 효과</a:t>
+              <a:t>다양한 테스트 데이터셋 10종 — 일반화 검증</a:t>
             </a:r>
           </a:p>
         </p:txBody>
@@ -12429,14 +12689,95 @@
       </p:sp>
       <p:sp>
         <p:nvSpPr>
-          <p:cNvPr id="10" name="Rectangle 9"/>
+          <p:cNvPr id="10" name="TextBox 9"/>
+          <p:cNvSpPr txBox="1"/>
+          <p:nvPr/>
+        </p:nvSpPr>
+        <p:spPr>
+          <a:xfrm>
+            <a:off x="822960" y="1207008"/>
+            <a:ext cx="10607040" cy="411480"/>
+          </a:xfrm>
+          <a:prstGeom prst="rect">
+            <a:avLst/>
+          </a:prstGeom>
+          <a:noFill/>
+        </p:spPr>
+        <p:txBody>
+          <a:bodyPr wrap="square" anchor="t" lIns="36576" rIns="36576" tIns="18288" bIns="18288">
+            <a:spAutoFit/>
+          </a:bodyPr>
+          <a:lstStyle/>
+          <a:p>
+            <a:pPr algn="l">
+              <a:lnSpc>
+                <a:spcPct val="100000"/>
+              </a:lnSpc>
+              <a:spcBef>
+                <a:spcPts val="0"/>
+              </a:spcBef>
+              <a:spcAft>
+                <a:spcPts val="400"/>
+              </a:spcAft>
+            </a:pPr>
+            <a:r>
+              <a:rPr sz="1200" b="0">
+                <a:solidFill>
+                  <a:srgbClr val="222A33"/>
+                </a:solidFill>
+                <a:latin typeface="맑은 고딕"/>
+              </a:rPr>
+              <a:t>설비·제품 수(2×2~6×6), 처리시간(30~72분), 전환시간(30~90분), 혼합도를 달리한 </a:t>
+            </a:r>
+            <a:r>
+              <a:rPr sz="1200" b="1">
+                <a:solidFill>
+                  <a:srgbClr val="1B3255"/>
+                </a:solidFill>
+                <a:latin typeface="맑은 고딕"/>
+              </a:rPr>
+              <a:t>10종 데이터셋</a:t>
+            </a:r>
+            <a:r>
+              <a:rPr sz="1200" b="0">
+                <a:solidFill>
+                  <a:srgbClr val="222A33"/>
+                </a:solidFill>
+                <a:latin typeface="맑은 고딕"/>
+              </a:rPr>
+              <a:t>에 </a:t>
+            </a:r>
+            <a:r>
+              <a:rPr sz="1200" b="1">
+                <a:solidFill>
+                  <a:srgbClr val="1B3255"/>
+                </a:solidFill>
+                <a:latin typeface="맑은 고딕"/>
+              </a:rPr>
+              <a:t>단일 Bulk-Fill 모델을 공동 학습</a:t>
+            </a:r>
+            <a:r>
+              <a:rPr sz="1200" b="0">
+                <a:solidFill>
+                  <a:srgbClr val="222A33"/>
+                </a:solidFill>
+                <a:latin typeface="맑은 고딕"/>
+              </a:rPr>
+              <a:t> 후 평가했습니다.</a:t>
+            </a:r>
+          </a:p>
+        </p:txBody>
+      </p:sp>
+      <p:sp>
+        <p:nvSpPr>
+          <p:cNvPr id="11" name="Rectangle 10"/>
           <p:cNvSpPr/>
           <p:nvPr/>
         </p:nvSpPr>
         <p:spPr>
           <a:xfrm>
-            <a:off x="822960" y="1417320"/>
-            <a:ext cx="5166360" cy="457200"/>
+            <a:off x="566928" y="1737360"/>
+            <a:ext cx="2148840" cy="566928"/>
           </a:xfrm>
           <a:prstGeom prst="rect">
             <a:avLst/>
@@ -12444,8 +12785,10 @@
           <a:solidFill>
             <a:srgbClr val="1B3255"/>
           </a:solidFill>
-          <a:ln>
-            <a:noFill/>
+          <a:ln w="12700">
+            <a:solidFill>
+              <a:srgbClr val="FFFFFF"/>
+            </a:solidFill>
           </a:ln>
           <a:effectLst/>
         </p:spPr>
@@ -12464,6 +12807,3751 @@
           </a:fontRef>
         </p:style>
         <p:txBody>
+          <a:bodyPr rtlCol="0" anchor="ctr" wrap="square"/>
+          <a:lstStyle/>
+          <a:p>
+            <a:pPr algn="ctr"/>
+            <a:r>
+              <a:rPr sz="1050" b="1">
+                <a:solidFill>
+                  <a:srgbClr val="FFFFFF"/>
+                </a:solidFill>
+                <a:latin typeface="맑은 고딕"/>
+              </a:rPr>
+              <a:t>데이터셋</a:t>
+            </a:r>
+          </a:p>
+        </p:txBody>
+      </p:sp>
+      <p:sp>
+        <p:nvSpPr>
+          <p:cNvPr id="12" name="Rectangle 11"/>
+          <p:cNvSpPr/>
+          <p:nvPr/>
+        </p:nvSpPr>
+        <p:spPr>
+          <a:xfrm>
+            <a:off x="2715768" y="1737360"/>
+            <a:ext cx="1417320" cy="566928"/>
+          </a:xfrm>
+          <a:prstGeom prst="rect">
+            <a:avLst/>
+          </a:prstGeom>
+          <a:solidFill>
+            <a:srgbClr val="1B3255"/>
+          </a:solidFill>
+          <a:ln w="12700">
+            <a:solidFill>
+              <a:srgbClr val="FFFFFF"/>
+            </a:solidFill>
+          </a:ln>
+          <a:effectLst/>
+        </p:spPr>
+        <p:style>
+          <a:lnRef idx="1">
+            <a:schemeClr val="accent1"/>
+          </a:lnRef>
+          <a:fillRef idx="3">
+            <a:schemeClr val="accent1"/>
+          </a:fillRef>
+          <a:effectRef idx="2">
+            <a:schemeClr val="accent1"/>
+          </a:effectRef>
+          <a:fontRef idx="minor">
+            <a:schemeClr val="lt1"/>
+          </a:fontRef>
+        </p:style>
+        <p:txBody>
+          <a:bodyPr rtlCol="0" anchor="ctr" wrap="square"/>
+          <a:lstStyle/>
+          <a:p>
+            <a:pPr algn="ctr"/>
+            <a:r>
+              <a:rPr sz="1050" b="1">
+                <a:solidFill>
+                  <a:srgbClr val="FFFFFF"/>
+                </a:solidFill>
+                <a:latin typeface="맑은 고딕"/>
+              </a:rPr>
+              <a:t>구성</a:t>
+            </a:r>
+          </a:p>
+        </p:txBody>
+      </p:sp>
+      <p:sp>
+        <p:nvSpPr>
+          <p:cNvPr id="13" name="Rectangle 12"/>
+          <p:cNvSpPr/>
+          <p:nvPr/>
+        </p:nvSpPr>
+        <p:spPr>
+          <a:xfrm>
+            <a:off x="4133088" y="1737360"/>
+            <a:ext cx="777240" cy="566928"/>
+          </a:xfrm>
+          <a:prstGeom prst="rect">
+            <a:avLst/>
+          </a:prstGeom>
+          <a:solidFill>
+            <a:srgbClr val="1B3255"/>
+          </a:solidFill>
+          <a:ln w="12700">
+            <a:solidFill>
+              <a:srgbClr val="FFFFFF"/>
+            </a:solidFill>
+          </a:ln>
+          <a:effectLst/>
+        </p:spPr>
+        <p:style>
+          <a:lnRef idx="1">
+            <a:schemeClr val="accent1"/>
+          </a:lnRef>
+          <a:fillRef idx="3">
+            <a:schemeClr val="accent1"/>
+          </a:fillRef>
+          <a:effectRef idx="2">
+            <a:schemeClr val="accent1"/>
+          </a:effectRef>
+          <a:fontRef idx="minor">
+            <a:schemeClr val="lt1"/>
+          </a:fontRef>
+        </p:style>
+        <p:txBody>
+          <a:bodyPr rtlCol="0" anchor="ctr" wrap="square"/>
+          <a:lstStyle/>
+          <a:p>
+            <a:pPr algn="ctr"/>
+            <a:r>
+              <a:rPr sz="1050" b="1">
+                <a:solidFill>
+                  <a:srgbClr val="FFFFFF"/>
+                </a:solidFill>
+                <a:latin typeface="맑은 고딕"/>
+              </a:rPr>
+              <a:t>최대</a:t>
+            </a:r>
+          </a:p>
+        </p:txBody>
+      </p:sp>
+      <p:sp>
+        <p:nvSpPr>
+          <p:cNvPr id="14" name="Rectangle 13"/>
+          <p:cNvSpPr/>
+          <p:nvPr/>
+        </p:nvSpPr>
+        <p:spPr>
+          <a:xfrm>
+            <a:off x="4910328" y="1737360"/>
+            <a:ext cx="2240280" cy="566928"/>
+          </a:xfrm>
+          <a:prstGeom prst="rect">
+            <a:avLst/>
+          </a:prstGeom>
+          <a:solidFill>
+            <a:srgbClr val="1B3255"/>
+          </a:solidFill>
+          <a:ln w="12700">
+            <a:solidFill>
+              <a:srgbClr val="FFFFFF"/>
+            </a:solidFill>
+          </a:ln>
+          <a:effectLst/>
+        </p:spPr>
+        <p:style>
+          <a:lnRef idx="1">
+            <a:schemeClr val="accent1"/>
+          </a:lnRef>
+          <a:fillRef idx="3">
+            <a:schemeClr val="accent1"/>
+          </a:fillRef>
+          <a:effectRef idx="2">
+            <a:schemeClr val="accent1"/>
+          </a:effectRef>
+          <a:fontRef idx="minor">
+            <a:schemeClr val="lt1"/>
+          </a:fontRef>
+        </p:style>
+        <p:txBody>
+          <a:bodyPr rtlCol="0" anchor="ctr" wrap="square"/>
+          <a:lstStyle/>
+          <a:p>
+            <a:pPr algn="ctr"/>
+            <a:r>
+              <a:rPr sz="1050" b="1">
+                <a:solidFill>
+                  <a:srgbClr val="FFFFFF"/>
+                </a:solidFill>
+                <a:latin typeface="맑은 고딕"/>
+              </a:rPr>
+              <a:t>Earliest-ST</a:t>
+            </a:r>
+          </a:p>
+          <a:p>
+            <a:pPr algn="ctr"/>
+            <a:r>
+              <a:rPr sz="900" b="1">
+                <a:solidFill>
+                  <a:srgbClr val="FFFFFF"/>
+                </a:solidFill>
+                <a:latin typeface="맑은 고딕"/>
+              </a:rPr>
+              <a:t>생산 / 전환</a:t>
+            </a:r>
+          </a:p>
+        </p:txBody>
+      </p:sp>
+      <p:sp>
+        <p:nvSpPr>
+          <p:cNvPr id="15" name="Rectangle 14"/>
+          <p:cNvSpPr/>
+          <p:nvPr/>
+        </p:nvSpPr>
+        <p:spPr>
+          <a:xfrm>
+            <a:off x="7150608" y="1737360"/>
+            <a:ext cx="1600200" cy="566928"/>
+          </a:xfrm>
+          <a:prstGeom prst="rect">
+            <a:avLst/>
+          </a:prstGeom>
+          <a:solidFill>
+            <a:srgbClr val="1B3255"/>
+          </a:solidFill>
+          <a:ln w="12700">
+            <a:solidFill>
+              <a:srgbClr val="FFFFFF"/>
+            </a:solidFill>
+          </a:ln>
+          <a:effectLst/>
+        </p:spPr>
+        <p:style>
+          <a:lnRef idx="1">
+            <a:schemeClr val="accent1"/>
+          </a:lnRef>
+          <a:fillRef idx="3">
+            <a:schemeClr val="accent1"/>
+          </a:fillRef>
+          <a:effectRef idx="2">
+            <a:schemeClr val="accent1"/>
+          </a:effectRef>
+          <a:fontRef idx="minor">
+            <a:schemeClr val="lt1"/>
+          </a:fontRef>
+        </p:style>
+        <p:txBody>
+          <a:bodyPr rtlCol="0" anchor="ctr" wrap="square"/>
+          <a:lstStyle/>
+          <a:p>
+            <a:pPr algn="ctr"/>
+            <a:r>
+              <a:rPr sz="1050" b="1">
+                <a:solidFill>
+                  <a:srgbClr val="FFFFFF"/>
+                </a:solidFill>
+                <a:latin typeface="맑은 고딕"/>
+              </a:rPr>
+              <a:t>Min-Progress</a:t>
+            </a:r>
+          </a:p>
+          <a:p>
+            <a:pPr algn="ctr"/>
+            <a:r>
+              <a:rPr sz="900" b="1">
+                <a:solidFill>
+                  <a:srgbClr val="FFFFFF"/>
+                </a:solidFill>
+                <a:latin typeface="맑은 고딕"/>
+              </a:rPr>
+              <a:t>생산</a:t>
+            </a:r>
+          </a:p>
+        </p:txBody>
+      </p:sp>
+      <p:sp>
+        <p:nvSpPr>
+          <p:cNvPr id="16" name="Rectangle 15"/>
+          <p:cNvSpPr/>
+          <p:nvPr/>
+        </p:nvSpPr>
+        <p:spPr>
+          <a:xfrm>
+            <a:off x="8750808" y="1737360"/>
+            <a:ext cx="2697480" cy="566928"/>
+          </a:xfrm>
+          <a:prstGeom prst="rect">
+            <a:avLst/>
+          </a:prstGeom>
+          <a:solidFill>
+            <a:srgbClr val="2E6FB0"/>
+          </a:solidFill>
+          <a:ln w="12700">
+            <a:solidFill>
+              <a:srgbClr val="FFFFFF"/>
+            </a:solidFill>
+          </a:ln>
+          <a:effectLst/>
+        </p:spPr>
+        <p:style>
+          <a:lnRef idx="1">
+            <a:schemeClr val="accent1"/>
+          </a:lnRef>
+          <a:fillRef idx="3">
+            <a:schemeClr val="accent1"/>
+          </a:fillRef>
+          <a:effectRef idx="2">
+            <a:schemeClr val="accent1"/>
+          </a:effectRef>
+          <a:fontRef idx="minor">
+            <a:schemeClr val="lt1"/>
+          </a:fontRef>
+        </p:style>
+        <p:txBody>
+          <a:bodyPr rtlCol="0" anchor="ctr" wrap="square"/>
+          <a:lstStyle/>
+          <a:p>
+            <a:pPr algn="ctr"/>
+            <a:r>
+              <a:rPr sz="1050" b="1">
+                <a:solidFill>
+                  <a:srgbClr val="FFFFFF"/>
+                </a:solidFill>
+                <a:latin typeface="맑은 고딕"/>
+              </a:rPr>
+              <a:t>Bulk-Fill</a:t>
+            </a:r>
+          </a:p>
+          <a:p>
+            <a:pPr algn="ctr"/>
+            <a:r>
+              <a:rPr sz="900" b="1">
+                <a:solidFill>
+                  <a:srgbClr val="FFFFFF"/>
+                </a:solidFill>
+                <a:latin typeface="맑은 고딕"/>
+              </a:rPr>
+              <a:t>생산 / 전환 / 전담</a:t>
+            </a:r>
+          </a:p>
+        </p:txBody>
+      </p:sp>
+      <p:sp>
+        <p:nvSpPr>
+          <p:cNvPr id="17" name="Rectangle 16"/>
+          <p:cNvSpPr/>
+          <p:nvPr/>
+        </p:nvSpPr>
+        <p:spPr>
+          <a:xfrm>
+            <a:off x="566928" y="2304288"/>
+            <a:ext cx="2148840" cy="365760"/>
+          </a:xfrm>
+          <a:prstGeom prst="rect">
+            <a:avLst/>
+          </a:prstGeom>
+          <a:solidFill>
+            <a:srgbClr val="FFFFFF"/>
+          </a:solidFill>
+          <a:ln w="7620">
+            <a:solidFill>
+              <a:srgbClr val="C4CFDB"/>
+            </a:solidFill>
+          </a:ln>
+          <a:effectLst/>
+        </p:spPr>
+        <p:style>
+          <a:lnRef idx="1">
+            <a:schemeClr val="accent1"/>
+          </a:lnRef>
+          <a:fillRef idx="3">
+            <a:schemeClr val="accent1"/>
+          </a:fillRef>
+          <a:effectRef idx="2">
+            <a:schemeClr val="accent1"/>
+          </a:effectRef>
+          <a:fontRef idx="minor">
+            <a:schemeClr val="lt1"/>
+          </a:fontRef>
+        </p:style>
+        <p:txBody>
+          <a:bodyPr rtlCol="0" anchor="ctr" wrap="square" lIns="73152" tIns="0" bIns="0"/>
+          <a:lstStyle/>
+          <a:p>
+            <a:pPr algn="l"/>
+            <a:r>
+              <a:rPr sz="1000" b="1">
+                <a:solidFill>
+                  <a:srgbClr val="1B3255"/>
+                </a:solidFill>
+                <a:latin typeface="맑은 고딕"/>
+              </a:rPr>
+              <a:t>BENCH01</a:t>
+            </a:r>
+          </a:p>
+        </p:txBody>
+      </p:sp>
+      <p:sp>
+        <p:nvSpPr>
+          <p:cNvPr id="18" name="Rectangle 17"/>
+          <p:cNvSpPr/>
+          <p:nvPr/>
+        </p:nvSpPr>
+        <p:spPr>
+          <a:xfrm>
+            <a:off x="2715768" y="2304288"/>
+            <a:ext cx="1417320" cy="365760"/>
+          </a:xfrm>
+          <a:prstGeom prst="rect">
+            <a:avLst/>
+          </a:prstGeom>
+          <a:solidFill>
+            <a:srgbClr val="FFFFFF"/>
+          </a:solidFill>
+          <a:ln w="7620">
+            <a:solidFill>
+              <a:srgbClr val="C4CFDB"/>
+            </a:solidFill>
+          </a:ln>
+          <a:effectLst/>
+        </p:spPr>
+        <p:style>
+          <a:lnRef idx="1">
+            <a:schemeClr val="accent1"/>
+          </a:lnRef>
+          <a:fillRef idx="3">
+            <a:schemeClr val="accent1"/>
+          </a:fillRef>
+          <a:effectRef idx="2">
+            <a:schemeClr val="accent1"/>
+          </a:effectRef>
+          <a:fontRef idx="minor">
+            <a:schemeClr val="lt1"/>
+          </a:fontRef>
+        </p:style>
+        <p:txBody>
+          <a:bodyPr rtlCol="0" anchor="ctr" wrap="square" lIns="73152" tIns="0" bIns="0"/>
+          <a:lstStyle/>
+          <a:p>
+            <a:pPr algn="ctr"/>
+            <a:r>
+              <a:rPr sz="1000" b="0">
+                <a:solidFill>
+                  <a:srgbClr val="5C6670"/>
+                </a:solidFill>
+                <a:latin typeface="맑은 고딕"/>
+              </a:rPr>
+              <a:t>3×3·ST60</a:t>
+            </a:r>
+          </a:p>
+        </p:txBody>
+      </p:sp>
+      <p:sp>
+        <p:nvSpPr>
+          <p:cNvPr id="19" name="Rectangle 18"/>
+          <p:cNvSpPr/>
+          <p:nvPr/>
+        </p:nvSpPr>
+        <p:spPr>
+          <a:xfrm>
+            <a:off x="4133088" y="2304288"/>
+            <a:ext cx="777240" cy="365760"/>
+          </a:xfrm>
+          <a:prstGeom prst="rect">
+            <a:avLst/>
+          </a:prstGeom>
+          <a:solidFill>
+            <a:srgbClr val="FFFFFF"/>
+          </a:solidFill>
+          <a:ln w="7620">
+            <a:solidFill>
+              <a:srgbClr val="C4CFDB"/>
+            </a:solidFill>
+          </a:ln>
+          <a:effectLst/>
+        </p:spPr>
+        <p:style>
+          <a:lnRef idx="1">
+            <a:schemeClr val="accent1"/>
+          </a:lnRef>
+          <a:fillRef idx="3">
+            <a:schemeClr val="accent1"/>
+          </a:fillRef>
+          <a:effectRef idx="2">
+            <a:schemeClr val="accent1"/>
+          </a:effectRef>
+          <a:fontRef idx="minor">
+            <a:schemeClr val="lt1"/>
+          </a:fontRef>
+        </p:style>
+        <p:txBody>
+          <a:bodyPr rtlCol="0" anchor="ctr" wrap="square" lIns="73152" tIns="0" bIns="0"/>
+          <a:lstStyle/>
+          <a:p>
+            <a:pPr algn="ctr"/>
+            <a:r>
+              <a:rPr sz="1000" b="0">
+                <a:solidFill>
+                  <a:srgbClr val="5C6670"/>
+                </a:solidFill>
+                <a:latin typeface="맑은 고딕"/>
+              </a:rPr>
+              <a:t>24</a:t>
+            </a:r>
+          </a:p>
+        </p:txBody>
+      </p:sp>
+      <p:sp>
+        <p:nvSpPr>
+          <p:cNvPr id="20" name="Rectangle 19"/>
+          <p:cNvSpPr/>
+          <p:nvPr/>
+        </p:nvSpPr>
+        <p:spPr>
+          <a:xfrm>
+            <a:off x="4910328" y="2304288"/>
+            <a:ext cx="2240280" cy="365760"/>
+          </a:xfrm>
+          <a:prstGeom prst="rect">
+            <a:avLst/>
+          </a:prstGeom>
+          <a:solidFill>
+            <a:srgbClr val="FFFFFF"/>
+          </a:solidFill>
+          <a:ln w="7620">
+            <a:solidFill>
+              <a:srgbClr val="C4CFDB"/>
+            </a:solidFill>
+          </a:ln>
+          <a:effectLst/>
+        </p:spPr>
+        <p:style>
+          <a:lnRef idx="1">
+            <a:schemeClr val="accent1"/>
+          </a:lnRef>
+          <a:fillRef idx="3">
+            <a:schemeClr val="accent1"/>
+          </a:fillRef>
+          <a:effectRef idx="2">
+            <a:schemeClr val="accent1"/>
+          </a:effectRef>
+          <a:fontRef idx="minor">
+            <a:schemeClr val="lt1"/>
+          </a:fontRef>
+        </p:style>
+        <p:txBody>
+          <a:bodyPr rtlCol="0" anchor="ctr" wrap="square" lIns="73152" tIns="0" bIns="0"/>
+          <a:lstStyle/>
+          <a:p>
+            <a:pPr algn="ctr"/>
+            <a:r>
+              <a:rPr sz="1000" b="0">
+                <a:solidFill>
+                  <a:srgbClr val="B33A3A"/>
+                </a:solidFill>
+                <a:latin typeface="맑은 고딕"/>
+              </a:rPr>
+              <a:t>18 / 6</a:t>
+            </a:r>
+          </a:p>
+        </p:txBody>
+      </p:sp>
+      <p:sp>
+        <p:nvSpPr>
+          <p:cNvPr id="21" name="Rectangle 20"/>
+          <p:cNvSpPr/>
+          <p:nvPr/>
+        </p:nvSpPr>
+        <p:spPr>
+          <a:xfrm>
+            <a:off x="7150608" y="2304288"/>
+            <a:ext cx="1600200" cy="365760"/>
+          </a:xfrm>
+          <a:prstGeom prst="rect">
+            <a:avLst/>
+          </a:prstGeom>
+          <a:solidFill>
+            <a:srgbClr val="FFFFFF"/>
+          </a:solidFill>
+          <a:ln w="7620">
+            <a:solidFill>
+              <a:srgbClr val="C4CFDB"/>
+            </a:solidFill>
+          </a:ln>
+          <a:effectLst/>
+        </p:spPr>
+        <p:style>
+          <a:lnRef idx="1">
+            <a:schemeClr val="accent1"/>
+          </a:lnRef>
+          <a:fillRef idx="3">
+            <a:schemeClr val="accent1"/>
+          </a:fillRef>
+          <a:effectRef idx="2">
+            <a:schemeClr val="accent1"/>
+          </a:effectRef>
+          <a:fontRef idx="minor">
+            <a:schemeClr val="lt1"/>
+          </a:fontRef>
+        </p:style>
+        <p:txBody>
+          <a:bodyPr rtlCol="0" anchor="ctr" wrap="square" lIns="73152" tIns="0" bIns="0"/>
+          <a:lstStyle/>
+          <a:p>
+            <a:pPr algn="ctr"/>
+            <a:r>
+              <a:rPr sz="1000" b="0">
+                <a:solidFill>
+                  <a:srgbClr val="5C6670"/>
+                </a:solidFill>
+                <a:latin typeface="맑은 고딕"/>
+              </a:rPr>
+              <a:t>24</a:t>
+            </a:r>
+          </a:p>
+        </p:txBody>
+      </p:sp>
+      <p:sp>
+        <p:nvSpPr>
+          <p:cNvPr id="22" name="Rectangle 21"/>
+          <p:cNvSpPr/>
+          <p:nvPr/>
+        </p:nvSpPr>
+        <p:spPr>
+          <a:xfrm>
+            <a:off x="8750808" y="2304288"/>
+            <a:ext cx="2697480" cy="365760"/>
+          </a:xfrm>
+          <a:prstGeom prst="rect">
+            <a:avLst/>
+          </a:prstGeom>
+          <a:solidFill>
+            <a:srgbClr val="E2EEE7"/>
+          </a:solidFill>
+          <a:ln w="7620">
+            <a:solidFill>
+              <a:srgbClr val="C4CFDB"/>
+            </a:solidFill>
+          </a:ln>
+          <a:effectLst/>
+        </p:spPr>
+        <p:style>
+          <a:lnRef idx="1">
+            <a:schemeClr val="accent1"/>
+          </a:lnRef>
+          <a:fillRef idx="3">
+            <a:schemeClr val="accent1"/>
+          </a:fillRef>
+          <a:effectRef idx="2">
+            <a:schemeClr val="accent1"/>
+          </a:effectRef>
+          <a:fontRef idx="minor">
+            <a:schemeClr val="lt1"/>
+          </a:fontRef>
+        </p:style>
+        <p:txBody>
+          <a:bodyPr rtlCol="0" anchor="ctr" wrap="square" lIns="73152" tIns="0" bIns="0"/>
+          <a:lstStyle/>
+          <a:p>
+            <a:pPr algn="ctr"/>
+            <a:r>
+              <a:rPr sz="1000" b="1">
+                <a:solidFill>
+                  <a:srgbClr val="2E7D4F"/>
+                </a:solidFill>
+                <a:latin typeface="맑은 고딕"/>
+              </a:rPr>
+              <a:t>24 / 0 / 3/3</a:t>
+            </a:r>
+          </a:p>
+        </p:txBody>
+      </p:sp>
+      <p:sp>
+        <p:nvSpPr>
+          <p:cNvPr id="23" name="Rectangle 22"/>
+          <p:cNvSpPr/>
+          <p:nvPr/>
+        </p:nvSpPr>
+        <p:spPr>
+          <a:xfrm>
+            <a:off x="566928" y="2670048"/>
+            <a:ext cx="2148840" cy="365760"/>
+          </a:xfrm>
+          <a:prstGeom prst="rect">
+            <a:avLst/>
+          </a:prstGeom>
+          <a:solidFill>
+            <a:srgbClr val="EEF2F7"/>
+          </a:solidFill>
+          <a:ln w="7620">
+            <a:solidFill>
+              <a:srgbClr val="C4CFDB"/>
+            </a:solidFill>
+          </a:ln>
+          <a:effectLst/>
+        </p:spPr>
+        <p:style>
+          <a:lnRef idx="1">
+            <a:schemeClr val="accent1"/>
+          </a:lnRef>
+          <a:fillRef idx="3">
+            <a:schemeClr val="accent1"/>
+          </a:fillRef>
+          <a:effectRef idx="2">
+            <a:schemeClr val="accent1"/>
+          </a:effectRef>
+          <a:fontRef idx="minor">
+            <a:schemeClr val="lt1"/>
+          </a:fontRef>
+        </p:style>
+        <p:txBody>
+          <a:bodyPr rtlCol="0" anchor="ctr" wrap="square" lIns="73152" tIns="0" bIns="0"/>
+          <a:lstStyle/>
+          <a:p>
+            <a:pPr algn="l"/>
+            <a:r>
+              <a:rPr sz="1000" b="1">
+                <a:solidFill>
+                  <a:srgbClr val="1B3255"/>
+                </a:solidFill>
+                <a:latin typeface="맑은 고딕"/>
+              </a:rPr>
+              <a:t>BENCH02</a:t>
+            </a:r>
+          </a:p>
+        </p:txBody>
+      </p:sp>
+      <p:sp>
+        <p:nvSpPr>
+          <p:cNvPr id="24" name="Rectangle 23"/>
+          <p:cNvSpPr/>
+          <p:nvPr/>
+        </p:nvSpPr>
+        <p:spPr>
+          <a:xfrm>
+            <a:off x="2715768" y="2670048"/>
+            <a:ext cx="1417320" cy="365760"/>
+          </a:xfrm>
+          <a:prstGeom prst="rect">
+            <a:avLst/>
+          </a:prstGeom>
+          <a:solidFill>
+            <a:srgbClr val="EEF2F7"/>
+          </a:solidFill>
+          <a:ln w="7620">
+            <a:solidFill>
+              <a:srgbClr val="C4CFDB"/>
+            </a:solidFill>
+          </a:ln>
+          <a:effectLst/>
+        </p:spPr>
+        <p:style>
+          <a:lnRef idx="1">
+            <a:schemeClr val="accent1"/>
+          </a:lnRef>
+          <a:fillRef idx="3">
+            <a:schemeClr val="accent1"/>
+          </a:fillRef>
+          <a:effectRef idx="2">
+            <a:schemeClr val="accent1"/>
+          </a:effectRef>
+          <a:fontRef idx="minor">
+            <a:schemeClr val="lt1"/>
+          </a:fontRef>
+        </p:style>
+        <p:txBody>
+          <a:bodyPr rtlCol="0" anchor="ctr" wrap="square" lIns="73152" tIns="0" bIns="0"/>
+          <a:lstStyle/>
+          <a:p>
+            <a:pPr algn="ctr"/>
+            <a:r>
+              <a:rPr sz="1000" b="0">
+                <a:solidFill>
+                  <a:srgbClr val="5C6670"/>
+                </a:solidFill>
+                <a:latin typeface="맑은 고딕"/>
+              </a:rPr>
+              <a:t>4×4·ST60</a:t>
+            </a:r>
+          </a:p>
+        </p:txBody>
+      </p:sp>
+      <p:sp>
+        <p:nvSpPr>
+          <p:cNvPr id="25" name="Rectangle 24"/>
+          <p:cNvSpPr/>
+          <p:nvPr/>
+        </p:nvSpPr>
+        <p:spPr>
+          <a:xfrm>
+            <a:off x="4133088" y="2670048"/>
+            <a:ext cx="777240" cy="365760"/>
+          </a:xfrm>
+          <a:prstGeom prst="rect">
+            <a:avLst/>
+          </a:prstGeom>
+          <a:solidFill>
+            <a:srgbClr val="EEF2F7"/>
+          </a:solidFill>
+          <a:ln w="7620">
+            <a:solidFill>
+              <a:srgbClr val="C4CFDB"/>
+            </a:solidFill>
+          </a:ln>
+          <a:effectLst/>
+        </p:spPr>
+        <p:style>
+          <a:lnRef idx="1">
+            <a:schemeClr val="accent1"/>
+          </a:lnRef>
+          <a:fillRef idx="3">
+            <a:schemeClr val="accent1"/>
+          </a:fillRef>
+          <a:effectRef idx="2">
+            <a:schemeClr val="accent1"/>
+          </a:effectRef>
+          <a:fontRef idx="minor">
+            <a:schemeClr val="lt1"/>
+          </a:fontRef>
+        </p:style>
+        <p:txBody>
+          <a:bodyPr rtlCol="0" anchor="ctr" wrap="square" lIns="73152" tIns="0" bIns="0"/>
+          <a:lstStyle/>
+          <a:p>
+            <a:pPr algn="ctr"/>
+            <a:r>
+              <a:rPr sz="1000" b="0">
+                <a:solidFill>
+                  <a:srgbClr val="5C6670"/>
+                </a:solidFill>
+                <a:latin typeface="맑은 고딕"/>
+              </a:rPr>
+              <a:t>24</a:t>
+            </a:r>
+          </a:p>
+        </p:txBody>
+      </p:sp>
+      <p:sp>
+        <p:nvSpPr>
+          <p:cNvPr id="26" name="Rectangle 25"/>
+          <p:cNvSpPr/>
+          <p:nvPr/>
+        </p:nvSpPr>
+        <p:spPr>
+          <a:xfrm>
+            <a:off x="4910328" y="2670048"/>
+            <a:ext cx="2240280" cy="365760"/>
+          </a:xfrm>
+          <a:prstGeom prst="rect">
+            <a:avLst/>
+          </a:prstGeom>
+          <a:solidFill>
+            <a:srgbClr val="EEF2F7"/>
+          </a:solidFill>
+          <a:ln w="7620">
+            <a:solidFill>
+              <a:srgbClr val="C4CFDB"/>
+            </a:solidFill>
+          </a:ln>
+          <a:effectLst/>
+        </p:spPr>
+        <p:style>
+          <a:lnRef idx="1">
+            <a:schemeClr val="accent1"/>
+          </a:lnRef>
+          <a:fillRef idx="3">
+            <a:schemeClr val="accent1"/>
+          </a:fillRef>
+          <a:effectRef idx="2">
+            <a:schemeClr val="accent1"/>
+          </a:effectRef>
+          <a:fontRef idx="minor">
+            <a:schemeClr val="lt1"/>
+          </a:fontRef>
+        </p:style>
+        <p:txBody>
+          <a:bodyPr rtlCol="0" anchor="ctr" wrap="square" lIns="73152" tIns="0" bIns="0"/>
+          <a:lstStyle/>
+          <a:p>
+            <a:pPr algn="ctr"/>
+            <a:r>
+              <a:rPr sz="1000" b="0">
+                <a:solidFill>
+                  <a:srgbClr val="B33A3A"/>
+                </a:solidFill>
+                <a:latin typeface="맑은 고딕"/>
+              </a:rPr>
+              <a:t>16 / 12</a:t>
+            </a:r>
+          </a:p>
+        </p:txBody>
+      </p:sp>
+      <p:sp>
+        <p:nvSpPr>
+          <p:cNvPr id="27" name="Rectangle 26"/>
+          <p:cNvSpPr/>
+          <p:nvPr/>
+        </p:nvSpPr>
+        <p:spPr>
+          <a:xfrm>
+            <a:off x="7150608" y="2670048"/>
+            <a:ext cx="1600200" cy="365760"/>
+          </a:xfrm>
+          <a:prstGeom prst="rect">
+            <a:avLst/>
+          </a:prstGeom>
+          <a:solidFill>
+            <a:srgbClr val="EEF2F7"/>
+          </a:solidFill>
+          <a:ln w="7620">
+            <a:solidFill>
+              <a:srgbClr val="C4CFDB"/>
+            </a:solidFill>
+          </a:ln>
+          <a:effectLst/>
+        </p:spPr>
+        <p:style>
+          <a:lnRef idx="1">
+            <a:schemeClr val="accent1"/>
+          </a:lnRef>
+          <a:fillRef idx="3">
+            <a:schemeClr val="accent1"/>
+          </a:fillRef>
+          <a:effectRef idx="2">
+            <a:schemeClr val="accent1"/>
+          </a:effectRef>
+          <a:fontRef idx="minor">
+            <a:schemeClr val="lt1"/>
+          </a:fontRef>
+        </p:style>
+        <p:txBody>
+          <a:bodyPr rtlCol="0" anchor="ctr" wrap="square" lIns="73152" tIns="0" bIns="0"/>
+          <a:lstStyle/>
+          <a:p>
+            <a:pPr algn="ctr"/>
+            <a:r>
+              <a:rPr sz="1000" b="0">
+                <a:solidFill>
+                  <a:srgbClr val="5C6670"/>
+                </a:solidFill>
+                <a:latin typeface="맑은 고딕"/>
+              </a:rPr>
+              <a:t>24</a:t>
+            </a:r>
+          </a:p>
+        </p:txBody>
+      </p:sp>
+      <p:sp>
+        <p:nvSpPr>
+          <p:cNvPr id="28" name="Rectangle 27"/>
+          <p:cNvSpPr/>
+          <p:nvPr/>
+        </p:nvSpPr>
+        <p:spPr>
+          <a:xfrm>
+            <a:off x="8750808" y="2670048"/>
+            <a:ext cx="2697480" cy="365760"/>
+          </a:xfrm>
+          <a:prstGeom prst="rect">
+            <a:avLst/>
+          </a:prstGeom>
+          <a:solidFill>
+            <a:srgbClr val="E2EEE7"/>
+          </a:solidFill>
+          <a:ln w="7620">
+            <a:solidFill>
+              <a:srgbClr val="C4CFDB"/>
+            </a:solidFill>
+          </a:ln>
+          <a:effectLst/>
+        </p:spPr>
+        <p:style>
+          <a:lnRef idx="1">
+            <a:schemeClr val="accent1"/>
+          </a:lnRef>
+          <a:fillRef idx="3">
+            <a:schemeClr val="accent1"/>
+          </a:fillRef>
+          <a:effectRef idx="2">
+            <a:schemeClr val="accent1"/>
+          </a:effectRef>
+          <a:fontRef idx="minor">
+            <a:schemeClr val="lt1"/>
+          </a:fontRef>
+        </p:style>
+        <p:txBody>
+          <a:bodyPr rtlCol="0" anchor="ctr" wrap="square" lIns="73152" tIns="0" bIns="0"/>
+          <a:lstStyle/>
+          <a:p>
+            <a:pPr algn="ctr"/>
+            <a:r>
+              <a:rPr sz="1000" b="1">
+                <a:solidFill>
+                  <a:srgbClr val="2E7D4F"/>
+                </a:solidFill>
+                <a:latin typeface="맑은 고딕"/>
+              </a:rPr>
+              <a:t>24 / 0 / 4/4</a:t>
+            </a:r>
+          </a:p>
+        </p:txBody>
+      </p:sp>
+      <p:sp>
+        <p:nvSpPr>
+          <p:cNvPr id="29" name="Rectangle 28"/>
+          <p:cNvSpPr/>
+          <p:nvPr/>
+        </p:nvSpPr>
+        <p:spPr>
+          <a:xfrm>
+            <a:off x="566928" y="3035808"/>
+            <a:ext cx="2148840" cy="365760"/>
+          </a:xfrm>
+          <a:prstGeom prst="rect">
+            <a:avLst/>
+          </a:prstGeom>
+          <a:solidFill>
+            <a:srgbClr val="FFFFFF"/>
+          </a:solidFill>
+          <a:ln w="7620">
+            <a:solidFill>
+              <a:srgbClr val="C4CFDB"/>
+            </a:solidFill>
+          </a:ln>
+          <a:effectLst/>
+        </p:spPr>
+        <p:style>
+          <a:lnRef idx="1">
+            <a:schemeClr val="accent1"/>
+          </a:lnRef>
+          <a:fillRef idx="3">
+            <a:schemeClr val="accent1"/>
+          </a:fillRef>
+          <a:effectRef idx="2">
+            <a:schemeClr val="accent1"/>
+          </a:effectRef>
+          <a:fontRef idx="minor">
+            <a:schemeClr val="lt1"/>
+          </a:fontRef>
+        </p:style>
+        <p:txBody>
+          <a:bodyPr rtlCol="0" anchor="ctr" wrap="square" lIns="73152" tIns="0" bIns="0"/>
+          <a:lstStyle/>
+          <a:p>
+            <a:pPr algn="l"/>
+            <a:r>
+              <a:rPr sz="1000" b="1">
+                <a:solidFill>
+                  <a:srgbClr val="1B3255"/>
+                </a:solidFill>
+                <a:latin typeface="맑은 고딕"/>
+              </a:rPr>
+              <a:t>BENCH03</a:t>
+            </a:r>
+          </a:p>
+        </p:txBody>
+      </p:sp>
+      <p:sp>
+        <p:nvSpPr>
+          <p:cNvPr id="30" name="Rectangle 29"/>
+          <p:cNvSpPr/>
+          <p:nvPr/>
+        </p:nvSpPr>
+        <p:spPr>
+          <a:xfrm>
+            <a:off x="2715768" y="3035808"/>
+            <a:ext cx="1417320" cy="365760"/>
+          </a:xfrm>
+          <a:prstGeom prst="rect">
+            <a:avLst/>
+          </a:prstGeom>
+          <a:solidFill>
+            <a:srgbClr val="FFFFFF"/>
+          </a:solidFill>
+          <a:ln w="7620">
+            <a:solidFill>
+              <a:srgbClr val="C4CFDB"/>
+            </a:solidFill>
+          </a:ln>
+          <a:effectLst/>
+        </p:spPr>
+        <p:style>
+          <a:lnRef idx="1">
+            <a:schemeClr val="accent1"/>
+          </a:lnRef>
+          <a:fillRef idx="3">
+            <a:schemeClr val="accent1"/>
+          </a:fillRef>
+          <a:effectRef idx="2">
+            <a:schemeClr val="accent1"/>
+          </a:effectRef>
+          <a:fontRef idx="minor">
+            <a:schemeClr val="lt1"/>
+          </a:fontRef>
+        </p:style>
+        <p:txBody>
+          <a:bodyPr rtlCol="0" anchor="ctr" wrap="square" lIns="73152" tIns="0" bIns="0"/>
+          <a:lstStyle/>
+          <a:p>
+            <a:pPr algn="ctr"/>
+            <a:r>
+              <a:rPr sz="1000" b="0">
+                <a:solidFill>
+                  <a:srgbClr val="5C6670"/>
+                </a:solidFill>
+                <a:latin typeface="맑은 고딕"/>
+              </a:rPr>
+              <a:t>5×5·ST45</a:t>
+            </a:r>
+          </a:p>
+        </p:txBody>
+      </p:sp>
+      <p:sp>
+        <p:nvSpPr>
+          <p:cNvPr id="31" name="Rectangle 30"/>
+          <p:cNvSpPr/>
+          <p:nvPr/>
+        </p:nvSpPr>
+        <p:spPr>
+          <a:xfrm>
+            <a:off x="4133088" y="3035808"/>
+            <a:ext cx="777240" cy="365760"/>
+          </a:xfrm>
+          <a:prstGeom prst="rect">
+            <a:avLst/>
+          </a:prstGeom>
+          <a:solidFill>
+            <a:srgbClr val="FFFFFF"/>
+          </a:solidFill>
+          <a:ln w="7620">
+            <a:solidFill>
+              <a:srgbClr val="C4CFDB"/>
+            </a:solidFill>
+          </a:ln>
+          <a:effectLst/>
+        </p:spPr>
+        <p:style>
+          <a:lnRef idx="1">
+            <a:schemeClr val="accent1"/>
+          </a:lnRef>
+          <a:fillRef idx="3">
+            <a:schemeClr val="accent1"/>
+          </a:fillRef>
+          <a:effectRef idx="2">
+            <a:schemeClr val="accent1"/>
+          </a:effectRef>
+          <a:fontRef idx="minor">
+            <a:schemeClr val="lt1"/>
+          </a:fontRef>
+        </p:style>
+        <p:txBody>
+          <a:bodyPr rtlCol="0" anchor="ctr" wrap="square" lIns="73152" tIns="0" bIns="0"/>
+          <a:lstStyle/>
+          <a:p>
+            <a:pPr algn="ctr"/>
+            <a:r>
+              <a:rPr sz="1000" b="0">
+                <a:solidFill>
+                  <a:srgbClr val="5C6670"/>
+                </a:solidFill>
+                <a:latin typeface="맑은 고딕"/>
+              </a:rPr>
+              <a:t>40</a:t>
+            </a:r>
+          </a:p>
+        </p:txBody>
+      </p:sp>
+      <p:sp>
+        <p:nvSpPr>
+          <p:cNvPr id="32" name="Rectangle 31"/>
+          <p:cNvSpPr/>
+          <p:nvPr/>
+        </p:nvSpPr>
+        <p:spPr>
+          <a:xfrm>
+            <a:off x="4910328" y="3035808"/>
+            <a:ext cx="2240280" cy="365760"/>
+          </a:xfrm>
+          <a:prstGeom prst="rect">
+            <a:avLst/>
+          </a:prstGeom>
+          <a:solidFill>
+            <a:srgbClr val="FFFFFF"/>
+          </a:solidFill>
+          <a:ln w="7620">
+            <a:solidFill>
+              <a:srgbClr val="C4CFDB"/>
+            </a:solidFill>
+          </a:ln>
+          <a:effectLst/>
+        </p:spPr>
+        <p:style>
+          <a:lnRef idx="1">
+            <a:schemeClr val="accent1"/>
+          </a:lnRef>
+          <a:fillRef idx="3">
+            <a:schemeClr val="accent1"/>
+          </a:fillRef>
+          <a:effectRef idx="2">
+            <a:schemeClr val="accent1"/>
+          </a:effectRef>
+          <a:fontRef idx="minor">
+            <a:schemeClr val="lt1"/>
+          </a:fontRef>
+        </p:style>
+        <p:txBody>
+          <a:bodyPr rtlCol="0" anchor="ctr" wrap="square" lIns="73152" tIns="0" bIns="0"/>
+          <a:lstStyle/>
+          <a:p>
+            <a:pPr algn="ctr"/>
+            <a:r>
+              <a:rPr sz="1000" b="0">
+                <a:solidFill>
+                  <a:srgbClr val="B33A3A"/>
+                </a:solidFill>
+                <a:latin typeface="맑은 고딕"/>
+              </a:rPr>
+              <a:t>25 / 20</a:t>
+            </a:r>
+          </a:p>
+        </p:txBody>
+      </p:sp>
+      <p:sp>
+        <p:nvSpPr>
+          <p:cNvPr id="33" name="Rectangle 32"/>
+          <p:cNvSpPr/>
+          <p:nvPr/>
+        </p:nvSpPr>
+        <p:spPr>
+          <a:xfrm>
+            <a:off x="7150608" y="3035808"/>
+            <a:ext cx="1600200" cy="365760"/>
+          </a:xfrm>
+          <a:prstGeom prst="rect">
+            <a:avLst/>
+          </a:prstGeom>
+          <a:solidFill>
+            <a:srgbClr val="FFFFFF"/>
+          </a:solidFill>
+          <a:ln w="7620">
+            <a:solidFill>
+              <a:srgbClr val="C4CFDB"/>
+            </a:solidFill>
+          </a:ln>
+          <a:effectLst/>
+        </p:spPr>
+        <p:style>
+          <a:lnRef idx="1">
+            <a:schemeClr val="accent1"/>
+          </a:lnRef>
+          <a:fillRef idx="3">
+            <a:schemeClr val="accent1"/>
+          </a:fillRef>
+          <a:effectRef idx="2">
+            <a:schemeClr val="accent1"/>
+          </a:effectRef>
+          <a:fontRef idx="minor">
+            <a:schemeClr val="lt1"/>
+          </a:fontRef>
+        </p:style>
+        <p:txBody>
+          <a:bodyPr rtlCol="0" anchor="ctr" wrap="square" lIns="73152" tIns="0" bIns="0"/>
+          <a:lstStyle/>
+          <a:p>
+            <a:pPr algn="ctr"/>
+            <a:r>
+              <a:rPr sz="1000" b="0">
+                <a:solidFill>
+                  <a:srgbClr val="5C6670"/>
+                </a:solidFill>
+                <a:latin typeface="맑은 고딕"/>
+              </a:rPr>
+              <a:t>40</a:t>
+            </a:r>
+          </a:p>
+        </p:txBody>
+      </p:sp>
+      <p:sp>
+        <p:nvSpPr>
+          <p:cNvPr id="34" name="Rectangle 33"/>
+          <p:cNvSpPr/>
+          <p:nvPr/>
+        </p:nvSpPr>
+        <p:spPr>
+          <a:xfrm>
+            <a:off x="8750808" y="3035808"/>
+            <a:ext cx="2697480" cy="365760"/>
+          </a:xfrm>
+          <a:prstGeom prst="rect">
+            <a:avLst/>
+          </a:prstGeom>
+          <a:solidFill>
+            <a:srgbClr val="E2EEE7"/>
+          </a:solidFill>
+          <a:ln w="7620">
+            <a:solidFill>
+              <a:srgbClr val="C4CFDB"/>
+            </a:solidFill>
+          </a:ln>
+          <a:effectLst/>
+        </p:spPr>
+        <p:style>
+          <a:lnRef idx="1">
+            <a:schemeClr val="accent1"/>
+          </a:lnRef>
+          <a:fillRef idx="3">
+            <a:schemeClr val="accent1"/>
+          </a:fillRef>
+          <a:effectRef idx="2">
+            <a:schemeClr val="accent1"/>
+          </a:effectRef>
+          <a:fontRef idx="minor">
+            <a:schemeClr val="lt1"/>
+          </a:fontRef>
+        </p:style>
+        <p:txBody>
+          <a:bodyPr rtlCol="0" anchor="ctr" wrap="square" lIns="73152" tIns="0" bIns="0"/>
+          <a:lstStyle/>
+          <a:p>
+            <a:pPr algn="ctr"/>
+            <a:r>
+              <a:rPr sz="1000" b="1">
+                <a:solidFill>
+                  <a:srgbClr val="2E7D4F"/>
+                </a:solidFill>
+                <a:latin typeface="맑은 고딕"/>
+              </a:rPr>
+              <a:t>40 / 0 / 5/5</a:t>
+            </a:r>
+          </a:p>
+        </p:txBody>
+      </p:sp>
+      <p:sp>
+        <p:nvSpPr>
+          <p:cNvPr id="35" name="Rectangle 34"/>
+          <p:cNvSpPr/>
+          <p:nvPr/>
+        </p:nvSpPr>
+        <p:spPr>
+          <a:xfrm>
+            <a:off x="566928" y="3401568"/>
+            <a:ext cx="2148840" cy="365760"/>
+          </a:xfrm>
+          <a:prstGeom prst="rect">
+            <a:avLst/>
+          </a:prstGeom>
+          <a:solidFill>
+            <a:srgbClr val="EEF2F7"/>
+          </a:solidFill>
+          <a:ln w="7620">
+            <a:solidFill>
+              <a:srgbClr val="C4CFDB"/>
+            </a:solidFill>
+          </a:ln>
+          <a:effectLst/>
+        </p:spPr>
+        <p:style>
+          <a:lnRef idx="1">
+            <a:schemeClr val="accent1"/>
+          </a:lnRef>
+          <a:fillRef idx="3">
+            <a:schemeClr val="accent1"/>
+          </a:fillRef>
+          <a:effectRef idx="2">
+            <a:schemeClr val="accent1"/>
+          </a:effectRef>
+          <a:fontRef idx="minor">
+            <a:schemeClr val="lt1"/>
+          </a:fontRef>
+        </p:style>
+        <p:txBody>
+          <a:bodyPr rtlCol="0" anchor="ctr" wrap="square" lIns="73152" tIns="0" bIns="0"/>
+          <a:lstStyle/>
+          <a:p>
+            <a:pPr algn="l"/>
+            <a:r>
+              <a:rPr sz="1000" b="1">
+                <a:solidFill>
+                  <a:srgbClr val="1B3255"/>
+                </a:solidFill>
+                <a:latin typeface="맑은 고딕"/>
+              </a:rPr>
+              <a:t>BENCH04</a:t>
+            </a:r>
+          </a:p>
+        </p:txBody>
+      </p:sp>
+      <p:sp>
+        <p:nvSpPr>
+          <p:cNvPr id="36" name="Rectangle 35"/>
+          <p:cNvSpPr/>
+          <p:nvPr/>
+        </p:nvSpPr>
+        <p:spPr>
+          <a:xfrm>
+            <a:off x="2715768" y="3401568"/>
+            <a:ext cx="1417320" cy="365760"/>
+          </a:xfrm>
+          <a:prstGeom prst="rect">
+            <a:avLst/>
+          </a:prstGeom>
+          <a:solidFill>
+            <a:srgbClr val="EEF2F7"/>
+          </a:solidFill>
+          <a:ln w="7620">
+            <a:solidFill>
+              <a:srgbClr val="C4CFDB"/>
+            </a:solidFill>
+          </a:ln>
+          <a:effectLst/>
+        </p:spPr>
+        <p:style>
+          <a:lnRef idx="1">
+            <a:schemeClr val="accent1"/>
+          </a:lnRef>
+          <a:fillRef idx="3">
+            <a:schemeClr val="accent1"/>
+          </a:fillRef>
+          <a:effectRef idx="2">
+            <a:schemeClr val="accent1"/>
+          </a:effectRef>
+          <a:fontRef idx="minor">
+            <a:schemeClr val="lt1"/>
+          </a:fontRef>
+        </p:style>
+        <p:txBody>
+          <a:bodyPr rtlCol="0" anchor="ctr" wrap="square" lIns="73152" tIns="0" bIns="0"/>
+          <a:lstStyle/>
+          <a:p>
+            <a:pPr algn="ctr"/>
+            <a:r>
+              <a:rPr sz="1000" b="0">
+                <a:solidFill>
+                  <a:srgbClr val="5C6670"/>
+                </a:solidFill>
+                <a:latin typeface="맑은 고딕"/>
+              </a:rPr>
+              <a:t>2×2·ST40</a:t>
+            </a:r>
+          </a:p>
+        </p:txBody>
+      </p:sp>
+      <p:sp>
+        <p:nvSpPr>
+          <p:cNvPr id="37" name="Rectangle 36"/>
+          <p:cNvSpPr/>
+          <p:nvPr/>
+        </p:nvSpPr>
+        <p:spPr>
+          <a:xfrm>
+            <a:off x="4133088" y="3401568"/>
+            <a:ext cx="777240" cy="365760"/>
+          </a:xfrm>
+          <a:prstGeom prst="rect">
+            <a:avLst/>
+          </a:prstGeom>
+          <a:solidFill>
+            <a:srgbClr val="EEF2F7"/>
+          </a:solidFill>
+          <a:ln w="7620">
+            <a:solidFill>
+              <a:srgbClr val="C4CFDB"/>
+            </a:solidFill>
+          </a:ln>
+          <a:effectLst/>
+        </p:spPr>
+        <p:style>
+          <a:lnRef idx="1">
+            <a:schemeClr val="accent1"/>
+          </a:lnRef>
+          <a:fillRef idx="3">
+            <a:schemeClr val="accent1"/>
+          </a:fillRef>
+          <a:effectRef idx="2">
+            <a:schemeClr val="accent1"/>
+          </a:effectRef>
+          <a:fontRef idx="minor">
+            <a:schemeClr val="lt1"/>
+          </a:fontRef>
+        </p:style>
+        <p:txBody>
+          <a:bodyPr rtlCol="0" anchor="ctr" wrap="square" lIns="73152" tIns="0" bIns="0"/>
+          <a:lstStyle/>
+          <a:p>
+            <a:pPr algn="ctr"/>
+            <a:r>
+              <a:rPr sz="1000" b="0">
+                <a:solidFill>
+                  <a:srgbClr val="5C6670"/>
+                </a:solidFill>
+                <a:latin typeface="맑은 고딕"/>
+              </a:rPr>
+              <a:t>24</a:t>
+            </a:r>
+          </a:p>
+        </p:txBody>
+      </p:sp>
+      <p:sp>
+        <p:nvSpPr>
+          <p:cNvPr id="38" name="Rectangle 37"/>
+          <p:cNvSpPr/>
+          <p:nvPr/>
+        </p:nvSpPr>
+        <p:spPr>
+          <a:xfrm>
+            <a:off x="4910328" y="3401568"/>
+            <a:ext cx="2240280" cy="365760"/>
+          </a:xfrm>
+          <a:prstGeom prst="rect">
+            <a:avLst/>
+          </a:prstGeom>
+          <a:solidFill>
+            <a:srgbClr val="EEF2F7"/>
+          </a:solidFill>
+          <a:ln w="7620">
+            <a:solidFill>
+              <a:srgbClr val="C4CFDB"/>
+            </a:solidFill>
+          </a:ln>
+          <a:effectLst/>
+        </p:spPr>
+        <p:style>
+          <a:lnRef idx="1">
+            <a:schemeClr val="accent1"/>
+          </a:lnRef>
+          <a:fillRef idx="3">
+            <a:schemeClr val="accent1"/>
+          </a:fillRef>
+          <a:effectRef idx="2">
+            <a:schemeClr val="accent1"/>
+          </a:effectRef>
+          <a:fontRef idx="minor">
+            <a:schemeClr val="lt1"/>
+          </a:fontRef>
+        </p:style>
+        <p:txBody>
+          <a:bodyPr rtlCol="0" anchor="ctr" wrap="square" lIns="73152" tIns="0" bIns="0"/>
+          <a:lstStyle/>
+          <a:p>
+            <a:pPr algn="ctr"/>
+            <a:r>
+              <a:rPr sz="1000" b="0">
+                <a:solidFill>
+                  <a:srgbClr val="B33A3A"/>
+                </a:solidFill>
+                <a:latin typeface="맑은 고딕"/>
+              </a:rPr>
+              <a:t>22 / 2</a:t>
+            </a:r>
+          </a:p>
+        </p:txBody>
+      </p:sp>
+      <p:sp>
+        <p:nvSpPr>
+          <p:cNvPr id="39" name="Rectangle 38"/>
+          <p:cNvSpPr/>
+          <p:nvPr/>
+        </p:nvSpPr>
+        <p:spPr>
+          <a:xfrm>
+            <a:off x="7150608" y="3401568"/>
+            <a:ext cx="1600200" cy="365760"/>
+          </a:xfrm>
+          <a:prstGeom prst="rect">
+            <a:avLst/>
+          </a:prstGeom>
+          <a:solidFill>
+            <a:srgbClr val="EEF2F7"/>
+          </a:solidFill>
+          <a:ln w="7620">
+            <a:solidFill>
+              <a:srgbClr val="C4CFDB"/>
+            </a:solidFill>
+          </a:ln>
+          <a:effectLst/>
+        </p:spPr>
+        <p:style>
+          <a:lnRef idx="1">
+            <a:schemeClr val="accent1"/>
+          </a:lnRef>
+          <a:fillRef idx="3">
+            <a:schemeClr val="accent1"/>
+          </a:fillRef>
+          <a:effectRef idx="2">
+            <a:schemeClr val="accent1"/>
+          </a:effectRef>
+          <a:fontRef idx="minor">
+            <a:schemeClr val="lt1"/>
+          </a:fontRef>
+        </p:style>
+        <p:txBody>
+          <a:bodyPr rtlCol="0" anchor="ctr" wrap="square" lIns="73152" tIns="0" bIns="0"/>
+          <a:lstStyle/>
+          <a:p>
+            <a:pPr algn="ctr"/>
+            <a:r>
+              <a:rPr sz="1000" b="0">
+                <a:solidFill>
+                  <a:srgbClr val="5C6670"/>
+                </a:solidFill>
+                <a:latin typeface="맑은 고딕"/>
+              </a:rPr>
+              <a:t>24</a:t>
+            </a:r>
+          </a:p>
+        </p:txBody>
+      </p:sp>
+      <p:sp>
+        <p:nvSpPr>
+          <p:cNvPr id="40" name="Rectangle 39"/>
+          <p:cNvSpPr/>
+          <p:nvPr/>
+        </p:nvSpPr>
+        <p:spPr>
+          <a:xfrm>
+            <a:off x="8750808" y="3401568"/>
+            <a:ext cx="2697480" cy="365760"/>
+          </a:xfrm>
+          <a:prstGeom prst="rect">
+            <a:avLst/>
+          </a:prstGeom>
+          <a:solidFill>
+            <a:srgbClr val="E2EEE7"/>
+          </a:solidFill>
+          <a:ln w="7620">
+            <a:solidFill>
+              <a:srgbClr val="C4CFDB"/>
+            </a:solidFill>
+          </a:ln>
+          <a:effectLst/>
+        </p:spPr>
+        <p:style>
+          <a:lnRef idx="1">
+            <a:schemeClr val="accent1"/>
+          </a:lnRef>
+          <a:fillRef idx="3">
+            <a:schemeClr val="accent1"/>
+          </a:fillRef>
+          <a:effectRef idx="2">
+            <a:schemeClr val="accent1"/>
+          </a:effectRef>
+          <a:fontRef idx="minor">
+            <a:schemeClr val="lt1"/>
+          </a:fontRef>
+        </p:style>
+        <p:txBody>
+          <a:bodyPr rtlCol="0" anchor="ctr" wrap="square" lIns="73152" tIns="0" bIns="0"/>
+          <a:lstStyle/>
+          <a:p>
+            <a:pPr algn="ctr"/>
+            <a:r>
+              <a:rPr sz="1000" b="1">
+                <a:solidFill>
+                  <a:srgbClr val="2E7D4F"/>
+                </a:solidFill>
+                <a:latin typeface="맑은 고딕"/>
+              </a:rPr>
+              <a:t>24 / 0 / 2/2</a:t>
+            </a:r>
+          </a:p>
+        </p:txBody>
+      </p:sp>
+      <p:sp>
+        <p:nvSpPr>
+          <p:cNvPr id="41" name="Rectangle 40"/>
+          <p:cNvSpPr/>
+          <p:nvPr/>
+        </p:nvSpPr>
+        <p:spPr>
+          <a:xfrm>
+            <a:off x="566928" y="3767328"/>
+            <a:ext cx="2148840" cy="365760"/>
+          </a:xfrm>
+          <a:prstGeom prst="rect">
+            <a:avLst/>
+          </a:prstGeom>
+          <a:solidFill>
+            <a:srgbClr val="FFFFFF"/>
+          </a:solidFill>
+          <a:ln w="7620">
+            <a:solidFill>
+              <a:srgbClr val="C4CFDB"/>
+            </a:solidFill>
+          </a:ln>
+          <a:effectLst/>
+        </p:spPr>
+        <p:style>
+          <a:lnRef idx="1">
+            <a:schemeClr val="accent1"/>
+          </a:lnRef>
+          <a:fillRef idx="3">
+            <a:schemeClr val="accent1"/>
+          </a:fillRef>
+          <a:effectRef idx="2">
+            <a:schemeClr val="accent1"/>
+          </a:effectRef>
+          <a:fontRef idx="minor">
+            <a:schemeClr val="lt1"/>
+          </a:fontRef>
+        </p:style>
+        <p:txBody>
+          <a:bodyPr rtlCol="0" anchor="ctr" wrap="square" lIns="73152" tIns="0" bIns="0"/>
+          <a:lstStyle/>
+          <a:p>
+            <a:pPr algn="l"/>
+            <a:r>
+              <a:rPr sz="1000" b="1">
+                <a:solidFill>
+                  <a:srgbClr val="1B3255"/>
+                </a:solidFill>
+                <a:latin typeface="맑은 고딕"/>
+              </a:rPr>
+              <a:t>BENCH05</a:t>
+            </a:r>
+          </a:p>
+        </p:txBody>
+      </p:sp>
+      <p:sp>
+        <p:nvSpPr>
+          <p:cNvPr id="42" name="Rectangle 41"/>
+          <p:cNvSpPr/>
+          <p:nvPr/>
+        </p:nvSpPr>
+        <p:spPr>
+          <a:xfrm>
+            <a:off x="2715768" y="3767328"/>
+            <a:ext cx="1417320" cy="365760"/>
+          </a:xfrm>
+          <a:prstGeom prst="rect">
+            <a:avLst/>
+          </a:prstGeom>
+          <a:solidFill>
+            <a:srgbClr val="FFFFFF"/>
+          </a:solidFill>
+          <a:ln w="7620">
+            <a:solidFill>
+              <a:srgbClr val="C4CFDB"/>
+            </a:solidFill>
+          </a:ln>
+          <a:effectLst/>
+        </p:spPr>
+        <p:style>
+          <a:lnRef idx="1">
+            <a:schemeClr val="accent1"/>
+          </a:lnRef>
+          <a:fillRef idx="3">
+            <a:schemeClr val="accent1"/>
+          </a:fillRef>
+          <a:effectRef idx="2">
+            <a:schemeClr val="accent1"/>
+          </a:effectRef>
+          <a:fontRef idx="minor">
+            <a:schemeClr val="lt1"/>
+          </a:fontRef>
+        </p:style>
+        <p:txBody>
+          <a:bodyPr rtlCol="0" anchor="ctr" wrap="square" lIns="73152" tIns="0" bIns="0"/>
+          <a:lstStyle/>
+          <a:p>
+            <a:pPr algn="ctr"/>
+            <a:r>
+              <a:rPr sz="1000" b="0">
+                <a:solidFill>
+                  <a:srgbClr val="5C6670"/>
+                </a:solidFill>
+                <a:latin typeface="맑은 고딕"/>
+              </a:rPr>
+              <a:t>3×3·ST48</a:t>
+            </a:r>
+          </a:p>
+        </p:txBody>
+      </p:sp>
+      <p:sp>
+        <p:nvSpPr>
+          <p:cNvPr id="43" name="Rectangle 42"/>
+          <p:cNvSpPr/>
+          <p:nvPr/>
+        </p:nvSpPr>
+        <p:spPr>
+          <a:xfrm>
+            <a:off x="4133088" y="3767328"/>
+            <a:ext cx="777240" cy="365760"/>
+          </a:xfrm>
+          <a:prstGeom prst="rect">
+            <a:avLst/>
+          </a:prstGeom>
+          <a:solidFill>
+            <a:srgbClr val="FFFFFF"/>
+          </a:solidFill>
+          <a:ln w="7620">
+            <a:solidFill>
+              <a:srgbClr val="C4CFDB"/>
+            </a:solidFill>
+          </a:ln>
+          <a:effectLst/>
+        </p:spPr>
+        <p:style>
+          <a:lnRef idx="1">
+            <a:schemeClr val="accent1"/>
+          </a:lnRef>
+          <a:fillRef idx="3">
+            <a:schemeClr val="accent1"/>
+          </a:fillRef>
+          <a:effectRef idx="2">
+            <a:schemeClr val="accent1"/>
+          </a:effectRef>
+          <a:fontRef idx="minor">
+            <a:schemeClr val="lt1"/>
+          </a:fontRef>
+        </p:style>
+        <p:txBody>
+          <a:bodyPr rtlCol="0" anchor="ctr" wrap="square" lIns="73152" tIns="0" bIns="0"/>
+          <a:lstStyle/>
+          <a:p>
+            <a:pPr algn="ctr"/>
+            <a:r>
+              <a:rPr sz="1000" b="0">
+                <a:solidFill>
+                  <a:srgbClr val="5C6670"/>
+                </a:solidFill>
+                <a:latin typeface="맑은 고딕"/>
+              </a:rPr>
+              <a:t>30</a:t>
+            </a:r>
+          </a:p>
+        </p:txBody>
+      </p:sp>
+      <p:sp>
+        <p:nvSpPr>
+          <p:cNvPr id="44" name="Rectangle 43"/>
+          <p:cNvSpPr/>
+          <p:nvPr/>
+        </p:nvSpPr>
+        <p:spPr>
+          <a:xfrm>
+            <a:off x="4910328" y="3767328"/>
+            <a:ext cx="2240280" cy="365760"/>
+          </a:xfrm>
+          <a:prstGeom prst="rect">
+            <a:avLst/>
+          </a:prstGeom>
+          <a:solidFill>
+            <a:srgbClr val="FFFFFF"/>
+          </a:solidFill>
+          <a:ln w="7620">
+            <a:solidFill>
+              <a:srgbClr val="C4CFDB"/>
+            </a:solidFill>
+          </a:ln>
+          <a:effectLst/>
+        </p:spPr>
+        <p:style>
+          <a:lnRef idx="1">
+            <a:schemeClr val="accent1"/>
+          </a:lnRef>
+          <a:fillRef idx="3">
+            <a:schemeClr val="accent1"/>
+          </a:fillRef>
+          <a:effectRef idx="2">
+            <a:schemeClr val="accent1"/>
+          </a:effectRef>
+          <a:fontRef idx="minor">
+            <a:schemeClr val="lt1"/>
+          </a:fontRef>
+        </p:style>
+        <p:txBody>
+          <a:bodyPr rtlCol="0" anchor="ctr" wrap="square" lIns="73152" tIns="0" bIns="0"/>
+          <a:lstStyle/>
+          <a:p>
+            <a:pPr algn="ctr"/>
+            <a:r>
+              <a:rPr sz="1000" b="0">
+                <a:solidFill>
+                  <a:srgbClr val="B33A3A"/>
+                </a:solidFill>
+                <a:latin typeface="맑은 고딕"/>
+              </a:rPr>
+              <a:t>24 / 6</a:t>
+            </a:r>
+          </a:p>
+        </p:txBody>
+      </p:sp>
+      <p:sp>
+        <p:nvSpPr>
+          <p:cNvPr id="45" name="Rectangle 44"/>
+          <p:cNvSpPr/>
+          <p:nvPr/>
+        </p:nvSpPr>
+        <p:spPr>
+          <a:xfrm>
+            <a:off x="7150608" y="3767328"/>
+            <a:ext cx="1600200" cy="365760"/>
+          </a:xfrm>
+          <a:prstGeom prst="rect">
+            <a:avLst/>
+          </a:prstGeom>
+          <a:solidFill>
+            <a:srgbClr val="FFFFFF"/>
+          </a:solidFill>
+          <a:ln w="7620">
+            <a:solidFill>
+              <a:srgbClr val="C4CFDB"/>
+            </a:solidFill>
+          </a:ln>
+          <a:effectLst/>
+        </p:spPr>
+        <p:style>
+          <a:lnRef idx="1">
+            <a:schemeClr val="accent1"/>
+          </a:lnRef>
+          <a:fillRef idx="3">
+            <a:schemeClr val="accent1"/>
+          </a:fillRef>
+          <a:effectRef idx="2">
+            <a:schemeClr val="accent1"/>
+          </a:effectRef>
+          <a:fontRef idx="minor">
+            <a:schemeClr val="lt1"/>
+          </a:fontRef>
+        </p:style>
+        <p:txBody>
+          <a:bodyPr rtlCol="0" anchor="ctr" wrap="square" lIns="73152" tIns="0" bIns="0"/>
+          <a:lstStyle/>
+          <a:p>
+            <a:pPr algn="ctr"/>
+            <a:r>
+              <a:rPr sz="1000" b="0">
+                <a:solidFill>
+                  <a:srgbClr val="5C6670"/>
+                </a:solidFill>
+                <a:latin typeface="맑은 고딕"/>
+              </a:rPr>
+              <a:t>30</a:t>
+            </a:r>
+          </a:p>
+        </p:txBody>
+      </p:sp>
+      <p:sp>
+        <p:nvSpPr>
+          <p:cNvPr id="46" name="Rectangle 45"/>
+          <p:cNvSpPr/>
+          <p:nvPr/>
+        </p:nvSpPr>
+        <p:spPr>
+          <a:xfrm>
+            <a:off x="8750808" y="3767328"/>
+            <a:ext cx="2697480" cy="365760"/>
+          </a:xfrm>
+          <a:prstGeom prst="rect">
+            <a:avLst/>
+          </a:prstGeom>
+          <a:solidFill>
+            <a:srgbClr val="E2EEE7"/>
+          </a:solidFill>
+          <a:ln w="7620">
+            <a:solidFill>
+              <a:srgbClr val="C4CFDB"/>
+            </a:solidFill>
+          </a:ln>
+          <a:effectLst/>
+        </p:spPr>
+        <p:style>
+          <a:lnRef idx="1">
+            <a:schemeClr val="accent1"/>
+          </a:lnRef>
+          <a:fillRef idx="3">
+            <a:schemeClr val="accent1"/>
+          </a:fillRef>
+          <a:effectRef idx="2">
+            <a:schemeClr val="accent1"/>
+          </a:effectRef>
+          <a:fontRef idx="minor">
+            <a:schemeClr val="lt1"/>
+          </a:fontRef>
+        </p:style>
+        <p:txBody>
+          <a:bodyPr rtlCol="0" anchor="ctr" wrap="square" lIns="73152" tIns="0" bIns="0"/>
+          <a:lstStyle/>
+          <a:p>
+            <a:pPr algn="ctr"/>
+            <a:r>
+              <a:rPr sz="1000" b="1">
+                <a:solidFill>
+                  <a:srgbClr val="2E7D4F"/>
+                </a:solidFill>
+                <a:latin typeface="맑은 고딕"/>
+              </a:rPr>
+              <a:t>30 / 0 / 3/3</a:t>
+            </a:r>
+          </a:p>
+        </p:txBody>
+      </p:sp>
+      <p:sp>
+        <p:nvSpPr>
+          <p:cNvPr id="47" name="Rectangle 46"/>
+          <p:cNvSpPr/>
+          <p:nvPr/>
+        </p:nvSpPr>
+        <p:spPr>
+          <a:xfrm>
+            <a:off x="566928" y="4133088"/>
+            <a:ext cx="2148840" cy="365760"/>
+          </a:xfrm>
+          <a:prstGeom prst="rect">
+            <a:avLst/>
+          </a:prstGeom>
+          <a:solidFill>
+            <a:srgbClr val="EEF2F7"/>
+          </a:solidFill>
+          <a:ln w="7620">
+            <a:solidFill>
+              <a:srgbClr val="C4CFDB"/>
+            </a:solidFill>
+          </a:ln>
+          <a:effectLst/>
+        </p:spPr>
+        <p:style>
+          <a:lnRef idx="1">
+            <a:schemeClr val="accent1"/>
+          </a:lnRef>
+          <a:fillRef idx="3">
+            <a:schemeClr val="accent1"/>
+          </a:fillRef>
+          <a:effectRef idx="2">
+            <a:schemeClr val="accent1"/>
+          </a:effectRef>
+          <a:fontRef idx="minor">
+            <a:schemeClr val="lt1"/>
+          </a:fontRef>
+        </p:style>
+        <p:txBody>
+          <a:bodyPr rtlCol="0" anchor="ctr" wrap="square" lIns="73152" tIns="0" bIns="0"/>
+          <a:lstStyle/>
+          <a:p>
+            <a:pPr algn="l"/>
+            <a:r>
+              <a:rPr sz="1000" b="1">
+                <a:solidFill>
+                  <a:srgbClr val="1B3255"/>
+                </a:solidFill>
+                <a:latin typeface="맑은 고딕"/>
+              </a:rPr>
+              <a:t>BENCH06</a:t>
+            </a:r>
+          </a:p>
+        </p:txBody>
+      </p:sp>
+      <p:sp>
+        <p:nvSpPr>
+          <p:cNvPr id="48" name="Rectangle 47"/>
+          <p:cNvSpPr/>
+          <p:nvPr/>
+        </p:nvSpPr>
+        <p:spPr>
+          <a:xfrm>
+            <a:off x="2715768" y="4133088"/>
+            <a:ext cx="1417320" cy="365760"/>
+          </a:xfrm>
+          <a:prstGeom prst="rect">
+            <a:avLst/>
+          </a:prstGeom>
+          <a:solidFill>
+            <a:srgbClr val="EEF2F7"/>
+          </a:solidFill>
+          <a:ln w="7620">
+            <a:solidFill>
+              <a:srgbClr val="C4CFDB"/>
+            </a:solidFill>
+          </a:ln>
+          <a:effectLst/>
+        </p:spPr>
+        <p:style>
+          <a:lnRef idx="1">
+            <a:schemeClr val="accent1"/>
+          </a:lnRef>
+          <a:fillRef idx="3">
+            <a:schemeClr val="accent1"/>
+          </a:fillRef>
+          <a:effectRef idx="2">
+            <a:schemeClr val="accent1"/>
+          </a:effectRef>
+          <a:fontRef idx="minor">
+            <a:schemeClr val="lt1"/>
+          </a:fontRef>
+        </p:style>
+        <p:txBody>
+          <a:bodyPr rtlCol="0" anchor="ctr" wrap="square" lIns="73152" tIns="0" bIns="0"/>
+          <a:lstStyle/>
+          <a:p>
+            <a:pPr algn="ctr"/>
+            <a:r>
+              <a:rPr sz="1000" b="0">
+                <a:solidFill>
+                  <a:srgbClr val="5C6670"/>
+                </a:solidFill>
+                <a:latin typeface="맑은 고딕"/>
+              </a:rPr>
+              <a:t>6×6·ST72</a:t>
+            </a:r>
+          </a:p>
+        </p:txBody>
+      </p:sp>
+      <p:sp>
+        <p:nvSpPr>
+          <p:cNvPr id="49" name="Rectangle 48"/>
+          <p:cNvSpPr/>
+          <p:nvPr/>
+        </p:nvSpPr>
+        <p:spPr>
+          <a:xfrm>
+            <a:off x="4133088" y="4133088"/>
+            <a:ext cx="777240" cy="365760"/>
+          </a:xfrm>
+          <a:prstGeom prst="rect">
+            <a:avLst/>
+          </a:prstGeom>
+          <a:solidFill>
+            <a:srgbClr val="EEF2F7"/>
+          </a:solidFill>
+          <a:ln w="7620">
+            <a:solidFill>
+              <a:srgbClr val="C4CFDB"/>
+            </a:solidFill>
+          </a:ln>
+          <a:effectLst/>
+        </p:spPr>
+        <p:style>
+          <a:lnRef idx="1">
+            <a:schemeClr val="accent1"/>
+          </a:lnRef>
+          <a:fillRef idx="3">
+            <a:schemeClr val="accent1"/>
+          </a:fillRef>
+          <a:effectRef idx="2">
+            <a:schemeClr val="accent1"/>
+          </a:effectRef>
+          <a:fontRef idx="minor">
+            <a:schemeClr val="lt1"/>
+          </a:fontRef>
+        </p:style>
+        <p:txBody>
+          <a:bodyPr rtlCol="0" anchor="ctr" wrap="square" lIns="73152" tIns="0" bIns="0"/>
+          <a:lstStyle/>
+          <a:p>
+            <a:pPr algn="ctr"/>
+            <a:r>
+              <a:rPr sz="1000" b="0">
+                <a:solidFill>
+                  <a:srgbClr val="5C6670"/>
+                </a:solidFill>
+                <a:latin typeface="맑은 고딕"/>
+              </a:rPr>
+              <a:t>30</a:t>
+            </a:r>
+          </a:p>
+        </p:txBody>
+      </p:sp>
+      <p:sp>
+        <p:nvSpPr>
+          <p:cNvPr id="50" name="Rectangle 49"/>
+          <p:cNvSpPr/>
+          <p:nvPr/>
+        </p:nvSpPr>
+        <p:spPr>
+          <a:xfrm>
+            <a:off x="4910328" y="4133088"/>
+            <a:ext cx="2240280" cy="365760"/>
+          </a:xfrm>
+          <a:prstGeom prst="rect">
+            <a:avLst/>
+          </a:prstGeom>
+          <a:solidFill>
+            <a:srgbClr val="EEF2F7"/>
+          </a:solidFill>
+          <a:ln w="7620">
+            <a:solidFill>
+              <a:srgbClr val="C4CFDB"/>
+            </a:solidFill>
+          </a:ln>
+          <a:effectLst/>
+        </p:spPr>
+        <p:style>
+          <a:lnRef idx="1">
+            <a:schemeClr val="accent1"/>
+          </a:lnRef>
+          <a:fillRef idx="3">
+            <a:schemeClr val="accent1"/>
+          </a:fillRef>
+          <a:effectRef idx="2">
+            <a:schemeClr val="accent1"/>
+          </a:effectRef>
+          <a:fontRef idx="minor">
+            <a:schemeClr val="lt1"/>
+          </a:fontRef>
+        </p:style>
+        <p:txBody>
+          <a:bodyPr rtlCol="0" anchor="ctr" wrap="square" lIns="73152" tIns="0" bIns="0"/>
+          <a:lstStyle/>
+          <a:p>
+            <a:pPr algn="ctr"/>
+            <a:r>
+              <a:rPr sz="1000" b="0">
+                <a:solidFill>
+                  <a:srgbClr val="B33A3A"/>
+                </a:solidFill>
+                <a:latin typeface="맑은 고딕"/>
+              </a:rPr>
+              <a:t>18 / 20</a:t>
+            </a:r>
+          </a:p>
+        </p:txBody>
+      </p:sp>
+      <p:sp>
+        <p:nvSpPr>
+          <p:cNvPr id="51" name="Rectangle 50"/>
+          <p:cNvSpPr/>
+          <p:nvPr/>
+        </p:nvSpPr>
+        <p:spPr>
+          <a:xfrm>
+            <a:off x="7150608" y="4133088"/>
+            <a:ext cx="1600200" cy="365760"/>
+          </a:xfrm>
+          <a:prstGeom prst="rect">
+            <a:avLst/>
+          </a:prstGeom>
+          <a:solidFill>
+            <a:srgbClr val="EEF2F7"/>
+          </a:solidFill>
+          <a:ln w="7620">
+            <a:solidFill>
+              <a:srgbClr val="C4CFDB"/>
+            </a:solidFill>
+          </a:ln>
+          <a:effectLst/>
+        </p:spPr>
+        <p:style>
+          <a:lnRef idx="1">
+            <a:schemeClr val="accent1"/>
+          </a:lnRef>
+          <a:fillRef idx="3">
+            <a:schemeClr val="accent1"/>
+          </a:fillRef>
+          <a:effectRef idx="2">
+            <a:schemeClr val="accent1"/>
+          </a:effectRef>
+          <a:fontRef idx="minor">
+            <a:schemeClr val="lt1"/>
+          </a:fontRef>
+        </p:style>
+        <p:txBody>
+          <a:bodyPr rtlCol="0" anchor="ctr" wrap="square" lIns="73152" tIns="0" bIns="0"/>
+          <a:lstStyle/>
+          <a:p>
+            <a:pPr algn="ctr"/>
+            <a:r>
+              <a:rPr sz="1000" b="0">
+                <a:solidFill>
+                  <a:srgbClr val="5C6670"/>
+                </a:solidFill>
+                <a:latin typeface="맑은 고딕"/>
+              </a:rPr>
+              <a:t>30</a:t>
+            </a:r>
+          </a:p>
+        </p:txBody>
+      </p:sp>
+      <p:sp>
+        <p:nvSpPr>
+          <p:cNvPr id="52" name="Rectangle 51"/>
+          <p:cNvSpPr/>
+          <p:nvPr/>
+        </p:nvSpPr>
+        <p:spPr>
+          <a:xfrm>
+            <a:off x="8750808" y="4133088"/>
+            <a:ext cx="2697480" cy="365760"/>
+          </a:xfrm>
+          <a:prstGeom prst="rect">
+            <a:avLst/>
+          </a:prstGeom>
+          <a:solidFill>
+            <a:srgbClr val="F6EEDD"/>
+          </a:solidFill>
+          <a:ln w="7620">
+            <a:solidFill>
+              <a:srgbClr val="C4CFDB"/>
+            </a:solidFill>
+          </a:ln>
+          <a:effectLst/>
+        </p:spPr>
+        <p:style>
+          <a:lnRef idx="1">
+            <a:schemeClr val="accent1"/>
+          </a:lnRef>
+          <a:fillRef idx="3">
+            <a:schemeClr val="accent1"/>
+          </a:fillRef>
+          <a:effectRef idx="2">
+            <a:schemeClr val="accent1"/>
+          </a:effectRef>
+          <a:fontRef idx="minor">
+            <a:schemeClr val="lt1"/>
+          </a:fontRef>
+        </p:style>
+        <p:txBody>
+          <a:bodyPr rtlCol="0" anchor="ctr" wrap="square" lIns="73152" tIns="0" bIns="0"/>
+          <a:lstStyle/>
+          <a:p>
+            <a:pPr algn="ctr"/>
+            <a:r>
+              <a:rPr sz="1000" b="1">
+                <a:solidFill>
+                  <a:srgbClr val="C8861E"/>
+                </a:solidFill>
+                <a:latin typeface="맑은 고딕"/>
+              </a:rPr>
+              <a:t>26 / 6 / 4/6</a:t>
+            </a:r>
+          </a:p>
+        </p:txBody>
+      </p:sp>
+      <p:sp>
+        <p:nvSpPr>
+          <p:cNvPr id="53" name="Rectangle 52"/>
+          <p:cNvSpPr/>
+          <p:nvPr/>
+        </p:nvSpPr>
+        <p:spPr>
+          <a:xfrm>
+            <a:off x="566928" y="4498848"/>
+            <a:ext cx="2148840" cy="365760"/>
+          </a:xfrm>
+          <a:prstGeom prst="rect">
+            <a:avLst/>
+          </a:prstGeom>
+          <a:solidFill>
+            <a:srgbClr val="FFFFFF"/>
+          </a:solidFill>
+          <a:ln w="7620">
+            <a:solidFill>
+              <a:srgbClr val="C4CFDB"/>
+            </a:solidFill>
+          </a:ln>
+          <a:effectLst/>
+        </p:spPr>
+        <p:style>
+          <a:lnRef idx="1">
+            <a:schemeClr val="accent1"/>
+          </a:lnRef>
+          <a:fillRef idx="3">
+            <a:schemeClr val="accent1"/>
+          </a:fillRef>
+          <a:effectRef idx="2">
+            <a:schemeClr val="accent1"/>
+          </a:effectRef>
+          <a:fontRef idx="minor">
+            <a:schemeClr val="lt1"/>
+          </a:fontRef>
+        </p:style>
+        <p:txBody>
+          <a:bodyPr rtlCol="0" anchor="ctr" wrap="square" lIns="73152" tIns="0" bIns="0"/>
+          <a:lstStyle/>
+          <a:p>
+            <a:pPr algn="l"/>
+            <a:r>
+              <a:rPr sz="1000" b="1">
+                <a:solidFill>
+                  <a:srgbClr val="1B3255"/>
+                </a:solidFill>
+                <a:latin typeface="맑은 고딕"/>
+              </a:rPr>
+              <a:t>BENCH07</a:t>
+            </a:r>
+          </a:p>
+        </p:txBody>
+      </p:sp>
+      <p:sp>
+        <p:nvSpPr>
+          <p:cNvPr id="54" name="Rectangle 53"/>
+          <p:cNvSpPr/>
+          <p:nvPr/>
+        </p:nvSpPr>
+        <p:spPr>
+          <a:xfrm>
+            <a:off x="2715768" y="4498848"/>
+            <a:ext cx="1417320" cy="365760"/>
+          </a:xfrm>
+          <a:prstGeom prst="rect">
+            <a:avLst/>
+          </a:prstGeom>
+          <a:solidFill>
+            <a:srgbClr val="FFFFFF"/>
+          </a:solidFill>
+          <a:ln w="7620">
+            <a:solidFill>
+              <a:srgbClr val="C4CFDB"/>
+            </a:solidFill>
+          </a:ln>
+          <a:effectLst/>
+        </p:spPr>
+        <p:style>
+          <a:lnRef idx="1">
+            <a:schemeClr val="accent1"/>
+          </a:lnRef>
+          <a:fillRef idx="3">
+            <a:schemeClr val="accent1"/>
+          </a:fillRef>
+          <a:effectRef idx="2">
+            <a:schemeClr val="accent1"/>
+          </a:effectRef>
+          <a:fontRef idx="minor">
+            <a:schemeClr val="lt1"/>
+          </a:fontRef>
+        </p:style>
+        <p:txBody>
+          <a:bodyPr rtlCol="0" anchor="ctr" wrap="square" lIns="73152" tIns="0" bIns="0"/>
+          <a:lstStyle/>
+          <a:p>
+            <a:pPr algn="ctr"/>
+            <a:r>
+              <a:rPr sz="1000" b="0">
+                <a:solidFill>
+                  <a:srgbClr val="5C6670"/>
+                </a:solidFill>
+                <a:latin typeface="맑은 고딕"/>
+              </a:rPr>
+              <a:t>4×4·ST50</a:t>
+            </a:r>
+          </a:p>
+        </p:txBody>
+      </p:sp>
+      <p:sp>
+        <p:nvSpPr>
+          <p:cNvPr id="55" name="Rectangle 54"/>
+          <p:cNvSpPr/>
+          <p:nvPr/>
+        </p:nvSpPr>
+        <p:spPr>
+          <a:xfrm>
+            <a:off x="4133088" y="4498848"/>
+            <a:ext cx="777240" cy="365760"/>
+          </a:xfrm>
+          <a:prstGeom prst="rect">
+            <a:avLst/>
+          </a:prstGeom>
+          <a:solidFill>
+            <a:srgbClr val="FFFFFF"/>
+          </a:solidFill>
+          <a:ln w="7620">
+            <a:solidFill>
+              <a:srgbClr val="C4CFDB"/>
+            </a:solidFill>
+          </a:ln>
+          <a:effectLst/>
+        </p:spPr>
+        <p:style>
+          <a:lnRef idx="1">
+            <a:schemeClr val="accent1"/>
+          </a:lnRef>
+          <a:fillRef idx="3">
+            <a:schemeClr val="accent1"/>
+          </a:fillRef>
+          <a:effectRef idx="2">
+            <a:schemeClr val="accent1"/>
+          </a:effectRef>
+          <a:fontRef idx="minor">
+            <a:schemeClr val="lt1"/>
+          </a:fontRef>
+        </p:style>
+        <p:txBody>
+          <a:bodyPr rtlCol="0" anchor="ctr" wrap="square" lIns="73152" tIns="0" bIns="0"/>
+          <a:lstStyle/>
+          <a:p>
+            <a:pPr algn="ctr"/>
+            <a:r>
+              <a:rPr sz="1000" b="0">
+                <a:solidFill>
+                  <a:srgbClr val="5C6670"/>
+                </a:solidFill>
+                <a:latin typeface="맑은 고딕"/>
+              </a:rPr>
+              <a:t>32</a:t>
+            </a:r>
+          </a:p>
+        </p:txBody>
+      </p:sp>
+      <p:sp>
+        <p:nvSpPr>
+          <p:cNvPr id="56" name="Rectangle 55"/>
+          <p:cNvSpPr/>
+          <p:nvPr/>
+        </p:nvSpPr>
+        <p:spPr>
+          <a:xfrm>
+            <a:off x="4910328" y="4498848"/>
+            <a:ext cx="2240280" cy="365760"/>
+          </a:xfrm>
+          <a:prstGeom prst="rect">
+            <a:avLst/>
+          </a:prstGeom>
+          <a:solidFill>
+            <a:srgbClr val="FFFFFF"/>
+          </a:solidFill>
+          <a:ln w="7620">
+            <a:solidFill>
+              <a:srgbClr val="C4CFDB"/>
+            </a:solidFill>
+          </a:ln>
+          <a:effectLst/>
+        </p:spPr>
+        <p:style>
+          <a:lnRef idx="1">
+            <a:schemeClr val="accent1"/>
+          </a:lnRef>
+          <a:fillRef idx="3">
+            <a:schemeClr val="accent1"/>
+          </a:fillRef>
+          <a:effectRef idx="2">
+            <a:schemeClr val="accent1"/>
+          </a:effectRef>
+          <a:fontRef idx="minor">
+            <a:schemeClr val="lt1"/>
+          </a:fontRef>
+        </p:style>
+        <p:txBody>
+          <a:bodyPr rtlCol="0" anchor="ctr" wrap="square" lIns="73152" tIns="0" bIns="0"/>
+          <a:lstStyle/>
+          <a:p>
+            <a:pPr algn="ctr"/>
+            <a:r>
+              <a:rPr sz="1000" b="0">
+                <a:solidFill>
+                  <a:srgbClr val="B33A3A"/>
+                </a:solidFill>
+                <a:latin typeface="맑은 고딕"/>
+              </a:rPr>
+              <a:t>24 / 12</a:t>
+            </a:r>
+          </a:p>
+        </p:txBody>
+      </p:sp>
+      <p:sp>
+        <p:nvSpPr>
+          <p:cNvPr id="57" name="Rectangle 56"/>
+          <p:cNvSpPr/>
+          <p:nvPr/>
+        </p:nvSpPr>
+        <p:spPr>
+          <a:xfrm>
+            <a:off x="7150608" y="4498848"/>
+            <a:ext cx="1600200" cy="365760"/>
+          </a:xfrm>
+          <a:prstGeom prst="rect">
+            <a:avLst/>
+          </a:prstGeom>
+          <a:solidFill>
+            <a:srgbClr val="FFFFFF"/>
+          </a:solidFill>
+          <a:ln w="7620">
+            <a:solidFill>
+              <a:srgbClr val="C4CFDB"/>
+            </a:solidFill>
+          </a:ln>
+          <a:effectLst/>
+        </p:spPr>
+        <p:style>
+          <a:lnRef idx="1">
+            <a:schemeClr val="accent1"/>
+          </a:lnRef>
+          <a:fillRef idx="3">
+            <a:schemeClr val="accent1"/>
+          </a:fillRef>
+          <a:effectRef idx="2">
+            <a:schemeClr val="accent1"/>
+          </a:effectRef>
+          <a:fontRef idx="minor">
+            <a:schemeClr val="lt1"/>
+          </a:fontRef>
+        </p:style>
+        <p:txBody>
+          <a:bodyPr rtlCol="0" anchor="ctr" wrap="square" lIns="73152" tIns="0" bIns="0"/>
+          <a:lstStyle/>
+          <a:p>
+            <a:pPr algn="ctr"/>
+            <a:r>
+              <a:rPr sz="1000" b="0">
+                <a:solidFill>
+                  <a:srgbClr val="5C6670"/>
+                </a:solidFill>
+                <a:latin typeface="맑은 고딕"/>
+              </a:rPr>
+              <a:t>32</a:t>
+            </a:r>
+          </a:p>
+        </p:txBody>
+      </p:sp>
+      <p:sp>
+        <p:nvSpPr>
+          <p:cNvPr id="58" name="Rectangle 57"/>
+          <p:cNvSpPr/>
+          <p:nvPr/>
+        </p:nvSpPr>
+        <p:spPr>
+          <a:xfrm>
+            <a:off x="8750808" y="4498848"/>
+            <a:ext cx="2697480" cy="365760"/>
+          </a:xfrm>
+          <a:prstGeom prst="rect">
+            <a:avLst/>
+          </a:prstGeom>
+          <a:solidFill>
+            <a:srgbClr val="E2EEE7"/>
+          </a:solidFill>
+          <a:ln w="7620">
+            <a:solidFill>
+              <a:srgbClr val="C4CFDB"/>
+            </a:solidFill>
+          </a:ln>
+          <a:effectLst/>
+        </p:spPr>
+        <p:style>
+          <a:lnRef idx="1">
+            <a:schemeClr val="accent1"/>
+          </a:lnRef>
+          <a:fillRef idx="3">
+            <a:schemeClr val="accent1"/>
+          </a:fillRef>
+          <a:effectRef idx="2">
+            <a:schemeClr val="accent1"/>
+          </a:effectRef>
+          <a:fontRef idx="minor">
+            <a:schemeClr val="lt1"/>
+          </a:fontRef>
+        </p:style>
+        <p:txBody>
+          <a:bodyPr rtlCol="0" anchor="ctr" wrap="square" lIns="73152" tIns="0" bIns="0"/>
+          <a:lstStyle/>
+          <a:p>
+            <a:pPr algn="ctr"/>
+            <a:r>
+              <a:rPr sz="1000" b="1">
+                <a:solidFill>
+                  <a:srgbClr val="2E7D4F"/>
+                </a:solidFill>
+                <a:latin typeface="맑은 고딕"/>
+              </a:rPr>
+              <a:t>32 / 0 / 4/4</a:t>
+            </a:r>
+          </a:p>
+        </p:txBody>
+      </p:sp>
+      <p:sp>
+        <p:nvSpPr>
+          <p:cNvPr id="59" name="Rectangle 58"/>
+          <p:cNvSpPr/>
+          <p:nvPr/>
+        </p:nvSpPr>
+        <p:spPr>
+          <a:xfrm>
+            <a:off x="566928" y="4864608"/>
+            <a:ext cx="2148840" cy="365760"/>
+          </a:xfrm>
+          <a:prstGeom prst="rect">
+            <a:avLst/>
+          </a:prstGeom>
+          <a:solidFill>
+            <a:srgbClr val="EEF2F7"/>
+          </a:solidFill>
+          <a:ln w="7620">
+            <a:solidFill>
+              <a:srgbClr val="C4CFDB"/>
+            </a:solidFill>
+          </a:ln>
+          <a:effectLst/>
+        </p:spPr>
+        <p:style>
+          <a:lnRef idx="1">
+            <a:schemeClr val="accent1"/>
+          </a:lnRef>
+          <a:fillRef idx="3">
+            <a:schemeClr val="accent1"/>
+          </a:fillRef>
+          <a:effectRef idx="2">
+            <a:schemeClr val="accent1"/>
+          </a:effectRef>
+          <a:fontRef idx="minor">
+            <a:schemeClr val="lt1"/>
+          </a:fontRef>
+        </p:style>
+        <p:txBody>
+          <a:bodyPr rtlCol="0" anchor="ctr" wrap="square" lIns="73152" tIns="0" bIns="0"/>
+          <a:lstStyle/>
+          <a:p>
+            <a:pPr algn="l"/>
+            <a:r>
+              <a:rPr sz="1000" b="1">
+                <a:solidFill>
+                  <a:srgbClr val="1B3255"/>
+                </a:solidFill>
+                <a:latin typeface="맑은 고딕"/>
+              </a:rPr>
+              <a:t>BENCH08</a:t>
+            </a:r>
+          </a:p>
+        </p:txBody>
+      </p:sp>
+      <p:sp>
+        <p:nvSpPr>
+          <p:cNvPr id="60" name="Rectangle 59"/>
+          <p:cNvSpPr/>
+          <p:nvPr/>
+        </p:nvSpPr>
+        <p:spPr>
+          <a:xfrm>
+            <a:off x="2715768" y="4864608"/>
+            <a:ext cx="1417320" cy="365760"/>
+          </a:xfrm>
+          <a:prstGeom prst="rect">
+            <a:avLst/>
+          </a:prstGeom>
+          <a:solidFill>
+            <a:srgbClr val="EEF2F7"/>
+          </a:solidFill>
+          <a:ln w="7620">
+            <a:solidFill>
+              <a:srgbClr val="C4CFDB"/>
+            </a:solidFill>
+          </a:ln>
+          <a:effectLst/>
+        </p:spPr>
+        <p:style>
+          <a:lnRef idx="1">
+            <a:schemeClr val="accent1"/>
+          </a:lnRef>
+          <a:fillRef idx="3">
+            <a:schemeClr val="accent1"/>
+          </a:fillRef>
+          <a:effectRef idx="2">
+            <a:schemeClr val="accent1"/>
+          </a:effectRef>
+          <a:fontRef idx="minor">
+            <a:schemeClr val="lt1"/>
+          </a:fontRef>
+        </p:style>
+        <p:txBody>
+          <a:bodyPr rtlCol="0" anchor="ctr" wrap="square" lIns="73152" tIns="0" bIns="0"/>
+          <a:lstStyle/>
+          <a:p>
+            <a:pPr algn="ctr"/>
+            <a:r>
+              <a:rPr sz="1000" b="0">
+                <a:solidFill>
+                  <a:srgbClr val="5C6670"/>
+                </a:solidFill>
+                <a:latin typeface="맑은 고딕"/>
+              </a:rPr>
+              <a:t>3×3·ST30</a:t>
+            </a:r>
+          </a:p>
+        </p:txBody>
+      </p:sp>
+      <p:sp>
+        <p:nvSpPr>
+          <p:cNvPr id="61" name="Rectangle 60"/>
+          <p:cNvSpPr/>
+          <p:nvPr/>
+        </p:nvSpPr>
+        <p:spPr>
+          <a:xfrm>
+            <a:off x="4133088" y="4864608"/>
+            <a:ext cx="777240" cy="365760"/>
+          </a:xfrm>
+          <a:prstGeom prst="rect">
+            <a:avLst/>
+          </a:prstGeom>
+          <a:solidFill>
+            <a:srgbClr val="EEF2F7"/>
+          </a:solidFill>
+          <a:ln w="7620">
+            <a:solidFill>
+              <a:srgbClr val="C4CFDB"/>
+            </a:solidFill>
+          </a:ln>
+          <a:effectLst/>
+        </p:spPr>
+        <p:style>
+          <a:lnRef idx="1">
+            <a:schemeClr val="accent1"/>
+          </a:lnRef>
+          <a:fillRef idx="3">
+            <a:schemeClr val="accent1"/>
+          </a:fillRef>
+          <a:effectRef idx="2">
+            <a:schemeClr val="accent1"/>
+          </a:effectRef>
+          <a:fontRef idx="minor">
+            <a:schemeClr val="lt1"/>
+          </a:fontRef>
+        </p:style>
+        <p:txBody>
+          <a:bodyPr rtlCol="0" anchor="ctr" wrap="square" lIns="73152" tIns="0" bIns="0"/>
+          <a:lstStyle/>
+          <a:p>
+            <a:pPr algn="ctr"/>
+            <a:r>
+              <a:rPr sz="1000" b="0">
+                <a:solidFill>
+                  <a:srgbClr val="5C6670"/>
+                </a:solidFill>
+                <a:latin typeface="맑은 고딕"/>
+              </a:rPr>
+              <a:t>48</a:t>
+            </a:r>
+          </a:p>
+        </p:txBody>
+      </p:sp>
+      <p:sp>
+        <p:nvSpPr>
+          <p:cNvPr id="62" name="Rectangle 61"/>
+          <p:cNvSpPr/>
+          <p:nvPr/>
+        </p:nvSpPr>
+        <p:spPr>
+          <a:xfrm>
+            <a:off x="4910328" y="4864608"/>
+            <a:ext cx="2240280" cy="365760"/>
+          </a:xfrm>
+          <a:prstGeom prst="rect">
+            <a:avLst/>
+          </a:prstGeom>
+          <a:solidFill>
+            <a:srgbClr val="EEF2F7"/>
+          </a:solidFill>
+          <a:ln w="7620">
+            <a:solidFill>
+              <a:srgbClr val="C4CFDB"/>
+            </a:solidFill>
+          </a:ln>
+          <a:effectLst/>
+        </p:spPr>
+        <p:style>
+          <a:lnRef idx="1">
+            <a:schemeClr val="accent1"/>
+          </a:lnRef>
+          <a:fillRef idx="3">
+            <a:schemeClr val="accent1"/>
+          </a:fillRef>
+          <a:effectRef idx="2">
+            <a:schemeClr val="accent1"/>
+          </a:effectRef>
+          <a:fontRef idx="minor">
+            <a:schemeClr val="lt1"/>
+          </a:fontRef>
+        </p:style>
+        <p:txBody>
+          <a:bodyPr rtlCol="0" anchor="ctr" wrap="square" lIns="73152" tIns="0" bIns="0"/>
+          <a:lstStyle/>
+          <a:p>
+            <a:pPr algn="ctr"/>
+            <a:r>
+              <a:rPr sz="1000" b="0">
+                <a:solidFill>
+                  <a:srgbClr val="B33A3A"/>
+                </a:solidFill>
+                <a:latin typeface="맑은 고딕"/>
+              </a:rPr>
+              <a:t>42 / 6</a:t>
+            </a:r>
+          </a:p>
+        </p:txBody>
+      </p:sp>
+      <p:sp>
+        <p:nvSpPr>
+          <p:cNvPr id="63" name="Rectangle 62"/>
+          <p:cNvSpPr/>
+          <p:nvPr/>
+        </p:nvSpPr>
+        <p:spPr>
+          <a:xfrm>
+            <a:off x="7150608" y="4864608"/>
+            <a:ext cx="1600200" cy="365760"/>
+          </a:xfrm>
+          <a:prstGeom prst="rect">
+            <a:avLst/>
+          </a:prstGeom>
+          <a:solidFill>
+            <a:srgbClr val="EEF2F7"/>
+          </a:solidFill>
+          <a:ln w="7620">
+            <a:solidFill>
+              <a:srgbClr val="C4CFDB"/>
+            </a:solidFill>
+          </a:ln>
+          <a:effectLst/>
+        </p:spPr>
+        <p:style>
+          <a:lnRef idx="1">
+            <a:schemeClr val="accent1"/>
+          </a:lnRef>
+          <a:fillRef idx="3">
+            <a:schemeClr val="accent1"/>
+          </a:fillRef>
+          <a:effectRef idx="2">
+            <a:schemeClr val="accent1"/>
+          </a:effectRef>
+          <a:fontRef idx="minor">
+            <a:schemeClr val="lt1"/>
+          </a:fontRef>
+        </p:style>
+        <p:txBody>
+          <a:bodyPr rtlCol="0" anchor="ctr" wrap="square" lIns="73152" tIns="0" bIns="0"/>
+          <a:lstStyle/>
+          <a:p>
+            <a:pPr algn="ctr"/>
+            <a:r>
+              <a:rPr sz="1000" b="0">
+                <a:solidFill>
+                  <a:srgbClr val="5C6670"/>
+                </a:solidFill>
+                <a:latin typeface="맑은 고딕"/>
+              </a:rPr>
+              <a:t>48</a:t>
+            </a:r>
+          </a:p>
+        </p:txBody>
+      </p:sp>
+      <p:sp>
+        <p:nvSpPr>
+          <p:cNvPr id="64" name="Rectangle 63"/>
+          <p:cNvSpPr/>
+          <p:nvPr/>
+        </p:nvSpPr>
+        <p:spPr>
+          <a:xfrm>
+            <a:off x="8750808" y="4864608"/>
+            <a:ext cx="2697480" cy="365760"/>
+          </a:xfrm>
+          <a:prstGeom prst="rect">
+            <a:avLst/>
+          </a:prstGeom>
+          <a:solidFill>
+            <a:srgbClr val="E2EEE7"/>
+          </a:solidFill>
+          <a:ln w="7620">
+            <a:solidFill>
+              <a:srgbClr val="C4CFDB"/>
+            </a:solidFill>
+          </a:ln>
+          <a:effectLst/>
+        </p:spPr>
+        <p:style>
+          <a:lnRef idx="1">
+            <a:schemeClr val="accent1"/>
+          </a:lnRef>
+          <a:fillRef idx="3">
+            <a:schemeClr val="accent1"/>
+          </a:fillRef>
+          <a:effectRef idx="2">
+            <a:schemeClr val="accent1"/>
+          </a:effectRef>
+          <a:fontRef idx="minor">
+            <a:schemeClr val="lt1"/>
+          </a:fontRef>
+        </p:style>
+        <p:txBody>
+          <a:bodyPr rtlCol="0" anchor="ctr" wrap="square" lIns="73152" tIns="0" bIns="0"/>
+          <a:lstStyle/>
+          <a:p>
+            <a:pPr algn="ctr"/>
+            <a:r>
+              <a:rPr sz="1000" b="1">
+                <a:solidFill>
+                  <a:srgbClr val="2E7D4F"/>
+                </a:solidFill>
+                <a:latin typeface="맑은 고딕"/>
+              </a:rPr>
+              <a:t>48 / 0 / 3/3</a:t>
+            </a:r>
+          </a:p>
+        </p:txBody>
+      </p:sp>
+      <p:sp>
+        <p:nvSpPr>
+          <p:cNvPr id="65" name="Rectangle 64"/>
+          <p:cNvSpPr/>
+          <p:nvPr/>
+        </p:nvSpPr>
+        <p:spPr>
+          <a:xfrm>
+            <a:off x="566928" y="5230368"/>
+            <a:ext cx="2148840" cy="365760"/>
+          </a:xfrm>
+          <a:prstGeom prst="rect">
+            <a:avLst/>
+          </a:prstGeom>
+          <a:solidFill>
+            <a:srgbClr val="FFFFFF"/>
+          </a:solidFill>
+          <a:ln w="7620">
+            <a:solidFill>
+              <a:srgbClr val="C4CFDB"/>
+            </a:solidFill>
+          </a:ln>
+          <a:effectLst/>
+        </p:spPr>
+        <p:style>
+          <a:lnRef idx="1">
+            <a:schemeClr val="accent1"/>
+          </a:lnRef>
+          <a:fillRef idx="3">
+            <a:schemeClr val="accent1"/>
+          </a:fillRef>
+          <a:effectRef idx="2">
+            <a:schemeClr val="accent1"/>
+          </a:effectRef>
+          <a:fontRef idx="minor">
+            <a:schemeClr val="lt1"/>
+          </a:fontRef>
+        </p:style>
+        <p:txBody>
+          <a:bodyPr rtlCol="0" anchor="ctr" wrap="square" lIns="73152" tIns="0" bIns="0"/>
+          <a:lstStyle/>
+          <a:p>
+            <a:pPr algn="l"/>
+            <a:r>
+              <a:rPr sz="1000" b="1">
+                <a:solidFill>
+                  <a:srgbClr val="1B3255"/>
+                </a:solidFill>
+                <a:latin typeface="맑은 고딕"/>
+              </a:rPr>
+              <a:t>BENCH09</a:t>
+            </a:r>
+          </a:p>
+        </p:txBody>
+      </p:sp>
+      <p:sp>
+        <p:nvSpPr>
+          <p:cNvPr id="66" name="Rectangle 65"/>
+          <p:cNvSpPr/>
+          <p:nvPr/>
+        </p:nvSpPr>
+        <p:spPr>
+          <a:xfrm>
+            <a:off x="2715768" y="5230368"/>
+            <a:ext cx="1417320" cy="365760"/>
+          </a:xfrm>
+          <a:prstGeom prst="rect">
+            <a:avLst/>
+          </a:prstGeom>
+          <a:solidFill>
+            <a:srgbClr val="FFFFFF"/>
+          </a:solidFill>
+          <a:ln w="7620">
+            <a:solidFill>
+              <a:srgbClr val="C4CFDB"/>
+            </a:solidFill>
+          </a:ln>
+          <a:effectLst/>
+        </p:spPr>
+        <p:style>
+          <a:lnRef idx="1">
+            <a:schemeClr val="accent1"/>
+          </a:lnRef>
+          <a:fillRef idx="3">
+            <a:schemeClr val="accent1"/>
+          </a:fillRef>
+          <a:effectRef idx="2">
+            <a:schemeClr val="accent1"/>
+          </a:effectRef>
+          <a:fontRef idx="minor">
+            <a:schemeClr val="lt1"/>
+          </a:fontRef>
+        </p:style>
+        <p:txBody>
+          <a:bodyPr rtlCol="0" anchor="ctr" wrap="square" lIns="73152" tIns="0" bIns="0"/>
+          <a:lstStyle/>
+          <a:p>
+            <a:pPr algn="ctr"/>
+            <a:r>
+              <a:rPr sz="1000" b="0">
+                <a:solidFill>
+                  <a:srgbClr val="5C6670"/>
+                </a:solidFill>
+                <a:latin typeface="맑은 고딕"/>
+              </a:rPr>
+              <a:t>5×5·ST60</a:t>
+            </a:r>
+          </a:p>
+        </p:txBody>
+      </p:sp>
+      <p:sp>
+        <p:nvSpPr>
+          <p:cNvPr id="67" name="Rectangle 66"/>
+          <p:cNvSpPr/>
+          <p:nvPr/>
+        </p:nvSpPr>
+        <p:spPr>
+          <a:xfrm>
+            <a:off x="4133088" y="5230368"/>
+            <a:ext cx="777240" cy="365760"/>
+          </a:xfrm>
+          <a:prstGeom prst="rect">
+            <a:avLst/>
+          </a:prstGeom>
+          <a:solidFill>
+            <a:srgbClr val="FFFFFF"/>
+          </a:solidFill>
+          <a:ln w="7620">
+            <a:solidFill>
+              <a:srgbClr val="C4CFDB"/>
+            </a:solidFill>
+          </a:ln>
+          <a:effectLst/>
+        </p:spPr>
+        <p:style>
+          <a:lnRef idx="1">
+            <a:schemeClr val="accent1"/>
+          </a:lnRef>
+          <a:fillRef idx="3">
+            <a:schemeClr val="accent1"/>
+          </a:fillRef>
+          <a:effectRef idx="2">
+            <a:schemeClr val="accent1"/>
+          </a:effectRef>
+          <a:fontRef idx="minor">
+            <a:schemeClr val="lt1"/>
+          </a:fontRef>
+        </p:style>
+        <p:txBody>
+          <a:bodyPr rtlCol="0" anchor="ctr" wrap="square" lIns="73152" tIns="0" bIns="0"/>
+          <a:lstStyle/>
+          <a:p>
+            <a:pPr algn="ctr"/>
+            <a:r>
+              <a:rPr sz="1000" b="0">
+                <a:solidFill>
+                  <a:srgbClr val="5C6670"/>
+                </a:solidFill>
+                <a:latin typeface="맑은 고딕"/>
+              </a:rPr>
+              <a:t>30</a:t>
+            </a:r>
+          </a:p>
+        </p:txBody>
+      </p:sp>
+      <p:sp>
+        <p:nvSpPr>
+          <p:cNvPr id="68" name="Rectangle 67"/>
+          <p:cNvSpPr/>
+          <p:nvPr/>
+        </p:nvSpPr>
+        <p:spPr>
+          <a:xfrm>
+            <a:off x="4910328" y="5230368"/>
+            <a:ext cx="2240280" cy="365760"/>
+          </a:xfrm>
+          <a:prstGeom prst="rect">
+            <a:avLst/>
+          </a:prstGeom>
+          <a:solidFill>
+            <a:srgbClr val="FFFFFF"/>
+          </a:solidFill>
+          <a:ln w="7620">
+            <a:solidFill>
+              <a:srgbClr val="C4CFDB"/>
+            </a:solidFill>
+          </a:ln>
+          <a:effectLst/>
+        </p:spPr>
+        <p:style>
+          <a:lnRef idx="1">
+            <a:schemeClr val="accent1"/>
+          </a:lnRef>
+          <a:fillRef idx="3">
+            <a:schemeClr val="accent1"/>
+          </a:fillRef>
+          <a:effectRef idx="2">
+            <a:schemeClr val="accent1"/>
+          </a:effectRef>
+          <a:fontRef idx="minor">
+            <a:schemeClr val="lt1"/>
+          </a:fontRef>
+        </p:style>
+        <p:txBody>
+          <a:bodyPr rtlCol="0" anchor="ctr" wrap="square" lIns="73152" tIns="0" bIns="0"/>
+          <a:lstStyle/>
+          <a:p>
+            <a:pPr algn="ctr"/>
+            <a:r>
+              <a:rPr sz="1000" b="0">
+                <a:solidFill>
+                  <a:srgbClr val="B33A3A"/>
+                </a:solidFill>
+                <a:latin typeface="맑은 고딕"/>
+              </a:rPr>
+              <a:t>15 / 20</a:t>
+            </a:r>
+          </a:p>
+        </p:txBody>
+      </p:sp>
+      <p:sp>
+        <p:nvSpPr>
+          <p:cNvPr id="69" name="Rectangle 68"/>
+          <p:cNvSpPr/>
+          <p:nvPr/>
+        </p:nvSpPr>
+        <p:spPr>
+          <a:xfrm>
+            <a:off x="7150608" y="5230368"/>
+            <a:ext cx="1600200" cy="365760"/>
+          </a:xfrm>
+          <a:prstGeom prst="rect">
+            <a:avLst/>
+          </a:prstGeom>
+          <a:solidFill>
+            <a:srgbClr val="FFFFFF"/>
+          </a:solidFill>
+          <a:ln w="7620">
+            <a:solidFill>
+              <a:srgbClr val="C4CFDB"/>
+            </a:solidFill>
+          </a:ln>
+          <a:effectLst/>
+        </p:spPr>
+        <p:style>
+          <a:lnRef idx="1">
+            <a:schemeClr val="accent1"/>
+          </a:lnRef>
+          <a:fillRef idx="3">
+            <a:schemeClr val="accent1"/>
+          </a:fillRef>
+          <a:effectRef idx="2">
+            <a:schemeClr val="accent1"/>
+          </a:effectRef>
+          <a:fontRef idx="minor">
+            <a:schemeClr val="lt1"/>
+          </a:fontRef>
+        </p:style>
+        <p:txBody>
+          <a:bodyPr rtlCol="0" anchor="ctr" wrap="square" lIns="73152" tIns="0" bIns="0"/>
+          <a:lstStyle/>
+          <a:p>
+            <a:pPr algn="ctr"/>
+            <a:r>
+              <a:rPr sz="1000" b="0">
+                <a:solidFill>
+                  <a:srgbClr val="5C6670"/>
+                </a:solidFill>
+                <a:latin typeface="맑은 고딕"/>
+              </a:rPr>
+              <a:t>30</a:t>
+            </a:r>
+          </a:p>
+        </p:txBody>
+      </p:sp>
+      <p:sp>
+        <p:nvSpPr>
+          <p:cNvPr id="70" name="Rectangle 69"/>
+          <p:cNvSpPr/>
+          <p:nvPr/>
+        </p:nvSpPr>
+        <p:spPr>
+          <a:xfrm>
+            <a:off x="8750808" y="5230368"/>
+            <a:ext cx="2697480" cy="365760"/>
+          </a:xfrm>
+          <a:prstGeom prst="rect">
+            <a:avLst/>
+          </a:prstGeom>
+          <a:solidFill>
+            <a:srgbClr val="E2EEE7"/>
+          </a:solidFill>
+          <a:ln w="7620">
+            <a:solidFill>
+              <a:srgbClr val="C4CFDB"/>
+            </a:solidFill>
+          </a:ln>
+          <a:effectLst/>
+        </p:spPr>
+        <p:style>
+          <a:lnRef idx="1">
+            <a:schemeClr val="accent1"/>
+          </a:lnRef>
+          <a:fillRef idx="3">
+            <a:schemeClr val="accent1"/>
+          </a:fillRef>
+          <a:effectRef idx="2">
+            <a:schemeClr val="accent1"/>
+          </a:effectRef>
+          <a:fontRef idx="minor">
+            <a:schemeClr val="lt1"/>
+          </a:fontRef>
+        </p:style>
+        <p:txBody>
+          <a:bodyPr rtlCol="0" anchor="ctr" wrap="square" lIns="73152" tIns="0" bIns="0"/>
+          <a:lstStyle/>
+          <a:p>
+            <a:pPr algn="ctr"/>
+            <a:r>
+              <a:rPr sz="1000" b="1">
+                <a:solidFill>
+                  <a:srgbClr val="2E7D4F"/>
+                </a:solidFill>
+                <a:latin typeface="맑은 고딕"/>
+              </a:rPr>
+              <a:t>30 / 0 / 5/5</a:t>
+            </a:r>
+          </a:p>
+        </p:txBody>
+      </p:sp>
+      <p:sp>
+        <p:nvSpPr>
+          <p:cNvPr id="71" name="Rectangle 70"/>
+          <p:cNvSpPr/>
+          <p:nvPr/>
+        </p:nvSpPr>
+        <p:spPr>
+          <a:xfrm>
+            <a:off x="566928" y="5596128"/>
+            <a:ext cx="2148840" cy="365760"/>
+          </a:xfrm>
+          <a:prstGeom prst="rect">
+            <a:avLst/>
+          </a:prstGeom>
+          <a:solidFill>
+            <a:srgbClr val="EEF2F7"/>
+          </a:solidFill>
+          <a:ln w="7620">
+            <a:solidFill>
+              <a:srgbClr val="C4CFDB"/>
+            </a:solidFill>
+          </a:ln>
+          <a:effectLst/>
+        </p:spPr>
+        <p:style>
+          <a:lnRef idx="1">
+            <a:schemeClr val="accent1"/>
+          </a:lnRef>
+          <a:fillRef idx="3">
+            <a:schemeClr val="accent1"/>
+          </a:fillRef>
+          <a:effectRef idx="2">
+            <a:schemeClr val="accent1"/>
+          </a:effectRef>
+          <a:fontRef idx="minor">
+            <a:schemeClr val="lt1"/>
+          </a:fontRef>
+        </p:style>
+        <p:txBody>
+          <a:bodyPr rtlCol="0" anchor="ctr" wrap="square" lIns="73152" tIns="0" bIns="0"/>
+          <a:lstStyle/>
+          <a:p>
+            <a:pPr algn="l"/>
+            <a:r>
+              <a:rPr sz="1000" b="1">
+                <a:solidFill>
+                  <a:srgbClr val="1B3255"/>
+                </a:solidFill>
+                <a:latin typeface="맑은 고딕"/>
+              </a:rPr>
+              <a:t>BENCH10</a:t>
+            </a:r>
+          </a:p>
+        </p:txBody>
+      </p:sp>
+      <p:sp>
+        <p:nvSpPr>
+          <p:cNvPr id="72" name="Rectangle 71"/>
+          <p:cNvSpPr/>
+          <p:nvPr/>
+        </p:nvSpPr>
+        <p:spPr>
+          <a:xfrm>
+            <a:off x="2715768" y="5596128"/>
+            <a:ext cx="1417320" cy="365760"/>
+          </a:xfrm>
+          <a:prstGeom prst="rect">
+            <a:avLst/>
+          </a:prstGeom>
+          <a:solidFill>
+            <a:srgbClr val="EEF2F7"/>
+          </a:solidFill>
+          <a:ln w="7620">
+            <a:solidFill>
+              <a:srgbClr val="C4CFDB"/>
+            </a:solidFill>
+          </a:ln>
+          <a:effectLst/>
+        </p:spPr>
+        <p:style>
+          <a:lnRef idx="1">
+            <a:schemeClr val="accent1"/>
+          </a:lnRef>
+          <a:fillRef idx="3">
+            <a:schemeClr val="accent1"/>
+          </a:fillRef>
+          <a:effectRef idx="2">
+            <a:schemeClr val="accent1"/>
+          </a:effectRef>
+          <a:fontRef idx="minor">
+            <a:schemeClr val="lt1"/>
+          </a:fontRef>
+        </p:style>
+        <p:txBody>
+          <a:bodyPr rtlCol="0" anchor="ctr" wrap="square" lIns="73152" tIns="0" bIns="0"/>
+          <a:lstStyle/>
+          <a:p>
+            <a:pPr algn="ctr"/>
+            <a:r>
+              <a:rPr sz="1000" b="0">
+                <a:solidFill>
+                  <a:srgbClr val="5C6670"/>
+                </a:solidFill>
+                <a:latin typeface="맑은 고딕"/>
+              </a:rPr>
+              <a:t>4×4·ST36</a:t>
+            </a:r>
+          </a:p>
+        </p:txBody>
+      </p:sp>
+      <p:sp>
+        <p:nvSpPr>
+          <p:cNvPr id="73" name="Rectangle 72"/>
+          <p:cNvSpPr/>
+          <p:nvPr/>
+        </p:nvSpPr>
+        <p:spPr>
+          <a:xfrm>
+            <a:off x="4133088" y="5596128"/>
+            <a:ext cx="777240" cy="365760"/>
+          </a:xfrm>
+          <a:prstGeom prst="rect">
+            <a:avLst/>
+          </a:prstGeom>
+          <a:solidFill>
+            <a:srgbClr val="EEF2F7"/>
+          </a:solidFill>
+          <a:ln w="7620">
+            <a:solidFill>
+              <a:srgbClr val="C4CFDB"/>
+            </a:solidFill>
+          </a:ln>
+          <a:effectLst/>
+        </p:spPr>
+        <p:style>
+          <a:lnRef idx="1">
+            <a:schemeClr val="accent1"/>
+          </a:lnRef>
+          <a:fillRef idx="3">
+            <a:schemeClr val="accent1"/>
+          </a:fillRef>
+          <a:effectRef idx="2">
+            <a:schemeClr val="accent1"/>
+          </a:effectRef>
+          <a:fontRef idx="minor">
+            <a:schemeClr val="lt1"/>
+          </a:fontRef>
+        </p:style>
+        <p:txBody>
+          <a:bodyPr rtlCol="0" anchor="ctr" wrap="square" lIns="73152" tIns="0" bIns="0"/>
+          <a:lstStyle/>
+          <a:p>
+            <a:pPr algn="ctr"/>
+            <a:r>
+              <a:rPr sz="1000" b="0">
+                <a:solidFill>
+                  <a:srgbClr val="5C6670"/>
+                </a:solidFill>
+                <a:latin typeface="맑은 고딕"/>
+              </a:rPr>
+              <a:t>40</a:t>
+            </a:r>
+          </a:p>
+        </p:txBody>
+      </p:sp>
+      <p:sp>
+        <p:nvSpPr>
+          <p:cNvPr id="74" name="Rectangle 73"/>
+          <p:cNvSpPr/>
+          <p:nvPr/>
+        </p:nvSpPr>
+        <p:spPr>
+          <a:xfrm>
+            <a:off x="4910328" y="5596128"/>
+            <a:ext cx="2240280" cy="365760"/>
+          </a:xfrm>
+          <a:prstGeom prst="rect">
+            <a:avLst/>
+          </a:prstGeom>
+          <a:solidFill>
+            <a:srgbClr val="EEF2F7"/>
+          </a:solidFill>
+          <a:ln w="7620">
+            <a:solidFill>
+              <a:srgbClr val="C4CFDB"/>
+            </a:solidFill>
+          </a:ln>
+          <a:effectLst/>
+        </p:spPr>
+        <p:style>
+          <a:lnRef idx="1">
+            <a:schemeClr val="accent1"/>
+          </a:lnRef>
+          <a:fillRef idx="3">
+            <a:schemeClr val="accent1"/>
+          </a:fillRef>
+          <a:effectRef idx="2">
+            <a:schemeClr val="accent1"/>
+          </a:effectRef>
+          <a:fontRef idx="minor">
+            <a:schemeClr val="lt1"/>
+          </a:fontRef>
+        </p:style>
+        <p:txBody>
+          <a:bodyPr rtlCol="0" anchor="ctr" wrap="square" lIns="73152" tIns="0" bIns="0"/>
+          <a:lstStyle/>
+          <a:p>
+            <a:pPr algn="ctr"/>
+            <a:r>
+              <a:rPr sz="1000" b="0">
+                <a:solidFill>
+                  <a:srgbClr val="B33A3A"/>
+                </a:solidFill>
+                <a:latin typeface="맑은 고딕"/>
+              </a:rPr>
+              <a:t>30 / 12</a:t>
+            </a:r>
+          </a:p>
+        </p:txBody>
+      </p:sp>
+      <p:sp>
+        <p:nvSpPr>
+          <p:cNvPr id="75" name="Rectangle 74"/>
+          <p:cNvSpPr/>
+          <p:nvPr/>
+        </p:nvSpPr>
+        <p:spPr>
+          <a:xfrm>
+            <a:off x="7150608" y="5596128"/>
+            <a:ext cx="1600200" cy="365760"/>
+          </a:xfrm>
+          <a:prstGeom prst="rect">
+            <a:avLst/>
+          </a:prstGeom>
+          <a:solidFill>
+            <a:srgbClr val="EEF2F7"/>
+          </a:solidFill>
+          <a:ln w="7620">
+            <a:solidFill>
+              <a:srgbClr val="C4CFDB"/>
+            </a:solidFill>
+          </a:ln>
+          <a:effectLst/>
+        </p:spPr>
+        <p:style>
+          <a:lnRef idx="1">
+            <a:schemeClr val="accent1"/>
+          </a:lnRef>
+          <a:fillRef idx="3">
+            <a:schemeClr val="accent1"/>
+          </a:fillRef>
+          <a:effectRef idx="2">
+            <a:schemeClr val="accent1"/>
+          </a:effectRef>
+          <a:fontRef idx="minor">
+            <a:schemeClr val="lt1"/>
+          </a:fontRef>
+        </p:style>
+        <p:txBody>
+          <a:bodyPr rtlCol="0" anchor="ctr" wrap="square" lIns="73152" tIns="0" bIns="0"/>
+          <a:lstStyle/>
+          <a:p>
+            <a:pPr algn="ctr"/>
+            <a:r>
+              <a:rPr sz="1000" b="0">
+                <a:solidFill>
+                  <a:srgbClr val="5C6670"/>
+                </a:solidFill>
+                <a:latin typeface="맑은 고딕"/>
+              </a:rPr>
+              <a:t>40</a:t>
+            </a:r>
+          </a:p>
+        </p:txBody>
+      </p:sp>
+      <p:sp>
+        <p:nvSpPr>
+          <p:cNvPr id="76" name="Rectangle 75"/>
+          <p:cNvSpPr/>
+          <p:nvPr/>
+        </p:nvSpPr>
+        <p:spPr>
+          <a:xfrm>
+            <a:off x="8750808" y="5596128"/>
+            <a:ext cx="2697480" cy="365760"/>
+          </a:xfrm>
+          <a:prstGeom prst="rect">
+            <a:avLst/>
+          </a:prstGeom>
+          <a:solidFill>
+            <a:srgbClr val="E2EEE7"/>
+          </a:solidFill>
+          <a:ln w="7620">
+            <a:solidFill>
+              <a:srgbClr val="C4CFDB"/>
+            </a:solidFill>
+          </a:ln>
+          <a:effectLst/>
+        </p:spPr>
+        <p:style>
+          <a:lnRef idx="1">
+            <a:schemeClr val="accent1"/>
+          </a:lnRef>
+          <a:fillRef idx="3">
+            <a:schemeClr val="accent1"/>
+          </a:fillRef>
+          <a:effectRef idx="2">
+            <a:schemeClr val="accent1"/>
+          </a:effectRef>
+          <a:fontRef idx="minor">
+            <a:schemeClr val="lt1"/>
+          </a:fontRef>
+        </p:style>
+        <p:txBody>
+          <a:bodyPr rtlCol="0" anchor="ctr" wrap="square" lIns="73152" tIns="0" bIns="0"/>
+          <a:lstStyle/>
+          <a:p>
+            <a:pPr algn="ctr"/>
+            <a:r>
+              <a:rPr sz="1000" b="1">
+                <a:solidFill>
+                  <a:srgbClr val="2E7D4F"/>
+                </a:solidFill>
+                <a:latin typeface="맑은 고딕"/>
+              </a:rPr>
+              <a:t>40 / 0 / 4/4</a:t>
+            </a:r>
+          </a:p>
+        </p:txBody>
+      </p:sp>
+      <p:sp>
+        <p:nvSpPr>
+          <p:cNvPr id="77" name="TextBox 76"/>
+          <p:cNvSpPr txBox="1"/>
+          <p:nvPr/>
+        </p:nvSpPr>
+        <p:spPr>
+          <a:xfrm>
+            <a:off x="566928" y="5897880"/>
+            <a:ext cx="11064240" cy="640080"/>
+          </a:xfrm>
+          <a:prstGeom prst="rect">
+            <a:avLst/>
+          </a:prstGeom>
+          <a:noFill/>
+        </p:spPr>
+        <p:txBody>
+          <a:bodyPr wrap="square" anchor="t" lIns="36576" rIns="36576" tIns="18288" bIns="18288">
+            <a:spAutoFit/>
+          </a:bodyPr>
+          <a:lstStyle/>
+          <a:p>
+            <a:pPr algn="l">
+              <a:lnSpc>
+                <a:spcPct val="110000"/>
+              </a:lnSpc>
+              <a:spcBef>
+                <a:spcPts val="0"/>
+              </a:spcBef>
+              <a:spcAft>
+                <a:spcPts val="400"/>
+              </a:spcAft>
+            </a:pPr>
+            <a:r>
+              <a:rPr sz="1150" b="0">
+                <a:solidFill>
+                  <a:srgbClr val="222A33"/>
+                </a:solidFill>
+                <a:latin typeface="맑은 고딕"/>
+              </a:rPr>
+              <a:t>Bulk-Fill는 별도 규칙 주입 없이 </a:t>
+            </a:r>
+            <a:r>
+              <a:rPr sz="1150" b="1">
+                <a:solidFill>
+                  <a:srgbClr val="2E7D4F"/>
+                </a:solidFill>
+                <a:latin typeface="맑은 고딕"/>
+              </a:rPr>
+              <a:t>10종 중 9종에서 이론 최적(전환 0·전량 생산)에 도달</a:t>
+            </a:r>
+            <a:r>
+              <a:rPr sz="1150" b="0">
+                <a:solidFill>
+                  <a:srgbClr val="5C6670"/>
+                </a:solidFill>
+                <a:latin typeface="맑은 고딕"/>
+              </a:rPr>
+              <a:t>했고, 나머지 1종(6×6)도 최고 수준에 근접했습니다. (녹색=최적, 주황=근접)</a:t>
+            </a:r>
+          </a:p>
+        </p:txBody>
+      </p:sp>
+    </p:spTree>
+  </p:cSld>
+  <p:clrMapOvr>
+    <a:masterClrMapping/>
+  </p:clrMapOvr>
+</p:sld>
+</file>
+
+<file path=ppt/slides/slide15.xml><?xml version="1.0" encoding="utf-8"?>
+<p:sld xmlns:a="http://schemas.openxmlformats.org/drawingml/2006/main" xmlns:p="http://schemas.openxmlformats.org/presentationml/2006/main" xmlns:r="http://schemas.openxmlformats.org/officeDocument/2006/relationships">
+  <p:cSld>
+    <p:spTree>
+      <p:nvGrpSpPr>
+        <p:cNvPr id="1" name=""/>
+        <p:cNvGrpSpPr/>
+        <p:nvPr/>
+      </p:nvGrpSpPr>
+      <p:grpSpPr/>
+      <p:sp>
+        <p:nvSpPr>
+          <p:cNvPr id="2" name="Rectangle 1"/>
+          <p:cNvSpPr/>
+          <p:nvPr/>
+        </p:nvSpPr>
+        <p:spPr>
+          <a:xfrm>
+            <a:off x="0" y="0"/>
+            <a:ext cx="12191695" cy="6858000"/>
+          </a:xfrm>
+          <a:prstGeom prst="rect">
+            <a:avLst/>
+          </a:prstGeom>
+          <a:solidFill>
+            <a:srgbClr val="FFFFFF"/>
+          </a:solidFill>
+          <a:ln>
+            <a:noFill/>
+          </a:ln>
+          <a:effectLst/>
+        </p:spPr>
+        <p:style>
+          <a:lnRef idx="1">
+            <a:schemeClr val="accent1"/>
+          </a:lnRef>
+          <a:fillRef idx="3">
+            <a:schemeClr val="accent1"/>
+          </a:fillRef>
+          <a:effectRef idx="2">
+            <a:schemeClr val="accent1"/>
+          </a:effectRef>
+          <a:fontRef idx="minor">
+            <a:schemeClr val="lt1"/>
+          </a:fontRef>
+        </p:style>
+        <p:txBody>
           <a:bodyPr rtlCol="0" anchor="ctr"/>
           <a:lstStyle/>
           <a:p>
@@ -12473,14 +16561,434 @@
       </p:sp>
       <p:sp>
         <p:nvSpPr>
-          <p:cNvPr id="11" name="TextBox 10"/>
+          <p:cNvPr id="3" name="Rectangle 2"/>
+          <p:cNvSpPr/>
+          <p:nvPr/>
+        </p:nvSpPr>
+        <p:spPr>
+          <a:xfrm>
+            <a:off x="0" y="0"/>
+            <a:ext cx="12191695" cy="1078992"/>
+          </a:xfrm>
+          <a:prstGeom prst="rect">
+            <a:avLst/>
+          </a:prstGeom>
+          <a:solidFill>
+            <a:srgbClr val="FFFFFF"/>
+          </a:solidFill>
+          <a:ln>
+            <a:noFill/>
+          </a:ln>
+          <a:effectLst/>
+        </p:spPr>
+        <p:style>
+          <a:lnRef idx="1">
+            <a:schemeClr val="accent1"/>
+          </a:lnRef>
+          <a:fillRef idx="3">
+            <a:schemeClr val="accent1"/>
+          </a:fillRef>
+          <a:effectRef idx="2">
+            <a:schemeClr val="accent1"/>
+          </a:effectRef>
+          <a:fontRef idx="minor">
+            <a:schemeClr val="lt1"/>
+          </a:fontRef>
+        </p:style>
+        <p:txBody>
+          <a:bodyPr rtlCol="0" anchor="ctr"/>
+          <a:lstStyle/>
+          <a:p>
+            <a:pPr algn="ctr"/>
+          </a:p>
+        </p:txBody>
+      </p:sp>
+      <p:sp>
+        <p:nvSpPr>
+          <p:cNvPr id="4" name="Rectangle 3"/>
+          <p:cNvSpPr/>
+          <p:nvPr/>
+        </p:nvSpPr>
+        <p:spPr>
+          <a:xfrm>
+            <a:off x="502920" y="310896"/>
+            <a:ext cx="82296" cy="475488"/>
+          </a:xfrm>
+          <a:prstGeom prst="rect">
+            <a:avLst/>
+          </a:prstGeom>
+          <a:solidFill>
+            <a:srgbClr val="2E6FB0"/>
+          </a:solidFill>
+          <a:ln>
+            <a:noFill/>
+          </a:ln>
+          <a:effectLst/>
+        </p:spPr>
+        <p:style>
+          <a:lnRef idx="1">
+            <a:schemeClr val="accent1"/>
+          </a:lnRef>
+          <a:fillRef idx="3">
+            <a:schemeClr val="accent1"/>
+          </a:fillRef>
+          <a:effectRef idx="2">
+            <a:schemeClr val="accent1"/>
+          </a:effectRef>
+          <a:fontRef idx="minor">
+            <a:schemeClr val="lt1"/>
+          </a:fontRef>
+        </p:style>
+        <p:txBody>
+          <a:bodyPr rtlCol="0" anchor="ctr"/>
+          <a:lstStyle/>
+          <a:p>
+            <a:pPr algn="ctr"/>
+          </a:p>
+        </p:txBody>
+      </p:sp>
+      <p:sp>
+        <p:nvSpPr>
+          <p:cNvPr id="5" name="TextBox 4"/>
           <p:cNvSpPr txBox="1"/>
           <p:nvPr/>
         </p:nvSpPr>
         <p:spPr>
           <a:xfrm>
-            <a:off x="822960" y="1417320"/>
-            <a:ext cx="5166360" cy="457200"/>
+            <a:off x="713232" y="274320"/>
+            <a:ext cx="10058400" cy="310896"/>
+          </a:xfrm>
+          <a:prstGeom prst="rect">
+            <a:avLst/>
+          </a:prstGeom>
+          <a:noFill/>
+        </p:spPr>
+        <p:txBody>
+          <a:bodyPr wrap="square" anchor="t" lIns="36576" rIns="36576" tIns="18288" bIns="18288">
+            <a:spAutoFit/>
+          </a:bodyPr>
+          <a:lstStyle/>
+          <a:p>
+            <a:pPr algn="l">
+              <a:lnSpc>
+                <a:spcPct val="100000"/>
+              </a:lnSpc>
+              <a:spcBef>
+                <a:spcPts val="0"/>
+              </a:spcBef>
+              <a:spcAft>
+                <a:spcPts val="400"/>
+              </a:spcAft>
+            </a:pPr>
+            <a:r>
+              <a:rPr sz="1150" b="1">
+                <a:solidFill>
+                  <a:srgbClr val="2E6FB0"/>
+                </a:solidFill>
+                <a:latin typeface="맑은 고딕"/>
+              </a:rPr>
+              <a:t>04  알고리즘 KPI 비교 및 효과성 검증</a:t>
+            </a:r>
+          </a:p>
+        </p:txBody>
+      </p:sp>
+      <p:sp>
+        <p:nvSpPr>
+          <p:cNvPr id="6" name="TextBox 5"/>
+          <p:cNvSpPr txBox="1"/>
+          <p:nvPr/>
+        </p:nvSpPr>
+        <p:spPr>
+          <a:xfrm>
+            <a:off x="704088" y="475488"/>
+            <a:ext cx="10607040" cy="475488"/>
+          </a:xfrm>
+          <a:prstGeom prst="rect">
+            <a:avLst/>
+          </a:prstGeom>
+          <a:noFill/>
+        </p:spPr>
+        <p:txBody>
+          <a:bodyPr wrap="square" anchor="t" lIns="36576" rIns="36576" tIns="18288" bIns="18288">
+            <a:spAutoFit/>
+          </a:bodyPr>
+          <a:lstStyle/>
+          <a:p>
+            <a:pPr algn="l">
+              <a:lnSpc>
+                <a:spcPct val="100000"/>
+              </a:lnSpc>
+              <a:spcBef>
+                <a:spcPts val="0"/>
+              </a:spcBef>
+              <a:spcAft>
+                <a:spcPts val="400"/>
+              </a:spcAft>
+            </a:pPr>
+            <a:r>
+              <a:rPr sz="2300" b="1">
+                <a:solidFill>
+                  <a:srgbClr val="1B3255"/>
+                </a:solidFill>
+                <a:latin typeface="맑은 고딕"/>
+              </a:rPr>
+              <a:t>10종 데이터셋 종합 — 효과성 집계</a:t>
+            </a:r>
+          </a:p>
+        </p:txBody>
+      </p:sp>
+      <p:sp>
+        <p:nvSpPr>
+          <p:cNvPr id="7" name="Rectangle 6"/>
+          <p:cNvSpPr/>
+          <p:nvPr/>
+        </p:nvSpPr>
+        <p:spPr>
+          <a:xfrm>
+            <a:off x="0" y="1069848"/>
+            <a:ext cx="12191695" cy="20116"/>
+          </a:xfrm>
+          <a:prstGeom prst="rect">
+            <a:avLst/>
+          </a:prstGeom>
+          <a:solidFill>
+            <a:srgbClr val="DDE6F0"/>
+          </a:solidFill>
+          <a:ln>
+            <a:noFill/>
+          </a:ln>
+          <a:effectLst/>
+        </p:spPr>
+        <p:style>
+          <a:lnRef idx="1">
+            <a:schemeClr val="accent1"/>
+          </a:lnRef>
+          <a:fillRef idx="3">
+            <a:schemeClr val="accent1"/>
+          </a:fillRef>
+          <a:effectRef idx="2">
+            <a:schemeClr val="accent1"/>
+          </a:effectRef>
+          <a:fontRef idx="minor">
+            <a:schemeClr val="lt1"/>
+          </a:fontRef>
+        </p:style>
+        <p:txBody>
+          <a:bodyPr rtlCol="0" anchor="ctr"/>
+          <a:lstStyle/>
+          <a:p>
+            <a:pPr algn="ctr"/>
+          </a:p>
+        </p:txBody>
+      </p:sp>
+      <p:sp>
+        <p:nvSpPr>
+          <p:cNvPr id="8" name="TextBox 7"/>
+          <p:cNvSpPr txBox="1"/>
+          <p:nvPr/>
+        </p:nvSpPr>
+        <p:spPr>
+          <a:xfrm>
+            <a:off x="502920" y="6455664"/>
+            <a:ext cx="8229600" cy="274320"/>
+          </a:xfrm>
+          <a:prstGeom prst="rect">
+            <a:avLst/>
+          </a:prstGeom>
+          <a:noFill/>
+        </p:spPr>
+        <p:txBody>
+          <a:bodyPr wrap="square" anchor="t" lIns="36576" rIns="36576" tIns="18288" bIns="18288">
+            <a:spAutoFit/>
+          </a:bodyPr>
+          <a:lstStyle/>
+          <a:p>
+            <a:pPr algn="l">
+              <a:lnSpc>
+                <a:spcPct val="100000"/>
+              </a:lnSpc>
+              <a:spcBef>
+                <a:spcPts val="0"/>
+              </a:spcBef>
+              <a:spcAft>
+                <a:spcPts val="400"/>
+              </a:spcAft>
+            </a:pPr>
+            <a:r>
+              <a:rPr sz="900" b="0">
+                <a:solidFill>
+                  <a:srgbClr val="5C6670"/>
+                </a:solidFill>
+                <a:latin typeface="맑은 고딕"/>
+              </a:rPr>
+              <a:t>Bulk-Fill 강화학습 기반 설비 스케줄링</a:t>
+            </a:r>
+          </a:p>
+        </p:txBody>
+      </p:sp>
+      <p:sp>
+        <p:nvSpPr>
+          <p:cNvPr id="9" name="TextBox 8"/>
+          <p:cNvSpPr txBox="1"/>
+          <p:nvPr/>
+        </p:nvSpPr>
+        <p:spPr>
+          <a:xfrm>
+            <a:off x="10515600" y="6455664"/>
+            <a:ext cx="1170432" cy="274320"/>
+          </a:xfrm>
+          <a:prstGeom prst="rect">
+            <a:avLst/>
+          </a:prstGeom>
+          <a:noFill/>
+        </p:spPr>
+        <p:txBody>
+          <a:bodyPr wrap="square" anchor="t" lIns="36576" rIns="36576" tIns="18288" bIns="18288">
+            <a:spAutoFit/>
+          </a:bodyPr>
+          <a:lstStyle/>
+          <a:p>
+            <a:pPr algn="r">
+              <a:lnSpc>
+                <a:spcPct val="100000"/>
+              </a:lnSpc>
+              <a:spcBef>
+                <a:spcPts val="0"/>
+              </a:spcBef>
+              <a:spcAft>
+                <a:spcPts val="400"/>
+              </a:spcAft>
+            </a:pPr>
+            <a:r>
+              <a:rPr sz="900" b="1">
+                <a:solidFill>
+                  <a:srgbClr val="5C6670"/>
+                </a:solidFill>
+                <a:latin typeface="맑은 고딕"/>
+              </a:rPr>
+              <a:t>15</a:t>
+            </a:r>
+          </a:p>
+        </p:txBody>
+      </p:sp>
+      <p:graphicFrame>
+        <p:nvGraphicFramePr>
+          <p:cNvPr id="10" name="Chart 9"/>
+          <p:cNvGraphicFramePr>
+            <a:graphicFrameLocks noGrp="1"/>
+          </p:cNvGraphicFramePr>
+          <p:nvPr/>
+        </p:nvGraphicFramePr>
+        <p:xfrm>
+          <a:off x="640080" y="1417320"/>
+          <a:ext cx="5943600" cy="3246120"/>
+        </p:xfrm>
+        <a:graphic>
+          <a:graphicData uri="http://schemas.openxmlformats.org/drawingml/2006/chart">
+            <c:chart xmlns:c="http://schemas.openxmlformats.org/drawingml/2006/chart" r:id="rId2"/>
+          </a:graphicData>
+        </a:graphic>
+      </p:graphicFrame>
+      <p:sp>
+        <p:nvSpPr>
+          <p:cNvPr id="11" name="Rectangle 10"/>
+          <p:cNvSpPr/>
+          <p:nvPr/>
+        </p:nvSpPr>
+        <p:spPr>
+          <a:xfrm>
+            <a:off x="6858000" y="1417320"/>
+            <a:ext cx="4617720" cy="3246120"/>
+          </a:xfrm>
+          <a:prstGeom prst="rect">
+            <a:avLst/>
+          </a:prstGeom>
+          <a:solidFill>
+            <a:srgbClr val="EEF2F7"/>
+          </a:solidFill>
+          <a:ln w="12700">
+            <a:solidFill>
+              <a:srgbClr val="C4CFDB"/>
+            </a:solidFill>
+          </a:ln>
+          <a:effectLst/>
+        </p:spPr>
+        <p:style>
+          <a:lnRef idx="1">
+            <a:schemeClr val="accent1"/>
+          </a:lnRef>
+          <a:fillRef idx="3">
+            <a:schemeClr val="accent1"/>
+          </a:fillRef>
+          <a:effectRef idx="2">
+            <a:schemeClr val="accent1"/>
+          </a:effectRef>
+          <a:fontRef idx="minor">
+            <a:schemeClr val="lt1"/>
+          </a:fontRef>
+        </p:style>
+        <p:txBody>
+          <a:bodyPr rtlCol="0" anchor="ctr"/>
+          <a:lstStyle/>
+          <a:p>
+            <a:pPr algn="ctr"/>
+          </a:p>
+        </p:txBody>
+      </p:sp>
+      <p:sp>
+        <p:nvSpPr>
+          <p:cNvPr id="12" name="Rectangle 11"/>
+          <p:cNvSpPr/>
+          <p:nvPr/>
+        </p:nvSpPr>
+        <p:spPr>
+          <a:xfrm>
+            <a:off x="6858000" y="1417320"/>
+            <a:ext cx="4617720" cy="457200"/>
+          </a:xfrm>
+          <a:prstGeom prst="rect">
+            <a:avLst/>
+          </a:prstGeom>
+          <a:solidFill>
+            <a:srgbClr val="1B3255"/>
+          </a:solidFill>
+          <a:ln>
+            <a:noFill/>
+          </a:ln>
+          <a:effectLst/>
+        </p:spPr>
+        <p:style>
+          <a:lnRef idx="1">
+            <a:schemeClr val="accent1"/>
+          </a:lnRef>
+          <a:fillRef idx="3">
+            <a:schemeClr val="accent1"/>
+          </a:fillRef>
+          <a:effectRef idx="2">
+            <a:schemeClr val="accent1"/>
+          </a:effectRef>
+          <a:fontRef idx="minor">
+            <a:schemeClr val="lt1"/>
+          </a:fontRef>
+        </p:style>
+        <p:txBody>
+          <a:bodyPr rtlCol="0" anchor="ctr"/>
+          <a:lstStyle/>
+          <a:p>
+            <a:pPr algn="ctr"/>
+          </a:p>
+        </p:txBody>
+      </p:sp>
+      <p:sp>
+        <p:nvSpPr>
+          <p:cNvPr id="13" name="TextBox 12"/>
+          <p:cNvSpPr txBox="1"/>
+          <p:nvPr/>
+        </p:nvSpPr>
+        <p:spPr>
+          <a:xfrm>
+            <a:off x="6858000" y="1417320"/>
+            <a:ext cx="4617720" cy="457200"/>
           </a:xfrm>
           <a:prstGeom prst="rect">
             <a:avLst/>
@@ -12505,71 +17013,27 @@
               </a:spcAft>
             </a:pPr>
             <a:r>
-              <a:rPr sz="1350" b="1">
+              <a:rPr sz="1300" b="1">
                 <a:solidFill>
                   <a:srgbClr val="FFFFFF"/>
                 </a:solidFill>
                 <a:latin typeface="맑은 고딕"/>
               </a:rPr>
-              <a:t>핵심 성과</a:t>
-            </a:r>
-          </a:p>
-        </p:txBody>
-      </p:sp>
-      <p:sp>
-        <p:nvSpPr>
-          <p:cNvPr id="12" name="Rectangle 11"/>
-          <p:cNvSpPr/>
-          <p:nvPr/>
-        </p:nvSpPr>
-        <p:spPr>
-          <a:xfrm>
-            <a:off x="6172200" y="1417320"/>
-            <a:ext cx="5166360" cy="457200"/>
-          </a:xfrm>
-          <a:prstGeom prst="rect">
-            <a:avLst/>
-          </a:prstGeom>
-          <a:solidFill>
-            <a:srgbClr val="2E6FB0"/>
-          </a:solidFill>
-          <a:ln>
-            <a:noFill/>
-          </a:ln>
-          <a:effectLst/>
-        </p:spPr>
-        <p:style>
-          <a:lnRef idx="1">
-            <a:schemeClr val="accent1"/>
-          </a:lnRef>
-          <a:fillRef idx="3">
-            <a:schemeClr val="accent1"/>
-          </a:fillRef>
-          <a:effectRef idx="2">
-            <a:schemeClr val="accent1"/>
-          </a:effectRef>
-          <a:fontRef idx="minor">
-            <a:schemeClr val="lt1"/>
-          </a:fontRef>
-        </p:style>
-        <p:txBody>
-          <a:bodyPr rtlCol="0" anchor="ctr"/>
-          <a:lstStyle/>
-          <a:p>
-            <a:pPr algn="ctr"/>
-          </a:p>
-        </p:txBody>
-      </p:sp>
-      <p:sp>
-        <p:nvSpPr>
-          <p:cNvPr id="13" name="TextBox 12"/>
+              <a:t>종합 집계 (10종 합산)</a:t>
+            </a:r>
+          </a:p>
+        </p:txBody>
+      </p:sp>
+      <p:sp>
+        <p:nvSpPr>
+          <p:cNvPr id="14" name="TextBox 13"/>
           <p:cNvSpPr txBox="1"/>
           <p:nvPr/>
         </p:nvSpPr>
         <p:spPr>
           <a:xfrm>
-            <a:off x="6172200" y="1417320"/>
-            <a:ext cx="5166360" cy="457200"/>
+            <a:off x="7040880" y="1993392"/>
+            <a:ext cx="1828800" cy="274320"/>
           </a:xfrm>
           <a:prstGeom prst="rect">
             <a:avLst/>
@@ -12577,7 +17041,52 @@
           <a:noFill/>
         </p:spPr>
         <p:txBody>
-          <a:bodyPr wrap="square" anchor="ctr" lIns="36576" rIns="36576" tIns="18288" bIns="18288">
+          <a:bodyPr wrap="square" anchor="t" lIns="36576" rIns="36576" tIns="18288" bIns="18288">
+            <a:spAutoFit/>
+          </a:bodyPr>
+          <a:lstStyle/>
+          <a:p>
+            <a:pPr algn="l">
+              <a:lnSpc>
+                <a:spcPct val="100000"/>
+              </a:lnSpc>
+              <a:spcBef>
+                <a:spcPts val="0"/>
+              </a:spcBef>
+              <a:spcAft>
+                <a:spcPts val="400"/>
+              </a:spcAft>
+            </a:pPr>
+            <a:r>
+              <a:rPr sz="1000" b="1">
+                <a:solidFill>
+                  <a:srgbClr val="2E6FB0"/>
+                </a:solidFill>
+                <a:latin typeface="맑은 고딕"/>
+              </a:rPr>
+              <a:t>지표</a:t>
+            </a:r>
+          </a:p>
+        </p:txBody>
+      </p:sp>
+      <p:sp>
+        <p:nvSpPr>
+          <p:cNvPr id="15" name="TextBox 14"/>
+          <p:cNvSpPr txBox="1"/>
+          <p:nvPr/>
+        </p:nvSpPr>
+        <p:spPr>
+          <a:xfrm>
+            <a:off x="8823960" y="1993392"/>
+            <a:ext cx="914400" cy="274320"/>
+          </a:xfrm>
+          <a:prstGeom prst="rect">
+            <a:avLst/>
+          </a:prstGeom>
+          <a:noFill/>
+        </p:spPr>
+        <p:txBody>
+          <a:bodyPr wrap="square" anchor="t" lIns="36576" rIns="36576" tIns="18288" bIns="18288">
             <a:spAutoFit/>
           </a:bodyPr>
           <a:lstStyle/>
@@ -12594,104 +17103,14 @@
               </a:spcAft>
             </a:pPr>
             <a:r>
-              <a:rPr sz="1350" b="1">
-                <a:solidFill>
-                  <a:srgbClr val="FFFFFF"/>
-                </a:solidFill>
-                <a:latin typeface="맑은 고딕"/>
-              </a:rPr>
-              <a:t>기대 효과 및 향후 과제</a:t>
-            </a:r>
-          </a:p>
-        </p:txBody>
-      </p:sp>
-      <p:sp>
-        <p:nvSpPr>
-          <p:cNvPr id="14" name="Rectangle 13"/>
-          <p:cNvSpPr/>
-          <p:nvPr/>
-        </p:nvSpPr>
-        <p:spPr>
-          <a:xfrm>
-            <a:off x="822960" y="2057400"/>
-            <a:ext cx="5166360" cy="1078992"/>
-          </a:xfrm>
-          <a:prstGeom prst="rect">
-            <a:avLst/>
-          </a:prstGeom>
-          <a:solidFill>
-            <a:srgbClr val="EEF2F7"/>
-          </a:solidFill>
-          <a:ln w="12700">
-            <a:solidFill>
-              <a:srgbClr val="C4CFDB"/>
-            </a:solidFill>
-          </a:ln>
-          <a:effectLst/>
-        </p:spPr>
-        <p:style>
-          <a:lnRef idx="1">
-            <a:schemeClr val="accent1"/>
-          </a:lnRef>
-          <a:fillRef idx="3">
-            <a:schemeClr val="accent1"/>
-          </a:fillRef>
-          <a:effectRef idx="2">
-            <a:schemeClr val="accent1"/>
-          </a:effectRef>
-          <a:fontRef idx="minor">
-            <a:schemeClr val="lt1"/>
-          </a:fontRef>
-        </p:style>
-        <p:txBody>
-          <a:bodyPr rtlCol="0" anchor="ctr"/>
-          <a:lstStyle/>
-          <a:p>
-            <a:pPr algn="ctr"/>
-          </a:p>
-        </p:txBody>
-      </p:sp>
-      <p:sp>
-        <p:nvSpPr>
-          <p:cNvPr id="15" name="Rectangle 14"/>
-          <p:cNvSpPr/>
-          <p:nvPr/>
-        </p:nvSpPr>
-        <p:spPr>
-          <a:xfrm>
-            <a:off x="822960" y="2057400"/>
-            <a:ext cx="73152" cy="1078992"/>
-          </a:xfrm>
-          <a:prstGeom prst="rect">
-            <a:avLst/>
-          </a:prstGeom>
-          <a:solidFill>
-            <a:srgbClr val="2E6FB0"/>
-          </a:solidFill>
-          <a:ln>
-            <a:noFill/>
-          </a:ln>
-          <a:effectLst/>
-        </p:spPr>
-        <p:style>
-          <a:lnRef idx="1">
-            <a:schemeClr val="accent1"/>
-          </a:lnRef>
-          <a:fillRef idx="3">
-            <a:schemeClr val="accent1"/>
-          </a:fillRef>
-          <a:effectRef idx="2">
-            <a:schemeClr val="accent1"/>
-          </a:effectRef>
-          <a:fontRef idx="minor">
-            <a:schemeClr val="lt1"/>
-          </a:fontRef>
-        </p:style>
-        <p:txBody>
-          <a:bodyPr rtlCol="0" anchor="ctr"/>
-          <a:lstStyle/>
-          <a:p>
-            <a:pPr algn="ctr"/>
+              <a:rPr sz="1000" b="1">
+                <a:solidFill>
+                  <a:srgbClr val="2E6FB0"/>
+                </a:solidFill>
+                <a:latin typeface="맑은 고딕"/>
+              </a:rPr>
+              <a:t>Earliest</a:t>
+            </a:r>
           </a:p>
         </p:txBody>
       </p:sp>
@@ -12703,8 +17122,98 @@
         </p:nvSpPr>
         <p:spPr>
           <a:xfrm>
-            <a:off x="1051560" y="2203704"/>
-            <a:ext cx="4846320" cy="365760"/>
+            <a:off x="9710928" y="1993392"/>
+            <a:ext cx="960120" cy="274320"/>
+          </a:xfrm>
+          <a:prstGeom prst="rect">
+            <a:avLst/>
+          </a:prstGeom>
+          <a:noFill/>
+        </p:spPr>
+        <p:txBody>
+          <a:bodyPr wrap="square" anchor="t" lIns="36576" rIns="36576" tIns="18288" bIns="18288">
+            <a:spAutoFit/>
+          </a:bodyPr>
+          <a:lstStyle/>
+          <a:p>
+            <a:pPr algn="ctr">
+              <a:lnSpc>
+                <a:spcPct val="100000"/>
+              </a:lnSpc>
+              <a:spcBef>
+                <a:spcPts val="0"/>
+              </a:spcBef>
+              <a:spcAft>
+                <a:spcPts val="400"/>
+              </a:spcAft>
+            </a:pPr>
+            <a:r>
+              <a:rPr sz="1000" b="1">
+                <a:solidFill>
+                  <a:srgbClr val="2E6FB0"/>
+                </a:solidFill>
+                <a:latin typeface="맑은 고딕"/>
+              </a:rPr>
+              <a:t>Bulk-Fill</a:t>
+            </a:r>
+          </a:p>
+        </p:txBody>
+      </p:sp>
+      <p:sp>
+        <p:nvSpPr>
+          <p:cNvPr id="17" name="TextBox 16"/>
+          <p:cNvSpPr txBox="1"/>
+          <p:nvPr/>
+        </p:nvSpPr>
+        <p:spPr>
+          <a:xfrm>
+            <a:off x="10625328" y="1993392"/>
+            <a:ext cx="777240" cy="274320"/>
+          </a:xfrm>
+          <a:prstGeom prst="rect">
+            <a:avLst/>
+          </a:prstGeom>
+          <a:noFill/>
+        </p:spPr>
+        <p:txBody>
+          <a:bodyPr wrap="square" anchor="t" lIns="36576" rIns="36576" tIns="18288" bIns="18288">
+            <a:spAutoFit/>
+          </a:bodyPr>
+          <a:lstStyle/>
+          <a:p>
+            <a:pPr algn="ctr">
+              <a:lnSpc>
+                <a:spcPct val="100000"/>
+              </a:lnSpc>
+              <a:spcBef>
+                <a:spcPts val="0"/>
+              </a:spcBef>
+              <a:spcAft>
+                <a:spcPts val="400"/>
+              </a:spcAft>
+            </a:pPr>
+            <a:r>
+              <a:rPr sz="1000" b="1">
+                <a:solidFill>
+                  <a:srgbClr val="2E6FB0"/>
+                </a:solidFill>
+                <a:latin typeface="맑은 고딕"/>
+              </a:rPr>
+              <a:t>Min-Prog</a:t>
+            </a:r>
+          </a:p>
+        </p:txBody>
+      </p:sp>
+      <p:sp>
+        <p:nvSpPr>
+          <p:cNvPr id="18" name="TextBox 17"/>
+          <p:cNvSpPr txBox="1"/>
+          <p:nvPr/>
+        </p:nvSpPr>
+        <p:spPr>
+          <a:xfrm>
+            <a:off x="7040880" y="2286000"/>
+            <a:ext cx="1828800" cy="310896"/>
           </a:xfrm>
           <a:prstGeom prst="rect">
             <a:avLst/>
@@ -12729,6 +17238,1745 @@
               </a:spcAft>
             </a:pPr>
             <a:r>
+              <a:rPr sz="1100" b="1">
+                <a:solidFill>
+                  <a:srgbClr val="1B3255"/>
+                </a:solidFill>
+                <a:latin typeface="맑은 고딕"/>
+              </a:rPr>
+              <a:t>총 생산률</a:t>
+            </a:r>
+          </a:p>
+        </p:txBody>
+      </p:sp>
+      <p:sp>
+        <p:nvSpPr>
+          <p:cNvPr id="19" name="TextBox 18"/>
+          <p:cNvSpPr txBox="1"/>
+          <p:nvPr/>
+        </p:nvSpPr>
+        <p:spPr>
+          <a:xfrm>
+            <a:off x="8686800" y="2286000"/>
+            <a:ext cx="960120" cy="310896"/>
+          </a:xfrm>
+          <a:prstGeom prst="rect">
+            <a:avLst/>
+          </a:prstGeom>
+          <a:noFill/>
+        </p:spPr>
+        <p:txBody>
+          <a:bodyPr wrap="square" anchor="t" lIns="36576" rIns="36576" tIns="18288" bIns="18288">
+            <a:spAutoFit/>
+          </a:bodyPr>
+          <a:lstStyle/>
+          <a:p>
+            <a:pPr algn="ctr">
+              <a:lnSpc>
+                <a:spcPct val="100000"/>
+              </a:lnSpc>
+              <a:spcBef>
+                <a:spcPts val="0"/>
+              </a:spcBef>
+              <a:spcAft>
+                <a:spcPts val="400"/>
+              </a:spcAft>
+            </a:pPr>
+            <a:r>
+              <a:rPr sz="1100" b="0">
+                <a:solidFill>
+                  <a:srgbClr val="B33A3A"/>
+                </a:solidFill>
+                <a:latin typeface="맑은 고딕"/>
+              </a:rPr>
+              <a:t>73%</a:t>
+            </a:r>
+          </a:p>
+        </p:txBody>
+      </p:sp>
+      <p:sp>
+        <p:nvSpPr>
+          <p:cNvPr id="20" name="TextBox 19"/>
+          <p:cNvSpPr txBox="1"/>
+          <p:nvPr/>
+        </p:nvSpPr>
+        <p:spPr>
+          <a:xfrm>
+            <a:off x="9646920" y="2286000"/>
+            <a:ext cx="1005840" cy="310896"/>
+          </a:xfrm>
+          <a:prstGeom prst="rect">
+            <a:avLst/>
+          </a:prstGeom>
+          <a:noFill/>
+        </p:spPr>
+        <p:txBody>
+          <a:bodyPr wrap="square" anchor="t" lIns="36576" rIns="36576" tIns="18288" bIns="18288">
+            <a:spAutoFit/>
+          </a:bodyPr>
+          <a:lstStyle/>
+          <a:p>
+            <a:pPr algn="ctr">
+              <a:lnSpc>
+                <a:spcPct val="100000"/>
+              </a:lnSpc>
+              <a:spcBef>
+                <a:spcPts val="0"/>
+              </a:spcBef>
+              <a:spcAft>
+                <a:spcPts val="400"/>
+              </a:spcAft>
+            </a:pPr>
+            <a:r>
+              <a:rPr sz="1200" b="1">
+                <a:solidFill>
+                  <a:srgbClr val="2E7D4F"/>
+                </a:solidFill>
+                <a:latin typeface="맑은 고딕"/>
+              </a:rPr>
+              <a:t>99%</a:t>
+            </a:r>
+          </a:p>
+        </p:txBody>
+      </p:sp>
+      <p:sp>
+        <p:nvSpPr>
+          <p:cNvPr id="21" name="TextBox 20"/>
+          <p:cNvSpPr txBox="1"/>
+          <p:nvPr/>
+        </p:nvSpPr>
+        <p:spPr>
+          <a:xfrm>
+            <a:off x="10625328" y="2286000"/>
+            <a:ext cx="777240" cy="310896"/>
+          </a:xfrm>
+          <a:prstGeom prst="rect">
+            <a:avLst/>
+          </a:prstGeom>
+          <a:noFill/>
+        </p:spPr>
+        <p:txBody>
+          <a:bodyPr wrap="square" anchor="t" lIns="36576" rIns="36576" tIns="18288" bIns="18288">
+            <a:spAutoFit/>
+          </a:bodyPr>
+          <a:lstStyle/>
+          <a:p>
+            <a:pPr algn="ctr">
+              <a:lnSpc>
+                <a:spcPct val="100000"/>
+              </a:lnSpc>
+              <a:spcBef>
+                <a:spcPts val="0"/>
+              </a:spcBef>
+              <a:spcAft>
+                <a:spcPts val="400"/>
+              </a:spcAft>
+            </a:pPr>
+            <a:r>
+              <a:rPr sz="1050" b="0">
+                <a:solidFill>
+                  <a:srgbClr val="5C6670"/>
+                </a:solidFill>
+                <a:latin typeface="맑은 고딕"/>
+              </a:rPr>
+              <a:t>100%</a:t>
+            </a:r>
+          </a:p>
+        </p:txBody>
+      </p:sp>
+      <p:sp>
+        <p:nvSpPr>
+          <p:cNvPr id="22" name="TextBox 21"/>
+          <p:cNvSpPr txBox="1"/>
+          <p:nvPr/>
+        </p:nvSpPr>
+        <p:spPr>
+          <a:xfrm>
+            <a:off x="7040880" y="2761488"/>
+            <a:ext cx="1828800" cy="310896"/>
+          </a:xfrm>
+          <a:prstGeom prst="rect">
+            <a:avLst/>
+          </a:prstGeom>
+          <a:noFill/>
+        </p:spPr>
+        <p:txBody>
+          <a:bodyPr wrap="square" anchor="t" lIns="36576" rIns="36576" tIns="18288" bIns="18288">
+            <a:spAutoFit/>
+          </a:bodyPr>
+          <a:lstStyle/>
+          <a:p>
+            <a:pPr algn="l">
+              <a:lnSpc>
+                <a:spcPct val="100000"/>
+              </a:lnSpc>
+              <a:spcBef>
+                <a:spcPts val="0"/>
+              </a:spcBef>
+              <a:spcAft>
+                <a:spcPts val="400"/>
+              </a:spcAft>
+            </a:pPr>
+            <a:r>
+              <a:rPr sz="1100" b="1">
+                <a:solidFill>
+                  <a:srgbClr val="1B3255"/>
+                </a:solidFill>
+                <a:latin typeface="맑은 고딕"/>
+              </a:rPr>
+              <a:t>총 전환 횟수</a:t>
+            </a:r>
+          </a:p>
+        </p:txBody>
+      </p:sp>
+      <p:sp>
+        <p:nvSpPr>
+          <p:cNvPr id="23" name="TextBox 22"/>
+          <p:cNvSpPr txBox="1"/>
+          <p:nvPr/>
+        </p:nvSpPr>
+        <p:spPr>
+          <a:xfrm>
+            <a:off x="8686800" y="2761488"/>
+            <a:ext cx="960120" cy="310896"/>
+          </a:xfrm>
+          <a:prstGeom prst="rect">
+            <a:avLst/>
+          </a:prstGeom>
+          <a:noFill/>
+        </p:spPr>
+        <p:txBody>
+          <a:bodyPr wrap="square" anchor="t" lIns="36576" rIns="36576" tIns="18288" bIns="18288">
+            <a:spAutoFit/>
+          </a:bodyPr>
+          <a:lstStyle/>
+          <a:p>
+            <a:pPr algn="ctr">
+              <a:lnSpc>
+                <a:spcPct val="100000"/>
+              </a:lnSpc>
+              <a:spcBef>
+                <a:spcPts val="0"/>
+              </a:spcBef>
+              <a:spcAft>
+                <a:spcPts val="400"/>
+              </a:spcAft>
+            </a:pPr>
+            <a:r>
+              <a:rPr sz="1100" b="0">
+                <a:solidFill>
+                  <a:srgbClr val="B33A3A"/>
+                </a:solidFill>
+                <a:latin typeface="맑은 고딕"/>
+              </a:rPr>
+              <a:t>116</a:t>
+            </a:r>
+          </a:p>
+        </p:txBody>
+      </p:sp>
+      <p:sp>
+        <p:nvSpPr>
+          <p:cNvPr id="24" name="TextBox 23"/>
+          <p:cNvSpPr txBox="1"/>
+          <p:nvPr/>
+        </p:nvSpPr>
+        <p:spPr>
+          <a:xfrm>
+            <a:off x="9646920" y="2761488"/>
+            <a:ext cx="1005840" cy="310896"/>
+          </a:xfrm>
+          <a:prstGeom prst="rect">
+            <a:avLst/>
+          </a:prstGeom>
+          <a:noFill/>
+        </p:spPr>
+        <p:txBody>
+          <a:bodyPr wrap="square" anchor="t" lIns="36576" rIns="36576" tIns="18288" bIns="18288">
+            <a:spAutoFit/>
+          </a:bodyPr>
+          <a:lstStyle/>
+          <a:p>
+            <a:pPr algn="ctr">
+              <a:lnSpc>
+                <a:spcPct val="100000"/>
+              </a:lnSpc>
+              <a:spcBef>
+                <a:spcPts val="0"/>
+              </a:spcBef>
+              <a:spcAft>
+                <a:spcPts val="400"/>
+              </a:spcAft>
+            </a:pPr>
+            <a:r>
+              <a:rPr sz="1200" b="1">
+                <a:solidFill>
+                  <a:srgbClr val="2E7D4F"/>
+                </a:solidFill>
+                <a:latin typeface="맑은 고딕"/>
+              </a:rPr>
+              <a:t>6</a:t>
+            </a:r>
+          </a:p>
+        </p:txBody>
+      </p:sp>
+      <p:sp>
+        <p:nvSpPr>
+          <p:cNvPr id="25" name="TextBox 24"/>
+          <p:cNvSpPr txBox="1"/>
+          <p:nvPr/>
+        </p:nvSpPr>
+        <p:spPr>
+          <a:xfrm>
+            <a:off x="10625328" y="2761488"/>
+            <a:ext cx="777240" cy="310896"/>
+          </a:xfrm>
+          <a:prstGeom prst="rect">
+            <a:avLst/>
+          </a:prstGeom>
+          <a:noFill/>
+        </p:spPr>
+        <p:txBody>
+          <a:bodyPr wrap="square" anchor="t" lIns="36576" rIns="36576" tIns="18288" bIns="18288">
+            <a:spAutoFit/>
+          </a:bodyPr>
+          <a:lstStyle/>
+          <a:p>
+            <a:pPr algn="ctr">
+              <a:lnSpc>
+                <a:spcPct val="100000"/>
+              </a:lnSpc>
+              <a:spcBef>
+                <a:spcPts val="0"/>
+              </a:spcBef>
+              <a:spcAft>
+                <a:spcPts val="400"/>
+              </a:spcAft>
+            </a:pPr>
+            <a:r>
+              <a:rPr sz="1050" b="0">
+                <a:solidFill>
+                  <a:srgbClr val="5C6670"/>
+                </a:solidFill>
+                <a:latin typeface="맑은 고딕"/>
+              </a:rPr>
+              <a:t>0</a:t>
+            </a:r>
+          </a:p>
+        </p:txBody>
+      </p:sp>
+      <p:sp>
+        <p:nvSpPr>
+          <p:cNvPr id="26" name="TextBox 25"/>
+          <p:cNvSpPr txBox="1"/>
+          <p:nvPr/>
+        </p:nvSpPr>
+        <p:spPr>
+          <a:xfrm>
+            <a:off x="7040880" y="3236976"/>
+            <a:ext cx="1828800" cy="310896"/>
+          </a:xfrm>
+          <a:prstGeom prst="rect">
+            <a:avLst/>
+          </a:prstGeom>
+          <a:noFill/>
+        </p:spPr>
+        <p:txBody>
+          <a:bodyPr wrap="square" anchor="t" lIns="36576" rIns="36576" tIns="18288" bIns="18288">
+            <a:spAutoFit/>
+          </a:bodyPr>
+          <a:lstStyle/>
+          <a:p>
+            <a:pPr algn="l">
+              <a:lnSpc>
+                <a:spcPct val="100000"/>
+              </a:lnSpc>
+              <a:spcBef>
+                <a:spcPts val="0"/>
+              </a:spcBef>
+              <a:spcAft>
+                <a:spcPts val="400"/>
+              </a:spcAft>
+            </a:pPr>
+            <a:r>
+              <a:rPr sz="1100" b="1">
+                <a:solidFill>
+                  <a:srgbClr val="1B3255"/>
+                </a:solidFill>
+                <a:latin typeface="맑은 고딕"/>
+              </a:rPr>
+              <a:t>평균 가동률</a:t>
+            </a:r>
+          </a:p>
+        </p:txBody>
+      </p:sp>
+      <p:sp>
+        <p:nvSpPr>
+          <p:cNvPr id="27" name="TextBox 26"/>
+          <p:cNvSpPr txBox="1"/>
+          <p:nvPr/>
+        </p:nvSpPr>
+        <p:spPr>
+          <a:xfrm>
+            <a:off x="8686800" y="3236976"/>
+            <a:ext cx="960120" cy="310896"/>
+          </a:xfrm>
+          <a:prstGeom prst="rect">
+            <a:avLst/>
+          </a:prstGeom>
+          <a:noFill/>
+        </p:spPr>
+        <p:txBody>
+          <a:bodyPr wrap="square" anchor="t" lIns="36576" rIns="36576" tIns="18288" bIns="18288">
+            <a:spAutoFit/>
+          </a:bodyPr>
+          <a:lstStyle/>
+          <a:p>
+            <a:pPr algn="ctr">
+              <a:lnSpc>
+                <a:spcPct val="100000"/>
+              </a:lnSpc>
+              <a:spcBef>
+                <a:spcPts val="0"/>
+              </a:spcBef>
+              <a:spcAft>
+                <a:spcPts val="400"/>
+              </a:spcAft>
+            </a:pPr>
+            <a:r>
+              <a:rPr sz="1100" b="0">
+                <a:solidFill>
+                  <a:srgbClr val="B33A3A"/>
+                </a:solidFill>
+                <a:latin typeface="맑은 고딕"/>
+              </a:rPr>
+              <a:t>72%</a:t>
+            </a:r>
+          </a:p>
+        </p:txBody>
+      </p:sp>
+      <p:sp>
+        <p:nvSpPr>
+          <p:cNvPr id="28" name="TextBox 27"/>
+          <p:cNvSpPr txBox="1"/>
+          <p:nvPr/>
+        </p:nvSpPr>
+        <p:spPr>
+          <a:xfrm>
+            <a:off x="9646920" y="3236976"/>
+            <a:ext cx="1005840" cy="310896"/>
+          </a:xfrm>
+          <a:prstGeom prst="rect">
+            <a:avLst/>
+          </a:prstGeom>
+          <a:noFill/>
+        </p:spPr>
+        <p:txBody>
+          <a:bodyPr wrap="square" anchor="t" lIns="36576" rIns="36576" tIns="18288" bIns="18288">
+            <a:spAutoFit/>
+          </a:bodyPr>
+          <a:lstStyle/>
+          <a:p>
+            <a:pPr algn="ctr">
+              <a:lnSpc>
+                <a:spcPct val="100000"/>
+              </a:lnSpc>
+              <a:spcBef>
+                <a:spcPts val="0"/>
+              </a:spcBef>
+              <a:spcAft>
+                <a:spcPts val="400"/>
+              </a:spcAft>
+            </a:pPr>
+            <a:r>
+              <a:rPr sz="1200" b="1">
+                <a:solidFill>
+                  <a:srgbClr val="2E7D4F"/>
+                </a:solidFill>
+                <a:latin typeface="맑은 고딕"/>
+              </a:rPr>
+              <a:t>99%</a:t>
+            </a:r>
+          </a:p>
+        </p:txBody>
+      </p:sp>
+      <p:sp>
+        <p:nvSpPr>
+          <p:cNvPr id="29" name="TextBox 28"/>
+          <p:cNvSpPr txBox="1"/>
+          <p:nvPr/>
+        </p:nvSpPr>
+        <p:spPr>
+          <a:xfrm>
+            <a:off x="10625328" y="3236976"/>
+            <a:ext cx="777240" cy="310896"/>
+          </a:xfrm>
+          <a:prstGeom prst="rect">
+            <a:avLst/>
+          </a:prstGeom>
+          <a:noFill/>
+        </p:spPr>
+        <p:txBody>
+          <a:bodyPr wrap="square" anchor="t" lIns="36576" rIns="36576" tIns="18288" bIns="18288">
+            <a:spAutoFit/>
+          </a:bodyPr>
+          <a:lstStyle/>
+          <a:p>
+            <a:pPr algn="ctr">
+              <a:lnSpc>
+                <a:spcPct val="100000"/>
+              </a:lnSpc>
+              <a:spcBef>
+                <a:spcPts val="0"/>
+              </a:spcBef>
+              <a:spcAft>
+                <a:spcPts val="400"/>
+              </a:spcAft>
+            </a:pPr>
+            <a:r>
+              <a:rPr sz="1050" b="0">
+                <a:solidFill>
+                  <a:srgbClr val="5C6670"/>
+                </a:solidFill>
+                <a:latin typeface="맑은 고딕"/>
+              </a:rPr>
+              <a:t>100%</a:t>
+            </a:r>
+          </a:p>
+        </p:txBody>
+      </p:sp>
+      <p:sp>
+        <p:nvSpPr>
+          <p:cNvPr id="30" name="TextBox 29"/>
+          <p:cNvSpPr txBox="1"/>
+          <p:nvPr/>
+        </p:nvSpPr>
+        <p:spPr>
+          <a:xfrm>
+            <a:off x="7040880" y="3712464"/>
+            <a:ext cx="1828800" cy="310896"/>
+          </a:xfrm>
+          <a:prstGeom prst="rect">
+            <a:avLst/>
+          </a:prstGeom>
+          <a:noFill/>
+        </p:spPr>
+        <p:txBody>
+          <a:bodyPr wrap="square" anchor="t" lIns="36576" rIns="36576" tIns="18288" bIns="18288">
+            <a:spAutoFit/>
+          </a:bodyPr>
+          <a:lstStyle/>
+          <a:p>
+            <a:pPr algn="l">
+              <a:lnSpc>
+                <a:spcPct val="100000"/>
+              </a:lnSpc>
+              <a:spcBef>
+                <a:spcPts val="0"/>
+              </a:spcBef>
+              <a:spcAft>
+                <a:spcPts val="400"/>
+              </a:spcAft>
+            </a:pPr>
+            <a:r>
+              <a:rPr sz="1100" b="1">
+                <a:solidFill>
+                  <a:srgbClr val="1B3255"/>
+                </a:solidFill>
+                <a:latin typeface="맑은 고딕"/>
+              </a:rPr>
+              <a:t>전담 달성률</a:t>
+            </a:r>
+          </a:p>
+        </p:txBody>
+      </p:sp>
+      <p:sp>
+        <p:nvSpPr>
+          <p:cNvPr id="31" name="TextBox 30"/>
+          <p:cNvSpPr txBox="1"/>
+          <p:nvPr/>
+        </p:nvSpPr>
+        <p:spPr>
+          <a:xfrm>
+            <a:off x="8686800" y="3712464"/>
+            <a:ext cx="960120" cy="310896"/>
+          </a:xfrm>
+          <a:prstGeom prst="rect">
+            <a:avLst/>
+          </a:prstGeom>
+          <a:noFill/>
+        </p:spPr>
+        <p:txBody>
+          <a:bodyPr wrap="square" anchor="t" lIns="36576" rIns="36576" tIns="18288" bIns="18288">
+            <a:spAutoFit/>
+          </a:bodyPr>
+          <a:lstStyle/>
+          <a:p>
+            <a:pPr algn="ctr">
+              <a:lnSpc>
+                <a:spcPct val="100000"/>
+              </a:lnSpc>
+              <a:spcBef>
+                <a:spcPts val="0"/>
+              </a:spcBef>
+              <a:spcAft>
+                <a:spcPts val="400"/>
+              </a:spcAft>
+            </a:pPr>
+            <a:r>
+              <a:rPr sz="1100" b="0">
+                <a:solidFill>
+                  <a:srgbClr val="B33A3A"/>
+                </a:solidFill>
+                <a:latin typeface="맑은 고딕"/>
+              </a:rPr>
+              <a:t>0%</a:t>
+            </a:r>
+          </a:p>
+        </p:txBody>
+      </p:sp>
+      <p:sp>
+        <p:nvSpPr>
+          <p:cNvPr id="32" name="TextBox 31"/>
+          <p:cNvSpPr txBox="1"/>
+          <p:nvPr/>
+        </p:nvSpPr>
+        <p:spPr>
+          <a:xfrm>
+            <a:off x="9646920" y="3712464"/>
+            <a:ext cx="1005840" cy="310896"/>
+          </a:xfrm>
+          <a:prstGeom prst="rect">
+            <a:avLst/>
+          </a:prstGeom>
+          <a:noFill/>
+        </p:spPr>
+        <p:txBody>
+          <a:bodyPr wrap="square" anchor="t" lIns="36576" rIns="36576" tIns="18288" bIns="18288">
+            <a:spAutoFit/>
+          </a:bodyPr>
+          <a:lstStyle/>
+          <a:p>
+            <a:pPr algn="ctr">
+              <a:lnSpc>
+                <a:spcPct val="100000"/>
+              </a:lnSpc>
+              <a:spcBef>
+                <a:spcPts val="0"/>
+              </a:spcBef>
+              <a:spcAft>
+                <a:spcPts val="400"/>
+              </a:spcAft>
+            </a:pPr>
+            <a:r>
+              <a:rPr sz="1200" b="1">
+                <a:solidFill>
+                  <a:srgbClr val="2E7D4F"/>
+                </a:solidFill>
+                <a:latin typeface="맑은 고딕"/>
+              </a:rPr>
+              <a:t>95%</a:t>
+            </a:r>
+          </a:p>
+        </p:txBody>
+      </p:sp>
+      <p:sp>
+        <p:nvSpPr>
+          <p:cNvPr id="33" name="TextBox 32"/>
+          <p:cNvSpPr txBox="1"/>
+          <p:nvPr/>
+        </p:nvSpPr>
+        <p:spPr>
+          <a:xfrm>
+            <a:off x="10625328" y="3712464"/>
+            <a:ext cx="777240" cy="310896"/>
+          </a:xfrm>
+          <a:prstGeom prst="rect">
+            <a:avLst/>
+          </a:prstGeom>
+          <a:noFill/>
+        </p:spPr>
+        <p:txBody>
+          <a:bodyPr wrap="square" anchor="t" lIns="36576" rIns="36576" tIns="18288" bIns="18288">
+            <a:spAutoFit/>
+          </a:bodyPr>
+          <a:lstStyle/>
+          <a:p>
+            <a:pPr algn="ctr">
+              <a:lnSpc>
+                <a:spcPct val="100000"/>
+              </a:lnSpc>
+              <a:spcBef>
+                <a:spcPts val="0"/>
+              </a:spcBef>
+              <a:spcAft>
+                <a:spcPts val="400"/>
+              </a:spcAft>
+            </a:pPr>
+            <a:r>
+              <a:rPr sz="1050" b="0">
+                <a:solidFill>
+                  <a:srgbClr val="5C6670"/>
+                </a:solidFill>
+                <a:latin typeface="맑은 고딕"/>
+              </a:rPr>
+              <a:t>100%</a:t>
+            </a:r>
+          </a:p>
+        </p:txBody>
+      </p:sp>
+      <p:sp>
+        <p:nvSpPr>
+          <p:cNvPr id="34" name="TextBox 33"/>
+          <p:cNvSpPr txBox="1"/>
+          <p:nvPr/>
+        </p:nvSpPr>
+        <p:spPr>
+          <a:xfrm>
+            <a:off x="7040880" y="4187952"/>
+            <a:ext cx="1828800" cy="310896"/>
+          </a:xfrm>
+          <a:prstGeom prst="rect">
+            <a:avLst/>
+          </a:prstGeom>
+          <a:noFill/>
+        </p:spPr>
+        <p:txBody>
+          <a:bodyPr wrap="square" anchor="t" lIns="36576" rIns="36576" tIns="18288" bIns="18288">
+            <a:spAutoFit/>
+          </a:bodyPr>
+          <a:lstStyle/>
+          <a:p>
+            <a:pPr algn="l">
+              <a:lnSpc>
+                <a:spcPct val="100000"/>
+              </a:lnSpc>
+              <a:spcBef>
+                <a:spcPts val="0"/>
+              </a:spcBef>
+              <a:spcAft>
+                <a:spcPts val="400"/>
+              </a:spcAft>
+            </a:pPr>
+            <a:r>
+              <a:rPr sz="1100" b="1">
+                <a:solidFill>
+                  <a:srgbClr val="1B3255"/>
+                </a:solidFill>
+                <a:latin typeface="맑은 고딕"/>
+              </a:rPr>
+              <a:t>최적 도달</a:t>
+            </a:r>
+          </a:p>
+        </p:txBody>
+      </p:sp>
+      <p:sp>
+        <p:nvSpPr>
+          <p:cNvPr id="35" name="TextBox 34"/>
+          <p:cNvSpPr txBox="1"/>
+          <p:nvPr/>
+        </p:nvSpPr>
+        <p:spPr>
+          <a:xfrm>
+            <a:off x="8686800" y="4187952"/>
+            <a:ext cx="960120" cy="310896"/>
+          </a:xfrm>
+          <a:prstGeom prst="rect">
+            <a:avLst/>
+          </a:prstGeom>
+          <a:noFill/>
+        </p:spPr>
+        <p:txBody>
+          <a:bodyPr wrap="square" anchor="t" lIns="36576" rIns="36576" tIns="18288" bIns="18288">
+            <a:spAutoFit/>
+          </a:bodyPr>
+          <a:lstStyle/>
+          <a:p>
+            <a:pPr algn="ctr">
+              <a:lnSpc>
+                <a:spcPct val="100000"/>
+              </a:lnSpc>
+              <a:spcBef>
+                <a:spcPts val="0"/>
+              </a:spcBef>
+              <a:spcAft>
+                <a:spcPts val="400"/>
+              </a:spcAft>
+            </a:pPr>
+            <a:r>
+              <a:rPr sz="1100" b="0">
+                <a:solidFill>
+                  <a:srgbClr val="B33A3A"/>
+                </a:solidFill>
+                <a:latin typeface="맑은 고딕"/>
+              </a:rPr>
+              <a:t>0/10</a:t>
+            </a:r>
+          </a:p>
+        </p:txBody>
+      </p:sp>
+      <p:sp>
+        <p:nvSpPr>
+          <p:cNvPr id="36" name="TextBox 35"/>
+          <p:cNvSpPr txBox="1"/>
+          <p:nvPr/>
+        </p:nvSpPr>
+        <p:spPr>
+          <a:xfrm>
+            <a:off x="9646920" y="4187952"/>
+            <a:ext cx="1005840" cy="310896"/>
+          </a:xfrm>
+          <a:prstGeom prst="rect">
+            <a:avLst/>
+          </a:prstGeom>
+          <a:noFill/>
+        </p:spPr>
+        <p:txBody>
+          <a:bodyPr wrap="square" anchor="t" lIns="36576" rIns="36576" tIns="18288" bIns="18288">
+            <a:spAutoFit/>
+          </a:bodyPr>
+          <a:lstStyle/>
+          <a:p>
+            <a:pPr algn="ctr">
+              <a:lnSpc>
+                <a:spcPct val="100000"/>
+              </a:lnSpc>
+              <a:spcBef>
+                <a:spcPts val="0"/>
+              </a:spcBef>
+              <a:spcAft>
+                <a:spcPts val="400"/>
+              </a:spcAft>
+            </a:pPr>
+            <a:r>
+              <a:rPr sz="1200" b="1">
+                <a:solidFill>
+                  <a:srgbClr val="2E7D4F"/>
+                </a:solidFill>
+                <a:latin typeface="맑은 고딕"/>
+              </a:rPr>
+              <a:t>9/10</a:t>
+            </a:r>
+          </a:p>
+        </p:txBody>
+      </p:sp>
+      <p:sp>
+        <p:nvSpPr>
+          <p:cNvPr id="37" name="TextBox 36"/>
+          <p:cNvSpPr txBox="1"/>
+          <p:nvPr/>
+        </p:nvSpPr>
+        <p:spPr>
+          <a:xfrm>
+            <a:off x="10625328" y="4187952"/>
+            <a:ext cx="777240" cy="310896"/>
+          </a:xfrm>
+          <a:prstGeom prst="rect">
+            <a:avLst/>
+          </a:prstGeom>
+          <a:noFill/>
+        </p:spPr>
+        <p:txBody>
+          <a:bodyPr wrap="square" anchor="t" lIns="36576" rIns="36576" tIns="18288" bIns="18288">
+            <a:spAutoFit/>
+          </a:bodyPr>
+          <a:lstStyle/>
+          <a:p>
+            <a:pPr algn="ctr">
+              <a:lnSpc>
+                <a:spcPct val="100000"/>
+              </a:lnSpc>
+              <a:spcBef>
+                <a:spcPts val="0"/>
+              </a:spcBef>
+              <a:spcAft>
+                <a:spcPts val="400"/>
+              </a:spcAft>
+            </a:pPr>
+            <a:r>
+              <a:rPr sz="1050" b="0">
+                <a:solidFill>
+                  <a:srgbClr val="5C6670"/>
+                </a:solidFill>
+                <a:latin typeface="맑은 고딕"/>
+              </a:rPr>
+              <a:t>10/10</a:t>
+            </a:r>
+          </a:p>
+        </p:txBody>
+      </p:sp>
+      <p:sp>
+        <p:nvSpPr>
+          <p:cNvPr id="38" name="Rectangle 37"/>
+          <p:cNvSpPr/>
+          <p:nvPr/>
+        </p:nvSpPr>
+        <p:spPr>
+          <a:xfrm>
+            <a:off x="640080" y="4937760"/>
+            <a:ext cx="10835640" cy="1280160"/>
+          </a:xfrm>
+          <a:prstGeom prst="rect">
+            <a:avLst/>
+          </a:prstGeom>
+          <a:solidFill>
+            <a:srgbClr val="1B3255"/>
+          </a:solidFill>
+          <a:ln>
+            <a:noFill/>
+          </a:ln>
+          <a:effectLst/>
+        </p:spPr>
+        <p:style>
+          <a:lnRef idx="1">
+            <a:schemeClr val="accent1"/>
+          </a:lnRef>
+          <a:fillRef idx="3">
+            <a:schemeClr val="accent1"/>
+          </a:fillRef>
+          <a:effectRef idx="2">
+            <a:schemeClr val="accent1"/>
+          </a:effectRef>
+          <a:fontRef idx="minor">
+            <a:schemeClr val="lt1"/>
+          </a:fontRef>
+        </p:style>
+        <p:txBody>
+          <a:bodyPr rtlCol="0" anchor="ctr"/>
+          <a:lstStyle/>
+          <a:p>
+            <a:pPr algn="ctr"/>
+          </a:p>
+        </p:txBody>
+      </p:sp>
+      <p:sp>
+        <p:nvSpPr>
+          <p:cNvPr id="39" name="TextBox 38"/>
+          <p:cNvSpPr txBox="1"/>
+          <p:nvPr/>
+        </p:nvSpPr>
+        <p:spPr>
+          <a:xfrm>
+            <a:off x="914400" y="5047488"/>
+            <a:ext cx="10424160" cy="365760"/>
+          </a:xfrm>
+          <a:prstGeom prst="rect">
+            <a:avLst/>
+          </a:prstGeom>
+          <a:noFill/>
+        </p:spPr>
+        <p:txBody>
+          <a:bodyPr wrap="square" anchor="t" lIns="36576" rIns="36576" tIns="18288" bIns="18288">
+            <a:spAutoFit/>
+          </a:bodyPr>
+          <a:lstStyle/>
+          <a:p>
+            <a:pPr algn="l">
+              <a:lnSpc>
+                <a:spcPct val="100000"/>
+              </a:lnSpc>
+              <a:spcBef>
+                <a:spcPts val="0"/>
+              </a:spcBef>
+              <a:spcAft>
+                <a:spcPts val="400"/>
+              </a:spcAft>
+            </a:pPr>
+            <a:r>
+              <a:rPr sz="1300" b="1">
+                <a:solidFill>
+                  <a:srgbClr val="9DBEE0"/>
+                </a:solidFill>
+                <a:latin typeface="맑은 고딕"/>
+              </a:rPr>
+              <a:t>일반화 효과 입증</a:t>
+            </a:r>
+          </a:p>
+        </p:txBody>
+      </p:sp>
+      <p:sp>
+        <p:nvSpPr>
+          <p:cNvPr id="40" name="TextBox 39"/>
+          <p:cNvSpPr txBox="1"/>
+          <p:nvPr/>
+        </p:nvSpPr>
+        <p:spPr>
+          <a:xfrm>
+            <a:off x="914400" y="5394960"/>
+            <a:ext cx="10515600" cy="777240"/>
+          </a:xfrm>
+          <a:prstGeom prst="rect">
+            <a:avLst/>
+          </a:prstGeom>
+          <a:noFill/>
+        </p:spPr>
+        <p:txBody>
+          <a:bodyPr wrap="square" anchor="t" lIns="36576" rIns="36576" tIns="18288" bIns="18288">
+            <a:spAutoFit/>
+          </a:bodyPr>
+          <a:lstStyle/>
+          <a:p>
+            <a:pPr algn="l">
+              <a:lnSpc>
+                <a:spcPct val="128000"/>
+              </a:lnSpc>
+              <a:spcBef>
+                <a:spcPts val="0"/>
+              </a:spcBef>
+              <a:spcAft>
+                <a:spcPts val="400"/>
+              </a:spcAft>
+            </a:pPr>
+            <a:r>
+              <a:rPr sz="1300" b="0">
+                <a:solidFill>
+                  <a:srgbClr val="D7E2EE"/>
+                </a:solidFill>
+                <a:latin typeface="맑은 고딕"/>
+              </a:rPr>
+              <a:t>단일 모델이 </a:t>
+            </a:r>
+            <a:r>
+              <a:rPr sz="1300" b="0">
+                <a:solidFill>
+                  <a:srgbClr val="D7E2EE"/>
+                </a:solidFill>
+                <a:latin typeface="맑은 고딕"/>
+              </a:rPr>
+              <a:t>서로 다른 10종 데이터셋에서 평균 생산률 </a:t>
+            </a:r>
+            <a:r>
+              <a:rPr sz="1350" b="1">
+                <a:solidFill>
+                  <a:srgbClr val="FFFFFF"/>
+                </a:solidFill>
+                <a:latin typeface="맑은 고딕"/>
+              </a:rPr>
+              <a:t>99% · 전환 116→6회 · 최적 9/10</a:t>
+            </a:r>
+            <a:r>
+              <a:rPr sz="1300" b="0">
+                <a:solidFill>
+                  <a:srgbClr val="D7E2EE"/>
+                </a:solidFill>
+                <a:latin typeface="맑은 고딕"/>
+              </a:rPr>
+              <a:t> 달성으로, 단순 규칙 대비 </a:t>
+            </a:r>
+            <a:r>
+              <a:rPr sz="1350" b="1">
+                <a:solidFill>
+                  <a:srgbClr val="FFFFFF"/>
+                </a:solidFill>
+                <a:latin typeface="맑은 고딕"/>
+              </a:rPr>
+              <a:t>생산률 +26%p</a:t>
+            </a:r>
+            <a:r>
+              <a:rPr sz="1300" b="0">
+                <a:solidFill>
+                  <a:srgbClr val="D7E2EE"/>
+                </a:solidFill>
+                <a:latin typeface="맑은 고딕"/>
+              </a:rPr>
+              <a:t> 향상되어 학습 모델의 </a:t>
+            </a:r>
+            <a:r>
+              <a:rPr sz="1350" b="1">
+                <a:solidFill>
+                  <a:srgbClr val="FFFFFF"/>
+                </a:solidFill>
+                <a:latin typeface="맑은 고딕"/>
+              </a:rPr>
+              <a:t>일반화 성능을 검증</a:t>
+            </a:r>
+            <a:r>
+              <a:rPr sz="1300" b="0">
+                <a:solidFill>
+                  <a:srgbClr val="D7E2EE"/>
+                </a:solidFill>
+                <a:latin typeface="맑은 고딕"/>
+              </a:rPr>
+              <a:t>했습니다.</a:t>
+            </a:r>
+          </a:p>
+        </p:txBody>
+      </p:sp>
+    </p:spTree>
+  </p:cSld>
+  <p:clrMapOvr>
+    <a:masterClrMapping/>
+  </p:clrMapOvr>
+</p:sld>
+</file>
+
+<file path=ppt/slides/slide16.xml><?xml version="1.0" encoding="utf-8"?>
+<p:sld xmlns:a="http://schemas.openxmlformats.org/drawingml/2006/main" xmlns:p="http://schemas.openxmlformats.org/presentationml/2006/main" xmlns:r="http://schemas.openxmlformats.org/officeDocument/2006/relationships">
+  <p:cSld>
+    <p:spTree>
+      <p:nvGrpSpPr>
+        <p:cNvPr id="1" name=""/>
+        <p:cNvGrpSpPr/>
+        <p:nvPr/>
+      </p:nvGrpSpPr>
+      <p:grpSpPr/>
+      <p:sp>
+        <p:nvSpPr>
+          <p:cNvPr id="2" name="Rectangle 1"/>
+          <p:cNvSpPr/>
+          <p:nvPr/>
+        </p:nvSpPr>
+        <p:spPr>
+          <a:xfrm>
+            <a:off x="0" y="0"/>
+            <a:ext cx="12191695" cy="6858000"/>
+          </a:xfrm>
+          <a:prstGeom prst="rect">
+            <a:avLst/>
+          </a:prstGeom>
+          <a:solidFill>
+            <a:srgbClr val="FFFFFF"/>
+          </a:solidFill>
+          <a:ln>
+            <a:noFill/>
+          </a:ln>
+          <a:effectLst/>
+        </p:spPr>
+        <p:style>
+          <a:lnRef idx="1">
+            <a:schemeClr val="accent1"/>
+          </a:lnRef>
+          <a:fillRef idx="3">
+            <a:schemeClr val="accent1"/>
+          </a:fillRef>
+          <a:effectRef idx="2">
+            <a:schemeClr val="accent1"/>
+          </a:effectRef>
+          <a:fontRef idx="minor">
+            <a:schemeClr val="lt1"/>
+          </a:fontRef>
+        </p:style>
+        <p:txBody>
+          <a:bodyPr rtlCol="0" anchor="ctr"/>
+          <a:lstStyle/>
+          <a:p>
+            <a:pPr algn="ctr"/>
+          </a:p>
+        </p:txBody>
+      </p:sp>
+      <p:sp>
+        <p:nvSpPr>
+          <p:cNvPr id="3" name="Rectangle 2"/>
+          <p:cNvSpPr/>
+          <p:nvPr/>
+        </p:nvSpPr>
+        <p:spPr>
+          <a:xfrm>
+            <a:off x="0" y="0"/>
+            <a:ext cx="12191695" cy="1078992"/>
+          </a:xfrm>
+          <a:prstGeom prst="rect">
+            <a:avLst/>
+          </a:prstGeom>
+          <a:solidFill>
+            <a:srgbClr val="FFFFFF"/>
+          </a:solidFill>
+          <a:ln>
+            <a:noFill/>
+          </a:ln>
+          <a:effectLst/>
+        </p:spPr>
+        <p:style>
+          <a:lnRef idx="1">
+            <a:schemeClr val="accent1"/>
+          </a:lnRef>
+          <a:fillRef idx="3">
+            <a:schemeClr val="accent1"/>
+          </a:fillRef>
+          <a:effectRef idx="2">
+            <a:schemeClr val="accent1"/>
+          </a:effectRef>
+          <a:fontRef idx="minor">
+            <a:schemeClr val="lt1"/>
+          </a:fontRef>
+        </p:style>
+        <p:txBody>
+          <a:bodyPr rtlCol="0" anchor="ctr"/>
+          <a:lstStyle/>
+          <a:p>
+            <a:pPr algn="ctr"/>
+          </a:p>
+        </p:txBody>
+      </p:sp>
+      <p:sp>
+        <p:nvSpPr>
+          <p:cNvPr id="4" name="Rectangle 3"/>
+          <p:cNvSpPr/>
+          <p:nvPr/>
+        </p:nvSpPr>
+        <p:spPr>
+          <a:xfrm>
+            <a:off x="502920" y="310896"/>
+            <a:ext cx="82296" cy="475488"/>
+          </a:xfrm>
+          <a:prstGeom prst="rect">
+            <a:avLst/>
+          </a:prstGeom>
+          <a:solidFill>
+            <a:srgbClr val="2E6FB0"/>
+          </a:solidFill>
+          <a:ln>
+            <a:noFill/>
+          </a:ln>
+          <a:effectLst/>
+        </p:spPr>
+        <p:style>
+          <a:lnRef idx="1">
+            <a:schemeClr val="accent1"/>
+          </a:lnRef>
+          <a:fillRef idx="3">
+            <a:schemeClr val="accent1"/>
+          </a:fillRef>
+          <a:effectRef idx="2">
+            <a:schemeClr val="accent1"/>
+          </a:effectRef>
+          <a:fontRef idx="minor">
+            <a:schemeClr val="lt1"/>
+          </a:fontRef>
+        </p:style>
+        <p:txBody>
+          <a:bodyPr rtlCol="0" anchor="ctr"/>
+          <a:lstStyle/>
+          <a:p>
+            <a:pPr algn="ctr"/>
+          </a:p>
+        </p:txBody>
+      </p:sp>
+      <p:sp>
+        <p:nvSpPr>
+          <p:cNvPr id="5" name="TextBox 4"/>
+          <p:cNvSpPr txBox="1"/>
+          <p:nvPr/>
+        </p:nvSpPr>
+        <p:spPr>
+          <a:xfrm>
+            <a:off x="713232" y="274320"/>
+            <a:ext cx="10058400" cy="310896"/>
+          </a:xfrm>
+          <a:prstGeom prst="rect">
+            <a:avLst/>
+          </a:prstGeom>
+          <a:noFill/>
+        </p:spPr>
+        <p:txBody>
+          <a:bodyPr wrap="square" anchor="t" lIns="36576" rIns="36576" tIns="18288" bIns="18288">
+            <a:spAutoFit/>
+          </a:bodyPr>
+          <a:lstStyle/>
+          <a:p>
+            <a:pPr algn="l">
+              <a:lnSpc>
+                <a:spcPct val="100000"/>
+              </a:lnSpc>
+              <a:spcBef>
+                <a:spcPts val="0"/>
+              </a:spcBef>
+              <a:spcAft>
+                <a:spcPts val="400"/>
+              </a:spcAft>
+            </a:pPr>
+            <a:r>
+              <a:rPr sz="1150" b="1">
+                <a:solidFill>
+                  <a:srgbClr val="2E6FB0"/>
+                </a:solidFill>
+                <a:latin typeface="맑은 고딕"/>
+              </a:rPr>
+              <a:t>CONCLUSION</a:t>
+            </a:r>
+          </a:p>
+        </p:txBody>
+      </p:sp>
+      <p:sp>
+        <p:nvSpPr>
+          <p:cNvPr id="6" name="TextBox 5"/>
+          <p:cNvSpPr txBox="1"/>
+          <p:nvPr/>
+        </p:nvSpPr>
+        <p:spPr>
+          <a:xfrm>
+            <a:off x="704088" y="475488"/>
+            <a:ext cx="10607040" cy="475488"/>
+          </a:xfrm>
+          <a:prstGeom prst="rect">
+            <a:avLst/>
+          </a:prstGeom>
+          <a:noFill/>
+        </p:spPr>
+        <p:txBody>
+          <a:bodyPr wrap="square" anchor="t" lIns="36576" rIns="36576" tIns="18288" bIns="18288">
+            <a:spAutoFit/>
+          </a:bodyPr>
+          <a:lstStyle/>
+          <a:p>
+            <a:pPr algn="l">
+              <a:lnSpc>
+                <a:spcPct val="100000"/>
+              </a:lnSpc>
+              <a:spcBef>
+                <a:spcPts val="0"/>
+              </a:spcBef>
+              <a:spcAft>
+                <a:spcPts val="400"/>
+              </a:spcAft>
+            </a:pPr>
+            <a:r>
+              <a:rPr sz="2300" b="1">
+                <a:solidFill>
+                  <a:srgbClr val="1B3255"/>
+                </a:solidFill>
+                <a:latin typeface="맑은 고딕"/>
+              </a:rPr>
+              <a:t>결론 및 기대 효과</a:t>
+            </a:r>
+          </a:p>
+        </p:txBody>
+      </p:sp>
+      <p:sp>
+        <p:nvSpPr>
+          <p:cNvPr id="7" name="Rectangle 6"/>
+          <p:cNvSpPr/>
+          <p:nvPr/>
+        </p:nvSpPr>
+        <p:spPr>
+          <a:xfrm>
+            <a:off x="0" y="1069848"/>
+            <a:ext cx="12191695" cy="20116"/>
+          </a:xfrm>
+          <a:prstGeom prst="rect">
+            <a:avLst/>
+          </a:prstGeom>
+          <a:solidFill>
+            <a:srgbClr val="DDE6F0"/>
+          </a:solidFill>
+          <a:ln>
+            <a:noFill/>
+          </a:ln>
+          <a:effectLst/>
+        </p:spPr>
+        <p:style>
+          <a:lnRef idx="1">
+            <a:schemeClr val="accent1"/>
+          </a:lnRef>
+          <a:fillRef idx="3">
+            <a:schemeClr val="accent1"/>
+          </a:fillRef>
+          <a:effectRef idx="2">
+            <a:schemeClr val="accent1"/>
+          </a:effectRef>
+          <a:fontRef idx="minor">
+            <a:schemeClr val="lt1"/>
+          </a:fontRef>
+        </p:style>
+        <p:txBody>
+          <a:bodyPr rtlCol="0" anchor="ctr"/>
+          <a:lstStyle/>
+          <a:p>
+            <a:pPr algn="ctr"/>
+          </a:p>
+        </p:txBody>
+      </p:sp>
+      <p:sp>
+        <p:nvSpPr>
+          <p:cNvPr id="8" name="TextBox 7"/>
+          <p:cNvSpPr txBox="1"/>
+          <p:nvPr/>
+        </p:nvSpPr>
+        <p:spPr>
+          <a:xfrm>
+            <a:off x="502920" y="6455664"/>
+            <a:ext cx="8229600" cy="274320"/>
+          </a:xfrm>
+          <a:prstGeom prst="rect">
+            <a:avLst/>
+          </a:prstGeom>
+          <a:noFill/>
+        </p:spPr>
+        <p:txBody>
+          <a:bodyPr wrap="square" anchor="t" lIns="36576" rIns="36576" tIns="18288" bIns="18288">
+            <a:spAutoFit/>
+          </a:bodyPr>
+          <a:lstStyle/>
+          <a:p>
+            <a:pPr algn="l">
+              <a:lnSpc>
+                <a:spcPct val="100000"/>
+              </a:lnSpc>
+              <a:spcBef>
+                <a:spcPts val="0"/>
+              </a:spcBef>
+              <a:spcAft>
+                <a:spcPts val="400"/>
+              </a:spcAft>
+            </a:pPr>
+            <a:r>
+              <a:rPr sz="900" b="0">
+                <a:solidFill>
+                  <a:srgbClr val="5C6670"/>
+                </a:solidFill>
+                <a:latin typeface="맑은 고딕"/>
+              </a:rPr>
+              <a:t>Bulk-Fill 강화학습 기반 설비 스케줄링</a:t>
+            </a:r>
+          </a:p>
+        </p:txBody>
+      </p:sp>
+      <p:sp>
+        <p:nvSpPr>
+          <p:cNvPr id="9" name="TextBox 8"/>
+          <p:cNvSpPr txBox="1"/>
+          <p:nvPr/>
+        </p:nvSpPr>
+        <p:spPr>
+          <a:xfrm>
+            <a:off x="10515600" y="6455664"/>
+            <a:ext cx="1170432" cy="274320"/>
+          </a:xfrm>
+          <a:prstGeom prst="rect">
+            <a:avLst/>
+          </a:prstGeom>
+          <a:noFill/>
+        </p:spPr>
+        <p:txBody>
+          <a:bodyPr wrap="square" anchor="t" lIns="36576" rIns="36576" tIns="18288" bIns="18288">
+            <a:spAutoFit/>
+          </a:bodyPr>
+          <a:lstStyle/>
+          <a:p>
+            <a:pPr algn="r">
+              <a:lnSpc>
+                <a:spcPct val="100000"/>
+              </a:lnSpc>
+              <a:spcBef>
+                <a:spcPts val="0"/>
+              </a:spcBef>
+              <a:spcAft>
+                <a:spcPts val="400"/>
+              </a:spcAft>
+            </a:pPr>
+            <a:r>
+              <a:rPr sz="900" b="1">
+                <a:solidFill>
+                  <a:srgbClr val="5C6670"/>
+                </a:solidFill>
+                <a:latin typeface="맑은 고딕"/>
+              </a:rPr>
+              <a:t>16</a:t>
+            </a:r>
+          </a:p>
+        </p:txBody>
+      </p:sp>
+      <p:sp>
+        <p:nvSpPr>
+          <p:cNvPr id="10" name="Rectangle 9"/>
+          <p:cNvSpPr/>
+          <p:nvPr/>
+        </p:nvSpPr>
+        <p:spPr>
+          <a:xfrm>
+            <a:off x="822960" y="1417320"/>
+            <a:ext cx="5166360" cy="457200"/>
+          </a:xfrm>
+          <a:prstGeom prst="rect">
+            <a:avLst/>
+          </a:prstGeom>
+          <a:solidFill>
+            <a:srgbClr val="1B3255"/>
+          </a:solidFill>
+          <a:ln>
+            <a:noFill/>
+          </a:ln>
+          <a:effectLst/>
+        </p:spPr>
+        <p:style>
+          <a:lnRef idx="1">
+            <a:schemeClr val="accent1"/>
+          </a:lnRef>
+          <a:fillRef idx="3">
+            <a:schemeClr val="accent1"/>
+          </a:fillRef>
+          <a:effectRef idx="2">
+            <a:schemeClr val="accent1"/>
+          </a:effectRef>
+          <a:fontRef idx="minor">
+            <a:schemeClr val="lt1"/>
+          </a:fontRef>
+        </p:style>
+        <p:txBody>
+          <a:bodyPr rtlCol="0" anchor="ctr"/>
+          <a:lstStyle/>
+          <a:p>
+            <a:pPr algn="ctr"/>
+          </a:p>
+        </p:txBody>
+      </p:sp>
+      <p:sp>
+        <p:nvSpPr>
+          <p:cNvPr id="11" name="TextBox 10"/>
+          <p:cNvSpPr txBox="1"/>
+          <p:nvPr/>
+        </p:nvSpPr>
+        <p:spPr>
+          <a:xfrm>
+            <a:off x="822960" y="1417320"/>
+            <a:ext cx="5166360" cy="457200"/>
+          </a:xfrm>
+          <a:prstGeom prst="rect">
+            <a:avLst/>
+          </a:prstGeom>
+          <a:noFill/>
+        </p:spPr>
+        <p:txBody>
+          <a:bodyPr wrap="square" anchor="ctr" lIns="36576" rIns="36576" tIns="18288" bIns="18288">
+            <a:spAutoFit/>
+          </a:bodyPr>
+          <a:lstStyle/>
+          <a:p>
+            <a:pPr algn="ctr">
+              <a:lnSpc>
+                <a:spcPct val="100000"/>
+              </a:lnSpc>
+              <a:spcBef>
+                <a:spcPts val="0"/>
+              </a:spcBef>
+              <a:spcAft>
+                <a:spcPts val="400"/>
+              </a:spcAft>
+            </a:pPr>
+            <a:r>
+              <a:rPr sz="1350" b="1">
+                <a:solidFill>
+                  <a:srgbClr val="FFFFFF"/>
+                </a:solidFill>
+                <a:latin typeface="맑은 고딕"/>
+              </a:rPr>
+              <a:t>핵심 성과</a:t>
+            </a:r>
+          </a:p>
+        </p:txBody>
+      </p:sp>
+      <p:sp>
+        <p:nvSpPr>
+          <p:cNvPr id="12" name="Rectangle 11"/>
+          <p:cNvSpPr/>
+          <p:nvPr/>
+        </p:nvSpPr>
+        <p:spPr>
+          <a:xfrm>
+            <a:off x="6172200" y="1417320"/>
+            <a:ext cx="5166360" cy="457200"/>
+          </a:xfrm>
+          <a:prstGeom prst="rect">
+            <a:avLst/>
+          </a:prstGeom>
+          <a:solidFill>
+            <a:srgbClr val="2E6FB0"/>
+          </a:solidFill>
+          <a:ln>
+            <a:noFill/>
+          </a:ln>
+          <a:effectLst/>
+        </p:spPr>
+        <p:style>
+          <a:lnRef idx="1">
+            <a:schemeClr val="accent1"/>
+          </a:lnRef>
+          <a:fillRef idx="3">
+            <a:schemeClr val="accent1"/>
+          </a:fillRef>
+          <a:effectRef idx="2">
+            <a:schemeClr val="accent1"/>
+          </a:effectRef>
+          <a:fontRef idx="minor">
+            <a:schemeClr val="lt1"/>
+          </a:fontRef>
+        </p:style>
+        <p:txBody>
+          <a:bodyPr rtlCol="0" anchor="ctr"/>
+          <a:lstStyle/>
+          <a:p>
+            <a:pPr algn="ctr"/>
+          </a:p>
+        </p:txBody>
+      </p:sp>
+      <p:sp>
+        <p:nvSpPr>
+          <p:cNvPr id="13" name="TextBox 12"/>
+          <p:cNvSpPr txBox="1"/>
+          <p:nvPr/>
+        </p:nvSpPr>
+        <p:spPr>
+          <a:xfrm>
+            <a:off x="6172200" y="1417320"/>
+            <a:ext cx="5166360" cy="457200"/>
+          </a:xfrm>
+          <a:prstGeom prst="rect">
+            <a:avLst/>
+          </a:prstGeom>
+          <a:noFill/>
+        </p:spPr>
+        <p:txBody>
+          <a:bodyPr wrap="square" anchor="ctr" lIns="36576" rIns="36576" tIns="18288" bIns="18288">
+            <a:spAutoFit/>
+          </a:bodyPr>
+          <a:lstStyle/>
+          <a:p>
+            <a:pPr algn="ctr">
+              <a:lnSpc>
+                <a:spcPct val="100000"/>
+              </a:lnSpc>
+              <a:spcBef>
+                <a:spcPts val="0"/>
+              </a:spcBef>
+              <a:spcAft>
+                <a:spcPts val="400"/>
+              </a:spcAft>
+            </a:pPr>
+            <a:r>
+              <a:rPr sz="1350" b="1">
+                <a:solidFill>
+                  <a:srgbClr val="FFFFFF"/>
+                </a:solidFill>
+                <a:latin typeface="맑은 고딕"/>
+              </a:rPr>
+              <a:t>기대 효과 및 향후 과제</a:t>
+            </a:r>
+          </a:p>
+        </p:txBody>
+      </p:sp>
+      <p:sp>
+        <p:nvSpPr>
+          <p:cNvPr id="14" name="Rectangle 13"/>
+          <p:cNvSpPr/>
+          <p:nvPr/>
+        </p:nvSpPr>
+        <p:spPr>
+          <a:xfrm>
+            <a:off x="822960" y="2057400"/>
+            <a:ext cx="5166360" cy="1078992"/>
+          </a:xfrm>
+          <a:prstGeom prst="rect">
+            <a:avLst/>
+          </a:prstGeom>
+          <a:solidFill>
+            <a:srgbClr val="EEF2F7"/>
+          </a:solidFill>
+          <a:ln w="12700">
+            <a:solidFill>
+              <a:srgbClr val="C4CFDB"/>
+            </a:solidFill>
+          </a:ln>
+          <a:effectLst/>
+        </p:spPr>
+        <p:style>
+          <a:lnRef idx="1">
+            <a:schemeClr val="accent1"/>
+          </a:lnRef>
+          <a:fillRef idx="3">
+            <a:schemeClr val="accent1"/>
+          </a:fillRef>
+          <a:effectRef idx="2">
+            <a:schemeClr val="accent1"/>
+          </a:effectRef>
+          <a:fontRef idx="minor">
+            <a:schemeClr val="lt1"/>
+          </a:fontRef>
+        </p:style>
+        <p:txBody>
+          <a:bodyPr rtlCol="0" anchor="ctr"/>
+          <a:lstStyle/>
+          <a:p>
+            <a:pPr algn="ctr"/>
+          </a:p>
+        </p:txBody>
+      </p:sp>
+      <p:sp>
+        <p:nvSpPr>
+          <p:cNvPr id="15" name="Rectangle 14"/>
+          <p:cNvSpPr/>
+          <p:nvPr/>
+        </p:nvSpPr>
+        <p:spPr>
+          <a:xfrm>
+            <a:off x="822960" y="2057400"/>
+            <a:ext cx="73152" cy="1078992"/>
+          </a:xfrm>
+          <a:prstGeom prst="rect">
+            <a:avLst/>
+          </a:prstGeom>
+          <a:solidFill>
+            <a:srgbClr val="2E6FB0"/>
+          </a:solidFill>
+          <a:ln>
+            <a:noFill/>
+          </a:ln>
+          <a:effectLst/>
+        </p:spPr>
+        <p:style>
+          <a:lnRef idx="1">
+            <a:schemeClr val="accent1"/>
+          </a:lnRef>
+          <a:fillRef idx="3">
+            <a:schemeClr val="accent1"/>
+          </a:fillRef>
+          <a:effectRef idx="2">
+            <a:schemeClr val="accent1"/>
+          </a:effectRef>
+          <a:fontRef idx="minor">
+            <a:schemeClr val="lt1"/>
+          </a:fontRef>
+        </p:style>
+        <p:txBody>
+          <a:bodyPr rtlCol="0" anchor="ctr"/>
+          <a:lstStyle/>
+          <a:p>
+            <a:pPr algn="ctr"/>
+          </a:p>
+        </p:txBody>
+      </p:sp>
+      <p:sp>
+        <p:nvSpPr>
+          <p:cNvPr id="16" name="TextBox 15"/>
+          <p:cNvSpPr txBox="1"/>
+          <p:nvPr/>
+        </p:nvSpPr>
+        <p:spPr>
+          <a:xfrm>
+            <a:off x="1051560" y="2203704"/>
+            <a:ext cx="4846320" cy="365760"/>
+          </a:xfrm>
+          <a:prstGeom prst="rect">
+            <a:avLst/>
+          </a:prstGeom>
+          <a:noFill/>
+        </p:spPr>
+        <p:txBody>
+          <a:bodyPr wrap="square" anchor="t" lIns="36576" rIns="36576" tIns="18288" bIns="18288">
+            <a:spAutoFit/>
+          </a:bodyPr>
+          <a:lstStyle/>
+          <a:p>
+            <a:pPr algn="l">
+              <a:lnSpc>
+                <a:spcPct val="100000"/>
+              </a:lnSpc>
+              <a:spcBef>
+                <a:spcPts val="0"/>
+              </a:spcBef>
+              <a:spcAft>
+                <a:spcPts val="400"/>
+              </a:spcAft>
+            </a:pPr>
+            <a:r>
               <a:rPr sz="1300" b="1">
                 <a:solidFill>
                   <a:srgbClr val="1B3255"/>
@@ -12780,7 +19028,7 @@
                 </a:solidFill>
                 <a:latin typeface="맑은 고딕"/>
               </a:rPr>
-              <a:t>학습 모델이 최고 휴리스틱과 동등한 최적해(생산 24·전환 0·전담 3/3)에 도달.</a:t>
+              <a:t>단일 학습 모델이 10종 데이터셋 중 9종에서 이론 최적(전환 0·전량 생산)에 도달.</a:t>
             </a:r>
           </a:p>
         </p:txBody>
@@ -13095,7 +19343,7 @@
                 </a:solidFill>
                 <a:latin typeface="맑은 고딕"/>
               </a:rPr>
-              <a:t>구조적 강점</a:t>
+              <a:t>일반화 성능</a:t>
             </a:r>
           </a:p>
         </p:txBody>
@@ -13140,7 +19388,7 @@
                 </a:solidFill>
                 <a:latin typeface="맑은 고딕"/>
               </a:rPr>
-              <a:t>벌크 점유 + 행동 마스킹으로 전환을 근본적으로 억제하고 학습을 안정화.</a:t>
+              <a:t>구성·시간·난이도가 다른 데이터셋에서도 평균 생산률 99%로 안정적으로 동작.</a:t>
             </a:r>
           </a:p>
         </p:txBody>
@@ -13455,7 +19703,7 @@
                 </a:solidFill>
                 <a:latin typeface="맑은 고딕"/>
               </a:rPr>
-              <a:t>객관적 비교 체계</a:t>
+              <a:t>구조적 강점</a:t>
             </a:r>
           </a:p>
         </p:txBody>
@@ -13500,7 +19748,7 @@
                 </a:solidFill>
                 <a:latin typeface="맑은 고딕"/>
               </a:rPr>
-              <a:t>동일 시뮬레이터·KPI에서 PPO와 휴리스틱을 1:1로 비교·검증.</a:t>
+              <a:t>벌크 점유 + 행동 마스킹으로 전환을 근본적으로 억제하고 학습을 안정화.</a:t>
             </a:r>
           </a:p>
         </p:txBody>

--- a/docs/BulkFill_스케줄링_발표자료.pptx
+++ b/docs/BulkFill_스케줄링_발표자료.pptx
@@ -10116,8 +10116,8 @@
         </p:blipFill>
         <p:spPr>
           <a:xfrm>
-            <a:off x="3337560" y="1353312"/>
-            <a:ext cx="5532120" cy="1786901"/>
+            <a:off x="3337560" y="1325880"/>
+            <a:ext cx="5532120" cy="2240280"/>
           </a:xfrm>
           <a:prstGeom prst="rect">
             <a:avLst/>
@@ -10132,8 +10132,8 @@
         </p:nvSpPr>
         <p:spPr>
           <a:xfrm>
-            <a:off x="502920" y="4160520"/>
-            <a:ext cx="11201400" cy="384048"/>
+            <a:off x="502920" y="3703320"/>
+            <a:ext cx="11201400" cy="365760"/>
           </a:xfrm>
           <a:prstGeom prst="rect">
             <a:avLst/>
@@ -10176,8 +10176,8 @@
         </p:nvSpPr>
         <p:spPr>
           <a:xfrm>
-            <a:off x="502920" y="4160520"/>
-            <a:ext cx="11201400" cy="384048"/>
+            <a:off x="502920" y="3703320"/>
+            <a:ext cx="11201400" cy="365760"/>
           </a:xfrm>
           <a:prstGeom prst="rect">
             <a:avLst/>
@@ -10202,13 +10202,13 @@
               </a:spcAft>
             </a:pPr>
             <a:r>
-              <a:rPr sz="1300" b="1">
+              <a:rPr sz="1200" b="1">
                 <a:solidFill>
                   <a:srgbClr val="FFFFFF"/>
                 </a:solidFill>
                 <a:latin typeface="맑은 고딕"/>
               </a:rPr>
-              <a:t>Reward  r = +2.83   ·   누적 Σr = +2.83</a:t>
+              <a:t>Reward  r = +2.83   ·   누적 Σr = +2.83   ·   clip(Σ항, ±10)</a:t>
             </a:r>
           </a:p>
         </p:txBody>
@@ -10221,54 +10221,8 @@
         </p:nvSpPr>
         <p:spPr>
           <a:xfrm>
-            <a:off x="502920" y="4544568"/>
-            <a:ext cx="11201400" cy="1234440"/>
-          </a:xfrm>
-          <a:prstGeom prst="rect">
-            <a:avLst/>
-          </a:prstGeom>
-          <a:solidFill>
-            <a:srgbClr val="EEF2F7"/>
-          </a:solidFill>
-          <a:ln w="12700">
-            <a:solidFill>
-              <a:srgbClr val="C4CFDB"/>
-            </a:solidFill>
-          </a:ln>
-          <a:effectLst/>
-        </p:spPr>
-        <p:style>
-          <a:lnRef idx="1">
-            <a:schemeClr val="accent1"/>
-          </a:lnRef>
-          <a:fillRef idx="3">
-            <a:schemeClr val="accent1"/>
-          </a:fillRef>
-          <a:effectRef idx="2">
-            <a:schemeClr val="accent1"/>
-          </a:effectRef>
-          <a:fontRef idx="minor">
-            <a:schemeClr val="lt1"/>
-          </a:fontRef>
-        </p:style>
-        <p:txBody>
-          <a:bodyPr rtlCol="0" anchor="ctr"/>
-          <a:lstStyle/>
-          <a:p>
-            <a:pPr algn="ctr"/>
-          </a:p>
-        </p:txBody>
-      </p:sp>
-      <p:sp>
-        <p:nvSpPr>
-          <p:cNvPr id="46" name="Rectangle 45"/>
-          <p:cNvSpPr/>
-          <p:nvPr/>
-        </p:nvSpPr>
-        <p:spPr>
-          <a:xfrm>
-            <a:off x="685800" y="4681728"/>
-            <a:ext cx="2606040" cy="868680"/>
+            <a:off x="502920" y="4133087"/>
+            <a:ext cx="11201400" cy="713232"/>
           </a:xfrm>
           <a:prstGeom prst="rect">
             <a:avLst/>
@@ -10307,14 +10261,58 @@
       </p:sp>
       <p:sp>
         <p:nvSpPr>
+          <p:cNvPr id="46" name="Rectangle 45"/>
+          <p:cNvSpPr/>
+          <p:nvPr/>
+        </p:nvSpPr>
+        <p:spPr>
+          <a:xfrm>
+            <a:off x="502920" y="4133087"/>
+            <a:ext cx="73152" cy="713232"/>
+          </a:xfrm>
+          <a:prstGeom prst="rect">
+            <a:avLst/>
+          </a:prstGeom>
+          <a:solidFill>
+            <a:srgbClr val="B33A3A"/>
+          </a:solidFill>
+          <a:ln>
+            <a:noFill/>
+          </a:ln>
+          <a:effectLst/>
+        </p:spPr>
+        <p:style>
+          <a:lnRef idx="1">
+            <a:schemeClr val="accent1"/>
+          </a:lnRef>
+          <a:fillRef idx="3">
+            <a:schemeClr val="accent1"/>
+          </a:fillRef>
+          <a:effectRef idx="2">
+            <a:schemeClr val="accent1"/>
+          </a:effectRef>
+          <a:fontRef idx="minor">
+            <a:schemeClr val="lt1"/>
+          </a:fontRef>
+        </p:style>
+        <p:txBody>
+          <a:bodyPr rtlCol="0" anchor="ctr"/>
+          <a:lstStyle/>
+          <a:p>
+            <a:pPr algn="ctr"/>
+          </a:p>
+        </p:txBody>
+      </p:sp>
+      <p:sp>
+        <p:nvSpPr>
           <p:cNvPr id="47" name="TextBox 46"/>
           <p:cNvSpPr txBox="1"/>
           <p:nvPr/>
         </p:nvSpPr>
         <p:spPr>
           <a:xfrm>
-            <a:off x="795528" y="4754880"/>
-            <a:ext cx="2377440" cy="320040"/>
+            <a:off x="658368" y="4187951"/>
+            <a:ext cx="1417320" cy="292608"/>
           </a:xfrm>
           <a:prstGeom prst="rect">
             <a:avLst/>
@@ -10358,8 +10356,8 @@
         </p:nvSpPr>
         <p:spPr>
           <a:xfrm>
-            <a:off x="795528" y="5074920"/>
-            <a:ext cx="2377440" cy="411480"/>
+            <a:off x="658368" y="4462272"/>
+            <a:ext cx="1417320" cy="292608"/>
           </a:xfrm>
           <a:prstGeom prst="rect">
             <a:avLst/>
@@ -10372,7 +10370,7 @@
           </a:bodyPr>
           <a:lstStyle/>
           <a:p>
-            <a:pPr algn="ctr">
+            <a:pPr algn="l">
               <a:lnSpc>
                 <a:spcPct val="100000"/>
               </a:lnSpc>
@@ -10384,7 +10382,7 @@
               </a:spcAft>
             </a:pPr>
             <a:r>
-              <a:rPr sz="1800" b="1">
+              <a:rPr sz="1400" b="1">
                 <a:solidFill>
                   <a:srgbClr val="B33A3A"/>
                 </a:solidFill>
@@ -10397,14 +10395,149 @@
       </p:sp>
       <p:sp>
         <p:nvSpPr>
-          <p:cNvPr id="49" name="Rectangle 48"/>
+          <p:cNvPr id="49" name="TextBox 48"/>
+          <p:cNvSpPr txBox="1"/>
+          <p:nvPr/>
+        </p:nvSpPr>
+        <p:spPr>
+          <a:xfrm>
+            <a:off x="2148840" y="4178807"/>
+            <a:ext cx="8732520" cy="256032"/>
+          </a:xfrm>
+          <a:prstGeom prst="rect">
+            <a:avLst/>
+          </a:prstGeom>
+          <a:noFill/>
+        </p:spPr>
+        <p:txBody>
+          <a:bodyPr wrap="square" anchor="t" lIns="36576" rIns="36576" tIns="18288" bIns="18288">
+            <a:spAutoFit/>
+          </a:bodyPr>
+          <a:lstStyle/>
+          <a:p>
+            <a:pPr algn="l">
+              <a:lnSpc>
+                <a:spcPct val="100000"/>
+              </a:lnSpc>
+              <a:spcBef>
+                <a:spcPts val="0"/>
+              </a:spcBef>
+              <a:spcAft>
+                <a:spcPts val="400"/>
+              </a:spcAft>
+            </a:pPr>
+            <a:r>
+              <a:rPr sz="950" b="0">
+                <a:solidFill>
+                  <a:srgbClr val="5C6670"/>
+                </a:solidFill>
+                <a:latin typeface="맑은 고딕"/>
+              </a:rPr>
+              <a:t>w_pacing · (|ideal − eff_before| − |ideal − eff_after|) / target</a:t>
+            </a:r>
+          </a:p>
+        </p:txBody>
+      </p:sp>
+      <p:sp>
+        <p:nvSpPr>
+          <p:cNvPr id="50" name="TextBox 49"/>
+          <p:cNvSpPr txBox="1"/>
+          <p:nvPr/>
+        </p:nvSpPr>
+        <p:spPr>
+          <a:xfrm>
+            <a:off x="2148840" y="4407407"/>
+            <a:ext cx="9052560" cy="256032"/>
+          </a:xfrm>
+          <a:prstGeom prst="rect">
+            <a:avLst/>
+          </a:prstGeom>
+          <a:noFill/>
+        </p:spPr>
+        <p:txBody>
+          <a:bodyPr wrap="square" anchor="t" lIns="36576" rIns="36576" tIns="18288" bIns="18288">
+            <a:spAutoFit/>
+          </a:bodyPr>
+          <a:lstStyle/>
+          <a:p>
+            <a:pPr algn="l">
+              <a:lnSpc>
+                <a:spcPct val="100000"/>
+              </a:lnSpc>
+              <a:spcBef>
+                <a:spcPts val="0"/>
+              </a:spcBef>
+              <a:spcAft>
+                <a:spcPts val="400"/>
+              </a:spcAft>
+            </a:pPr>
+            <a:r>
+              <a:rPr sz="950" b="0">
+                <a:solidFill>
+                  <a:srgbClr val="222A33"/>
+                </a:solidFill>
+                <a:latin typeface="맑은 고딕"/>
+              </a:rPr>
+              <a:t>ideal: target·min(t,horizon)/horizon = 8·0/1320 = 0.0 · eff: 0.0→1.0 (done=0, cover=0.0, wf=1) · 2.5·(0.0−1.0)/8</a:t>
+            </a:r>
+          </a:p>
+        </p:txBody>
+      </p:sp>
+      <p:sp>
+        <p:nvSpPr>
+          <p:cNvPr id="51" name="TextBox 50"/>
+          <p:cNvSpPr txBox="1"/>
+          <p:nvPr/>
+        </p:nvSpPr>
+        <p:spPr>
+          <a:xfrm>
+            <a:off x="10561320" y="4334255"/>
+            <a:ext cx="1005840" cy="347472"/>
+          </a:xfrm>
+          <a:prstGeom prst="rect">
+            <a:avLst/>
+          </a:prstGeom>
+          <a:noFill/>
+        </p:spPr>
+        <p:txBody>
+          <a:bodyPr wrap="square" anchor="ctr" lIns="36576" rIns="36576" tIns="18288" bIns="18288">
+            <a:spAutoFit/>
+          </a:bodyPr>
+          <a:lstStyle/>
+          <a:p>
+            <a:pPr algn="r">
+              <a:lnSpc>
+                <a:spcPct val="100000"/>
+              </a:lnSpc>
+              <a:spcBef>
+                <a:spcPts val="0"/>
+              </a:spcBef>
+              <a:spcAft>
+                <a:spcPts val="400"/>
+              </a:spcAft>
+            </a:pPr>
+            <a:r>
+              <a:rPr sz="1100" b="1">
+                <a:solidFill>
+                  <a:srgbClr val="B33A3A"/>
+                </a:solidFill>
+                <a:latin typeface="맑은 고딕"/>
+              </a:rPr>
+              <a:t>= -0.31</a:t>
+            </a:r>
+          </a:p>
+        </p:txBody>
+      </p:sp>
+      <p:sp>
+        <p:nvSpPr>
+          <p:cNvPr id="52" name="Rectangle 51"/>
           <p:cNvSpPr/>
           <p:nvPr/>
         </p:nvSpPr>
         <p:spPr>
           <a:xfrm>
-            <a:off x="3383280" y="4681728"/>
-            <a:ext cx="2606040" cy="868680"/>
+            <a:off x="502920" y="4901183"/>
+            <a:ext cx="11201400" cy="713232"/>
           </a:xfrm>
           <a:prstGeom prst="rect">
             <a:avLst/>
@@ -10443,14 +10576,58 @@
       </p:sp>
       <p:sp>
         <p:nvSpPr>
-          <p:cNvPr id="50" name="TextBox 49"/>
-          <p:cNvSpPr txBox="1"/>
-          <p:nvPr/>
-        </p:nvSpPr>
-        <p:spPr>
-          <a:xfrm>
-            <a:off x="3493008" y="4754880"/>
-            <a:ext cx="2377440" cy="320040"/>
+          <p:cNvPr id="53" name="Rectangle 52"/>
+          <p:cNvSpPr/>
+          <p:nvPr/>
+        </p:nvSpPr>
+        <p:spPr>
+          <a:xfrm>
+            <a:off x="502920" y="4901183"/>
+            <a:ext cx="73152" cy="713232"/>
+          </a:xfrm>
+          <a:prstGeom prst="rect">
+            <a:avLst/>
+          </a:prstGeom>
+          <a:solidFill>
+            <a:srgbClr val="2E7D4F"/>
+          </a:solidFill>
+          <a:ln>
+            <a:noFill/>
+          </a:ln>
+          <a:effectLst/>
+        </p:spPr>
+        <p:style>
+          <a:lnRef idx="1">
+            <a:schemeClr val="accent1"/>
+          </a:lnRef>
+          <a:fillRef idx="3">
+            <a:schemeClr val="accent1"/>
+          </a:fillRef>
+          <a:effectRef idx="2">
+            <a:schemeClr val="accent1"/>
+          </a:effectRef>
+          <a:fontRef idx="minor">
+            <a:schemeClr val="lt1"/>
+          </a:fontRef>
+        </p:style>
+        <p:txBody>
+          <a:bodyPr rtlCol="0" anchor="ctr"/>
+          <a:lstStyle/>
+          <a:p>
+            <a:pPr algn="ctr"/>
+          </a:p>
+        </p:txBody>
+      </p:sp>
+      <p:sp>
+        <p:nvSpPr>
+          <p:cNvPr id="54" name="TextBox 53"/>
+          <p:cNvSpPr txBox="1"/>
+          <p:nvPr/>
+        </p:nvSpPr>
+        <p:spPr>
+          <a:xfrm>
+            <a:off x="658368" y="4956047"/>
+            <a:ext cx="1417320" cy="292608"/>
           </a:xfrm>
           <a:prstGeom prst="rect">
             <a:avLst/>
@@ -10488,14 +10665,14 @@
       </p:sp>
       <p:sp>
         <p:nvSpPr>
-          <p:cNvPr id="51" name="TextBox 50"/>
-          <p:cNvSpPr txBox="1"/>
-          <p:nvPr/>
-        </p:nvSpPr>
-        <p:spPr>
-          <a:xfrm>
-            <a:off x="3493008" y="5074920"/>
-            <a:ext cx="2377440" cy="411480"/>
+          <p:cNvPr id="55" name="TextBox 54"/>
+          <p:cNvSpPr txBox="1"/>
+          <p:nvPr/>
+        </p:nvSpPr>
+        <p:spPr>
+          <a:xfrm>
+            <a:off x="658368" y="5230368"/>
+            <a:ext cx="1417320" cy="292608"/>
           </a:xfrm>
           <a:prstGeom prst="rect">
             <a:avLst/>
@@ -10508,7 +10685,7 @@
           </a:bodyPr>
           <a:lstStyle/>
           <a:p>
-            <a:pPr algn="ctr">
+            <a:pPr algn="l">
               <a:lnSpc>
                 <a:spcPct val="100000"/>
               </a:lnSpc>
@@ -10520,7 +10697,7 @@
               </a:spcAft>
             </a:pPr>
             <a:r>
-              <a:rPr sz="1800" b="1">
+              <a:rPr sz="1400" b="1">
                 <a:solidFill>
                   <a:srgbClr val="2E7D4F"/>
                 </a:solidFill>
@@ -10533,14 +10710,149 @@
       </p:sp>
       <p:sp>
         <p:nvSpPr>
-          <p:cNvPr id="52" name="Rectangle 51"/>
+          <p:cNvPr id="56" name="TextBox 55"/>
+          <p:cNvSpPr txBox="1"/>
+          <p:nvPr/>
+        </p:nvSpPr>
+        <p:spPr>
+          <a:xfrm>
+            <a:off x="2148840" y="4946903"/>
+            <a:ext cx="8732520" cy="256032"/>
+          </a:xfrm>
+          <a:prstGeom prst="rect">
+            <a:avLst/>
+          </a:prstGeom>
+          <a:noFill/>
+        </p:spPr>
+        <p:txBody>
+          <a:bodyPr wrap="square" anchor="t" lIns="36576" rIns="36576" tIns="18288" bIns="18288">
+            <a:spAutoFit/>
+          </a:bodyPr>
+          <a:lstStyle/>
+          <a:p>
+            <a:pPr algn="l">
+              <a:lnSpc>
+                <a:spcPct val="100000"/>
+              </a:lnSpc>
+              <a:spcBef>
+                <a:spcPts val="0"/>
+              </a:spcBef>
+              <a:spcAft>
+                <a:spcPts val="400"/>
+              </a:spcAft>
+            </a:pPr>
+            <a:r>
+              <a:rPr sz="950" b="0">
+                <a:solidFill>
+                  <a:srgbClr val="5C6670"/>
+                </a:solidFill>
+                <a:latin typeface="맑은 고딕"/>
+              </a:rPr>
+              <a:t>w_plan_hit · (gap_before − gap_after) / target   ;  gap = max(target − done, 0)</a:t>
+            </a:r>
+          </a:p>
+        </p:txBody>
+      </p:sp>
+      <p:sp>
+        <p:nvSpPr>
+          <p:cNvPr id="57" name="TextBox 56"/>
+          <p:cNvSpPr txBox="1"/>
+          <p:nvPr/>
+        </p:nvSpPr>
+        <p:spPr>
+          <a:xfrm>
+            <a:off x="2148840" y="5175503"/>
+            <a:ext cx="9052560" cy="256032"/>
+          </a:xfrm>
+          <a:prstGeom prst="rect">
+            <a:avLst/>
+          </a:prstGeom>
+          <a:noFill/>
+        </p:spPr>
+        <p:txBody>
+          <a:bodyPr wrap="square" anchor="t" lIns="36576" rIns="36576" tIns="18288" bIns="18288">
+            <a:spAutoFit/>
+          </a:bodyPr>
+          <a:lstStyle/>
+          <a:p>
+            <a:pPr algn="l">
+              <a:lnSpc>
+                <a:spcPct val="100000"/>
+              </a:lnSpc>
+              <a:spcBef>
+                <a:spcPts val="0"/>
+              </a:spcBef>
+              <a:spcAft>
+                <a:spcPts val="400"/>
+              </a:spcAft>
+            </a:pPr>
+            <a:r>
+              <a:rPr sz="950" b="0">
+                <a:solidFill>
+                  <a:srgbClr val="222A33"/>
+                </a:solidFill>
+                <a:latin typeface="맑은 고딕"/>
+              </a:rPr>
+              <a:t>gap: 8→7 (done 0→1, target=8) · 1.0·(8−7)/8</a:t>
+            </a:r>
+          </a:p>
+        </p:txBody>
+      </p:sp>
+      <p:sp>
+        <p:nvSpPr>
+          <p:cNvPr id="58" name="TextBox 57"/>
+          <p:cNvSpPr txBox="1"/>
+          <p:nvPr/>
+        </p:nvSpPr>
+        <p:spPr>
+          <a:xfrm>
+            <a:off x="10561320" y="5102351"/>
+            <a:ext cx="1005840" cy="347472"/>
+          </a:xfrm>
+          <a:prstGeom prst="rect">
+            <a:avLst/>
+          </a:prstGeom>
+          <a:noFill/>
+        </p:spPr>
+        <p:txBody>
+          <a:bodyPr wrap="square" anchor="ctr" lIns="36576" rIns="36576" tIns="18288" bIns="18288">
+            <a:spAutoFit/>
+          </a:bodyPr>
+          <a:lstStyle/>
+          <a:p>
+            <a:pPr algn="r">
+              <a:lnSpc>
+                <a:spcPct val="100000"/>
+              </a:lnSpc>
+              <a:spcBef>
+                <a:spcPts val="0"/>
+              </a:spcBef>
+              <a:spcAft>
+                <a:spcPts val="400"/>
+              </a:spcAft>
+            </a:pPr>
+            <a:r>
+              <a:rPr sz="1100" b="1">
+                <a:solidFill>
+                  <a:srgbClr val="2E7D4F"/>
+                </a:solidFill>
+                <a:latin typeface="맑은 고딕"/>
+              </a:rPr>
+              <a:t>= +0.14</a:t>
+            </a:r>
+          </a:p>
+        </p:txBody>
+      </p:sp>
+      <p:sp>
+        <p:nvSpPr>
+          <p:cNvPr id="59" name="Rectangle 58"/>
           <p:cNvSpPr/>
           <p:nvPr/>
         </p:nvSpPr>
         <p:spPr>
           <a:xfrm>
-            <a:off x="6080760" y="4681728"/>
-            <a:ext cx="2606040" cy="868680"/>
+            <a:off x="502920" y="5669279"/>
+            <a:ext cx="11201400" cy="713232"/>
           </a:xfrm>
           <a:prstGeom prst="rect">
             <a:avLst/>
@@ -10579,14 +10891,58 @@
       </p:sp>
       <p:sp>
         <p:nvSpPr>
-          <p:cNvPr id="53" name="TextBox 52"/>
-          <p:cNvSpPr txBox="1"/>
-          <p:nvPr/>
-        </p:nvSpPr>
-        <p:spPr>
-          <a:xfrm>
-            <a:off x="6190488" y="4754880"/>
-            <a:ext cx="2377440" cy="320040"/>
+          <p:cNvPr id="60" name="Rectangle 59"/>
+          <p:cNvSpPr/>
+          <p:nvPr/>
+        </p:nvSpPr>
+        <p:spPr>
+          <a:xfrm>
+            <a:off x="502920" y="5669279"/>
+            <a:ext cx="73152" cy="713232"/>
+          </a:xfrm>
+          <a:prstGeom prst="rect">
+            <a:avLst/>
+          </a:prstGeom>
+          <a:solidFill>
+            <a:srgbClr val="2E7D4F"/>
+          </a:solidFill>
+          <a:ln>
+            <a:noFill/>
+          </a:ln>
+          <a:effectLst/>
+        </p:spPr>
+        <p:style>
+          <a:lnRef idx="1">
+            <a:schemeClr val="accent1"/>
+          </a:lnRef>
+          <a:fillRef idx="3">
+            <a:schemeClr val="accent1"/>
+          </a:fillRef>
+          <a:effectRef idx="2">
+            <a:schemeClr val="accent1"/>
+          </a:effectRef>
+          <a:fontRef idx="minor">
+            <a:schemeClr val="lt1"/>
+          </a:fontRef>
+        </p:style>
+        <p:txBody>
+          <a:bodyPr rtlCol="0" anchor="ctr"/>
+          <a:lstStyle/>
+          <a:p>
+            <a:pPr algn="ctr"/>
+          </a:p>
+        </p:txBody>
+      </p:sp>
+      <p:sp>
+        <p:nvSpPr>
+          <p:cNvPr id="61" name="TextBox 60"/>
+          <p:cNvSpPr txBox="1"/>
+          <p:nvPr/>
+        </p:nvSpPr>
+        <p:spPr>
+          <a:xfrm>
+            <a:off x="658368" y="5724143"/>
+            <a:ext cx="1417320" cy="292608"/>
           </a:xfrm>
           <a:prstGeom prst="rect">
             <a:avLst/>
@@ -10624,14 +10980,14 @@
       </p:sp>
       <p:sp>
         <p:nvSpPr>
-          <p:cNvPr id="54" name="TextBox 53"/>
-          <p:cNvSpPr txBox="1"/>
-          <p:nvPr/>
-        </p:nvSpPr>
-        <p:spPr>
-          <a:xfrm>
-            <a:off x="6190488" y="5074920"/>
-            <a:ext cx="2377440" cy="411480"/>
+          <p:cNvPr id="62" name="TextBox 61"/>
+          <p:cNvSpPr txBox="1"/>
+          <p:nvPr/>
+        </p:nvSpPr>
+        <p:spPr>
+          <a:xfrm>
+            <a:off x="658368" y="5998464"/>
+            <a:ext cx="1417320" cy="292608"/>
           </a:xfrm>
           <a:prstGeom prst="rect">
             <a:avLst/>
@@ -10644,7 +11000,7 @@
           </a:bodyPr>
           <a:lstStyle/>
           <a:p>
-            <a:pPr algn="ctr">
+            <a:pPr algn="l">
               <a:lnSpc>
                 <a:spcPct val="100000"/>
               </a:lnSpc>
@@ -10656,7 +11012,7 @@
               </a:spcAft>
             </a:pPr>
             <a:r>
-              <a:rPr sz="1800" b="1">
+              <a:rPr sz="1400" b="1">
                 <a:solidFill>
                   <a:srgbClr val="2E7D4F"/>
                 </a:solidFill>
@@ -10669,14 +11025,149 @@
       </p:sp>
       <p:sp>
         <p:nvSpPr>
-          <p:cNvPr id="55" name="Rectangle 54"/>
+          <p:cNvPr id="63" name="TextBox 62"/>
+          <p:cNvSpPr txBox="1"/>
+          <p:nvPr/>
+        </p:nvSpPr>
+        <p:spPr>
+          <a:xfrm>
+            <a:off x="2148840" y="5714999"/>
+            <a:ext cx="8732520" cy="256032"/>
+          </a:xfrm>
+          <a:prstGeom prst="rect">
+            <a:avLst/>
+          </a:prstGeom>
+          <a:noFill/>
+        </p:spPr>
+        <p:txBody>
+          <a:bodyPr wrap="square" anchor="t" lIns="36576" rIns="36576" tIns="18288" bIns="18288">
+            <a:spAutoFit/>
+          </a:bodyPr>
+          <a:lstStyle/>
+          <a:p>
+            <a:pPr algn="l">
+              <a:lnSpc>
+                <a:spcPct val="100000"/>
+              </a:lnSpc>
+              <a:spcBef>
+                <a:spcPts val="0"/>
+              </a:spcBef>
+              <a:spcAft>
+                <a:spcPts val="400"/>
+              </a:spcAft>
+            </a:pPr>
+            <a:r>
+              <a:rPr sz="950" b="0">
+                <a:solidFill>
+                  <a:srgbClr val="5C6670"/>
+                </a:solidFill>
+                <a:latin typeface="맑은 고딕"/>
+              </a:rPr>
+              <a:t>w_bulk · min(N / takt예산, 1)</a:t>
+            </a:r>
+          </a:p>
+        </p:txBody>
+      </p:sp>
+      <p:sp>
+        <p:nvSpPr>
+          <p:cNvPr id="64" name="TextBox 63"/>
+          <p:cNvSpPr txBox="1"/>
+          <p:nvPr/>
+        </p:nvSpPr>
+        <p:spPr>
+          <a:xfrm>
+            <a:off x="2148840" y="5943599"/>
+            <a:ext cx="9052560" cy="256032"/>
+          </a:xfrm>
+          <a:prstGeom prst="rect">
+            <a:avLst/>
+          </a:prstGeom>
+          <a:noFill/>
+        </p:spPr>
+        <p:txBody>
+          <a:bodyPr wrap="square" anchor="t" lIns="36576" rIns="36576" tIns="18288" bIns="18288">
+            <a:spAutoFit/>
+          </a:bodyPr>
+          <a:lstStyle/>
+          <a:p>
+            <a:pPr algn="l">
+              <a:lnSpc>
+                <a:spcPct val="100000"/>
+              </a:lnSpc>
+              <a:spcBef>
+                <a:spcPts val="0"/>
+              </a:spcBef>
+              <a:spcAft>
+                <a:spcPts val="400"/>
+              </a:spcAft>
+            </a:pPr>
+            <a:r>
+              <a:rPr sz="950" b="0">
+                <a:solidFill>
+                  <a:srgbClr val="222A33"/>
+                </a:solidFill>
+                <a:latin typeface="맑은 고딕"/>
+              </a:rPr>
+              <a:t>3.0 · min(6 / 6, 1) = 3.0 · 1.0</a:t>
+            </a:r>
+          </a:p>
+        </p:txBody>
+      </p:sp>
+      <p:sp>
+        <p:nvSpPr>
+          <p:cNvPr id="65" name="TextBox 64"/>
+          <p:cNvSpPr txBox="1"/>
+          <p:nvPr/>
+        </p:nvSpPr>
+        <p:spPr>
+          <a:xfrm>
+            <a:off x="10561320" y="5870447"/>
+            <a:ext cx="1005840" cy="347472"/>
+          </a:xfrm>
+          <a:prstGeom prst="rect">
+            <a:avLst/>
+          </a:prstGeom>
+          <a:noFill/>
+        </p:spPr>
+        <p:txBody>
+          <a:bodyPr wrap="square" anchor="ctr" lIns="36576" rIns="36576" tIns="18288" bIns="18288">
+            <a:spAutoFit/>
+          </a:bodyPr>
+          <a:lstStyle/>
+          <a:p>
+            <a:pPr algn="r">
+              <a:lnSpc>
+                <a:spcPct val="100000"/>
+              </a:lnSpc>
+              <a:spcBef>
+                <a:spcPts val="0"/>
+              </a:spcBef>
+              <a:spcAft>
+                <a:spcPts val="400"/>
+              </a:spcAft>
+            </a:pPr>
+            <a:r>
+              <a:rPr sz="1100" b="1">
+                <a:solidFill>
+                  <a:srgbClr val="2E7D4F"/>
+                </a:solidFill>
+                <a:latin typeface="맑은 고딕"/>
+              </a:rPr>
+              <a:t>= +3.00</a:t>
+            </a:r>
+          </a:p>
+        </p:txBody>
+      </p:sp>
+      <p:sp>
+        <p:nvSpPr>
+          <p:cNvPr id="66" name="Rectangle 65"/>
           <p:cNvSpPr/>
           <p:nvPr/>
         </p:nvSpPr>
         <p:spPr>
           <a:xfrm>
-            <a:off x="502920" y="5897880"/>
-            <a:ext cx="11201400" cy="438912"/>
+            <a:off x="502920" y="6455663"/>
+            <a:ext cx="11201400" cy="347472"/>
           </a:xfrm>
           <a:prstGeom prst="rect">
             <a:avLst/>
@@ -10713,14 +11204,14 @@
       </p:sp>
       <p:sp>
         <p:nvSpPr>
-          <p:cNvPr id="56" name="TextBox 55"/>
-          <p:cNvSpPr txBox="1"/>
-          <p:nvPr/>
-        </p:nvSpPr>
-        <p:spPr>
-          <a:xfrm>
-            <a:off x="685800" y="5897880"/>
-            <a:ext cx="10881360" cy="438912"/>
+          <p:cNvPr id="67" name="TextBox 66"/>
+          <p:cNvSpPr txBox="1"/>
+          <p:nvPr/>
+        </p:nvSpPr>
+        <p:spPr>
+          <a:xfrm>
+            <a:off x="685800" y="6455663"/>
+            <a:ext cx="10881360" cy="347472"/>
           </a:xfrm>
           <a:prstGeom prst="rect">
             <a:avLst/>
@@ -10745,22 +11236,22 @@
               </a:spcAft>
             </a:pPr>
             <a:r>
-              <a:rPr sz="1050" b="1">
+              <a:rPr sz="1000" b="1">
                 <a:solidFill>
                   <a:srgbClr val="2E6FB0"/>
                 </a:solidFill>
                 <a:latin typeface="맑은 고딕"/>
               </a:rPr>
-              <a:t>계산  </a:t>
-            </a:r>
-            <a:r>
-              <a:rPr sz="1050" b="0">
+              <a:t>합산  </a:t>
+            </a:r>
+            <a:r>
+              <a:rPr sz="1000" b="0">
                 <a:solidFill>
                   <a:srgbClr val="222A33"/>
                 </a:solidFill>
                 <a:latin typeface="맑은 고딕"/>
               </a:rPr>
-              <a:t>페이싱 -0.31 + 계획 달성 +0.14 + 블록 보너스 +3.00</a:t>
+              <a:t>페이싱 -0.31 + 계획 달성 +0.14 + 블록 보너스 +3.00  →  r = +2.83</a:t>
             </a:r>
           </a:p>
         </p:txBody>
@@ -12595,8 +13086,8 @@
         </p:blipFill>
         <p:spPr>
           <a:xfrm>
-            <a:off x="3337560" y="1353312"/>
-            <a:ext cx="5532120" cy="1786901"/>
+            <a:off x="3337560" y="1325880"/>
+            <a:ext cx="5532120" cy="2240280"/>
           </a:xfrm>
           <a:prstGeom prst="rect">
             <a:avLst/>
@@ -12611,8 +13102,8 @@
         </p:nvSpPr>
         <p:spPr>
           <a:xfrm>
-            <a:off x="502920" y="4160520"/>
-            <a:ext cx="11201400" cy="384048"/>
+            <a:off x="502920" y="3703320"/>
+            <a:ext cx="11201400" cy="365760"/>
           </a:xfrm>
           <a:prstGeom prst="rect">
             <a:avLst/>
@@ -12655,8 +13146,8 @@
         </p:nvSpPr>
         <p:spPr>
           <a:xfrm>
-            <a:off x="502920" y="4160520"/>
-            <a:ext cx="11201400" cy="384048"/>
+            <a:off x="502920" y="3703320"/>
+            <a:ext cx="11201400" cy="365760"/>
           </a:xfrm>
           <a:prstGeom prst="rect">
             <a:avLst/>
@@ -12681,13 +13172,13 @@
               </a:spcAft>
             </a:pPr>
             <a:r>
-              <a:rPr sz="1300" b="1">
+              <a:rPr sz="1200" b="1">
                 <a:solidFill>
                   <a:srgbClr val="FFFFFF"/>
                 </a:solidFill>
                 <a:latin typeface="맑은 고딕"/>
               </a:rPr>
-              <a:t>Reward  r = +2.83   ·   누적 Σr = +5.66</a:t>
+              <a:t>Reward  r = +2.83   ·   누적 Σr = +5.66   ·   clip(Σ항, ±10)</a:t>
             </a:r>
           </a:p>
         </p:txBody>
@@ -12700,54 +13191,8 @@
         </p:nvSpPr>
         <p:spPr>
           <a:xfrm>
-            <a:off x="502920" y="4544568"/>
-            <a:ext cx="11201400" cy="1234440"/>
-          </a:xfrm>
-          <a:prstGeom prst="rect">
-            <a:avLst/>
-          </a:prstGeom>
-          <a:solidFill>
-            <a:srgbClr val="EEF2F7"/>
-          </a:solidFill>
-          <a:ln w="12700">
-            <a:solidFill>
-              <a:srgbClr val="C4CFDB"/>
-            </a:solidFill>
-          </a:ln>
-          <a:effectLst/>
-        </p:spPr>
-        <p:style>
-          <a:lnRef idx="1">
-            <a:schemeClr val="accent1"/>
-          </a:lnRef>
-          <a:fillRef idx="3">
-            <a:schemeClr val="accent1"/>
-          </a:fillRef>
-          <a:effectRef idx="2">
-            <a:schemeClr val="accent1"/>
-          </a:effectRef>
-          <a:fontRef idx="minor">
-            <a:schemeClr val="lt1"/>
-          </a:fontRef>
-        </p:style>
-        <p:txBody>
-          <a:bodyPr rtlCol="0" anchor="ctr"/>
-          <a:lstStyle/>
-          <a:p>
-            <a:pPr algn="ctr"/>
-          </a:p>
-        </p:txBody>
-      </p:sp>
-      <p:sp>
-        <p:nvSpPr>
-          <p:cNvPr id="46" name="Rectangle 45"/>
-          <p:cNvSpPr/>
-          <p:nvPr/>
-        </p:nvSpPr>
-        <p:spPr>
-          <a:xfrm>
-            <a:off x="685800" y="4681728"/>
-            <a:ext cx="2606040" cy="868680"/>
+            <a:off x="502920" y="4133087"/>
+            <a:ext cx="11201400" cy="713232"/>
           </a:xfrm>
           <a:prstGeom prst="rect">
             <a:avLst/>
@@ -12786,14 +13231,58 @@
       </p:sp>
       <p:sp>
         <p:nvSpPr>
+          <p:cNvPr id="46" name="Rectangle 45"/>
+          <p:cNvSpPr/>
+          <p:nvPr/>
+        </p:nvSpPr>
+        <p:spPr>
+          <a:xfrm>
+            <a:off x="502920" y="4133087"/>
+            <a:ext cx="73152" cy="713232"/>
+          </a:xfrm>
+          <a:prstGeom prst="rect">
+            <a:avLst/>
+          </a:prstGeom>
+          <a:solidFill>
+            <a:srgbClr val="B33A3A"/>
+          </a:solidFill>
+          <a:ln>
+            <a:noFill/>
+          </a:ln>
+          <a:effectLst/>
+        </p:spPr>
+        <p:style>
+          <a:lnRef idx="1">
+            <a:schemeClr val="accent1"/>
+          </a:lnRef>
+          <a:fillRef idx="3">
+            <a:schemeClr val="accent1"/>
+          </a:fillRef>
+          <a:effectRef idx="2">
+            <a:schemeClr val="accent1"/>
+          </a:effectRef>
+          <a:fontRef idx="minor">
+            <a:schemeClr val="lt1"/>
+          </a:fontRef>
+        </p:style>
+        <p:txBody>
+          <a:bodyPr rtlCol="0" anchor="ctr"/>
+          <a:lstStyle/>
+          <a:p>
+            <a:pPr algn="ctr"/>
+          </a:p>
+        </p:txBody>
+      </p:sp>
+      <p:sp>
+        <p:nvSpPr>
           <p:cNvPr id="47" name="TextBox 46"/>
           <p:cNvSpPr txBox="1"/>
           <p:nvPr/>
         </p:nvSpPr>
         <p:spPr>
           <a:xfrm>
-            <a:off x="795528" y="4754880"/>
-            <a:ext cx="2377440" cy="320040"/>
+            <a:off x="658368" y="4187951"/>
+            <a:ext cx="1417320" cy="292608"/>
           </a:xfrm>
           <a:prstGeom prst="rect">
             <a:avLst/>
@@ -12837,8 +13326,8 @@
         </p:nvSpPr>
         <p:spPr>
           <a:xfrm>
-            <a:off x="795528" y="5074920"/>
-            <a:ext cx="2377440" cy="411480"/>
+            <a:off x="658368" y="4462272"/>
+            <a:ext cx="1417320" cy="292608"/>
           </a:xfrm>
           <a:prstGeom prst="rect">
             <a:avLst/>
@@ -12851,7 +13340,7 @@
           </a:bodyPr>
           <a:lstStyle/>
           <a:p>
-            <a:pPr algn="ctr">
+            <a:pPr algn="l">
               <a:lnSpc>
                 <a:spcPct val="100000"/>
               </a:lnSpc>
@@ -12863,7 +13352,7 @@
               </a:spcAft>
             </a:pPr>
             <a:r>
-              <a:rPr sz="1800" b="1">
+              <a:rPr sz="1400" b="1">
                 <a:solidFill>
                   <a:srgbClr val="B33A3A"/>
                 </a:solidFill>
@@ -12876,14 +13365,149 @@
       </p:sp>
       <p:sp>
         <p:nvSpPr>
-          <p:cNvPr id="49" name="Rectangle 48"/>
+          <p:cNvPr id="49" name="TextBox 48"/>
+          <p:cNvSpPr txBox="1"/>
+          <p:nvPr/>
+        </p:nvSpPr>
+        <p:spPr>
+          <a:xfrm>
+            <a:off x="2148840" y="4178807"/>
+            <a:ext cx="8732520" cy="256032"/>
+          </a:xfrm>
+          <a:prstGeom prst="rect">
+            <a:avLst/>
+          </a:prstGeom>
+          <a:noFill/>
+        </p:spPr>
+        <p:txBody>
+          <a:bodyPr wrap="square" anchor="t" lIns="36576" rIns="36576" tIns="18288" bIns="18288">
+            <a:spAutoFit/>
+          </a:bodyPr>
+          <a:lstStyle/>
+          <a:p>
+            <a:pPr algn="l">
+              <a:lnSpc>
+                <a:spcPct val="100000"/>
+              </a:lnSpc>
+              <a:spcBef>
+                <a:spcPts val="0"/>
+              </a:spcBef>
+              <a:spcAft>
+                <a:spcPts val="400"/>
+              </a:spcAft>
+            </a:pPr>
+            <a:r>
+              <a:rPr sz="950" b="0">
+                <a:solidFill>
+                  <a:srgbClr val="5C6670"/>
+                </a:solidFill>
+                <a:latin typeface="맑은 고딕"/>
+              </a:rPr>
+              <a:t>w_pacing · (|ideal − eff_before| − |ideal − eff_after|) / target</a:t>
+            </a:r>
+          </a:p>
+        </p:txBody>
+      </p:sp>
+      <p:sp>
+        <p:nvSpPr>
+          <p:cNvPr id="50" name="TextBox 49"/>
+          <p:cNvSpPr txBox="1"/>
+          <p:nvPr/>
+        </p:nvSpPr>
+        <p:spPr>
+          <a:xfrm>
+            <a:off x="2148840" y="4407407"/>
+            <a:ext cx="9052560" cy="256032"/>
+          </a:xfrm>
+          <a:prstGeom prst="rect">
+            <a:avLst/>
+          </a:prstGeom>
+          <a:noFill/>
+        </p:spPr>
+        <p:txBody>
+          <a:bodyPr wrap="square" anchor="t" lIns="36576" rIns="36576" tIns="18288" bIns="18288">
+            <a:spAutoFit/>
+          </a:bodyPr>
+          <a:lstStyle/>
+          <a:p>
+            <a:pPr algn="l">
+              <a:lnSpc>
+                <a:spcPct val="100000"/>
+              </a:lnSpc>
+              <a:spcBef>
+                <a:spcPts val="0"/>
+              </a:spcBef>
+              <a:spcAft>
+                <a:spcPts val="400"/>
+              </a:spcAft>
+            </a:pPr>
+            <a:r>
+              <a:rPr sz="950" b="0">
+                <a:solidFill>
+                  <a:srgbClr val="222A33"/>
+                </a:solidFill>
+                <a:latin typeface="맑은 고딕"/>
+              </a:rPr>
+              <a:t>ideal: target·min(t,horizon)/horizon = 8·0/1320 = 0.0 · eff: 0.0→1.0 (done=0, cover=0.0, wf=1) · 2.5·(0.0−1.0)/8</a:t>
+            </a:r>
+          </a:p>
+        </p:txBody>
+      </p:sp>
+      <p:sp>
+        <p:nvSpPr>
+          <p:cNvPr id="51" name="TextBox 50"/>
+          <p:cNvSpPr txBox="1"/>
+          <p:nvPr/>
+        </p:nvSpPr>
+        <p:spPr>
+          <a:xfrm>
+            <a:off x="10561320" y="4334255"/>
+            <a:ext cx="1005840" cy="347472"/>
+          </a:xfrm>
+          <a:prstGeom prst="rect">
+            <a:avLst/>
+          </a:prstGeom>
+          <a:noFill/>
+        </p:spPr>
+        <p:txBody>
+          <a:bodyPr wrap="square" anchor="ctr" lIns="36576" rIns="36576" tIns="18288" bIns="18288">
+            <a:spAutoFit/>
+          </a:bodyPr>
+          <a:lstStyle/>
+          <a:p>
+            <a:pPr algn="r">
+              <a:lnSpc>
+                <a:spcPct val="100000"/>
+              </a:lnSpc>
+              <a:spcBef>
+                <a:spcPts val="0"/>
+              </a:spcBef>
+              <a:spcAft>
+                <a:spcPts val="400"/>
+              </a:spcAft>
+            </a:pPr>
+            <a:r>
+              <a:rPr sz="1100" b="1">
+                <a:solidFill>
+                  <a:srgbClr val="B33A3A"/>
+                </a:solidFill>
+                <a:latin typeface="맑은 고딕"/>
+              </a:rPr>
+              <a:t>= -0.31</a:t>
+            </a:r>
+          </a:p>
+        </p:txBody>
+      </p:sp>
+      <p:sp>
+        <p:nvSpPr>
+          <p:cNvPr id="52" name="Rectangle 51"/>
           <p:cNvSpPr/>
           <p:nvPr/>
         </p:nvSpPr>
         <p:spPr>
           <a:xfrm>
-            <a:off x="3383280" y="4681728"/>
-            <a:ext cx="2606040" cy="868680"/>
+            <a:off x="502920" y="4901183"/>
+            <a:ext cx="11201400" cy="713232"/>
           </a:xfrm>
           <a:prstGeom prst="rect">
             <a:avLst/>
@@ -12922,14 +13546,58 @@
       </p:sp>
       <p:sp>
         <p:nvSpPr>
-          <p:cNvPr id="50" name="TextBox 49"/>
-          <p:cNvSpPr txBox="1"/>
-          <p:nvPr/>
-        </p:nvSpPr>
-        <p:spPr>
-          <a:xfrm>
-            <a:off x="3493008" y="4754880"/>
-            <a:ext cx="2377440" cy="320040"/>
+          <p:cNvPr id="53" name="Rectangle 52"/>
+          <p:cNvSpPr/>
+          <p:nvPr/>
+        </p:nvSpPr>
+        <p:spPr>
+          <a:xfrm>
+            <a:off x="502920" y="4901183"/>
+            <a:ext cx="73152" cy="713232"/>
+          </a:xfrm>
+          <a:prstGeom prst="rect">
+            <a:avLst/>
+          </a:prstGeom>
+          <a:solidFill>
+            <a:srgbClr val="2E7D4F"/>
+          </a:solidFill>
+          <a:ln>
+            <a:noFill/>
+          </a:ln>
+          <a:effectLst/>
+        </p:spPr>
+        <p:style>
+          <a:lnRef idx="1">
+            <a:schemeClr val="accent1"/>
+          </a:lnRef>
+          <a:fillRef idx="3">
+            <a:schemeClr val="accent1"/>
+          </a:fillRef>
+          <a:effectRef idx="2">
+            <a:schemeClr val="accent1"/>
+          </a:effectRef>
+          <a:fontRef idx="minor">
+            <a:schemeClr val="lt1"/>
+          </a:fontRef>
+        </p:style>
+        <p:txBody>
+          <a:bodyPr rtlCol="0" anchor="ctr"/>
+          <a:lstStyle/>
+          <a:p>
+            <a:pPr algn="ctr"/>
+          </a:p>
+        </p:txBody>
+      </p:sp>
+      <p:sp>
+        <p:nvSpPr>
+          <p:cNvPr id="54" name="TextBox 53"/>
+          <p:cNvSpPr txBox="1"/>
+          <p:nvPr/>
+        </p:nvSpPr>
+        <p:spPr>
+          <a:xfrm>
+            <a:off x="658368" y="4956047"/>
+            <a:ext cx="1417320" cy="292608"/>
           </a:xfrm>
           <a:prstGeom prst="rect">
             <a:avLst/>
@@ -12967,14 +13635,14 @@
       </p:sp>
       <p:sp>
         <p:nvSpPr>
-          <p:cNvPr id="51" name="TextBox 50"/>
-          <p:cNvSpPr txBox="1"/>
-          <p:nvPr/>
-        </p:nvSpPr>
-        <p:spPr>
-          <a:xfrm>
-            <a:off x="3493008" y="5074920"/>
-            <a:ext cx="2377440" cy="411480"/>
+          <p:cNvPr id="55" name="TextBox 54"/>
+          <p:cNvSpPr txBox="1"/>
+          <p:nvPr/>
+        </p:nvSpPr>
+        <p:spPr>
+          <a:xfrm>
+            <a:off x="658368" y="5230368"/>
+            <a:ext cx="1417320" cy="292608"/>
           </a:xfrm>
           <a:prstGeom prst="rect">
             <a:avLst/>
@@ -12987,7 +13655,7 @@
           </a:bodyPr>
           <a:lstStyle/>
           <a:p>
-            <a:pPr algn="ctr">
+            <a:pPr algn="l">
               <a:lnSpc>
                 <a:spcPct val="100000"/>
               </a:lnSpc>
@@ -12999,7 +13667,7 @@
               </a:spcAft>
             </a:pPr>
             <a:r>
-              <a:rPr sz="1800" b="1">
+              <a:rPr sz="1400" b="1">
                 <a:solidFill>
                   <a:srgbClr val="2E7D4F"/>
                 </a:solidFill>
@@ -13012,14 +13680,149 @@
       </p:sp>
       <p:sp>
         <p:nvSpPr>
-          <p:cNvPr id="52" name="Rectangle 51"/>
+          <p:cNvPr id="56" name="TextBox 55"/>
+          <p:cNvSpPr txBox="1"/>
+          <p:nvPr/>
+        </p:nvSpPr>
+        <p:spPr>
+          <a:xfrm>
+            <a:off x="2148840" y="4946903"/>
+            <a:ext cx="8732520" cy="256032"/>
+          </a:xfrm>
+          <a:prstGeom prst="rect">
+            <a:avLst/>
+          </a:prstGeom>
+          <a:noFill/>
+        </p:spPr>
+        <p:txBody>
+          <a:bodyPr wrap="square" anchor="t" lIns="36576" rIns="36576" tIns="18288" bIns="18288">
+            <a:spAutoFit/>
+          </a:bodyPr>
+          <a:lstStyle/>
+          <a:p>
+            <a:pPr algn="l">
+              <a:lnSpc>
+                <a:spcPct val="100000"/>
+              </a:lnSpc>
+              <a:spcBef>
+                <a:spcPts val="0"/>
+              </a:spcBef>
+              <a:spcAft>
+                <a:spcPts val="400"/>
+              </a:spcAft>
+            </a:pPr>
+            <a:r>
+              <a:rPr sz="950" b="0">
+                <a:solidFill>
+                  <a:srgbClr val="5C6670"/>
+                </a:solidFill>
+                <a:latin typeface="맑은 고딕"/>
+              </a:rPr>
+              <a:t>w_plan_hit · (gap_before − gap_after) / target   ;  gap = max(target − done, 0)</a:t>
+            </a:r>
+          </a:p>
+        </p:txBody>
+      </p:sp>
+      <p:sp>
+        <p:nvSpPr>
+          <p:cNvPr id="57" name="TextBox 56"/>
+          <p:cNvSpPr txBox="1"/>
+          <p:nvPr/>
+        </p:nvSpPr>
+        <p:spPr>
+          <a:xfrm>
+            <a:off x="2148840" y="5175503"/>
+            <a:ext cx="9052560" cy="256032"/>
+          </a:xfrm>
+          <a:prstGeom prst="rect">
+            <a:avLst/>
+          </a:prstGeom>
+          <a:noFill/>
+        </p:spPr>
+        <p:txBody>
+          <a:bodyPr wrap="square" anchor="t" lIns="36576" rIns="36576" tIns="18288" bIns="18288">
+            <a:spAutoFit/>
+          </a:bodyPr>
+          <a:lstStyle/>
+          <a:p>
+            <a:pPr algn="l">
+              <a:lnSpc>
+                <a:spcPct val="100000"/>
+              </a:lnSpc>
+              <a:spcBef>
+                <a:spcPts val="0"/>
+              </a:spcBef>
+              <a:spcAft>
+                <a:spcPts val="400"/>
+              </a:spcAft>
+            </a:pPr>
+            <a:r>
+              <a:rPr sz="950" b="0">
+                <a:solidFill>
+                  <a:srgbClr val="222A33"/>
+                </a:solidFill>
+                <a:latin typeface="맑은 고딕"/>
+              </a:rPr>
+              <a:t>gap: 8→7 (done 0→1, target=8) · 1.0·(8−7)/8</a:t>
+            </a:r>
+          </a:p>
+        </p:txBody>
+      </p:sp>
+      <p:sp>
+        <p:nvSpPr>
+          <p:cNvPr id="58" name="TextBox 57"/>
+          <p:cNvSpPr txBox="1"/>
+          <p:nvPr/>
+        </p:nvSpPr>
+        <p:spPr>
+          <a:xfrm>
+            <a:off x="10561320" y="5102351"/>
+            <a:ext cx="1005840" cy="347472"/>
+          </a:xfrm>
+          <a:prstGeom prst="rect">
+            <a:avLst/>
+          </a:prstGeom>
+          <a:noFill/>
+        </p:spPr>
+        <p:txBody>
+          <a:bodyPr wrap="square" anchor="ctr" lIns="36576" rIns="36576" tIns="18288" bIns="18288">
+            <a:spAutoFit/>
+          </a:bodyPr>
+          <a:lstStyle/>
+          <a:p>
+            <a:pPr algn="r">
+              <a:lnSpc>
+                <a:spcPct val="100000"/>
+              </a:lnSpc>
+              <a:spcBef>
+                <a:spcPts val="0"/>
+              </a:spcBef>
+              <a:spcAft>
+                <a:spcPts val="400"/>
+              </a:spcAft>
+            </a:pPr>
+            <a:r>
+              <a:rPr sz="1100" b="1">
+                <a:solidFill>
+                  <a:srgbClr val="2E7D4F"/>
+                </a:solidFill>
+                <a:latin typeface="맑은 고딕"/>
+              </a:rPr>
+              <a:t>= +0.14</a:t>
+            </a:r>
+          </a:p>
+        </p:txBody>
+      </p:sp>
+      <p:sp>
+        <p:nvSpPr>
+          <p:cNvPr id="59" name="Rectangle 58"/>
           <p:cNvSpPr/>
           <p:nvPr/>
         </p:nvSpPr>
         <p:spPr>
           <a:xfrm>
-            <a:off x="6080760" y="4681728"/>
-            <a:ext cx="2606040" cy="868680"/>
+            <a:off x="502920" y="5669279"/>
+            <a:ext cx="11201400" cy="713232"/>
           </a:xfrm>
           <a:prstGeom prst="rect">
             <a:avLst/>
@@ -13058,14 +13861,58 @@
       </p:sp>
       <p:sp>
         <p:nvSpPr>
-          <p:cNvPr id="53" name="TextBox 52"/>
-          <p:cNvSpPr txBox="1"/>
-          <p:nvPr/>
-        </p:nvSpPr>
-        <p:spPr>
-          <a:xfrm>
-            <a:off x="6190488" y="4754880"/>
-            <a:ext cx="2377440" cy="320040"/>
+          <p:cNvPr id="60" name="Rectangle 59"/>
+          <p:cNvSpPr/>
+          <p:nvPr/>
+        </p:nvSpPr>
+        <p:spPr>
+          <a:xfrm>
+            <a:off x="502920" y="5669279"/>
+            <a:ext cx="73152" cy="713232"/>
+          </a:xfrm>
+          <a:prstGeom prst="rect">
+            <a:avLst/>
+          </a:prstGeom>
+          <a:solidFill>
+            <a:srgbClr val="2E7D4F"/>
+          </a:solidFill>
+          <a:ln>
+            <a:noFill/>
+          </a:ln>
+          <a:effectLst/>
+        </p:spPr>
+        <p:style>
+          <a:lnRef idx="1">
+            <a:schemeClr val="accent1"/>
+          </a:lnRef>
+          <a:fillRef idx="3">
+            <a:schemeClr val="accent1"/>
+          </a:fillRef>
+          <a:effectRef idx="2">
+            <a:schemeClr val="accent1"/>
+          </a:effectRef>
+          <a:fontRef idx="minor">
+            <a:schemeClr val="lt1"/>
+          </a:fontRef>
+        </p:style>
+        <p:txBody>
+          <a:bodyPr rtlCol="0" anchor="ctr"/>
+          <a:lstStyle/>
+          <a:p>
+            <a:pPr algn="ctr"/>
+          </a:p>
+        </p:txBody>
+      </p:sp>
+      <p:sp>
+        <p:nvSpPr>
+          <p:cNvPr id="61" name="TextBox 60"/>
+          <p:cNvSpPr txBox="1"/>
+          <p:nvPr/>
+        </p:nvSpPr>
+        <p:spPr>
+          <a:xfrm>
+            <a:off x="658368" y="5724143"/>
+            <a:ext cx="1417320" cy="292608"/>
           </a:xfrm>
           <a:prstGeom prst="rect">
             <a:avLst/>
@@ -13103,14 +13950,14 @@
       </p:sp>
       <p:sp>
         <p:nvSpPr>
-          <p:cNvPr id="54" name="TextBox 53"/>
-          <p:cNvSpPr txBox="1"/>
-          <p:nvPr/>
-        </p:nvSpPr>
-        <p:spPr>
-          <a:xfrm>
-            <a:off x="6190488" y="5074920"/>
-            <a:ext cx="2377440" cy="411480"/>
+          <p:cNvPr id="62" name="TextBox 61"/>
+          <p:cNvSpPr txBox="1"/>
+          <p:nvPr/>
+        </p:nvSpPr>
+        <p:spPr>
+          <a:xfrm>
+            <a:off x="658368" y="5998464"/>
+            <a:ext cx="1417320" cy="292608"/>
           </a:xfrm>
           <a:prstGeom prst="rect">
             <a:avLst/>
@@ -13123,7 +13970,7 @@
           </a:bodyPr>
           <a:lstStyle/>
           <a:p>
-            <a:pPr algn="ctr">
+            <a:pPr algn="l">
               <a:lnSpc>
                 <a:spcPct val="100000"/>
               </a:lnSpc>
@@ -13135,7 +13982,7 @@
               </a:spcAft>
             </a:pPr>
             <a:r>
-              <a:rPr sz="1800" b="1">
+              <a:rPr sz="1400" b="1">
                 <a:solidFill>
                   <a:srgbClr val="2E7D4F"/>
                 </a:solidFill>
@@ -13148,14 +13995,149 @@
       </p:sp>
       <p:sp>
         <p:nvSpPr>
-          <p:cNvPr id="55" name="Rectangle 54"/>
+          <p:cNvPr id="63" name="TextBox 62"/>
+          <p:cNvSpPr txBox="1"/>
+          <p:nvPr/>
+        </p:nvSpPr>
+        <p:spPr>
+          <a:xfrm>
+            <a:off x="2148840" y="5714999"/>
+            <a:ext cx="8732520" cy="256032"/>
+          </a:xfrm>
+          <a:prstGeom prst="rect">
+            <a:avLst/>
+          </a:prstGeom>
+          <a:noFill/>
+        </p:spPr>
+        <p:txBody>
+          <a:bodyPr wrap="square" anchor="t" lIns="36576" rIns="36576" tIns="18288" bIns="18288">
+            <a:spAutoFit/>
+          </a:bodyPr>
+          <a:lstStyle/>
+          <a:p>
+            <a:pPr algn="l">
+              <a:lnSpc>
+                <a:spcPct val="100000"/>
+              </a:lnSpc>
+              <a:spcBef>
+                <a:spcPts val="0"/>
+              </a:spcBef>
+              <a:spcAft>
+                <a:spcPts val="400"/>
+              </a:spcAft>
+            </a:pPr>
+            <a:r>
+              <a:rPr sz="950" b="0">
+                <a:solidFill>
+                  <a:srgbClr val="5C6670"/>
+                </a:solidFill>
+                <a:latin typeface="맑은 고딕"/>
+              </a:rPr>
+              <a:t>w_bulk · min(N / takt예산, 1)</a:t>
+            </a:r>
+          </a:p>
+        </p:txBody>
+      </p:sp>
+      <p:sp>
+        <p:nvSpPr>
+          <p:cNvPr id="64" name="TextBox 63"/>
+          <p:cNvSpPr txBox="1"/>
+          <p:nvPr/>
+        </p:nvSpPr>
+        <p:spPr>
+          <a:xfrm>
+            <a:off x="2148840" y="5943599"/>
+            <a:ext cx="9052560" cy="256032"/>
+          </a:xfrm>
+          <a:prstGeom prst="rect">
+            <a:avLst/>
+          </a:prstGeom>
+          <a:noFill/>
+        </p:spPr>
+        <p:txBody>
+          <a:bodyPr wrap="square" anchor="t" lIns="36576" rIns="36576" tIns="18288" bIns="18288">
+            <a:spAutoFit/>
+          </a:bodyPr>
+          <a:lstStyle/>
+          <a:p>
+            <a:pPr algn="l">
+              <a:lnSpc>
+                <a:spcPct val="100000"/>
+              </a:lnSpc>
+              <a:spcBef>
+                <a:spcPts val="0"/>
+              </a:spcBef>
+              <a:spcAft>
+                <a:spcPts val="400"/>
+              </a:spcAft>
+            </a:pPr>
+            <a:r>
+              <a:rPr sz="950" b="0">
+                <a:solidFill>
+                  <a:srgbClr val="222A33"/>
+                </a:solidFill>
+                <a:latin typeface="맑은 고딕"/>
+              </a:rPr>
+              <a:t>3.0 · min(6 / 6, 1) = 3.0 · 1.0</a:t>
+            </a:r>
+          </a:p>
+        </p:txBody>
+      </p:sp>
+      <p:sp>
+        <p:nvSpPr>
+          <p:cNvPr id="65" name="TextBox 64"/>
+          <p:cNvSpPr txBox="1"/>
+          <p:nvPr/>
+        </p:nvSpPr>
+        <p:spPr>
+          <a:xfrm>
+            <a:off x="10561320" y="5870447"/>
+            <a:ext cx="1005840" cy="347472"/>
+          </a:xfrm>
+          <a:prstGeom prst="rect">
+            <a:avLst/>
+          </a:prstGeom>
+          <a:noFill/>
+        </p:spPr>
+        <p:txBody>
+          <a:bodyPr wrap="square" anchor="ctr" lIns="36576" rIns="36576" tIns="18288" bIns="18288">
+            <a:spAutoFit/>
+          </a:bodyPr>
+          <a:lstStyle/>
+          <a:p>
+            <a:pPr algn="r">
+              <a:lnSpc>
+                <a:spcPct val="100000"/>
+              </a:lnSpc>
+              <a:spcBef>
+                <a:spcPts val="0"/>
+              </a:spcBef>
+              <a:spcAft>
+                <a:spcPts val="400"/>
+              </a:spcAft>
+            </a:pPr>
+            <a:r>
+              <a:rPr sz="1100" b="1">
+                <a:solidFill>
+                  <a:srgbClr val="2E7D4F"/>
+                </a:solidFill>
+                <a:latin typeface="맑은 고딕"/>
+              </a:rPr>
+              <a:t>= +3.00</a:t>
+            </a:r>
+          </a:p>
+        </p:txBody>
+      </p:sp>
+      <p:sp>
+        <p:nvSpPr>
+          <p:cNvPr id="66" name="Rectangle 65"/>
           <p:cNvSpPr/>
           <p:nvPr/>
         </p:nvSpPr>
         <p:spPr>
           <a:xfrm>
-            <a:off x="502920" y="5897880"/>
-            <a:ext cx="11201400" cy="438912"/>
+            <a:off x="502920" y="6455663"/>
+            <a:ext cx="11201400" cy="347472"/>
           </a:xfrm>
           <a:prstGeom prst="rect">
             <a:avLst/>
@@ -13192,14 +14174,14 @@
       </p:sp>
       <p:sp>
         <p:nvSpPr>
-          <p:cNvPr id="56" name="TextBox 55"/>
-          <p:cNvSpPr txBox="1"/>
-          <p:nvPr/>
-        </p:nvSpPr>
-        <p:spPr>
-          <a:xfrm>
-            <a:off x="685800" y="5897880"/>
-            <a:ext cx="10881360" cy="438912"/>
+          <p:cNvPr id="67" name="TextBox 66"/>
+          <p:cNvSpPr txBox="1"/>
+          <p:nvPr/>
+        </p:nvSpPr>
+        <p:spPr>
+          <a:xfrm>
+            <a:off x="685800" y="6455663"/>
+            <a:ext cx="10881360" cy="347472"/>
           </a:xfrm>
           <a:prstGeom prst="rect">
             <a:avLst/>
@@ -13224,22 +14206,22 @@
               </a:spcAft>
             </a:pPr>
             <a:r>
-              <a:rPr sz="1050" b="1">
+              <a:rPr sz="1000" b="1">
                 <a:solidFill>
                   <a:srgbClr val="2E6FB0"/>
                 </a:solidFill>
                 <a:latin typeface="맑은 고딕"/>
               </a:rPr>
-              <a:t>계산  </a:t>
-            </a:r>
-            <a:r>
-              <a:rPr sz="1050" b="0">
+              <a:t>합산  </a:t>
+            </a:r>
+            <a:r>
+              <a:rPr sz="1000" b="0">
                 <a:solidFill>
                   <a:srgbClr val="222A33"/>
                 </a:solidFill>
                 <a:latin typeface="맑은 고딕"/>
               </a:rPr>
-              <a:t>페이싱 -0.31 + 계획 달성 +0.14 + 블록 보너스 +3.00</a:t>
+              <a:t>페이싱 -0.31 + 계획 달성 +0.14 + 블록 보너스 +3.00  →  r = +2.83</a:t>
             </a:r>
           </a:p>
         </p:txBody>
@@ -15074,8 +16056,8 @@
         </p:blipFill>
         <p:spPr>
           <a:xfrm>
-            <a:off x="3337560" y="1353312"/>
-            <a:ext cx="5532120" cy="1786901"/>
+            <a:off x="3337560" y="1325880"/>
+            <a:ext cx="5532120" cy="2240280"/>
           </a:xfrm>
           <a:prstGeom prst="rect">
             <a:avLst/>
@@ -15090,8 +16072,8 @@
         </p:nvSpPr>
         <p:spPr>
           <a:xfrm>
-            <a:off x="502920" y="4160520"/>
-            <a:ext cx="11201400" cy="384048"/>
+            <a:off x="502920" y="3703320"/>
+            <a:ext cx="11201400" cy="365760"/>
           </a:xfrm>
           <a:prstGeom prst="rect">
             <a:avLst/>
@@ -15134,8 +16116,8 @@
         </p:nvSpPr>
         <p:spPr>
           <a:xfrm>
-            <a:off x="502920" y="4160520"/>
-            <a:ext cx="11201400" cy="384048"/>
+            <a:off x="502920" y="3703320"/>
+            <a:ext cx="11201400" cy="365760"/>
           </a:xfrm>
           <a:prstGeom prst="rect">
             <a:avLst/>
@@ -15160,13 +16142,13 @@
               </a:spcAft>
             </a:pPr>
             <a:r>
-              <a:rPr sz="1300" b="1">
+              <a:rPr sz="1200" b="1">
                 <a:solidFill>
                   <a:srgbClr val="FFFFFF"/>
                 </a:solidFill>
                 <a:latin typeface="맑은 고딕"/>
               </a:rPr>
-              <a:t>Reward  r = +2.83   ·   누적 Σr = +8.49</a:t>
+              <a:t>Reward  r = +2.83   ·   누적 Σr = +8.49   ·   clip(Σ항, ±10)</a:t>
             </a:r>
           </a:p>
         </p:txBody>
@@ -15179,54 +16161,8 @@
         </p:nvSpPr>
         <p:spPr>
           <a:xfrm>
-            <a:off x="502920" y="4544568"/>
-            <a:ext cx="11201400" cy="1234440"/>
-          </a:xfrm>
-          <a:prstGeom prst="rect">
-            <a:avLst/>
-          </a:prstGeom>
-          <a:solidFill>
-            <a:srgbClr val="EEF2F7"/>
-          </a:solidFill>
-          <a:ln w="12700">
-            <a:solidFill>
-              <a:srgbClr val="C4CFDB"/>
-            </a:solidFill>
-          </a:ln>
-          <a:effectLst/>
-        </p:spPr>
-        <p:style>
-          <a:lnRef idx="1">
-            <a:schemeClr val="accent1"/>
-          </a:lnRef>
-          <a:fillRef idx="3">
-            <a:schemeClr val="accent1"/>
-          </a:fillRef>
-          <a:effectRef idx="2">
-            <a:schemeClr val="accent1"/>
-          </a:effectRef>
-          <a:fontRef idx="minor">
-            <a:schemeClr val="lt1"/>
-          </a:fontRef>
-        </p:style>
-        <p:txBody>
-          <a:bodyPr rtlCol="0" anchor="ctr"/>
-          <a:lstStyle/>
-          <a:p>
-            <a:pPr algn="ctr"/>
-          </a:p>
-        </p:txBody>
-      </p:sp>
-      <p:sp>
-        <p:nvSpPr>
-          <p:cNvPr id="46" name="Rectangle 45"/>
-          <p:cNvSpPr/>
-          <p:nvPr/>
-        </p:nvSpPr>
-        <p:spPr>
-          <a:xfrm>
-            <a:off x="685800" y="4681728"/>
-            <a:ext cx="2606040" cy="868680"/>
+            <a:off x="502920" y="4133087"/>
+            <a:ext cx="11201400" cy="713232"/>
           </a:xfrm>
           <a:prstGeom prst="rect">
             <a:avLst/>
@@ -15265,14 +16201,58 @@
       </p:sp>
       <p:sp>
         <p:nvSpPr>
+          <p:cNvPr id="46" name="Rectangle 45"/>
+          <p:cNvSpPr/>
+          <p:nvPr/>
+        </p:nvSpPr>
+        <p:spPr>
+          <a:xfrm>
+            <a:off x="502920" y="4133087"/>
+            <a:ext cx="73152" cy="713232"/>
+          </a:xfrm>
+          <a:prstGeom prst="rect">
+            <a:avLst/>
+          </a:prstGeom>
+          <a:solidFill>
+            <a:srgbClr val="B33A3A"/>
+          </a:solidFill>
+          <a:ln>
+            <a:noFill/>
+          </a:ln>
+          <a:effectLst/>
+        </p:spPr>
+        <p:style>
+          <a:lnRef idx="1">
+            <a:schemeClr val="accent1"/>
+          </a:lnRef>
+          <a:fillRef idx="3">
+            <a:schemeClr val="accent1"/>
+          </a:fillRef>
+          <a:effectRef idx="2">
+            <a:schemeClr val="accent1"/>
+          </a:effectRef>
+          <a:fontRef idx="minor">
+            <a:schemeClr val="lt1"/>
+          </a:fontRef>
+        </p:style>
+        <p:txBody>
+          <a:bodyPr rtlCol="0" anchor="ctr"/>
+          <a:lstStyle/>
+          <a:p>
+            <a:pPr algn="ctr"/>
+          </a:p>
+        </p:txBody>
+      </p:sp>
+      <p:sp>
+        <p:nvSpPr>
           <p:cNvPr id="47" name="TextBox 46"/>
           <p:cNvSpPr txBox="1"/>
           <p:nvPr/>
         </p:nvSpPr>
         <p:spPr>
           <a:xfrm>
-            <a:off x="795528" y="4754880"/>
-            <a:ext cx="2377440" cy="320040"/>
+            <a:off x="658368" y="4187951"/>
+            <a:ext cx="1417320" cy="292608"/>
           </a:xfrm>
           <a:prstGeom prst="rect">
             <a:avLst/>
@@ -15316,8 +16296,8 @@
         </p:nvSpPr>
         <p:spPr>
           <a:xfrm>
-            <a:off x="795528" y="5074920"/>
-            <a:ext cx="2377440" cy="411480"/>
+            <a:off x="658368" y="4462272"/>
+            <a:ext cx="1417320" cy="292608"/>
           </a:xfrm>
           <a:prstGeom prst="rect">
             <a:avLst/>
@@ -15330,7 +16310,7 @@
           </a:bodyPr>
           <a:lstStyle/>
           <a:p>
-            <a:pPr algn="ctr">
+            <a:pPr algn="l">
               <a:lnSpc>
                 <a:spcPct val="100000"/>
               </a:lnSpc>
@@ -15342,7 +16322,7 @@
               </a:spcAft>
             </a:pPr>
             <a:r>
-              <a:rPr sz="1800" b="1">
+              <a:rPr sz="1400" b="1">
                 <a:solidFill>
                   <a:srgbClr val="B33A3A"/>
                 </a:solidFill>
@@ -15355,14 +16335,149 @@
       </p:sp>
       <p:sp>
         <p:nvSpPr>
-          <p:cNvPr id="49" name="Rectangle 48"/>
+          <p:cNvPr id="49" name="TextBox 48"/>
+          <p:cNvSpPr txBox="1"/>
+          <p:nvPr/>
+        </p:nvSpPr>
+        <p:spPr>
+          <a:xfrm>
+            <a:off x="2148840" y="4178807"/>
+            <a:ext cx="8732520" cy="256032"/>
+          </a:xfrm>
+          <a:prstGeom prst="rect">
+            <a:avLst/>
+          </a:prstGeom>
+          <a:noFill/>
+        </p:spPr>
+        <p:txBody>
+          <a:bodyPr wrap="square" anchor="t" lIns="36576" rIns="36576" tIns="18288" bIns="18288">
+            <a:spAutoFit/>
+          </a:bodyPr>
+          <a:lstStyle/>
+          <a:p>
+            <a:pPr algn="l">
+              <a:lnSpc>
+                <a:spcPct val="100000"/>
+              </a:lnSpc>
+              <a:spcBef>
+                <a:spcPts val="0"/>
+              </a:spcBef>
+              <a:spcAft>
+                <a:spcPts val="400"/>
+              </a:spcAft>
+            </a:pPr>
+            <a:r>
+              <a:rPr sz="950" b="0">
+                <a:solidFill>
+                  <a:srgbClr val="5C6670"/>
+                </a:solidFill>
+                <a:latin typeface="맑은 고딕"/>
+              </a:rPr>
+              <a:t>w_pacing · (|ideal − eff_before| − |ideal − eff_after|) / target</a:t>
+            </a:r>
+          </a:p>
+        </p:txBody>
+      </p:sp>
+      <p:sp>
+        <p:nvSpPr>
+          <p:cNvPr id="50" name="TextBox 49"/>
+          <p:cNvSpPr txBox="1"/>
+          <p:nvPr/>
+        </p:nvSpPr>
+        <p:spPr>
+          <a:xfrm>
+            <a:off x="2148840" y="4407407"/>
+            <a:ext cx="9052560" cy="256032"/>
+          </a:xfrm>
+          <a:prstGeom prst="rect">
+            <a:avLst/>
+          </a:prstGeom>
+          <a:noFill/>
+        </p:spPr>
+        <p:txBody>
+          <a:bodyPr wrap="square" anchor="t" lIns="36576" rIns="36576" tIns="18288" bIns="18288">
+            <a:spAutoFit/>
+          </a:bodyPr>
+          <a:lstStyle/>
+          <a:p>
+            <a:pPr algn="l">
+              <a:lnSpc>
+                <a:spcPct val="100000"/>
+              </a:lnSpc>
+              <a:spcBef>
+                <a:spcPts val="0"/>
+              </a:spcBef>
+              <a:spcAft>
+                <a:spcPts val="400"/>
+              </a:spcAft>
+            </a:pPr>
+            <a:r>
+              <a:rPr sz="950" b="0">
+                <a:solidFill>
+                  <a:srgbClr val="222A33"/>
+                </a:solidFill>
+                <a:latin typeface="맑은 고딕"/>
+              </a:rPr>
+              <a:t>ideal: target·min(t,horizon)/horizon = 8·0/1320 = 0.0 · eff: 0.0→1.0 (done=0, cover=0.0, wf=1) · 2.5·(0.0−1.0)/8</a:t>
+            </a:r>
+          </a:p>
+        </p:txBody>
+      </p:sp>
+      <p:sp>
+        <p:nvSpPr>
+          <p:cNvPr id="51" name="TextBox 50"/>
+          <p:cNvSpPr txBox="1"/>
+          <p:nvPr/>
+        </p:nvSpPr>
+        <p:spPr>
+          <a:xfrm>
+            <a:off x="10561320" y="4334255"/>
+            <a:ext cx="1005840" cy="347472"/>
+          </a:xfrm>
+          <a:prstGeom prst="rect">
+            <a:avLst/>
+          </a:prstGeom>
+          <a:noFill/>
+        </p:spPr>
+        <p:txBody>
+          <a:bodyPr wrap="square" anchor="ctr" lIns="36576" rIns="36576" tIns="18288" bIns="18288">
+            <a:spAutoFit/>
+          </a:bodyPr>
+          <a:lstStyle/>
+          <a:p>
+            <a:pPr algn="r">
+              <a:lnSpc>
+                <a:spcPct val="100000"/>
+              </a:lnSpc>
+              <a:spcBef>
+                <a:spcPts val="0"/>
+              </a:spcBef>
+              <a:spcAft>
+                <a:spcPts val="400"/>
+              </a:spcAft>
+            </a:pPr>
+            <a:r>
+              <a:rPr sz="1100" b="1">
+                <a:solidFill>
+                  <a:srgbClr val="B33A3A"/>
+                </a:solidFill>
+                <a:latin typeface="맑은 고딕"/>
+              </a:rPr>
+              <a:t>= -0.31</a:t>
+            </a:r>
+          </a:p>
+        </p:txBody>
+      </p:sp>
+      <p:sp>
+        <p:nvSpPr>
+          <p:cNvPr id="52" name="Rectangle 51"/>
           <p:cNvSpPr/>
           <p:nvPr/>
         </p:nvSpPr>
         <p:spPr>
           <a:xfrm>
-            <a:off x="3383280" y="4681728"/>
-            <a:ext cx="2606040" cy="868680"/>
+            <a:off x="502920" y="4901183"/>
+            <a:ext cx="11201400" cy="713232"/>
           </a:xfrm>
           <a:prstGeom prst="rect">
             <a:avLst/>
@@ -15401,14 +16516,58 @@
       </p:sp>
       <p:sp>
         <p:nvSpPr>
-          <p:cNvPr id="50" name="TextBox 49"/>
-          <p:cNvSpPr txBox="1"/>
-          <p:nvPr/>
-        </p:nvSpPr>
-        <p:spPr>
-          <a:xfrm>
-            <a:off x="3493008" y="4754880"/>
-            <a:ext cx="2377440" cy="320040"/>
+          <p:cNvPr id="53" name="Rectangle 52"/>
+          <p:cNvSpPr/>
+          <p:nvPr/>
+        </p:nvSpPr>
+        <p:spPr>
+          <a:xfrm>
+            <a:off x="502920" y="4901183"/>
+            <a:ext cx="73152" cy="713232"/>
+          </a:xfrm>
+          <a:prstGeom prst="rect">
+            <a:avLst/>
+          </a:prstGeom>
+          <a:solidFill>
+            <a:srgbClr val="2E7D4F"/>
+          </a:solidFill>
+          <a:ln>
+            <a:noFill/>
+          </a:ln>
+          <a:effectLst/>
+        </p:spPr>
+        <p:style>
+          <a:lnRef idx="1">
+            <a:schemeClr val="accent1"/>
+          </a:lnRef>
+          <a:fillRef idx="3">
+            <a:schemeClr val="accent1"/>
+          </a:fillRef>
+          <a:effectRef idx="2">
+            <a:schemeClr val="accent1"/>
+          </a:effectRef>
+          <a:fontRef idx="minor">
+            <a:schemeClr val="lt1"/>
+          </a:fontRef>
+        </p:style>
+        <p:txBody>
+          <a:bodyPr rtlCol="0" anchor="ctr"/>
+          <a:lstStyle/>
+          <a:p>
+            <a:pPr algn="ctr"/>
+          </a:p>
+        </p:txBody>
+      </p:sp>
+      <p:sp>
+        <p:nvSpPr>
+          <p:cNvPr id="54" name="TextBox 53"/>
+          <p:cNvSpPr txBox="1"/>
+          <p:nvPr/>
+        </p:nvSpPr>
+        <p:spPr>
+          <a:xfrm>
+            <a:off x="658368" y="4956047"/>
+            <a:ext cx="1417320" cy="292608"/>
           </a:xfrm>
           <a:prstGeom prst="rect">
             <a:avLst/>
@@ -15446,14 +16605,14 @@
       </p:sp>
       <p:sp>
         <p:nvSpPr>
-          <p:cNvPr id="51" name="TextBox 50"/>
-          <p:cNvSpPr txBox="1"/>
-          <p:nvPr/>
-        </p:nvSpPr>
-        <p:spPr>
-          <a:xfrm>
-            <a:off x="3493008" y="5074920"/>
-            <a:ext cx="2377440" cy="411480"/>
+          <p:cNvPr id="55" name="TextBox 54"/>
+          <p:cNvSpPr txBox="1"/>
+          <p:nvPr/>
+        </p:nvSpPr>
+        <p:spPr>
+          <a:xfrm>
+            <a:off x="658368" y="5230368"/>
+            <a:ext cx="1417320" cy="292608"/>
           </a:xfrm>
           <a:prstGeom prst="rect">
             <a:avLst/>
@@ -15466,7 +16625,7 @@
           </a:bodyPr>
           <a:lstStyle/>
           <a:p>
-            <a:pPr algn="ctr">
+            <a:pPr algn="l">
               <a:lnSpc>
                 <a:spcPct val="100000"/>
               </a:lnSpc>
@@ -15478,7 +16637,7 @@
               </a:spcAft>
             </a:pPr>
             <a:r>
-              <a:rPr sz="1800" b="1">
+              <a:rPr sz="1400" b="1">
                 <a:solidFill>
                   <a:srgbClr val="2E7D4F"/>
                 </a:solidFill>
@@ -15491,14 +16650,149 @@
       </p:sp>
       <p:sp>
         <p:nvSpPr>
-          <p:cNvPr id="52" name="Rectangle 51"/>
+          <p:cNvPr id="56" name="TextBox 55"/>
+          <p:cNvSpPr txBox="1"/>
+          <p:nvPr/>
+        </p:nvSpPr>
+        <p:spPr>
+          <a:xfrm>
+            <a:off x="2148840" y="4946903"/>
+            <a:ext cx="8732520" cy="256032"/>
+          </a:xfrm>
+          <a:prstGeom prst="rect">
+            <a:avLst/>
+          </a:prstGeom>
+          <a:noFill/>
+        </p:spPr>
+        <p:txBody>
+          <a:bodyPr wrap="square" anchor="t" lIns="36576" rIns="36576" tIns="18288" bIns="18288">
+            <a:spAutoFit/>
+          </a:bodyPr>
+          <a:lstStyle/>
+          <a:p>
+            <a:pPr algn="l">
+              <a:lnSpc>
+                <a:spcPct val="100000"/>
+              </a:lnSpc>
+              <a:spcBef>
+                <a:spcPts val="0"/>
+              </a:spcBef>
+              <a:spcAft>
+                <a:spcPts val="400"/>
+              </a:spcAft>
+            </a:pPr>
+            <a:r>
+              <a:rPr sz="950" b="0">
+                <a:solidFill>
+                  <a:srgbClr val="5C6670"/>
+                </a:solidFill>
+                <a:latin typeface="맑은 고딕"/>
+              </a:rPr>
+              <a:t>w_plan_hit · (gap_before − gap_after) / target   ;  gap = max(target − done, 0)</a:t>
+            </a:r>
+          </a:p>
+        </p:txBody>
+      </p:sp>
+      <p:sp>
+        <p:nvSpPr>
+          <p:cNvPr id="57" name="TextBox 56"/>
+          <p:cNvSpPr txBox="1"/>
+          <p:nvPr/>
+        </p:nvSpPr>
+        <p:spPr>
+          <a:xfrm>
+            <a:off x="2148840" y="5175503"/>
+            <a:ext cx="9052560" cy="256032"/>
+          </a:xfrm>
+          <a:prstGeom prst="rect">
+            <a:avLst/>
+          </a:prstGeom>
+          <a:noFill/>
+        </p:spPr>
+        <p:txBody>
+          <a:bodyPr wrap="square" anchor="t" lIns="36576" rIns="36576" tIns="18288" bIns="18288">
+            <a:spAutoFit/>
+          </a:bodyPr>
+          <a:lstStyle/>
+          <a:p>
+            <a:pPr algn="l">
+              <a:lnSpc>
+                <a:spcPct val="100000"/>
+              </a:lnSpc>
+              <a:spcBef>
+                <a:spcPts val="0"/>
+              </a:spcBef>
+              <a:spcAft>
+                <a:spcPts val="400"/>
+              </a:spcAft>
+            </a:pPr>
+            <a:r>
+              <a:rPr sz="950" b="0">
+                <a:solidFill>
+                  <a:srgbClr val="222A33"/>
+                </a:solidFill>
+                <a:latin typeface="맑은 고딕"/>
+              </a:rPr>
+              <a:t>gap: 8→7 (done 0→1, target=8) · 1.0·(8−7)/8</a:t>
+            </a:r>
+          </a:p>
+        </p:txBody>
+      </p:sp>
+      <p:sp>
+        <p:nvSpPr>
+          <p:cNvPr id="58" name="TextBox 57"/>
+          <p:cNvSpPr txBox="1"/>
+          <p:nvPr/>
+        </p:nvSpPr>
+        <p:spPr>
+          <a:xfrm>
+            <a:off x="10561320" y="5102351"/>
+            <a:ext cx="1005840" cy="347472"/>
+          </a:xfrm>
+          <a:prstGeom prst="rect">
+            <a:avLst/>
+          </a:prstGeom>
+          <a:noFill/>
+        </p:spPr>
+        <p:txBody>
+          <a:bodyPr wrap="square" anchor="ctr" lIns="36576" rIns="36576" tIns="18288" bIns="18288">
+            <a:spAutoFit/>
+          </a:bodyPr>
+          <a:lstStyle/>
+          <a:p>
+            <a:pPr algn="r">
+              <a:lnSpc>
+                <a:spcPct val="100000"/>
+              </a:lnSpc>
+              <a:spcBef>
+                <a:spcPts val="0"/>
+              </a:spcBef>
+              <a:spcAft>
+                <a:spcPts val="400"/>
+              </a:spcAft>
+            </a:pPr>
+            <a:r>
+              <a:rPr sz="1100" b="1">
+                <a:solidFill>
+                  <a:srgbClr val="2E7D4F"/>
+                </a:solidFill>
+                <a:latin typeface="맑은 고딕"/>
+              </a:rPr>
+              <a:t>= +0.14</a:t>
+            </a:r>
+          </a:p>
+        </p:txBody>
+      </p:sp>
+      <p:sp>
+        <p:nvSpPr>
+          <p:cNvPr id="59" name="Rectangle 58"/>
           <p:cNvSpPr/>
           <p:nvPr/>
         </p:nvSpPr>
         <p:spPr>
           <a:xfrm>
-            <a:off x="6080760" y="4681728"/>
-            <a:ext cx="2606040" cy="868680"/>
+            <a:off x="502920" y="5669279"/>
+            <a:ext cx="11201400" cy="713232"/>
           </a:xfrm>
           <a:prstGeom prst="rect">
             <a:avLst/>
@@ -15537,14 +16831,58 @@
       </p:sp>
       <p:sp>
         <p:nvSpPr>
-          <p:cNvPr id="53" name="TextBox 52"/>
-          <p:cNvSpPr txBox="1"/>
-          <p:nvPr/>
-        </p:nvSpPr>
-        <p:spPr>
-          <a:xfrm>
-            <a:off x="6190488" y="4754880"/>
-            <a:ext cx="2377440" cy="320040"/>
+          <p:cNvPr id="60" name="Rectangle 59"/>
+          <p:cNvSpPr/>
+          <p:nvPr/>
+        </p:nvSpPr>
+        <p:spPr>
+          <a:xfrm>
+            <a:off x="502920" y="5669279"/>
+            <a:ext cx="73152" cy="713232"/>
+          </a:xfrm>
+          <a:prstGeom prst="rect">
+            <a:avLst/>
+          </a:prstGeom>
+          <a:solidFill>
+            <a:srgbClr val="2E7D4F"/>
+          </a:solidFill>
+          <a:ln>
+            <a:noFill/>
+          </a:ln>
+          <a:effectLst/>
+        </p:spPr>
+        <p:style>
+          <a:lnRef idx="1">
+            <a:schemeClr val="accent1"/>
+          </a:lnRef>
+          <a:fillRef idx="3">
+            <a:schemeClr val="accent1"/>
+          </a:fillRef>
+          <a:effectRef idx="2">
+            <a:schemeClr val="accent1"/>
+          </a:effectRef>
+          <a:fontRef idx="minor">
+            <a:schemeClr val="lt1"/>
+          </a:fontRef>
+        </p:style>
+        <p:txBody>
+          <a:bodyPr rtlCol="0" anchor="ctr"/>
+          <a:lstStyle/>
+          <a:p>
+            <a:pPr algn="ctr"/>
+          </a:p>
+        </p:txBody>
+      </p:sp>
+      <p:sp>
+        <p:nvSpPr>
+          <p:cNvPr id="61" name="TextBox 60"/>
+          <p:cNvSpPr txBox="1"/>
+          <p:nvPr/>
+        </p:nvSpPr>
+        <p:spPr>
+          <a:xfrm>
+            <a:off x="658368" y="5724143"/>
+            <a:ext cx="1417320" cy="292608"/>
           </a:xfrm>
           <a:prstGeom prst="rect">
             <a:avLst/>
@@ -15582,14 +16920,14 @@
       </p:sp>
       <p:sp>
         <p:nvSpPr>
-          <p:cNvPr id="54" name="TextBox 53"/>
-          <p:cNvSpPr txBox="1"/>
-          <p:nvPr/>
-        </p:nvSpPr>
-        <p:spPr>
-          <a:xfrm>
-            <a:off x="6190488" y="5074920"/>
-            <a:ext cx="2377440" cy="411480"/>
+          <p:cNvPr id="62" name="TextBox 61"/>
+          <p:cNvSpPr txBox="1"/>
+          <p:nvPr/>
+        </p:nvSpPr>
+        <p:spPr>
+          <a:xfrm>
+            <a:off x="658368" y="5998464"/>
+            <a:ext cx="1417320" cy="292608"/>
           </a:xfrm>
           <a:prstGeom prst="rect">
             <a:avLst/>
@@ -15602,7 +16940,7 @@
           </a:bodyPr>
           <a:lstStyle/>
           <a:p>
-            <a:pPr algn="ctr">
+            <a:pPr algn="l">
               <a:lnSpc>
                 <a:spcPct val="100000"/>
               </a:lnSpc>
@@ -15614,7 +16952,7 @@
               </a:spcAft>
             </a:pPr>
             <a:r>
-              <a:rPr sz="1800" b="1">
+              <a:rPr sz="1400" b="1">
                 <a:solidFill>
                   <a:srgbClr val="2E7D4F"/>
                 </a:solidFill>
@@ -15627,14 +16965,149 @@
       </p:sp>
       <p:sp>
         <p:nvSpPr>
-          <p:cNvPr id="55" name="Rectangle 54"/>
+          <p:cNvPr id="63" name="TextBox 62"/>
+          <p:cNvSpPr txBox="1"/>
+          <p:nvPr/>
+        </p:nvSpPr>
+        <p:spPr>
+          <a:xfrm>
+            <a:off x="2148840" y="5714999"/>
+            <a:ext cx="8732520" cy="256032"/>
+          </a:xfrm>
+          <a:prstGeom prst="rect">
+            <a:avLst/>
+          </a:prstGeom>
+          <a:noFill/>
+        </p:spPr>
+        <p:txBody>
+          <a:bodyPr wrap="square" anchor="t" lIns="36576" rIns="36576" tIns="18288" bIns="18288">
+            <a:spAutoFit/>
+          </a:bodyPr>
+          <a:lstStyle/>
+          <a:p>
+            <a:pPr algn="l">
+              <a:lnSpc>
+                <a:spcPct val="100000"/>
+              </a:lnSpc>
+              <a:spcBef>
+                <a:spcPts val="0"/>
+              </a:spcBef>
+              <a:spcAft>
+                <a:spcPts val="400"/>
+              </a:spcAft>
+            </a:pPr>
+            <a:r>
+              <a:rPr sz="950" b="0">
+                <a:solidFill>
+                  <a:srgbClr val="5C6670"/>
+                </a:solidFill>
+                <a:latin typeface="맑은 고딕"/>
+              </a:rPr>
+              <a:t>w_bulk · min(N / takt예산, 1)</a:t>
+            </a:r>
+          </a:p>
+        </p:txBody>
+      </p:sp>
+      <p:sp>
+        <p:nvSpPr>
+          <p:cNvPr id="64" name="TextBox 63"/>
+          <p:cNvSpPr txBox="1"/>
+          <p:nvPr/>
+        </p:nvSpPr>
+        <p:spPr>
+          <a:xfrm>
+            <a:off x="2148840" y="5943599"/>
+            <a:ext cx="9052560" cy="256032"/>
+          </a:xfrm>
+          <a:prstGeom prst="rect">
+            <a:avLst/>
+          </a:prstGeom>
+          <a:noFill/>
+        </p:spPr>
+        <p:txBody>
+          <a:bodyPr wrap="square" anchor="t" lIns="36576" rIns="36576" tIns="18288" bIns="18288">
+            <a:spAutoFit/>
+          </a:bodyPr>
+          <a:lstStyle/>
+          <a:p>
+            <a:pPr algn="l">
+              <a:lnSpc>
+                <a:spcPct val="100000"/>
+              </a:lnSpc>
+              <a:spcBef>
+                <a:spcPts val="0"/>
+              </a:spcBef>
+              <a:spcAft>
+                <a:spcPts val="400"/>
+              </a:spcAft>
+            </a:pPr>
+            <a:r>
+              <a:rPr sz="950" b="0">
+                <a:solidFill>
+                  <a:srgbClr val="222A33"/>
+                </a:solidFill>
+                <a:latin typeface="맑은 고딕"/>
+              </a:rPr>
+              <a:t>3.0 · min(6 / 6, 1) = 3.0 · 1.0</a:t>
+            </a:r>
+          </a:p>
+        </p:txBody>
+      </p:sp>
+      <p:sp>
+        <p:nvSpPr>
+          <p:cNvPr id="65" name="TextBox 64"/>
+          <p:cNvSpPr txBox="1"/>
+          <p:nvPr/>
+        </p:nvSpPr>
+        <p:spPr>
+          <a:xfrm>
+            <a:off x="10561320" y="5870447"/>
+            <a:ext cx="1005840" cy="347472"/>
+          </a:xfrm>
+          <a:prstGeom prst="rect">
+            <a:avLst/>
+          </a:prstGeom>
+          <a:noFill/>
+        </p:spPr>
+        <p:txBody>
+          <a:bodyPr wrap="square" anchor="ctr" lIns="36576" rIns="36576" tIns="18288" bIns="18288">
+            <a:spAutoFit/>
+          </a:bodyPr>
+          <a:lstStyle/>
+          <a:p>
+            <a:pPr algn="r">
+              <a:lnSpc>
+                <a:spcPct val="100000"/>
+              </a:lnSpc>
+              <a:spcBef>
+                <a:spcPts val="0"/>
+              </a:spcBef>
+              <a:spcAft>
+                <a:spcPts val="400"/>
+              </a:spcAft>
+            </a:pPr>
+            <a:r>
+              <a:rPr sz="1100" b="1">
+                <a:solidFill>
+                  <a:srgbClr val="2E7D4F"/>
+                </a:solidFill>
+                <a:latin typeface="맑은 고딕"/>
+              </a:rPr>
+              <a:t>= +3.00</a:t>
+            </a:r>
+          </a:p>
+        </p:txBody>
+      </p:sp>
+      <p:sp>
+        <p:nvSpPr>
+          <p:cNvPr id="66" name="Rectangle 65"/>
           <p:cNvSpPr/>
           <p:nvPr/>
         </p:nvSpPr>
         <p:spPr>
           <a:xfrm>
-            <a:off x="502920" y="5897880"/>
-            <a:ext cx="11201400" cy="438912"/>
+            <a:off x="502920" y="6455663"/>
+            <a:ext cx="11201400" cy="347472"/>
           </a:xfrm>
           <a:prstGeom prst="rect">
             <a:avLst/>
@@ -15671,14 +17144,14 @@
       </p:sp>
       <p:sp>
         <p:nvSpPr>
-          <p:cNvPr id="56" name="TextBox 55"/>
-          <p:cNvSpPr txBox="1"/>
-          <p:nvPr/>
-        </p:nvSpPr>
-        <p:spPr>
-          <a:xfrm>
-            <a:off x="685800" y="5897880"/>
-            <a:ext cx="10881360" cy="438912"/>
+          <p:cNvPr id="67" name="TextBox 66"/>
+          <p:cNvSpPr txBox="1"/>
+          <p:nvPr/>
+        </p:nvSpPr>
+        <p:spPr>
+          <a:xfrm>
+            <a:off x="685800" y="6455663"/>
+            <a:ext cx="10881360" cy="347472"/>
           </a:xfrm>
           <a:prstGeom prst="rect">
             <a:avLst/>
@@ -15703,22 +17176,22 @@
               </a:spcAft>
             </a:pPr>
             <a:r>
-              <a:rPr sz="1050" b="1">
+              <a:rPr sz="1000" b="1">
                 <a:solidFill>
                   <a:srgbClr val="2E6FB0"/>
                 </a:solidFill>
                 <a:latin typeface="맑은 고딕"/>
               </a:rPr>
-              <a:t>계산  </a:t>
-            </a:r>
-            <a:r>
-              <a:rPr sz="1050" b="0">
+              <a:t>합산  </a:t>
+            </a:r>
+            <a:r>
+              <a:rPr sz="1000" b="0">
                 <a:solidFill>
                   <a:srgbClr val="222A33"/>
                 </a:solidFill>
                 <a:latin typeface="맑은 고딕"/>
               </a:rPr>
-              <a:t>페이싱 -0.31 + 계획 달성 +0.14 + 블록 보너스 +3.00</a:t>
+              <a:t>페이싱 -0.31 + 계획 달성 +0.14 + 블록 보너스 +3.00  →  r = +2.83</a:t>
             </a:r>
           </a:p>
         </p:txBody>
@@ -17553,8 +19026,8 @@
         </p:blipFill>
         <p:spPr>
           <a:xfrm>
-            <a:off x="3337560" y="1353312"/>
-            <a:ext cx="5532120" cy="1786901"/>
+            <a:off x="3337560" y="1325880"/>
+            <a:ext cx="5532120" cy="2240280"/>
           </a:xfrm>
           <a:prstGeom prst="rect">
             <a:avLst/>
@@ -17569,8 +19042,8 @@
         </p:nvSpPr>
         <p:spPr>
           <a:xfrm>
-            <a:off x="502920" y="4160520"/>
-            <a:ext cx="11201400" cy="384048"/>
+            <a:off x="502920" y="3703320"/>
+            <a:ext cx="11201400" cy="365760"/>
           </a:xfrm>
           <a:prstGeom prst="rect">
             <a:avLst/>
@@ -17613,8 +19086,8 @@
         </p:nvSpPr>
         <p:spPr>
           <a:xfrm>
-            <a:off x="502920" y="4160520"/>
-            <a:ext cx="11201400" cy="384048"/>
+            <a:off x="502920" y="3703320"/>
+            <a:ext cx="11201400" cy="365760"/>
           </a:xfrm>
           <a:prstGeom prst="rect">
             <a:avLst/>
@@ -17639,13 +19112,13 @@
               </a:spcAft>
             </a:pPr>
             <a:r>
-              <a:rPr sz="1300" b="1">
+              <a:rPr sz="1200" b="1">
                 <a:solidFill>
                   <a:srgbClr val="FFFFFF"/>
                 </a:solidFill>
                 <a:latin typeface="맑은 고딕"/>
               </a:rPr>
-              <a:t>Reward  r = +0.83   ·   누적 Σr = +9.32</a:t>
+              <a:t>Reward  r = +0.83   ·   누적 Σr = +9.32   ·   clip(Σ항, ±10)</a:t>
             </a:r>
           </a:p>
         </p:txBody>
@@ -17658,54 +19131,8 @@
         </p:nvSpPr>
         <p:spPr>
           <a:xfrm>
-            <a:off x="502920" y="4544568"/>
-            <a:ext cx="11201400" cy="1234440"/>
-          </a:xfrm>
-          <a:prstGeom prst="rect">
-            <a:avLst/>
-          </a:prstGeom>
-          <a:solidFill>
-            <a:srgbClr val="EEF2F7"/>
-          </a:solidFill>
-          <a:ln w="12700">
-            <a:solidFill>
-              <a:srgbClr val="C4CFDB"/>
-            </a:solidFill>
-          </a:ln>
-          <a:effectLst/>
-        </p:spPr>
-        <p:style>
-          <a:lnRef idx="1">
-            <a:schemeClr val="accent1"/>
-          </a:lnRef>
-          <a:fillRef idx="3">
-            <a:schemeClr val="accent1"/>
-          </a:fillRef>
-          <a:effectRef idx="2">
-            <a:schemeClr val="accent1"/>
-          </a:effectRef>
-          <a:fontRef idx="minor">
-            <a:schemeClr val="lt1"/>
-          </a:fontRef>
-        </p:style>
-        <p:txBody>
-          <a:bodyPr rtlCol="0" anchor="ctr"/>
-          <a:lstStyle/>
-          <a:p>
-            <a:pPr algn="ctr"/>
-          </a:p>
-        </p:txBody>
-      </p:sp>
-      <p:sp>
-        <p:nvSpPr>
-          <p:cNvPr id="46" name="Rectangle 45"/>
-          <p:cNvSpPr/>
-          <p:nvPr/>
-        </p:nvSpPr>
-        <p:spPr>
-          <a:xfrm>
-            <a:off x="685800" y="4681728"/>
-            <a:ext cx="2606040" cy="868680"/>
+            <a:off x="502920" y="4133087"/>
+            <a:ext cx="11201400" cy="713232"/>
           </a:xfrm>
           <a:prstGeom prst="rect">
             <a:avLst/>
@@ -17744,14 +19171,58 @@
       </p:sp>
       <p:sp>
         <p:nvSpPr>
+          <p:cNvPr id="46" name="Rectangle 45"/>
+          <p:cNvSpPr/>
+          <p:nvPr/>
+        </p:nvSpPr>
+        <p:spPr>
+          <a:xfrm>
+            <a:off x="502920" y="4133087"/>
+            <a:ext cx="73152" cy="713232"/>
+          </a:xfrm>
+          <a:prstGeom prst="rect">
+            <a:avLst/>
+          </a:prstGeom>
+          <a:solidFill>
+            <a:srgbClr val="2E7D4F"/>
+          </a:solidFill>
+          <a:ln>
+            <a:noFill/>
+          </a:ln>
+          <a:effectLst/>
+        </p:spPr>
+        <p:style>
+          <a:lnRef idx="1">
+            <a:schemeClr val="accent1"/>
+          </a:lnRef>
+          <a:fillRef idx="3">
+            <a:schemeClr val="accent1"/>
+          </a:fillRef>
+          <a:effectRef idx="2">
+            <a:schemeClr val="accent1"/>
+          </a:effectRef>
+          <a:fontRef idx="minor">
+            <a:schemeClr val="lt1"/>
+          </a:fontRef>
+        </p:style>
+        <p:txBody>
+          <a:bodyPr rtlCol="0" anchor="ctr"/>
+          <a:lstStyle/>
+          <a:p>
+            <a:pPr algn="ctr"/>
+          </a:p>
+        </p:txBody>
+      </p:sp>
+      <p:sp>
+        <p:nvSpPr>
           <p:cNvPr id="47" name="TextBox 46"/>
           <p:cNvSpPr txBox="1"/>
           <p:nvPr/>
         </p:nvSpPr>
         <p:spPr>
           <a:xfrm>
-            <a:off x="795528" y="4754880"/>
-            <a:ext cx="2377440" cy="320040"/>
+            <a:off x="658368" y="4187951"/>
+            <a:ext cx="1417320" cy="292608"/>
           </a:xfrm>
           <a:prstGeom prst="rect">
             <a:avLst/>
@@ -17795,8 +19266,8 @@
         </p:nvSpPr>
         <p:spPr>
           <a:xfrm>
-            <a:off x="795528" y="5074920"/>
-            <a:ext cx="2377440" cy="411480"/>
+            <a:off x="658368" y="4462272"/>
+            <a:ext cx="1417320" cy="292608"/>
           </a:xfrm>
           <a:prstGeom prst="rect">
             <a:avLst/>
@@ -17809,7 +19280,7 @@
           </a:bodyPr>
           <a:lstStyle/>
           <a:p>
-            <a:pPr algn="ctr">
+            <a:pPr algn="l">
               <a:lnSpc>
                 <a:spcPct val="100000"/>
               </a:lnSpc>
@@ -17821,7 +19292,7 @@
               </a:spcAft>
             </a:pPr>
             <a:r>
-              <a:rPr sz="1800" b="1">
+              <a:rPr sz="1400" b="1">
                 <a:solidFill>
                   <a:srgbClr val="2E7D4F"/>
                 </a:solidFill>
@@ -17834,14 +19305,149 @@
       </p:sp>
       <p:sp>
         <p:nvSpPr>
-          <p:cNvPr id="49" name="Rectangle 48"/>
+          <p:cNvPr id="49" name="TextBox 48"/>
+          <p:cNvSpPr txBox="1"/>
+          <p:nvPr/>
+        </p:nvSpPr>
+        <p:spPr>
+          <a:xfrm>
+            <a:off x="2148840" y="4178807"/>
+            <a:ext cx="8732520" cy="256032"/>
+          </a:xfrm>
+          <a:prstGeom prst="rect">
+            <a:avLst/>
+          </a:prstGeom>
+          <a:noFill/>
+        </p:spPr>
+        <p:txBody>
+          <a:bodyPr wrap="square" anchor="t" lIns="36576" rIns="36576" tIns="18288" bIns="18288">
+            <a:spAutoFit/>
+          </a:bodyPr>
+          <a:lstStyle/>
+          <a:p>
+            <a:pPr algn="l">
+              <a:lnSpc>
+                <a:spcPct val="100000"/>
+              </a:lnSpc>
+              <a:spcBef>
+                <a:spcPts val="0"/>
+              </a:spcBef>
+              <a:spcAft>
+                <a:spcPts val="400"/>
+              </a:spcAft>
+            </a:pPr>
+            <a:r>
+              <a:rPr sz="950" b="0">
+                <a:solidFill>
+                  <a:srgbClr val="5C6670"/>
+                </a:solidFill>
+                <a:latin typeface="맑은 고딕"/>
+              </a:rPr>
+              <a:t>w_same_setup · 1[동일 제품·공정 &amp; 재공 잔존]</a:t>
+            </a:r>
+          </a:p>
+        </p:txBody>
+      </p:sp>
+      <p:sp>
+        <p:nvSpPr>
+          <p:cNvPr id="50" name="TextBox 49"/>
+          <p:cNvSpPr txBox="1"/>
+          <p:nvPr/>
+        </p:nvSpPr>
+        <p:spPr>
+          <a:xfrm>
+            <a:off x="2148840" y="4407407"/>
+            <a:ext cx="9052560" cy="256032"/>
+          </a:xfrm>
+          <a:prstGeom prst="rect">
+            <a:avLst/>
+          </a:prstGeom>
+          <a:noFill/>
+        </p:spPr>
+        <p:txBody>
+          <a:bodyPr wrap="square" anchor="t" lIns="36576" rIns="36576" tIns="18288" bIns="18288">
+            <a:spAutoFit/>
+          </a:bodyPr>
+          <a:lstStyle/>
+          <a:p>
+            <a:pPr algn="l">
+              <a:lnSpc>
+                <a:spcPct val="100000"/>
+              </a:lnSpc>
+              <a:spcBef>
+                <a:spcPts val="0"/>
+              </a:spcBef>
+              <a:spcAft>
+                <a:spcPts val="400"/>
+              </a:spcAft>
+            </a:pPr>
+            <a:r>
+              <a:rPr sz="950" b="0">
+                <a:solidFill>
+                  <a:srgbClr val="222A33"/>
+                </a:solidFill>
+                <a:latin typeface="맑은 고딕"/>
+              </a:rPr>
+              <a:t>1.0 · 1[None→PPK001, None→OPER001] = 0</a:t>
+            </a:r>
+          </a:p>
+        </p:txBody>
+      </p:sp>
+      <p:sp>
+        <p:nvSpPr>
+          <p:cNvPr id="51" name="TextBox 50"/>
+          <p:cNvSpPr txBox="1"/>
+          <p:nvPr/>
+        </p:nvSpPr>
+        <p:spPr>
+          <a:xfrm>
+            <a:off x="10561320" y="4334255"/>
+            <a:ext cx="1005840" cy="347472"/>
+          </a:xfrm>
+          <a:prstGeom prst="rect">
+            <a:avLst/>
+          </a:prstGeom>
+          <a:noFill/>
+        </p:spPr>
+        <p:txBody>
+          <a:bodyPr wrap="square" anchor="ctr" lIns="36576" rIns="36576" tIns="18288" bIns="18288">
+            <a:spAutoFit/>
+          </a:bodyPr>
+          <a:lstStyle/>
+          <a:p>
+            <a:pPr algn="r">
+              <a:lnSpc>
+                <a:spcPct val="100000"/>
+              </a:lnSpc>
+              <a:spcBef>
+                <a:spcPts val="0"/>
+              </a:spcBef>
+              <a:spcAft>
+                <a:spcPts val="400"/>
+              </a:spcAft>
+            </a:pPr>
+            <a:r>
+              <a:rPr sz="1100" b="1">
+                <a:solidFill>
+                  <a:srgbClr val="2E7D4F"/>
+                </a:solidFill>
+                <a:latin typeface="맑은 고딕"/>
+              </a:rPr>
+              <a:t>= +1.00</a:t>
+            </a:r>
+          </a:p>
+        </p:txBody>
+      </p:sp>
+      <p:sp>
+        <p:nvSpPr>
+          <p:cNvPr id="52" name="Rectangle 51"/>
           <p:cNvSpPr/>
           <p:nvPr/>
         </p:nvSpPr>
         <p:spPr>
           <a:xfrm>
-            <a:off x="3383280" y="4681728"/>
-            <a:ext cx="2606040" cy="868680"/>
+            <a:off x="502920" y="4901183"/>
+            <a:ext cx="11201400" cy="713232"/>
           </a:xfrm>
           <a:prstGeom prst="rect">
             <a:avLst/>
@@ -17880,14 +19486,58 @@
       </p:sp>
       <p:sp>
         <p:nvSpPr>
-          <p:cNvPr id="50" name="TextBox 49"/>
-          <p:cNvSpPr txBox="1"/>
-          <p:nvPr/>
-        </p:nvSpPr>
-        <p:spPr>
-          <a:xfrm>
-            <a:off x="3493008" y="4754880"/>
-            <a:ext cx="2377440" cy="320040"/>
+          <p:cNvPr id="53" name="Rectangle 52"/>
+          <p:cNvSpPr/>
+          <p:nvPr/>
+        </p:nvSpPr>
+        <p:spPr>
+          <a:xfrm>
+            <a:off x="502920" y="4901183"/>
+            <a:ext cx="73152" cy="713232"/>
+          </a:xfrm>
+          <a:prstGeom prst="rect">
+            <a:avLst/>
+          </a:prstGeom>
+          <a:solidFill>
+            <a:srgbClr val="B33A3A"/>
+          </a:solidFill>
+          <a:ln>
+            <a:noFill/>
+          </a:ln>
+          <a:effectLst/>
+        </p:spPr>
+        <p:style>
+          <a:lnRef idx="1">
+            <a:schemeClr val="accent1"/>
+          </a:lnRef>
+          <a:fillRef idx="3">
+            <a:schemeClr val="accent1"/>
+          </a:fillRef>
+          <a:effectRef idx="2">
+            <a:schemeClr val="accent1"/>
+          </a:effectRef>
+          <a:fontRef idx="minor">
+            <a:schemeClr val="lt1"/>
+          </a:fontRef>
+        </p:style>
+        <p:txBody>
+          <a:bodyPr rtlCol="0" anchor="ctr"/>
+          <a:lstStyle/>
+          <a:p>
+            <a:pPr algn="ctr"/>
+          </a:p>
+        </p:txBody>
+      </p:sp>
+      <p:sp>
+        <p:nvSpPr>
+          <p:cNvPr id="54" name="TextBox 53"/>
+          <p:cNvSpPr txBox="1"/>
+          <p:nvPr/>
+        </p:nvSpPr>
+        <p:spPr>
+          <a:xfrm>
+            <a:off x="658368" y="4956047"/>
+            <a:ext cx="1417320" cy="292608"/>
           </a:xfrm>
           <a:prstGeom prst="rect">
             <a:avLst/>
@@ -17925,14 +19575,14 @@
       </p:sp>
       <p:sp>
         <p:nvSpPr>
-          <p:cNvPr id="51" name="TextBox 50"/>
-          <p:cNvSpPr txBox="1"/>
-          <p:nvPr/>
-        </p:nvSpPr>
-        <p:spPr>
-          <a:xfrm>
-            <a:off x="3493008" y="5074920"/>
-            <a:ext cx="2377440" cy="411480"/>
+          <p:cNvPr id="55" name="TextBox 54"/>
+          <p:cNvSpPr txBox="1"/>
+          <p:nvPr/>
+        </p:nvSpPr>
+        <p:spPr>
+          <a:xfrm>
+            <a:off x="658368" y="5230368"/>
+            <a:ext cx="1417320" cy="292608"/>
           </a:xfrm>
           <a:prstGeom prst="rect">
             <a:avLst/>
@@ -17945,7 +19595,7 @@
           </a:bodyPr>
           <a:lstStyle/>
           <a:p>
-            <a:pPr algn="ctr">
+            <a:pPr algn="l">
               <a:lnSpc>
                 <a:spcPct val="100000"/>
               </a:lnSpc>
@@ -17957,7 +19607,7 @@
               </a:spcAft>
             </a:pPr>
             <a:r>
-              <a:rPr sz="1800" b="1">
+              <a:rPr sz="1400" b="1">
                 <a:solidFill>
                   <a:srgbClr val="B33A3A"/>
                 </a:solidFill>
@@ -17970,14 +19620,149 @@
       </p:sp>
       <p:sp>
         <p:nvSpPr>
-          <p:cNvPr id="52" name="Rectangle 51"/>
+          <p:cNvPr id="56" name="TextBox 55"/>
+          <p:cNvSpPr txBox="1"/>
+          <p:nvPr/>
+        </p:nvSpPr>
+        <p:spPr>
+          <a:xfrm>
+            <a:off x="2148840" y="4946903"/>
+            <a:ext cx="8732520" cy="256032"/>
+          </a:xfrm>
+          <a:prstGeom prst="rect">
+            <a:avLst/>
+          </a:prstGeom>
+          <a:noFill/>
+        </p:spPr>
+        <p:txBody>
+          <a:bodyPr wrap="square" anchor="t" lIns="36576" rIns="36576" tIns="18288" bIns="18288">
+            <a:spAutoFit/>
+          </a:bodyPr>
+          <a:lstStyle/>
+          <a:p>
+            <a:pPr algn="l">
+              <a:lnSpc>
+                <a:spcPct val="100000"/>
+              </a:lnSpc>
+              <a:spcBef>
+                <a:spcPts val="0"/>
+              </a:spcBef>
+              <a:spcAft>
+                <a:spcPts val="400"/>
+              </a:spcAft>
+            </a:pPr>
+            <a:r>
+              <a:rPr sz="950" b="0">
+                <a:solidFill>
+                  <a:srgbClr val="5C6670"/>
+                </a:solidFill>
+                <a:latin typeface="맑은 고딕"/>
+              </a:rPr>
+              <a:t>w_pacing · (|ideal − eff_before| − |ideal − eff_after|) / target</a:t>
+            </a:r>
+          </a:p>
+        </p:txBody>
+      </p:sp>
+      <p:sp>
+        <p:nvSpPr>
+          <p:cNvPr id="57" name="TextBox 56"/>
+          <p:cNvSpPr txBox="1"/>
+          <p:nvPr/>
+        </p:nvSpPr>
+        <p:spPr>
+          <a:xfrm>
+            <a:off x="2148840" y="5175503"/>
+            <a:ext cx="9052560" cy="256032"/>
+          </a:xfrm>
+          <a:prstGeom prst="rect">
+            <a:avLst/>
+          </a:prstGeom>
+          <a:noFill/>
+        </p:spPr>
+        <p:txBody>
+          <a:bodyPr wrap="square" anchor="t" lIns="36576" rIns="36576" tIns="18288" bIns="18288">
+            <a:spAutoFit/>
+          </a:bodyPr>
+          <a:lstStyle/>
+          <a:p>
+            <a:pPr algn="l">
+              <a:lnSpc>
+                <a:spcPct val="100000"/>
+              </a:lnSpc>
+              <a:spcBef>
+                <a:spcPts val="0"/>
+              </a:spcBef>
+              <a:spcAft>
+                <a:spcPts val="400"/>
+              </a:spcAft>
+            </a:pPr>
+            <a:r>
+              <a:rPr sz="950" b="0">
+                <a:solidFill>
+                  <a:srgbClr val="222A33"/>
+                </a:solidFill>
+                <a:latin typeface="맑은 고딕"/>
+              </a:rPr>
+              <a:t>ideal: target·min(t,horizon)/horizon = 8·0/1320 = 0.0 · eff: 22.0→23.0 (done=1, cover=21.0, wf=1) · 2.5·(22.0−23.0)/8</a:t>
+            </a:r>
+          </a:p>
+        </p:txBody>
+      </p:sp>
+      <p:sp>
+        <p:nvSpPr>
+          <p:cNvPr id="58" name="TextBox 57"/>
+          <p:cNvSpPr txBox="1"/>
+          <p:nvPr/>
+        </p:nvSpPr>
+        <p:spPr>
+          <a:xfrm>
+            <a:off x="10561320" y="5102351"/>
+            <a:ext cx="1005840" cy="347472"/>
+          </a:xfrm>
+          <a:prstGeom prst="rect">
+            <a:avLst/>
+          </a:prstGeom>
+          <a:noFill/>
+        </p:spPr>
+        <p:txBody>
+          <a:bodyPr wrap="square" anchor="ctr" lIns="36576" rIns="36576" tIns="18288" bIns="18288">
+            <a:spAutoFit/>
+          </a:bodyPr>
+          <a:lstStyle/>
+          <a:p>
+            <a:pPr algn="r">
+              <a:lnSpc>
+                <a:spcPct val="100000"/>
+              </a:lnSpc>
+              <a:spcBef>
+                <a:spcPts val="0"/>
+              </a:spcBef>
+              <a:spcAft>
+                <a:spcPts val="400"/>
+              </a:spcAft>
+            </a:pPr>
+            <a:r>
+              <a:rPr sz="1100" b="1">
+                <a:solidFill>
+                  <a:srgbClr val="B33A3A"/>
+                </a:solidFill>
+                <a:latin typeface="맑은 고딕"/>
+              </a:rPr>
+              <a:t>= -0.31</a:t>
+            </a:r>
+          </a:p>
+        </p:txBody>
+      </p:sp>
+      <p:sp>
+        <p:nvSpPr>
+          <p:cNvPr id="59" name="Rectangle 58"/>
           <p:cNvSpPr/>
           <p:nvPr/>
         </p:nvSpPr>
         <p:spPr>
           <a:xfrm>
-            <a:off x="6080760" y="4681728"/>
-            <a:ext cx="2606040" cy="868680"/>
+            <a:off x="502920" y="5669279"/>
+            <a:ext cx="11201400" cy="713232"/>
           </a:xfrm>
           <a:prstGeom prst="rect">
             <a:avLst/>
@@ -18016,14 +19801,58 @@
       </p:sp>
       <p:sp>
         <p:nvSpPr>
-          <p:cNvPr id="53" name="TextBox 52"/>
-          <p:cNvSpPr txBox="1"/>
-          <p:nvPr/>
-        </p:nvSpPr>
-        <p:spPr>
-          <a:xfrm>
-            <a:off x="6190488" y="4754880"/>
-            <a:ext cx="2377440" cy="320040"/>
+          <p:cNvPr id="60" name="Rectangle 59"/>
+          <p:cNvSpPr/>
+          <p:nvPr/>
+        </p:nvSpPr>
+        <p:spPr>
+          <a:xfrm>
+            <a:off x="502920" y="5669279"/>
+            <a:ext cx="73152" cy="713232"/>
+          </a:xfrm>
+          <a:prstGeom prst="rect">
+            <a:avLst/>
+          </a:prstGeom>
+          <a:solidFill>
+            <a:srgbClr val="2E7D4F"/>
+          </a:solidFill>
+          <a:ln>
+            <a:noFill/>
+          </a:ln>
+          <a:effectLst/>
+        </p:spPr>
+        <p:style>
+          <a:lnRef idx="1">
+            <a:schemeClr val="accent1"/>
+          </a:lnRef>
+          <a:fillRef idx="3">
+            <a:schemeClr val="accent1"/>
+          </a:fillRef>
+          <a:effectRef idx="2">
+            <a:schemeClr val="accent1"/>
+          </a:effectRef>
+          <a:fontRef idx="minor">
+            <a:schemeClr val="lt1"/>
+          </a:fontRef>
+        </p:style>
+        <p:txBody>
+          <a:bodyPr rtlCol="0" anchor="ctr"/>
+          <a:lstStyle/>
+          <a:p>
+            <a:pPr algn="ctr"/>
+          </a:p>
+        </p:txBody>
+      </p:sp>
+      <p:sp>
+        <p:nvSpPr>
+          <p:cNvPr id="61" name="TextBox 60"/>
+          <p:cNvSpPr txBox="1"/>
+          <p:nvPr/>
+        </p:nvSpPr>
+        <p:spPr>
+          <a:xfrm>
+            <a:off x="658368" y="5724143"/>
+            <a:ext cx="1417320" cy="292608"/>
           </a:xfrm>
           <a:prstGeom prst="rect">
             <a:avLst/>
@@ -18061,14 +19890,14 @@
       </p:sp>
       <p:sp>
         <p:nvSpPr>
-          <p:cNvPr id="54" name="TextBox 53"/>
-          <p:cNvSpPr txBox="1"/>
-          <p:nvPr/>
-        </p:nvSpPr>
-        <p:spPr>
-          <a:xfrm>
-            <a:off x="6190488" y="5074920"/>
-            <a:ext cx="2377440" cy="411480"/>
+          <p:cNvPr id="62" name="TextBox 61"/>
+          <p:cNvSpPr txBox="1"/>
+          <p:nvPr/>
+        </p:nvSpPr>
+        <p:spPr>
+          <a:xfrm>
+            <a:off x="658368" y="5998464"/>
+            <a:ext cx="1417320" cy="292608"/>
           </a:xfrm>
           <a:prstGeom prst="rect">
             <a:avLst/>
@@ -18081,7 +19910,7 @@
           </a:bodyPr>
           <a:lstStyle/>
           <a:p>
-            <a:pPr algn="ctr">
+            <a:pPr algn="l">
               <a:lnSpc>
                 <a:spcPct val="100000"/>
               </a:lnSpc>
@@ -18093,7 +19922,7 @@
               </a:spcAft>
             </a:pPr>
             <a:r>
-              <a:rPr sz="1800" b="1">
+              <a:rPr sz="1400" b="1">
                 <a:solidFill>
                   <a:srgbClr val="2E7D4F"/>
                 </a:solidFill>
@@ -18106,14 +19935,149 @@
       </p:sp>
       <p:sp>
         <p:nvSpPr>
-          <p:cNvPr id="55" name="Rectangle 54"/>
+          <p:cNvPr id="63" name="TextBox 62"/>
+          <p:cNvSpPr txBox="1"/>
+          <p:nvPr/>
+        </p:nvSpPr>
+        <p:spPr>
+          <a:xfrm>
+            <a:off x="2148840" y="5714999"/>
+            <a:ext cx="8732520" cy="256032"/>
+          </a:xfrm>
+          <a:prstGeom prst="rect">
+            <a:avLst/>
+          </a:prstGeom>
+          <a:noFill/>
+        </p:spPr>
+        <p:txBody>
+          <a:bodyPr wrap="square" anchor="t" lIns="36576" rIns="36576" tIns="18288" bIns="18288">
+            <a:spAutoFit/>
+          </a:bodyPr>
+          <a:lstStyle/>
+          <a:p>
+            <a:pPr algn="l">
+              <a:lnSpc>
+                <a:spcPct val="100000"/>
+              </a:lnSpc>
+              <a:spcBef>
+                <a:spcPts val="0"/>
+              </a:spcBef>
+              <a:spcAft>
+                <a:spcPts val="400"/>
+              </a:spcAft>
+            </a:pPr>
+            <a:r>
+              <a:rPr sz="950" b="0">
+                <a:solidFill>
+                  <a:srgbClr val="5C6670"/>
+                </a:solidFill>
+                <a:latin typeface="맑은 고딕"/>
+              </a:rPr>
+              <a:t>w_plan_hit · (gap_before − gap_after) / target   ;  gap = max(target − done, 0)</a:t>
+            </a:r>
+          </a:p>
+        </p:txBody>
+      </p:sp>
+      <p:sp>
+        <p:nvSpPr>
+          <p:cNvPr id="64" name="TextBox 63"/>
+          <p:cNvSpPr txBox="1"/>
+          <p:nvPr/>
+        </p:nvSpPr>
+        <p:spPr>
+          <a:xfrm>
+            <a:off x="2148840" y="5943599"/>
+            <a:ext cx="9052560" cy="256032"/>
+          </a:xfrm>
+          <a:prstGeom prst="rect">
+            <a:avLst/>
+          </a:prstGeom>
+          <a:noFill/>
+        </p:spPr>
+        <p:txBody>
+          <a:bodyPr wrap="square" anchor="t" lIns="36576" rIns="36576" tIns="18288" bIns="18288">
+            <a:spAutoFit/>
+          </a:bodyPr>
+          <a:lstStyle/>
+          <a:p>
+            <a:pPr algn="l">
+              <a:lnSpc>
+                <a:spcPct val="100000"/>
+              </a:lnSpc>
+              <a:spcBef>
+                <a:spcPts val="0"/>
+              </a:spcBef>
+              <a:spcAft>
+                <a:spcPts val="400"/>
+              </a:spcAft>
+            </a:pPr>
+            <a:r>
+              <a:rPr sz="950" b="0">
+                <a:solidFill>
+                  <a:srgbClr val="222A33"/>
+                </a:solidFill>
+                <a:latin typeface="맑은 고딕"/>
+              </a:rPr>
+              <a:t>gap: 7→6 (done 1→2, target=8) · 1.0·(7−6)/8</a:t>
+            </a:r>
+          </a:p>
+        </p:txBody>
+      </p:sp>
+      <p:sp>
+        <p:nvSpPr>
+          <p:cNvPr id="65" name="TextBox 64"/>
+          <p:cNvSpPr txBox="1"/>
+          <p:nvPr/>
+        </p:nvSpPr>
+        <p:spPr>
+          <a:xfrm>
+            <a:off x="10561320" y="5870447"/>
+            <a:ext cx="1005840" cy="347472"/>
+          </a:xfrm>
+          <a:prstGeom prst="rect">
+            <a:avLst/>
+          </a:prstGeom>
+          <a:noFill/>
+        </p:spPr>
+        <p:txBody>
+          <a:bodyPr wrap="square" anchor="ctr" lIns="36576" rIns="36576" tIns="18288" bIns="18288">
+            <a:spAutoFit/>
+          </a:bodyPr>
+          <a:lstStyle/>
+          <a:p>
+            <a:pPr algn="r">
+              <a:lnSpc>
+                <a:spcPct val="100000"/>
+              </a:lnSpc>
+              <a:spcBef>
+                <a:spcPts val="0"/>
+              </a:spcBef>
+              <a:spcAft>
+                <a:spcPts val="400"/>
+              </a:spcAft>
+            </a:pPr>
+            <a:r>
+              <a:rPr sz="1100" b="1">
+                <a:solidFill>
+                  <a:srgbClr val="2E7D4F"/>
+                </a:solidFill>
+                <a:latin typeface="맑은 고딕"/>
+              </a:rPr>
+              <a:t>= +0.14</a:t>
+            </a:r>
+          </a:p>
+        </p:txBody>
+      </p:sp>
+      <p:sp>
+        <p:nvSpPr>
+          <p:cNvPr id="66" name="Rectangle 65"/>
           <p:cNvSpPr/>
           <p:nvPr/>
         </p:nvSpPr>
         <p:spPr>
           <a:xfrm>
-            <a:off x="502920" y="5897880"/>
-            <a:ext cx="11201400" cy="438912"/>
+            <a:off x="502920" y="6455663"/>
+            <a:ext cx="11201400" cy="347472"/>
           </a:xfrm>
           <a:prstGeom prst="rect">
             <a:avLst/>
@@ -18150,14 +20114,14 @@
       </p:sp>
       <p:sp>
         <p:nvSpPr>
-          <p:cNvPr id="56" name="TextBox 55"/>
-          <p:cNvSpPr txBox="1"/>
-          <p:nvPr/>
-        </p:nvSpPr>
-        <p:spPr>
-          <a:xfrm>
-            <a:off x="685800" y="5897880"/>
-            <a:ext cx="10881360" cy="438912"/>
+          <p:cNvPr id="67" name="TextBox 66"/>
+          <p:cNvSpPr txBox="1"/>
+          <p:nvPr/>
+        </p:nvSpPr>
+        <p:spPr>
+          <a:xfrm>
+            <a:off x="685800" y="6455663"/>
+            <a:ext cx="10881360" cy="347472"/>
           </a:xfrm>
           <a:prstGeom prst="rect">
             <a:avLst/>
@@ -18182,22 +20146,22 @@
               </a:spcAft>
             </a:pPr>
             <a:r>
-              <a:rPr sz="1050" b="1">
+              <a:rPr sz="1000" b="1">
                 <a:solidFill>
                   <a:srgbClr val="2E6FB0"/>
                 </a:solidFill>
                 <a:latin typeface="맑은 고딕"/>
               </a:rPr>
-              <a:t>계산  </a:t>
-            </a:r>
-            <a:r>
-              <a:rPr sz="1050" b="0">
+              <a:t>합산  </a:t>
+            </a:r>
+            <a:r>
+              <a:rPr sz="1000" b="0">
                 <a:solidFill>
                   <a:srgbClr val="222A33"/>
                 </a:solidFill>
                 <a:latin typeface="맑은 고딕"/>
               </a:rPr>
-              <a:t>동일 셋업 +1.00 + 페이싱 -0.31 + 계획 달성 +0.14</a:t>
+              <a:t>동일 셋업 +1.00 + 페이싱 -0.31 + 계획 달성 +0.14  →  r = +0.83</a:t>
             </a:r>
           </a:p>
         </p:txBody>
@@ -19921,7 +21885,7 @@
                 </a:solidFill>
                 <a:latin typeface="맑은 고딕"/>
               </a:rPr>
-              <a:t>LOT020</a:t>
+              <a:t>LOT018</a:t>
             </a:r>
           </a:p>
         </p:txBody>
@@ -20032,8 +21996,8 @@
         </p:blipFill>
         <p:spPr>
           <a:xfrm>
-            <a:off x="3337560" y="1353312"/>
-            <a:ext cx="5532120" cy="1786901"/>
+            <a:off x="3337560" y="1325880"/>
+            <a:ext cx="5532120" cy="2240280"/>
           </a:xfrm>
           <a:prstGeom prst="rect">
             <a:avLst/>
@@ -20048,8 +22012,8 @@
         </p:nvSpPr>
         <p:spPr>
           <a:xfrm>
-            <a:off x="502920" y="4160520"/>
-            <a:ext cx="11201400" cy="384048"/>
+            <a:off x="502920" y="3703320"/>
+            <a:ext cx="11201400" cy="365760"/>
           </a:xfrm>
           <a:prstGeom prst="rect">
             <a:avLst/>
@@ -20092,8 +22056,8 @@
         </p:nvSpPr>
         <p:spPr>
           <a:xfrm>
-            <a:off x="502920" y="4160520"/>
-            <a:ext cx="11201400" cy="384048"/>
+            <a:off x="502920" y="3703320"/>
+            <a:ext cx="11201400" cy="365760"/>
           </a:xfrm>
           <a:prstGeom prst="rect">
             <a:avLst/>
@@ -20118,13 +22082,13 @@
               </a:spcAft>
             </a:pPr>
             <a:r>
-              <a:rPr sz="1300" b="1">
+              <a:rPr sz="1200" b="1">
                 <a:solidFill>
                   <a:srgbClr val="FFFFFF"/>
                 </a:solidFill>
                 <a:latin typeface="맑은 고딕"/>
               </a:rPr>
-              <a:t>Reward  r = +0.83   ·   누적 Σr = +10.98</a:t>
+              <a:t>Reward  r = +0.83   ·   누적 Σr = +10.98   ·   clip(Σ항, ±10)</a:t>
             </a:r>
           </a:p>
         </p:txBody>
@@ -20137,54 +22101,8 @@
         </p:nvSpPr>
         <p:spPr>
           <a:xfrm>
-            <a:off x="502920" y="4544568"/>
-            <a:ext cx="11201400" cy="1234440"/>
-          </a:xfrm>
-          <a:prstGeom prst="rect">
-            <a:avLst/>
-          </a:prstGeom>
-          <a:solidFill>
-            <a:srgbClr val="EEF2F7"/>
-          </a:solidFill>
-          <a:ln w="12700">
-            <a:solidFill>
-              <a:srgbClr val="C4CFDB"/>
-            </a:solidFill>
-          </a:ln>
-          <a:effectLst/>
-        </p:spPr>
-        <p:style>
-          <a:lnRef idx="1">
-            <a:schemeClr val="accent1"/>
-          </a:lnRef>
-          <a:fillRef idx="3">
-            <a:schemeClr val="accent1"/>
-          </a:fillRef>
-          <a:effectRef idx="2">
-            <a:schemeClr val="accent1"/>
-          </a:effectRef>
-          <a:fontRef idx="minor">
-            <a:schemeClr val="lt1"/>
-          </a:fontRef>
-        </p:style>
-        <p:txBody>
-          <a:bodyPr rtlCol="0" anchor="ctr"/>
-          <a:lstStyle/>
-          <a:p>
-            <a:pPr algn="ctr"/>
-          </a:p>
-        </p:txBody>
-      </p:sp>
-      <p:sp>
-        <p:nvSpPr>
-          <p:cNvPr id="46" name="Rectangle 45"/>
-          <p:cNvSpPr/>
-          <p:nvPr/>
-        </p:nvSpPr>
-        <p:spPr>
-          <a:xfrm>
-            <a:off x="685800" y="4681728"/>
-            <a:ext cx="2606040" cy="868680"/>
+            <a:off x="502920" y="4133087"/>
+            <a:ext cx="11201400" cy="713232"/>
           </a:xfrm>
           <a:prstGeom prst="rect">
             <a:avLst/>
@@ -20223,14 +22141,58 @@
       </p:sp>
       <p:sp>
         <p:nvSpPr>
+          <p:cNvPr id="46" name="Rectangle 45"/>
+          <p:cNvSpPr/>
+          <p:nvPr/>
+        </p:nvSpPr>
+        <p:spPr>
+          <a:xfrm>
+            <a:off x="502920" y="4133087"/>
+            <a:ext cx="73152" cy="713232"/>
+          </a:xfrm>
+          <a:prstGeom prst="rect">
+            <a:avLst/>
+          </a:prstGeom>
+          <a:solidFill>
+            <a:srgbClr val="2E7D4F"/>
+          </a:solidFill>
+          <a:ln>
+            <a:noFill/>
+          </a:ln>
+          <a:effectLst/>
+        </p:spPr>
+        <p:style>
+          <a:lnRef idx="1">
+            <a:schemeClr val="accent1"/>
+          </a:lnRef>
+          <a:fillRef idx="3">
+            <a:schemeClr val="accent1"/>
+          </a:fillRef>
+          <a:effectRef idx="2">
+            <a:schemeClr val="accent1"/>
+          </a:effectRef>
+          <a:fontRef idx="minor">
+            <a:schemeClr val="lt1"/>
+          </a:fontRef>
+        </p:style>
+        <p:txBody>
+          <a:bodyPr rtlCol="0" anchor="ctr"/>
+          <a:lstStyle/>
+          <a:p>
+            <a:pPr algn="ctr"/>
+          </a:p>
+        </p:txBody>
+      </p:sp>
+      <p:sp>
+        <p:nvSpPr>
           <p:cNvPr id="47" name="TextBox 46"/>
           <p:cNvSpPr txBox="1"/>
           <p:nvPr/>
         </p:nvSpPr>
         <p:spPr>
           <a:xfrm>
-            <a:off x="795528" y="4754880"/>
-            <a:ext cx="2377440" cy="320040"/>
+            <a:off x="658368" y="4187951"/>
+            <a:ext cx="1417320" cy="292608"/>
           </a:xfrm>
           <a:prstGeom prst="rect">
             <a:avLst/>
@@ -20274,8 +22236,8 @@
         </p:nvSpPr>
         <p:spPr>
           <a:xfrm>
-            <a:off x="795528" y="5074920"/>
-            <a:ext cx="2377440" cy="411480"/>
+            <a:off x="658368" y="4462272"/>
+            <a:ext cx="1417320" cy="292608"/>
           </a:xfrm>
           <a:prstGeom prst="rect">
             <a:avLst/>
@@ -20288,7 +22250,7 @@
           </a:bodyPr>
           <a:lstStyle/>
           <a:p>
-            <a:pPr algn="ctr">
+            <a:pPr algn="l">
               <a:lnSpc>
                 <a:spcPct val="100000"/>
               </a:lnSpc>
@@ -20300,7 +22262,7 @@
               </a:spcAft>
             </a:pPr>
             <a:r>
-              <a:rPr sz="1800" b="1">
+              <a:rPr sz="1400" b="1">
                 <a:solidFill>
                   <a:srgbClr val="2E7D4F"/>
                 </a:solidFill>
@@ -20313,14 +22275,149 @@
       </p:sp>
       <p:sp>
         <p:nvSpPr>
-          <p:cNvPr id="49" name="Rectangle 48"/>
+          <p:cNvPr id="49" name="TextBox 48"/>
+          <p:cNvSpPr txBox="1"/>
+          <p:nvPr/>
+        </p:nvSpPr>
+        <p:spPr>
+          <a:xfrm>
+            <a:off x="2148840" y="4178807"/>
+            <a:ext cx="8732520" cy="256032"/>
+          </a:xfrm>
+          <a:prstGeom prst="rect">
+            <a:avLst/>
+          </a:prstGeom>
+          <a:noFill/>
+        </p:spPr>
+        <p:txBody>
+          <a:bodyPr wrap="square" anchor="t" lIns="36576" rIns="36576" tIns="18288" bIns="18288">
+            <a:spAutoFit/>
+          </a:bodyPr>
+          <a:lstStyle/>
+          <a:p>
+            <a:pPr algn="l">
+              <a:lnSpc>
+                <a:spcPct val="100000"/>
+              </a:lnSpc>
+              <a:spcBef>
+                <a:spcPts val="0"/>
+              </a:spcBef>
+              <a:spcAft>
+                <a:spcPts val="400"/>
+              </a:spcAft>
+            </a:pPr>
+            <a:r>
+              <a:rPr sz="950" b="0">
+                <a:solidFill>
+                  <a:srgbClr val="5C6670"/>
+                </a:solidFill>
+                <a:latin typeface="맑은 고딕"/>
+              </a:rPr>
+              <a:t>w_same_setup · 1[동일 제품·공정 &amp; 재공 잔존]</a:t>
+            </a:r>
+          </a:p>
+        </p:txBody>
+      </p:sp>
+      <p:sp>
+        <p:nvSpPr>
+          <p:cNvPr id="50" name="TextBox 49"/>
+          <p:cNvSpPr txBox="1"/>
+          <p:nvPr/>
+        </p:nvSpPr>
+        <p:spPr>
+          <a:xfrm>
+            <a:off x="2148840" y="4407407"/>
+            <a:ext cx="9052560" cy="256032"/>
+          </a:xfrm>
+          <a:prstGeom prst="rect">
+            <a:avLst/>
+          </a:prstGeom>
+          <a:noFill/>
+        </p:spPr>
+        <p:txBody>
+          <a:bodyPr wrap="square" anchor="t" lIns="36576" rIns="36576" tIns="18288" bIns="18288">
+            <a:spAutoFit/>
+          </a:bodyPr>
+          <a:lstStyle/>
+          <a:p>
+            <a:pPr algn="l">
+              <a:lnSpc>
+                <a:spcPct val="100000"/>
+              </a:lnSpc>
+              <a:spcBef>
+                <a:spcPts val="0"/>
+              </a:spcBef>
+              <a:spcAft>
+                <a:spcPts val="400"/>
+              </a:spcAft>
+            </a:pPr>
+            <a:r>
+              <a:rPr sz="950" b="0">
+                <a:solidFill>
+                  <a:srgbClr val="222A33"/>
+                </a:solidFill>
+                <a:latin typeface="맑은 고딕"/>
+              </a:rPr>
+              <a:t>1.0 · 1[PPK003→PPK003, OPER001→OPER001] = 1.0</a:t>
+            </a:r>
+          </a:p>
+        </p:txBody>
+      </p:sp>
+      <p:sp>
+        <p:nvSpPr>
+          <p:cNvPr id="51" name="TextBox 50"/>
+          <p:cNvSpPr txBox="1"/>
+          <p:nvPr/>
+        </p:nvSpPr>
+        <p:spPr>
+          <a:xfrm>
+            <a:off x="10561320" y="4334255"/>
+            <a:ext cx="1005840" cy="347472"/>
+          </a:xfrm>
+          <a:prstGeom prst="rect">
+            <a:avLst/>
+          </a:prstGeom>
+          <a:noFill/>
+        </p:spPr>
+        <p:txBody>
+          <a:bodyPr wrap="square" anchor="ctr" lIns="36576" rIns="36576" tIns="18288" bIns="18288">
+            <a:spAutoFit/>
+          </a:bodyPr>
+          <a:lstStyle/>
+          <a:p>
+            <a:pPr algn="r">
+              <a:lnSpc>
+                <a:spcPct val="100000"/>
+              </a:lnSpc>
+              <a:spcBef>
+                <a:spcPts val="0"/>
+              </a:spcBef>
+              <a:spcAft>
+                <a:spcPts val="400"/>
+              </a:spcAft>
+            </a:pPr>
+            <a:r>
+              <a:rPr sz="1100" b="1">
+                <a:solidFill>
+                  <a:srgbClr val="2E7D4F"/>
+                </a:solidFill>
+                <a:latin typeface="맑은 고딕"/>
+              </a:rPr>
+              <a:t>= +1.00</a:t>
+            </a:r>
+          </a:p>
+        </p:txBody>
+      </p:sp>
+      <p:sp>
+        <p:nvSpPr>
+          <p:cNvPr id="52" name="Rectangle 51"/>
           <p:cNvSpPr/>
           <p:nvPr/>
         </p:nvSpPr>
         <p:spPr>
           <a:xfrm>
-            <a:off x="3383280" y="4681728"/>
-            <a:ext cx="2606040" cy="868680"/>
+            <a:off x="502920" y="4901183"/>
+            <a:ext cx="11201400" cy="713232"/>
           </a:xfrm>
           <a:prstGeom prst="rect">
             <a:avLst/>
@@ -20359,14 +22456,58 @@
       </p:sp>
       <p:sp>
         <p:nvSpPr>
-          <p:cNvPr id="50" name="TextBox 49"/>
-          <p:cNvSpPr txBox="1"/>
-          <p:nvPr/>
-        </p:nvSpPr>
-        <p:spPr>
-          <a:xfrm>
-            <a:off x="3493008" y="4754880"/>
-            <a:ext cx="2377440" cy="320040"/>
+          <p:cNvPr id="53" name="Rectangle 52"/>
+          <p:cNvSpPr/>
+          <p:nvPr/>
+        </p:nvSpPr>
+        <p:spPr>
+          <a:xfrm>
+            <a:off x="502920" y="4901183"/>
+            <a:ext cx="73152" cy="713232"/>
+          </a:xfrm>
+          <a:prstGeom prst="rect">
+            <a:avLst/>
+          </a:prstGeom>
+          <a:solidFill>
+            <a:srgbClr val="B33A3A"/>
+          </a:solidFill>
+          <a:ln>
+            <a:noFill/>
+          </a:ln>
+          <a:effectLst/>
+        </p:spPr>
+        <p:style>
+          <a:lnRef idx="1">
+            <a:schemeClr val="accent1"/>
+          </a:lnRef>
+          <a:fillRef idx="3">
+            <a:schemeClr val="accent1"/>
+          </a:fillRef>
+          <a:effectRef idx="2">
+            <a:schemeClr val="accent1"/>
+          </a:effectRef>
+          <a:fontRef idx="minor">
+            <a:schemeClr val="lt1"/>
+          </a:fontRef>
+        </p:style>
+        <p:txBody>
+          <a:bodyPr rtlCol="0" anchor="ctr"/>
+          <a:lstStyle/>
+          <a:p>
+            <a:pPr algn="ctr"/>
+          </a:p>
+        </p:txBody>
+      </p:sp>
+      <p:sp>
+        <p:nvSpPr>
+          <p:cNvPr id="54" name="TextBox 53"/>
+          <p:cNvSpPr txBox="1"/>
+          <p:nvPr/>
+        </p:nvSpPr>
+        <p:spPr>
+          <a:xfrm>
+            <a:off x="658368" y="4956047"/>
+            <a:ext cx="1417320" cy="292608"/>
           </a:xfrm>
           <a:prstGeom prst="rect">
             <a:avLst/>
@@ -20404,14 +22545,14 @@
       </p:sp>
       <p:sp>
         <p:nvSpPr>
-          <p:cNvPr id="51" name="TextBox 50"/>
-          <p:cNvSpPr txBox="1"/>
-          <p:nvPr/>
-        </p:nvSpPr>
-        <p:spPr>
-          <a:xfrm>
-            <a:off x="3493008" y="5074920"/>
-            <a:ext cx="2377440" cy="411480"/>
+          <p:cNvPr id="55" name="TextBox 54"/>
+          <p:cNvSpPr txBox="1"/>
+          <p:nvPr/>
+        </p:nvSpPr>
+        <p:spPr>
+          <a:xfrm>
+            <a:off x="658368" y="5230368"/>
+            <a:ext cx="1417320" cy="292608"/>
           </a:xfrm>
           <a:prstGeom prst="rect">
             <a:avLst/>
@@ -20424,7 +22565,7 @@
           </a:bodyPr>
           <a:lstStyle/>
           <a:p>
-            <a:pPr algn="ctr">
+            <a:pPr algn="l">
               <a:lnSpc>
                 <a:spcPct val="100000"/>
               </a:lnSpc>
@@ -20436,7 +22577,7 @@
               </a:spcAft>
             </a:pPr>
             <a:r>
-              <a:rPr sz="1800" b="1">
+              <a:rPr sz="1400" b="1">
                 <a:solidFill>
                   <a:srgbClr val="B33A3A"/>
                 </a:solidFill>
@@ -20449,14 +22590,149 @@
       </p:sp>
       <p:sp>
         <p:nvSpPr>
-          <p:cNvPr id="52" name="Rectangle 51"/>
+          <p:cNvPr id="56" name="TextBox 55"/>
+          <p:cNvSpPr txBox="1"/>
+          <p:nvPr/>
+        </p:nvSpPr>
+        <p:spPr>
+          <a:xfrm>
+            <a:off x="2148840" y="4946903"/>
+            <a:ext cx="8732520" cy="256032"/>
+          </a:xfrm>
+          <a:prstGeom prst="rect">
+            <a:avLst/>
+          </a:prstGeom>
+          <a:noFill/>
+        </p:spPr>
+        <p:txBody>
+          <a:bodyPr wrap="square" anchor="t" lIns="36576" rIns="36576" tIns="18288" bIns="18288">
+            <a:spAutoFit/>
+          </a:bodyPr>
+          <a:lstStyle/>
+          <a:p>
+            <a:pPr algn="l">
+              <a:lnSpc>
+                <a:spcPct val="100000"/>
+              </a:lnSpc>
+              <a:spcBef>
+                <a:spcPts val="0"/>
+              </a:spcBef>
+              <a:spcAft>
+                <a:spcPts val="400"/>
+              </a:spcAft>
+            </a:pPr>
+            <a:r>
+              <a:rPr sz="950" b="0">
+                <a:solidFill>
+                  <a:srgbClr val="5C6670"/>
+                </a:solidFill>
+                <a:latin typeface="맑은 고딕"/>
+              </a:rPr>
+              <a:t>w_pacing · (|ideal − eff_before| − |ideal − eff_after|) / target</a:t>
+            </a:r>
+          </a:p>
+        </p:txBody>
+      </p:sp>
+      <p:sp>
+        <p:nvSpPr>
+          <p:cNvPr id="57" name="TextBox 56"/>
+          <p:cNvSpPr txBox="1"/>
+          <p:nvPr/>
+        </p:nvSpPr>
+        <p:spPr>
+          <a:xfrm>
+            <a:off x="2148840" y="5175503"/>
+            <a:ext cx="9052560" cy="256032"/>
+          </a:xfrm>
+          <a:prstGeom prst="rect">
+            <a:avLst/>
+          </a:prstGeom>
+          <a:noFill/>
+        </p:spPr>
+        <p:txBody>
+          <a:bodyPr wrap="square" anchor="t" lIns="36576" rIns="36576" tIns="18288" bIns="18288">
+            <a:spAutoFit/>
+          </a:bodyPr>
+          <a:lstStyle/>
+          <a:p>
+            <a:pPr algn="l">
+              <a:lnSpc>
+                <a:spcPct val="100000"/>
+              </a:lnSpc>
+              <a:spcBef>
+                <a:spcPts val="0"/>
+              </a:spcBef>
+              <a:spcAft>
+                <a:spcPts val="400"/>
+              </a:spcAft>
+            </a:pPr>
+            <a:r>
+              <a:rPr sz="950" b="0">
+                <a:solidFill>
+                  <a:srgbClr val="222A33"/>
+                </a:solidFill>
+                <a:latin typeface="맑은 고딕"/>
+              </a:rPr>
+              <a:t>ideal: target·min(t,horizon)/horizon = 8·60/1320 = 0.36 · eff: 1.0→2.0 (done=1, cover=0.0, wf=1) · 2.5·(0.64−1.64)/8</a:t>
+            </a:r>
+          </a:p>
+        </p:txBody>
+      </p:sp>
+      <p:sp>
+        <p:nvSpPr>
+          <p:cNvPr id="58" name="TextBox 57"/>
+          <p:cNvSpPr txBox="1"/>
+          <p:nvPr/>
+        </p:nvSpPr>
+        <p:spPr>
+          <a:xfrm>
+            <a:off x="10561320" y="5102351"/>
+            <a:ext cx="1005840" cy="347472"/>
+          </a:xfrm>
+          <a:prstGeom prst="rect">
+            <a:avLst/>
+          </a:prstGeom>
+          <a:noFill/>
+        </p:spPr>
+        <p:txBody>
+          <a:bodyPr wrap="square" anchor="ctr" lIns="36576" rIns="36576" tIns="18288" bIns="18288">
+            <a:spAutoFit/>
+          </a:bodyPr>
+          <a:lstStyle/>
+          <a:p>
+            <a:pPr algn="r">
+              <a:lnSpc>
+                <a:spcPct val="100000"/>
+              </a:lnSpc>
+              <a:spcBef>
+                <a:spcPts val="0"/>
+              </a:spcBef>
+              <a:spcAft>
+                <a:spcPts val="400"/>
+              </a:spcAft>
+            </a:pPr>
+            <a:r>
+              <a:rPr sz="1100" b="1">
+                <a:solidFill>
+                  <a:srgbClr val="B33A3A"/>
+                </a:solidFill>
+                <a:latin typeface="맑은 고딕"/>
+              </a:rPr>
+              <a:t>= -0.31</a:t>
+            </a:r>
+          </a:p>
+        </p:txBody>
+      </p:sp>
+      <p:sp>
+        <p:nvSpPr>
+          <p:cNvPr id="59" name="Rectangle 58"/>
           <p:cNvSpPr/>
           <p:nvPr/>
         </p:nvSpPr>
         <p:spPr>
           <a:xfrm>
-            <a:off x="6080760" y="4681728"/>
-            <a:ext cx="2606040" cy="868680"/>
+            <a:off x="502920" y="5669279"/>
+            <a:ext cx="11201400" cy="713232"/>
           </a:xfrm>
           <a:prstGeom prst="rect">
             <a:avLst/>
@@ -20495,14 +22771,58 @@
       </p:sp>
       <p:sp>
         <p:nvSpPr>
-          <p:cNvPr id="53" name="TextBox 52"/>
-          <p:cNvSpPr txBox="1"/>
-          <p:nvPr/>
-        </p:nvSpPr>
-        <p:spPr>
-          <a:xfrm>
-            <a:off x="6190488" y="4754880"/>
-            <a:ext cx="2377440" cy="320040"/>
+          <p:cNvPr id="60" name="Rectangle 59"/>
+          <p:cNvSpPr/>
+          <p:nvPr/>
+        </p:nvSpPr>
+        <p:spPr>
+          <a:xfrm>
+            <a:off x="502920" y="5669279"/>
+            <a:ext cx="73152" cy="713232"/>
+          </a:xfrm>
+          <a:prstGeom prst="rect">
+            <a:avLst/>
+          </a:prstGeom>
+          <a:solidFill>
+            <a:srgbClr val="2E7D4F"/>
+          </a:solidFill>
+          <a:ln>
+            <a:noFill/>
+          </a:ln>
+          <a:effectLst/>
+        </p:spPr>
+        <p:style>
+          <a:lnRef idx="1">
+            <a:schemeClr val="accent1"/>
+          </a:lnRef>
+          <a:fillRef idx="3">
+            <a:schemeClr val="accent1"/>
+          </a:fillRef>
+          <a:effectRef idx="2">
+            <a:schemeClr val="accent1"/>
+          </a:effectRef>
+          <a:fontRef idx="minor">
+            <a:schemeClr val="lt1"/>
+          </a:fontRef>
+        </p:style>
+        <p:txBody>
+          <a:bodyPr rtlCol="0" anchor="ctr"/>
+          <a:lstStyle/>
+          <a:p>
+            <a:pPr algn="ctr"/>
+          </a:p>
+        </p:txBody>
+      </p:sp>
+      <p:sp>
+        <p:nvSpPr>
+          <p:cNvPr id="61" name="TextBox 60"/>
+          <p:cNvSpPr txBox="1"/>
+          <p:nvPr/>
+        </p:nvSpPr>
+        <p:spPr>
+          <a:xfrm>
+            <a:off x="658368" y="5724143"/>
+            <a:ext cx="1417320" cy="292608"/>
           </a:xfrm>
           <a:prstGeom prst="rect">
             <a:avLst/>
@@ -20540,14 +22860,14 @@
       </p:sp>
       <p:sp>
         <p:nvSpPr>
-          <p:cNvPr id="54" name="TextBox 53"/>
-          <p:cNvSpPr txBox="1"/>
-          <p:nvPr/>
-        </p:nvSpPr>
-        <p:spPr>
-          <a:xfrm>
-            <a:off x="6190488" y="5074920"/>
-            <a:ext cx="2377440" cy="411480"/>
+          <p:cNvPr id="62" name="TextBox 61"/>
+          <p:cNvSpPr txBox="1"/>
+          <p:nvPr/>
+        </p:nvSpPr>
+        <p:spPr>
+          <a:xfrm>
+            <a:off x="658368" y="5998464"/>
+            <a:ext cx="1417320" cy="292608"/>
           </a:xfrm>
           <a:prstGeom prst="rect">
             <a:avLst/>
@@ -20560,7 +22880,7 @@
           </a:bodyPr>
           <a:lstStyle/>
           <a:p>
-            <a:pPr algn="ctr">
+            <a:pPr algn="l">
               <a:lnSpc>
                 <a:spcPct val="100000"/>
               </a:lnSpc>
@@ -20572,7 +22892,7 @@
               </a:spcAft>
             </a:pPr>
             <a:r>
-              <a:rPr sz="1800" b="1">
+              <a:rPr sz="1400" b="1">
                 <a:solidFill>
                   <a:srgbClr val="2E7D4F"/>
                 </a:solidFill>
@@ -20585,14 +22905,149 @@
       </p:sp>
       <p:sp>
         <p:nvSpPr>
-          <p:cNvPr id="55" name="Rectangle 54"/>
+          <p:cNvPr id="63" name="TextBox 62"/>
+          <p:cNvSpPr txBox="1"/>
+          <p:nvPr/>
+        </p:nvSpPr>
+        <p:spPr>
+          <a:xfrm>
+            <a:off x="2148840" y="5714999"/>
+            <a:ext cx="8732520" cy="256032"/>
+          </a:xfrm>
+          <a:prstGeom prst="rect">
+            <a:avLst/>
+          </a:prstGeom>
+          <a:noFill/>
+        </p:spPr>
+        <p:txBody>
+          <a:bodyPr wrap="square" anchor="t" lIns="36576" rIns="36576" tIns="18288" bIns="18288">
+            <a:spAutoFit/>
+          </a:bodyPr>
+          <a:lstStyle/>
+          <a:p>
+            <a:pPr algn="l">
+              <a:lnSpc>
+                <a:spcPct val="100000"/>
+              </a:lnSpc>
+              <a:spcBef>
+                <a:spcPts val="0"/>
+              </a:spcBef>
+              <a:spcAft>
+                <a:spcPts val="400"/>
+              </a:spcAft>
+            </a:pPr>
+            <a:r>
+              <a:rPr sz="950" b="0">
+                <a:solidFill>
+                  <a:srgbClr val="5C6670"/>
+                </a:solidFill>
+                <a:latin typeface="맑은 고딕"/>
+              </a:rPr>
+              <a:t>w_plan_hit · (gap_before − gap_after) / target   ;  gap = max(target − done, 0)</a:t>
+            </a:r>
+          </a:p>
+        </p:txBody>
+      </p:sp>
+      <p:sp>
+        <p:nvSpPr>
+          <p:cNvPr id="64" name="TextBox 63"/>
+          <p:cNvSpPr txBox="1"/>
+          <p:nvPr/>
+        </p:nvSpPr>
+        <p:spPr>
+          <a:xfrm>
+            <a:off x="2148840" y="5943599"/>
+            <a:ext cx="9052560" cy="256032"/>
+          </a:xfrm>
+          <a:prstGeom prst="rect">
+            <a:avLst/>
+          </a:prstGeom>
+          <a:noFill/>
+        </p:spPr>
+        <p:txBody>
+          <a:bodyPr wrap="square" anchor="t" lIns="36576" rIns="36576" tIns="18288" bIns="18288">
+            <a:spAutoFit/>
+          </a:bodyPr>
+          <a:lstStyle/>
+          <a:p>
+            <a:pPr algn="l">
+              <a:lnSpc>
+                <a:spcPct val="100000"/>
+              </a:lnSpc>
+              <a:spcBef>
+                <a:spcPts val="0"/>
+              </a:spcBef>
+              <a:spcAft>
+                <a:spcPts val="400"/>
+              </a:spcAft>
+            </a:pPr>
+            <a:r>
+              <a:rPr sz="950" b="0">
+                <a:solidFill>
+                  <a:srgbClr val="222A33"/>
+                </a:solidFill>
+                <a:latin typeface="맑은 고딕"/>
+              </a:rPr>
+              <a:t>gap: 7→6 (done 1→2, target=8) · 1.0·(7−6)/8</a:t>
+            </a:r>
+          </a:p>
+        </p:txBody>
+      </p:sp>
+      <p:sp>
+        <p:nvSpPr>
+          <p:cNvPr id="65" name="TextBox 64"/>
+          <p:cNvSpPr txBox="1"/>
+          <p:nvPr/>
+        </p:nvSpPr>
+        <p:spPr>
+          <a:xfrm>
+            <a:off x="10561320" y="5870447"/>
+            <a:ext cx="1005840" cy="347472"/>
+          </a:xfrm>
+          <a:prstGeom prst="rect">
+            <a:avLst/>
+          </a:prstGeom>
+          <a:noFill/>
+        </p:spPr>
+        <p:txBody>
+          <a:bodyPr wrap="square" anchor="ctr" lIns="36576" rIns="36576" tIns="18288" bIns="18288">
+            <a:spAutoFit/>
+          </a:bodyPr>
+          <a:lstStyle/>
+          <a:p>
+            <a:pPr algn="r">
+              <a:lnSpc>
+                <a:spcPct val="100000"/>
+              </a:lnSpc>
+              <a:spcBef>
+                <a:spcPts val="0"/>
+              </a:spcBef>
+              <a:spcAft>
+                <a:spcPts val="400"/>
+              </a:spcAft>
+            </a:pPr>
+            <a:r>
+              <a:rPr sz="1100" b="1">
+                <a:solidFill>
+                  <a:srgbClr val="2E7D4F"/>
+                </a:solidFill>
+                <a:latin typeface="맑은 고딕"/>
+              </a:rPr>
+              <a:t>= +0.14</a:t>
+            </a:r>
+          </a:p>
+        </p:txBody>
+      </p:sp>
+      <p:sp>
+        <p:nvSpPr>
+          <p:cNvPr id="66" name="Rectangle 65"/>
           <p:cNvSpPr/>
           <p:nvPr/>
         </p:nvSpPr>
         <p:spPr>
           <a:xfrm>
-            <a:off x="502920" y="5897880"/>
-            <a:ext cx="11201400" cy="438912"/>
+            <a:off x="502920" y="6455663"/>
+            <a:ext cx="11201400" cy="347472"/>
           </a:xfrm>
           <a:prstGeom prst="rect">
             <a:avLst/>
@@ -20629,14 +23084,14 @@
       </p:sp>
       <p:sp>
         <p:nvSpPr>
-          <p:cNvPr id="56" name="TextBox 55"/>
-          <p:cNvSpPr txBox="1"/>
-          <p:nvPr/>
-        </p:nvSpPr>
-        <p:spPr>
-          <a:xfrm>
-            <a:off x="685800" y="5897880"/>
-            <a:ext cx="10881360" cy="438912"/>
+          <p:cNvPr id="67" name="TextBox 66"/>
+          <p:cNvSpPr txBox="1"/>
+          <p:nvPr/>
+        </p:nvSpPr>
+        <p:spPr>
+          <a:xfrm>
+            <a:off x="685800" y="6455663"/>
+            <a:ext cx="10881360" cy="347472"/>
           </a:xfrm>
           <a:prstGeom prst="rect">
             <a:avLst/>
@@ -20661,22 +23116,22 @@
               </a:spcAft>
             </a:pPr>
             <a:r>
-              <a:rPr sz="1050" b="1">
+              <a:rPr sz="1000" b="1">
                 <a:solidFill>
                   <a:srgbClr val="2E6FB0"/>
                 </a:solidFill>
                 <a:latin typeface="맑은 고딕"/>
               </a:rPr>
-              <a:t>계산  </a:t>
-            </a:r>
-            <a:r>
-              <a:rPr sz="1050" b="0">
+              <a:t>합산  </a:t>
+            </a:r>
+            <a:r>
+              <a:rPr sz="1000" b="0">
                 <a:solidFill>
                   <a:srgbClr val="222A33"/>
                 </a:solidFill>
                 <a:latin typeface="맑은 고딕"/>
               </a:rPr>
-              <a:t>동일 셋업 +1.00 + 페이싱 -0.31 + 계획 달성 +0.14</a:t>
+              <a:t>동일 셋업 +1.00 + 페이싱 -0.31 + 계획 달성 +0.14  →  r = +0.83</a:t>
             </a:r>
           </a:p>
         </p:txBody>
@@ -22511,8 +24966,8 @@
         </p:blipFill>
         <p:spPr>
           <a:xfrm>
-            <a:off x="3337560" y="1353312"/>
-            <a:ext cx="5532120" cy="1786901"/>
+            <a:off x="3337560" y="1325880"/>
+            <a:ext cx="5532120" cy="2240280"/>
           </a:xfrm>
           <a:prstGeom prst="rect">
             <a:avLst/>
@@ -22527,8 +24982,8 @@
         </p:nvSpPr>
         <p:spPr>
           <a:xfrm>
-            <a:off x="502920" y="4160520"/>
-            <a:ext cx="11201400" cy="384048"/>
+            <a:off x="502920" y="3703320"/>
+            <a:ext cx="11201400" cy="365760"/>
           </a:xfrm>
           <a:prstGeom prst="rect">
             <a:avLst/>
@@ -22571,8 +25026,8 @@
         </p:nvSpPr>
         <p:spPr>
           <a:xfrm>
-            <a:off x="502920" y="4160520"/>
-            <a:ext cx="11201400" cy="384048"/>
+            <a:off x="502920" y="3703320"/>
+            <a:ext cx="11201400" cy="365760"/>
           </a:xfrm>
           <a:prstGeom prst="rect">
             <a:avLst/>
@@ -22597,13 +25052,13 @@
               </a:spcAft>
             </a:pPr>
             <a:r>
-              <a:rPr sz="1300" b="1">
+              <a:rPr sz="1200" b="1">
                 <a:solidFill>
                   <a:srgbClr val="FFFFFF"/>
                 </a:solidFill>
                 <a:latin typeface="맑은 고딕"/>
               </a:rPr>
-              <a:t>Reward  r = +0.83   ·   누적 Σr = +12.64</a:t>
+              <a:t>Reward  r = +0.83   ·   누적 Σr = +12.64   ·   clip(Σ항, ±10)</a:t>
             </a:r>
           </a:p>
         </p:txBody>
@@ -22616,54 +25071,8 @@
         </p:nvSpPr>
         <p:spPr>
           <a:xfrm>
-            <a:off x="502920" y="4544568"/>
-            <a:ext cx="11201400" cy="1234440"/>
-          </a:xfrm>
-          <a:prstGeom prst="rect">
-            <a:avLst/>
-          </a:prstGeom>
-          <a:solidFill>
-            <a:srgbClr val="EEF2F7"/>
-          </a:solidFill>
-          <a:ln w="12700">
-            <a:solidFill>
-              <a:srgbClr val="C4CFDB"/>
-            </a:solidFill>
-          </a:ln>
-          <a:effectLst/>
-        </p:spPr>
-        <p:style>
-          <a:lnRef idx="1">
-            <a:schemeClr val="accent1"/>
-          </a:lnRef>
-          <a:fillRef idx="3">
-            <a:schemeClr val="accent1"/>
-          </a:fillRef>
-          <a:effectRef idx="2">
-            <a:schemeClr val="accent1"/>
-          </a:effectRef>
-          <a:fontRef idx="minor">
-            <a:schemeClr val="lt1"/>
-          </a:fontRef>
-        </p:style>
-        <p:txBody>
-          <a:bodyPr rtlCol="0" anchor="ctr"/>
-          <a:lstStyle/>
-          <a:p>
-            <a:pPr algn="ctr"/>
-          </a:p>
-        </p:txBody>
-      </p:sp>
-      <p:sp>
-        <p:nvSpPr>
-          <p:cNvPr id="46" name="Rectangle 45"/>
-          <p:cNvSpPr/>
-          <p:nvPr/>
-        </p:nvSpPr>
-        <p:spPr>
-          <a:xfrm>
-            <a:off x="685800" y="4681728"/>
-            <a:ext cx="2606040" cy="868680"/>
+            <a:off x="502920" y="4133087"/>
+            <a:ext cx="11201400" cy="713232"/>
           </a:xfrm>
           <a:prstGeom prst="rect">
             <a:avLst/>
@@ -22702,14 +25111,58 @@
       </p:sp>
       <p:sp>
         <p:nvSpPr>
+          <p:cNvPr id="46" name="Rectangle 45"/>
+          <p:cNvSpPr/>
+          <p:nvPr/>
+        </p:nvSpPr>
+        <p:spPr>
+          <a:xfrm>
+            <a:off x="502920" y="4133087"/>
+            <a:ext cx="73152" cy="713232"/>
+          </a:xfrm>
+          <a:prstGeom prst="rect">
+            <a:avLst/>
+          </a:prstGeom>
+          <a:solidFill>
+            <a:srgbClr val="2E7D4F"/>
+          </a:solidFill>
+          <a:ln>
+            <a:noFill/>
+          </a:ln>
+          <a:effectLst/>
+        </p:spPr>
+        <p:style>
+          <a:lnRef idx="1">
+            <a:schemeClr val="accent1"/>
+          </a:lnRef>
+          <a:fillRef idx="3">
+            <a:schemeClr val="accent1"/>
+          </a:fillRef>
+          <a:effectRef idx="2">
+            <a:schemeClr val="accent1"/>
+          </a:effectRef>
+          <a:fontRef idx="minor">
+            <a:schemeClr val="lt1"/>
+          </a:fontRef>
+        </p:style>
+        <p:txBody>
+          <a:bodyPr rtlCol="0" anchor="ctr"/>
+          <a:lstStyle/>
+          <a:p>
+            <a:pPr algn="ctr"/>
+          </a:p>
+        </p:txBody>
+      </p:sp>
+      <p:sp>
+        <p:nvSpPr>
           <p:cNvPr id="47" name="TextBox 46"/>
           <p:cNvSpPr txBox="1"/>
           <p:nvPr/>
         </p:nvSpPr>
         <p:spPr>
           <a:xfrm>
-            <a:off x="795528" y="4754880"/>
-            <a:ext cx="2377440" cy="320040"/>
+            <a:off x="658368" y="4187951"/>
+            <a:ext cx="1417320" cy="292608"/>
           </a:xfrm>
           <a:prstGeom prst="rect">
             <a:avLst/>
@@ -22753,8 +25206,8 @@
         </p:nvSpPr>
         <p:spPr>
           <a:xfrm>
-            <a:off x="795528" y="5074920"/>
-            <a:ext cx="2377440" cy="411480"/>
+            <a:off x="658368" y="4462272"/>
+            <a:ext cx="1417320" cy="292608"/>
           </a:xfrm>
           <a:prstGeom prst="rect">
             <a:avLst/>
@@ -22767,7 +25220,7 @@
           </a:bodyPr>
           <a:lstStyle/>
           <a:p>
-            <a:pPr algn="ctr">
+            <a:pPr algn="l">
               <a:lnSpc>
                 <a:spcPct val="100000"/>
               </a:lnSpc>
@@ -22779,7 +25232,7 @@
               </a:spcAft>
             </a:pPr>
             <a:r>
-              <a:rPr sz="1800" b="1">
+              <a:rPr sz="1400" b="1">
                 <a:solidFill>
                   <a:srgbClr val="2E7D4F"/>
                 </a:solidFill>
@@ -22792,14 +25245,149 @@
       </p:sp>
       <p:sp>
         <p:nvSpPr>
-          <p:cNvPr id="49" name="Rectangle 48"/>
+          <p:cNvPr id="49" name="TextBox 48"/>
+          <p:cNvSpPr txBox="1"/>
+          <p:nvPr/>
+        </p:nvSpPr>
+        <p:spPr>
+          <a:xfrm>
+            <a:off x="2148840" y="4178807"/>
+            <a:ext cx="8732520" cy="256032"/>
+          </a:xfrm>
+          <a:prstGeom prst="rect">
+            <a:avLst/>
+          </a:prstGeom>
+          <a:noFill/>
+        </p:spPr>
+        <p:txBody>
+          <a:bodyPr wrap="square" anchor="t" lIns="36576" rIns="36576" tIns="18288" bIns="18288">
+            <a:spAutoFit/>
+          </a:bodyPr>
+          <a:lstStyle/>
+          <a:p>
+            <a:pPr algn="l">
+              <a:lnSpc>
+                <a:spcPct val="100000"/>
+              </a:lnSpc>
+              <a:spcBef>
+                <a:spcPts val="0"/>
+              </a:spcBef>
+              <a:spcAft>
+                <a:spcPts val="400"/>
+              </a:spcAft>
+            </a:pPr>
+            <a:r>
+              <a:rPr sz="950" b="0">
+                <a:solidFill>
+                  <a:srgbClr val="5C6670"/>
+                </a:solidFill>
+                <a:latin typeface="맑은 고딕"/>
+              </a:rPr>
+              <a:t>w_same_setup · 1[동일 제품·공정 &amp; 재공 잔존]</a:t>
+            </a:r>
+          </a:p>
+        </p:txBody>
+      </p:sp>
+      <p:sp>
+        <p:nvSpPr>
+          <p:cNvPr id="50" name="TextBox 49"/>
+          <p:cNvSpPr txBox="1"/>
+          <p:nvPr/>
+        </p:nvSpPr>
+        <p:spPr>
+          <a:xfrm>
+            <a:off x="2148840" y="4407407"/>
+            <a:ext cx="9052560" cy="256032"/>
+          </a:xfrm>
+          <a:prstGeom prst="rect">
+            <a:avLst/>
+          </a:prstGeom>
+          <a:noFill/>
+        </p:spPr>
+        <p:txBody>
+          <a:bodyPr wrap="square" anchor="t" lIns="36576" rIns="36576" tIns="18288" bIns="18288">
+            <a:spAutoFit/>
+          </a:bodyPr>
+          <a:lstStyle/>
+          <a:p>
+            <a:pPr algn="l">
+              <a:lnSpc>
+                <a:spcPct val="100000"/>
+              </a:lnSpc>
+              <a:spcBef>
+                <a:spcPts val="0"/>
+              </a:spcBef>
+              <a:spcAft>
+                <a:spcPts val="400"/>
+              </a:spcAft>
+            </a:pPr>
+            <a:r>
+              <a:rPr sz="950" b="0">
+                <a:solidFill>
+                  <a:srgbClr val="222A33"/>
+                </a:solidFill>
+                <a:latin typeface="맑은 고딕"/>
+              </a:rPr>
+              <a:t>1.0 · 1[PPK002→PPK002, OPER001→OPER001] = 1.0</a:t>
+            </a:r>
+          </a:p>
+        </p:txBody>
+      </p:sp>
+      <p:sp>
+        <p:nvSpPr>
+          <p:cNvPr id="51" name="TextBox 50"/>
+          <p:cNvSpPr txBox="1"/>
+          <p:nvPr/>
+        </p:nvSpPr>
+        <p:spPr>
+          <a:xfrm>
+            <a:off x="10561320" y="4334255"/>
+            <a:ext cx="1005840" cy="347472"/>
+          </a:xfrm>
+          <a:prstGeom prst="rect">
+            <a:avLst/>
+          </a:prstGeom>
+          <a:noFill/>
+        </p:spPr>
+        <p:txBody>
+          <a:bodyPr wrap="square" anchor="ctr" lIns="36576" rIns="36576" tIns="18288" bIns="18288">
+            <a:spAutoFit/>
+          </a:bodyPr>
+          <a:lstStyle/>
+          <a:p>
+            <a:pPr algn="r">
+              <a:lnSpc>
+                <a:spcPct val="100000"/>
+              </a:lnSpc>
+              <a:spcBef>
+                <a:spcPts val="0"/>
+              </a:spcBef>
+              <a:spcAft>
+                <a:spcPts val="400"/>
+              </a:spcAft>
+            </a:pPr>
+            <a:r>
+              <a:rPr sz="1100" b="1">
+                <a:solidFill>
+                  <a:srgbClr val="2E7D4F"/>
+                </a:solidFill>
+                <a:latin typeface="맑은 고딕"/>
+              </a:rPr>
+              <a:t>= +1.00</a:t>
+            </a:r>
+          </a:p>
+        </p:txBody>
+      </p:sp>
+      <p:sp>
+        <p:nvSpPr>
+          <p:cNvPr id="52" name="Rectangle 51"/>
           <p:cNvSpPr/>
           <p:nvPr/>
         </p:nvSpPr>
         <p:spPr>
           <a:xfrm>
-            <a:off x="3383280" y="4681728"/>
-            <a:ext cx="2606040" cy="868680"/>
+            <a:off x="502920" y="4901183"/>
+            <a:ext cx="11201400" cy="713232"/>
           </a:xfrm>
           <a:prstGeom prst="rect">
             <a:avLst/>
@@ -22838,14 +25426,58 @@
       </p:sp>
       <p:sp>
         <p:nvSpPr>
-          <p:cNvPr id="50" name="TextBox 49"/>
-          <p:cNvSpPr txBox="1"/>
-          <p:nvPr/>
-        </p:nvSpPr>
-        <p:spPr>
-          <a:xfrm>
-            <a:off x="3493008" y="4754880"/>
-            <a:ext cx="2377440" cy="320040"/>
+          <p:cNvPr id="53" name="Rectangle 52"/>
+          <p:cNvSpPr/>
+          <p:nvPr/>
+        </p:nvSpPr>
+        <p:spPr>
+          <a:xfrm>
+            <a:off x="502920" y="4901183"/>
+            <a:ext cx="73152" cy="713232"/>
+          </a:xfrm>
+          <a:prstGeom prst="rect">
+            <a:avLst/>
+          </a:prstGeom>
+          <a:solidFill>
+            <a:srgbClr val="B33A3A"/>
+          </a:solidFill>
+          <a:ln>
+            <a:noFill/>
+          </a:ln>
+          <a:effectLst/>
+        </p:spPr>
+        <p:style>
+          <a:lnRef idx="1">
+            <a:schemeClr val="accent1"/>
+          </a:lnRef>
+          <a:fillRef idx="3">
+            <a:schemeClr val="accent1"/>
+          </a:fillRef>
+          <a:effectRef idx="2">
+            <a:schemeClr val="accent1"/>
+          </a:effectRef>
+          <a:fontRef idx="minor">
+            <a:schemeClr val="lt1"/>
+          </a:fontRef>
+        </p:style>
+        <p:txBody>
+          <a:bodyPr rtlCol="0" anchor="ctr"/>
+          <a:lstStyle/>
+          <a:p>
+            <a:pPr algn="ctr"/>
+          </a:p>
+        </p:txBody>
+      </p:sp>
+      <p:sp>
+        <p:nvSpPr>
+          <p:cNvPr id="54" name="TextBox 53"/>
+          <p:cNvSpPr txBox="1"/>
+          <p:nvPr/>
+        </p:nvSpPr>
+        <p:spPr>
+          <a:xfrm>
+            <a:off x="658368" y="4956047"/>
+            <a:ext cx="1417320" cy="292608"/>
           </a:xfrm>
           <a:prstGeom prst="rect">
             <a:avLst/>
@@ -22883,14 +25515,14 @@
       </p:sp>
       <p:sp>
         <p:nvSpPr>
-          <p:cNvPr id="51" name="TextBox 50"/>
-          <p:cNvSpPr txBox="1"/>
-          <p:nvPr/>
-        </p:nvSpPr>
-        <p:spPr>
-          <a:xfrm>
-            <a:off x="3493008" y="5074920"/>
-            <a:ext cx="2377440" cy="411480"/>
+          <p:cNvPr id="55" name="TextBox 54"/>
+          <p:cNvSpPr txBox="1"/>
+          <p:nvPr/>
+        </p:nvSpPr>
+        <p:spPr>
+          <a:xfrm>
+            <a:off x="658368" y="5230368"/>
+            <a:ext cx="1417320" cy="292608"/>
           </a:xfrm>
           <a:prstGeom prst="rect">
             <a:avLst/>
@@ -22903,7 +25535,7 @@
           </a:bodyPr>
           <a:lstStyle/>
           <a:p>
-            <a:pPr algn="ctr">
+            <a:pPr algn="l">
               <a:lnSpc>
                 <a:spcPct val="100000"/>
               </a:lnSpc>
@@ -22915,7 +25547,7 @@
               </a:spcAft>
             </a:pPr>
             <a:r>
-              <a:rPr sz="1800" b="1">
+              <a:rPr sz="1400" b="1">
                 <a:solidFill>
                   <a:srgbClr val="B33A3A"/>
                 </a:solidFill>
@@ -22928,14 +25560,149 @@
       </p:sp>
       <p:sp>
         <p:nvSpPr>
-          <p:cNvPr id="52" name="Rectangle 51"/>
+          <p:cNvPr id="56" name="TextBox 55"/>
+          <p:cNvSpPr txBox="1"/>
+          <p:nvPr/>
+        </p:nvSpPr>
+        <p:spPr>
+          <a:xfrm>
+            <a:off x="2148840" y="4946903"/>
+            <a:ext cx="8732520" cy="256032"/>
+          </a:xfrm>
+          <a:prstGeom prst="rect">
+            <a:avLst/>
+          </a:prstGeom>
+          <a:noFill/>
+        </p:spPr>
+        <p:txBody>
+          <a:bodyPr wrap="square" anchor="t" lIns="36576" rIns="36576" tIns="18288" bIns="18288">
+            <a:spAutoFit/>
+          </a:bodyPr>
+          <a:lstStyle/>
+          <a:p>
+            <a:pPr algn="l">
+              <a:lnSpc>
+                <a:spcPct val="100000"/>
+              </a:lnSpc>
+              <a:spcBef>
+                <a:spcPts val="0"/>
+              </a:spcBef>
+              <a:spcAft>
+                <a:spcPts val="400"/>
+              </a:spcAft>
+            </a:pPr>
+            <a:r>
+              <a:rPr sz="950" b="0">
+                <a:solidFill>
+                  <a:srgbClr val="5C6670"/>
+                </a:solidFill>
+                <a:latin typeface="맑은 고딕"/>
+              </a:rPr>
+              <a:t>w_pacing · (|ideal − eff_before| − |ideal − eff_after|) / target</a:t>
+            </a:r>
+          </a:p>
+        </p:txBody>
+      </p:sp>
+      <p:sp>
+        <p:nvSpPr>
+          <p:cNvPr id="57" name="TextBox 56"/>
+          <p:cNvSpPr txBox="1"/>
+          <p:nvPr/>
+        </p:nvSpPr>
+        <p:spPr>
+          <a:xfrm>
+            <a:off x="2148840" y="5175503"/>
+            <a:ext cx="9052560" cy="256032"/>
+          </a:xfrm>
+          <a:prstGeom prst="rect">
+            <a:avLst/>
+          </a:prstGeom>
+          <a:noFill/>
+        </p:spPr>
+        <p:txBody>
+          <a:bodyPr wrap="square" anchor="t" lIns="36576" rIns="36576" tIns="18288" bIns="18288">
+            <a:spAutoFit/>
+          </a:bodyPr>
+          <a:lstStyle/>
+          <a:p>
+            <a:pPr algn="l">
+              <a:lnSpc>
+                <a:spcPct val="100000"/>
+              </a:lnSpc>
+              <a:spcBef>
+                <a:spcPts val="0"/>
+              </a:spcBef>
+              <a:spcAft>
+                <a:spcPts val="400"/>
+              </a:spcAft>
+            </a:pPr>
+            <a:r>
+              <a:rPr sz="950" b="0">
+                <a:solidFill>
+                  <a:srgbClr val="222A33"/>
+                </a:solidFill>
+                <a:latin typeface="맑은 고딕"/>
+              </a:rPr>
+              <a:t>ideal: target·min(t,horizon)/horizon = 8·120/1320 = 0.73 · eff: 2.0→3.0 (done=2, cover=0.0, wf=1) · 2.5·(1.27−2.27)/8</a:t>
+            </a:r>
+          </a:p>
+        </p:txBody>
+      </p:sp>
+      <p:sp>
+        <p:nvSpPr>
+          <p:cNvPr id="58" name="TextBox 57"/>
+          <p:cNvSpPr txBox="1"/>
+          <p:nvPr/>
+        </p:nvSpPr>
+        <p:spPr>
+          <a:xfrm>
+            <a:off x="10561320" y="5102351"/>
+            <a:ext cx="1005840" cy="347472"/>
+          </a:xfrm>
+          <a:prstGeom prst="rect">
+            <a:avLst/>
+          </a:prstGeom>
+          <a:noFill/>
+        </p:spPr>
+        <p:txBody>
+          <a:bodyPr wrap="square" anchor="ctr" lIns="36576" rIns="36576" tIns="18288" bIns="18288">
+            <a:spAutoFit/>
+          </a:bodyPr>
+          <a:lstStyle/>
+          <a:p>
+            <a:pPr algn="r">
+              <a:lnSpc>
+                <a:spcPct val="100000"/>
+              </a:lnSpc>
+              <a:spcBef>
+                <a:spcPts val="0"/>
+              </a:spcBef>
+              <a:spcAft>
+                <a:spcPts val="400"/>
+              </a:spcAft>
+            </a:pPr>
+            <a:r>
+              <a:rPr sz="1100" b="1">
+                <a:solidFill>
+                  <a:srgbClr val="B33A3A"/>
+                </a:solidFill>
+                <a:latin typeface="맑은 고딕"/>
+              </a:rPr>
+              <a:t>= -0.31</a:t>
+            </a:r>
+          </a:p>
+        </p:txBody>
+      </p:sp>
+      <p:sp>
+        <p:nvSpPr>
+          <p:cNvPr id="59" name="Rectangle 58"/>
           <p:cNvSpPr/>
           <p:nvPr/>
         </p:nvSpPr>
         <p:spPr>
           <a:xfrm>
-            <a:off x="6080760" y="4681728"/>
-            <a:ext cx="2606040" cy="868680"/>
+            <a:off x="502920" y="5669279"/>
+            <a:ext cx="11201400" cy="713232"/>
           </a:xfrm>
           <a:prstGeom prst="rect">
             <a:avLst/>
@@ -22974,14 +25741,58 @@
       </p:sp>
       <p:sp>
         <p:nvSpPr>
-          <p:cNvPr id="53" name="TextBox 52"/>
-          <p:cNvSpPr txBox="1"/>
-          <p:nvPr/>
-        </p:nvSpPr>
-        <p:spPr>
-          <a:xfrm>
-            <a:off x="6190488" y="4754880"/>
-            <a:ext cx="2377440" cy="320040"/>
+          <p:cNvPr id="60" name="Rectangle 59"/>
+          <p:cNvSpPr/>
+          <p:nvPr/>
+        </p:nvSpPr>
+        <p:spPr>
+          <a:xfrm>
+            <a:off x="502920" y="5669279"/>
+            <a:ext cx="73152" cy="713232"/>
+          </a:xfrm>
+          <a:prstGeom prst="rect">
+            <a:avLst/>
+          </a:prstGeom>
+          <a:solidFill>
+            <a:srgbClr val="2E7D4F"/>
+          </a:solidFill>
+          <a:ln>
+            <a:noFill/>
+          </a:ln>
+          <a:effectLst/>
+        </p:spPr>
+        <p:style>
+          <a:lnRef idx="1">
+            <a:schemeClr val="accent1"/>
+          </a:lnRef>
+          <a:fillRef idx="3">
+            <a:schemeClr val="accent1"/>
+          </a:fillRef>
+          <a:effectRef idx="2">
+            <a:schemeClr val="accent1"/>
+          </a:effectRef>
+          <a:fontRef idx="minor">
+            <a:schemeClr val="lt1"/>
+          </a:fontRef>
+        </p:style>
+        <p:txBody>
+          <a:bodyPr rtlCol="0" anchor="ctr"/>
+          <a:lstStyle/>
+          <a:p>
+            <a:pPr algn="ctr"/>
+          </a:p>
+        </p:txBody>
+      </p:sp>
+      <p:sp>
+        <p:nvSpPr>
+          <p:cNvPr id="61" name="TextBox 60"/>
+          <p:cNvSpPr txBox="1"/>
+          <p:nvPr/>
+        </p:nvSpPr>
+        <p:spPr>
+          <a:xfrm>
+            <a:off x="658368" y="5724143"/>
+            <a:ext cx="1417320" cy="292608"/>
           </a:xfrm>
           <a:prstGeom prst="rect">
             <a:avLst/>
@@ -23019,14 +25830,14 @@
       </p:sp>
       <p:sp>
         <p:nvSpPr>
-          <p:cNvPr id="54" name="TextBox 53"/>
-          <p:cNvSpPr txBox="1"/>
-          <p:nvPr/>
-        </p:nvSpPr>
-        <p:spPr>
-          <a:xfrm>
-            <a:off x="6190488" y="5074920"/>
-            <a:ext cx="2377440" cy="411480"/>
+          <p:cNvPr id="62" name="TextBox 61"/>
+          <p:cNvSpPr txBox="1"/>
+          <p:nvPr/>
+        </p:nvSpPr>
+        <p:spPr>
+          <a:xfrm>
+            <a:off x="658368" y="5998464"/>
+            <a:ext cx="1417320" cy="292608"/>
           </a:xfrm>
           <a:prstGeom prst="rect">
             <a:avLst/>
@@ -23039,7 +25850,7 @@
           </a:bodyPr>
           <a:lstStyle/>
           <a:p>
-            <a:pPr algn="ctr">
+            <a:pPr algn="l">
               <a:lnSpc>
                 <a:spcPct val="100000"/>
               </a:lnSpc>
@@ -23051,7 +25862,7 @@
               </a:spcAft>
             </a:pPr>
             <a:r>
-              <a:rPr sz="1800" b="1">
+              <a:rPr sz="1400" b="1">
                 <a:solidFill>
                   <a:srgbClr val="2E7D4F"/>
                 </a:solidFill>
@@ -23064,14 +25875,149 @@
       </p:sp>
       <p:sp>
         <p:nvSpPr>
-          <p:cNvPr id="55" name="Rectangle 54"/>
+          <p:cNvPr id="63" name="TextBox 62"/>
+          <p:cNvSpPr txBox="1"/>
+          <p:nvPr/>
+        </p:nvSpPr>
+        <p:spPr>
+          <a:xfrm>
+            <a:off x="2148840" y="5714999"/>
+            <a:ext cx="8732520" cy="256032"/>
+          </a:xfrm>
+          <a:prstGeom prst="rect">
+            <a:avLst/>
+          </a:prstGeom>
+          <a:noFill/>
+        </p:spPr>
+        <p:txBody>
+          <a:bodyPr wrap="square" anchor="t" lIns="36576" rIns="36576" tIns="18288" bIns="18288">
+            <a:spAutoFit/>
+          </a:bodyPr>
+          <a:lstStyle/>
+          <a:p>
+            <a:pPr algn="l">
+              <a:lnSpc>
+                <a:spcPct val="100000"/>
+              </a:lnSpc>
+              <a:spcBef>
+                <a:spcPts val="0"/>
+              </a:spcBef>
+              <a:spcAft>
+                <a:spcPts val="400"/>
+              </a:spcAft>
+            </a:pPr>
+            <a:r>
+              <a:rPr sz="950" b="0">
+                <a:solidFill>
+                  <a:srgbClr val="5C6670"/>
+                </a:solidFill>
+                <a:latin typeface="맑은 고딕"/>
+              </a:rPr>
+              <a:t>w_plan_hit · (gap_before − gap_after) / target   ;  gap = max(target − done, 0)</a:t>
+            </a:r>
+          </a:p>
+        </p:txBody>
+      </p:sp>
+      <p:sp>
+        <p:nvSpPr>
+          <p:cNvPr id="64" name="TextBox 63"/>
+          <p:cNvSpPr txBox="1"/>
+          <p:nvPr/>
+        </p:nvSpPr>
+        <p:spPr>
+          <a:xfrm>
+            <a:off x="2148840" y="5943599"/>
+            <a:ext cx="9052560" cy="256032"/>
+          </a:xfrm>
+          <a:prstGeom prst="rect">
+            <a:avLst/>
+          </a:prstGeom>
+          <a:noFill/>
+        </p:spPr>
+        <p:txBody>
+          <a:bodyPr wrap="square" anchor="t" lIns="36576" rIns="36576" tIns="18288" bIns="18288">
+            <a:spAutoFit/>
+          </a:bodyPr>
+          <a:lstStyle/>
+          <a:p>
+            <a:pPr algn="l">
+              <a:lnSpc>
+                <a:spcPct val="100000"/>
+              </a:lnSpc>
+              <a:spcBef>
+                <a:spcPts val="0"/>
+              </a:spcBef>
+              <a:spcAft>
+                <a:spcPts val="400"/>
+              </a:spcAft>
+            </a:pPr>
+            <a:r>
+              <a:rPr sz="950" b="0">
+                <a:solidFill>
+                  <a:srgbClr val="222A33"/>
+                </a:solidFill>
+                <a:latin typeface="맑은 고딕"/>
+              </a:rPr>
+              <a:t>gap: 6→5 (done 2→3, target=8) · 1.0·(6−5)/8</a:t>
+            </a:r>
+          </a:p>
+        </p:txBody>
+      </p:sp>
+      <p:sp>
+        <p:nvSpPr>
+          <p:cNvPr id="65" name="TextBox 64"/>
+          <p:cNvSpPr txBox="1"/>
+          <p:nvPr/>
+        </p:nvSpPr>
+        <p:spPr>
+          <a:xfrm>
+            <a:off x="10561320" y="5870447"/>
+            <a:ext cx="1005840" cy="347472"/>
+          </a:xfrm>
+          <a:prstGeom prst="rect">
+            <a:avLst/>
+          </a:prstGeom>
+          <a:noFill/>
+        </p:spPr>
+        <p:txBody>
+          <a:bodyPr wrap="square" anchor="ctr" lIns="36576" rIns="36576" tIns="18288" bIns="18288">
+            <a:spAutoFit/>
+          </a:bodyPr>
+          <a:lstStyle/>
+          <a:p>
+            <a:pPr algn="r">
+              <a:lnSpc>
+                <a:spcPct val="100000"/>
+              </a:lnSpc>
+              <a:spcBef>
+                <a:spcPts val="0"/>
+              </a:spcBef>
+              <a:spcAft>
+                <a:spcPts val="400"/>
+              </a:spcAft>
+            </a:pPr>
+            <a:r>
+              <a:rPr sz="1100" b="1">
+                <a:solidFill>
+                  <a:srgbClr val="2E7D4F"/>
+                </a:solidFill>
+                <a:latin typeface="맑은 고딕"/>
+              </a:rPr>
+              <a:t>= +0.14</a:t>
+            </a:r>
+          </a:p>
+        </p:txBody>
+      </p:sp>
+      <p:sp>
+        <p:nvSpPr>
+          <p:cNvPr id="66" name="Rectangle 65"/>
           <p:cNvSpPr/>
           <p:nvPr/>
         </p:nvSpPr>
         <p:spPr>
           <a:xfrm>
-            <a:off x="502920" y="5897880"/>
-            <a:ext cx="11201400" cy="438912"/>
+            <a:off x="502920" y="6455663"/>
+            <a:ext cx="11201400" cy="347472"/>
           </a:xfrm>
           <a:prstGeom prst="rect">
             <a:avLst/>
@@ -23108,14 +26054,14 @@
       </p:sp>
       <p:sp>
         <p:nvSpPr>
-          <p:cNvPr id="56" name="TextBox 55"/>
-          <p:cNvSpPr txBox="1"/>
-          <p:nvPr/>
-        </p:nvSpPr>
-        <p:spPr>
-          <a:xfrm>
-            <a:off x="685800" y="5897880"/>
-            <a:ext cx="10881360" cy="438912"/>
+          <p:cNvPr id="67" name="TextBox 66"/>
+          <p:cNvSpPr txBox="1"/>
+          <p:nvPr/>
+        </p:nvSpPr>
+        <p:spPr>
+          <a:xfrm>
+            <a:off x="685800" y="6455663"/>
+            <a:ext cx="10881360" cy="347472"/>
           </a:xfrm>
           <a:prstGeom prst="rect">
             <a:avLst/>
@@ -23140,22 +26086,22 @@
               </a:spcAft>
             </a:pPr>
             <a:r>
-              <a:rPr sz="1050" b="1">
+              <a:rPr sz="1000" b="1">
                 <a:solidFill>
                   <a:srgbClr val="2E6FB0"/>
                 </a:solidFill>
                 <a:latin typeface="맑은 고딕"/>
               </a:rPr>
-              <a:t>계산  </a:t>
-            </a:r>
-            <a:r>
-              <a:rPr sz="1050" b="0">
+              <a:t>합산  </a:t>
+            </a:r>
+            <a:r>
+              <a:rPr sz="1000" b="0">
                 <a:solidFill>
                   <a:srgbClr val="222A33"/>
                 </a:solidFill>
                 <a:latin typeface="맑은 고딕"/>
               </a:rPr>
-              <a:t>동일 셋업 +1.00 + 페이싱 -0.31 + 계획 달성 +0.14</a:t>
+              <a:t>동일 셋업 +1.00 + 페이싱 -0.31 + 계획 달성 +0.14  →  r = +0.83</a:t>
             </a:r>
           </a:p>
         </p:txBody>
@@ -23776,8 +26722,8 @@
         </p:nvSpPr>
         <p:spPr>
           <a:xfrm>
-            <a:off x="1024128" y="2971800"/>
-            <a:ext cx="1737360" cy="310896"/>
+            <a:off x="1024128" y="2880360"/>
+            <a:ext cx="1417320" cy="256032"/>
           </a:xfrm>
           <a:prstGeom prst="rect">
             <a:avLst/>
@@ -23802,27 +26748,297 @@
               </a:spcAft>
             </a:pPr>
             <a:r>
+              <a:rPr sz="1050" b="1">
+                <a:solidFill>
+                  <a:srgbClr val="1B3255"/>
+                </a:solidFill>
+                <a:latin typeface="맑은 고딕"/>
+              </a:rPr>
+              <a:t>동일 셋업</a:t>
+            </a:r>
+          </a:p>
+        </p:txBody>
+      </p:sp>
+      <p:sp>
+        <p:nvSpPr>
+          <p:cNvPr id="16" name="TextBox 15"/>
+          <p:cNvSpPr txBox="1"/>
+          <p:nvPr/>
+        </p:nvSpPr>
+        <p:spPr>
+          <a:xfrm>
+            <a:off x="2423160" y="2880360"/>
+            <a:ext cx="2606040" cy="256032"/>
+          </a:xfrm>
+          <a:prstGeom prst="rect">
+            <a:avLst/>
+          </a:prstGeom>
+          <a:noFill/>
+        </p:spPr>
+        <p:txBody>
+          <a:bodyPr wrap="square" anchor="t" lIns="36576" rIns="36576" tIns="18288" bIns="18288">
+            <a:spAutoFit/>
+          </a:bodyPr>
+          <a:lstStyle/>
+          <a:p>
+            <a:pPr algn="l">
+              <a:lnSpc>
+                <a:spcPct val="100000"/>
+              </a:lnSpc>
+              <a:spcBef>
+                <a:spcPts val="0"/>
+              </a:spcBef>
+              <a:spcAft>
+                <a:spcPts val="400"/>
+              </a:spcAft>
+            </a:pPr>
+            <a:r>
+              <a:rPr sz="900" b="0">
+                <a:solidFill>
+                  <a:srgbClr val="5C6670"/>
+                </a:solidFill>
+                <a:latin typeface="맑은 고딕"/>
+              </a:rPr>
+              <a:t>w·1[동일셋업]</a:t>
+            </a:r>
+          </a:p>
+        </p:txBody>
+      </p:sp>
+      <p:sp>
+        <p:nvSpPr>
+          <p:cNvPr id="17" name="TextBox 16"/>
+          <p:cNvSpPr txBox="1"/>
+          <p:nvPr/>
+        </p:nvSpPr>
+        <p:spPr>
+          <a:xfrm>
+            <a:off x="1024128" y="3118104"/>
+            <a:ext cx="3977639" cy="237744"/>
+          </a:xfrm>
+          <a:prstGeom prst="rect">
+            <a:avLst/>
+          </a:prstGeom>
+          <a:noFill/>
+        </p:spPr>
+        <p:txBody>
+          <a:bodyPr wrap="square" anchor="t" lIns="36576" rIns="36576" tIns="18288" bIns="18288">
+            <a:spAutoFit/>
+          </a:bodyPr>
+          <a:lstStyle/>
+          <a:p>
+            <a:pPr algn="l">
+              <a:lnSpc>
+                <a:spcPct val="100000"/>
+              </a:lnSpc>
+              <a:spcBef>
+                <a:spcPts val="0"/>
+              </a:spcBef>
+              <a:spcAft>
+                <a:spcPts val="400"/>
+              </a:spcAft>
+            </a:pPr>
+            <a:r>
+              <a:rPr sz="950" b="0">
+                <a:solidFill>
+                  <a:srgbClr val="222A33"/>
+                </a:solidFill>
+                <a:latin typeface="맑은 고딕"/>
+              </a:rPr>
+              <a:t>1.0·1 = +1.0</a:t>
+            </a:r>
+          </a:p>
+        </p:txBody>
+      </p:sp>
+      <p:sp>
+        <p:nvSpPr>
+          <p:cNvPr id="18" name="TextBox 17"/>
+          <p:cNvSpPr txBox="1"/>
+          <p:nvPr/>
+        </p:nvSpPr>
+        <p:spPr>
+          <a:xfrm>
+            <a:off x="5074920" y="2971800"/>
+            <a:ext cx="685800" cy="310896"/>
+          </a:xfrm>
+          <a:prstGeom prst="rect">
+            <a:avLst/>
+          </a:prstGeom>
+          <a:noFill/>
+        </p:spPr>
+        <p:txBody>
+          <a:bodyPr wrap="square" anchor="t" lIns="36576" rIns="36576" tIns="18288" bIns="18288">
+            <a:spAutoFit/>
+          </a:bodyPr>
+          <a:lstStyle/>
+          <a:p>
+            <a:pPr algn="r">
+              <a:lnSpc>
+                <a:spcPct val="100000"/>
+              </a:lnSpc>
+              <a:spcBef>
+                <a:spcPts val="0"/>
+              </a:spcBef>
+              <a:spcAft>
+                <a:spcPts val="400"/>
+              </a:spcAft>
+            </a:pPr>
+            <a:r>
               <a:rPr sz="1100" b="1">
                 <a:solidFill>
+                  <a:srgbClr val="2E7D4F"/>
+                </a:solidFill>
+                <a:latin typeface="맑은 고딕"/>
+              </a:rPr>
+              <a:t>+1.0</a:t>
+            </a:r>
+          </a:p>
+        </p:txBody>
+      </p:sp>
+      <p:sp>
+        <p:nvSpPr>
+          <p:cNvPr id="19" name="TextBox 18"/>
+          <p:cNvSpPr txBox="1"/>
+          <p:nvPr/>
+        </p:nvSpPr>
+        <p:spPr>
+          <a:xfrm>
+            <a:off x="1024128" y="3355848"/>
+            <a:ext cx="1417320" cy="256032"/>
+          </a:xfrm>
+          <a:prstGeom prst="rect">
+            <a:avLst/>
+          </a:prstGeom>
+          <a:noFill/>
+        </p:spPr>
+        <p:txBody>
+          <a:bodyPr wrap="square" anchor="t" lIns="36576" rIns="36576" tIns="18288" bIns="18288">
+            <a:spAutoFit/>
+          </a:bodyPr>
+          <a:lstStyle/>
+          <a:p>
+            <a:pPr algn="l">
+              <a:lnSpc>
+                <a:spcPct val="100000"/>
+              </a:lnSpc>
+              <a:spcBef>
+                <a:spcPts val="0"/>
+              </a:spcBef>
+              <a:spcAft>
+                <a:spcPts val="400"/>
+              </a:spcAft>
+            </a:pPr>
+            <a:r>
+              <a:rPr sz="1050" b="1">
+                <a:solidFill>
+                  <a:srgbClr val="1B3255"/>
+                </a:solidFill>
+                <a:latin typeface="맑은 고딕"/>
+              </a:rPr>
+              <a:t>페이싱</a:t>
+            </a:r>
+          </a:p>
+        </p:txBody>
+      </p:sp>
+      <p:sp>
+        <p:nvSpPr>
+          <p:cNvPr id="20" name="TextBox 19"/>
+          <p:cNvSpPr txBox="1"/>
+          <p:nvPr/>
+        </p:nvSpPr>
+        <p:spPr>
+          <a:xfrm>
+            <a:off x="2423160" y="3355848"/>
+            <a:ext cx="2606040" cy="256032"/>
+          </a:xfrm>
+          <a:prstGeom prst="rect">
+            <a:avLst/>
+          </a:prstGeom>
+          <a:noFill/>
+        </p:spPr>
+        <p:txBody>
+          <a:bodyPr wrap="square" anchor="t" lIns="36576" rIns="36576" tIns="18288" bIns="18288">
+            <a:spAutoFit/>
+          </a:bodyPr>
+          <a:lstStyle/>
+          <a:p>
+            <a:pPr algn="l">
+              <a:lnSpc>
+                <a:spcPct val="100000"/>
+              </a:lnSpc>
+              <a:spcBef>
+                <a:spcPts val="0"/>
+              </a:spcBef>
+              <a:spcAft>
+                <a:spcPts val="400"/>
+              </a:spcAft>
+            </a:pPr>
+            <a:r>
+              <a:rPr sz="900" b="0">
+                <a:solidFill>
+                  <a:srgbClr val="5C6670"/>
+                </a:solidFill>
+                <a:latin typeface="맑은 고딕"/>
+              </a:rPr>
+              <a:t>w·(|ideal−eff_b|−|ideal−eff_a|)/T</a:t>
+            </a:r>
+          </a:p>
+        </p:txBody>
+      </p:sp>
+      <p:sp>
+        <p:nvSpPr>
+          <p:cNvPr id="21" name="TextBox 20"/>
+          <p:cNvSpPr txBox="1"/>
+          <p:nvPr/>
+        </p:nvSpPr>
+        <p:spPr>
+          <a:xfrm>
+            <a:off x="1024128" y="3593591"/>
+            <a:ext cx="3977639" cy="237744"/>
+          </a:xfrm>
+          <a:prstGeom prst="rect">
+            <a:avLst/>
+          </a:prstGeom>
+          <a:noFill/>
+        </p:spPr>
+        <p:txBody>
+          <a:bodyPr wrap="square" anchor="t" lIns="36576" rIns="36576" tIns="18288" bIns="18288">
+            <a:spAutoFit/>
+          </a:bodyPr>
+          <a:lstStyle/>
+          <a:p>
+            <a:pPr algn="l">
+              <a:lnSpc>
+                <a:spcPct val="100000"/>
+              </a:lnSpc>
+              <a:spcBef>
+                <a:spcPts val="0"/>
+              </a:spcBef>
+              <a:spcAft>
+                <a:spcPts val="400"/>
+              </a:spcAft>
+            </a:pPr>
+            <a:r>
+              <a:rPr sz="950" b="0">
+                <a:solidFill>
                   <a:srgbClr val="222A33"/>
                 </a:solidFill>
                 <a:latin typeface="맑은 고딕"/>
               </a:rPr>
-              <a:t>동일 셋업 연속</a:t>
-            </a:r>
-          </a:p>
-        </p:txBody>
-      </p:sp>
-      <p:sp>
-        <p:nvSpPr>
-          <p:cNvPr id="16" name="TextBox 15"/>
-          <p:cNvSpPr txBox="1"/>
-          <p:nvPr/>
-        </p:nvSpPr>
-        <p:spPr>
-          <a:xfrm>
-            <a:off x="2743200" y="2971800"/>
-            <a:ext cx="1143000" cy="310896"/>
+              <a:t>2.5·(0.5−0.3)/8 ≈ +0.06</a:t>
+            </a:r>
+          </a:p>
+        </p:txBody>
+      </p:sp>
+      <p:sp>
+        <p:nvSpPr>
+          <p:cNvPr id="22" name="TextBox 21"/>
+          <p:cNvSpPr txBox="1"/>
+          <p:nvPr/>
+        </p:nvSpPr>
+        <p:spPr>
+          <a:xfrm>
+            <a:off x="5074920" y="3447288"/>
+            <a:ext cx="685800" cy="310896"/>
           </a:xfrm>
           <a:prstGeom prst="rect">
             <a:avLst/>
@@ -23835,6 +27051,51 @@
           </a:bodyPr>
           <a:lstStyle/>
           <a:p>
+            <a:pPr algn="r">
+              <a:lnSpc>
+                <a:spcPct val="100000"/>
+              </a:lnSpc>
+              <a:spcBef>
+                <a:spcPts val="0"/>
+              </a:spcBef>
+              <a:spcAft>
+                <a:spcPts val="400"/>
+              </a:spcAft>
+            </a:pPr>
+            <a:r>
+              <a:rPr sz="1100" b="1">
+                <a:solidFill>
+                  <a:srgbClr val="2E7D4F"/>
+                </a:solidFill>
+                <a:latin typeface="맑은 고딕"/>
+              </a:rPr>
+              <a:t>+Δ</a:t>
+            </a:r>
+          </a:p>
+        </p:txBody>
+      </p:sp>
+      <p:sp>
+        <p:nvSpPr>
+          <p:cNvPr id="23" name="TextBox 22"/>
+          <p:cNvSpPr txBox="1"/>
+          <p:nvPr/>
+        </p:nvSpPr>
+        <p:spPr>
+          <a:xfrm>
+            <a:off x="1024128" y="3831335"/>
+            <a:ext cx="1417320" cy="256032"/>
+          </a:xfrm>
+          <a:prstGeom prst="rect">
+            <a:avLst/>
+          </a:prstGeom>
+          <a:noFill/>
+        </p:spPr>
+        <p:txBody>
+          <a:bodyPr wrap="square" anchor="t" lIns="36576" rIns="36576" tIns="18288" bIns="18288">
+            <a:spAutoFit/>
+          </a:bodyPr>
+          <a:lstStyle/>
+          <a:p>
             <a:pPr algn="l">
               <a:lnSpc>
                 <a:spcPct val="100000"/>
@@ -23847,27 +27108,162 @@
               </a:spcAft>
             </a:pPr>
             <a:r>
+              <a:rPr sz="1050" b="1">
+                <a:solidFill>
+                  <a:srgbClr val="1B3255"/>
+                </a:solidFill>
+                <a:latin typeface="맑은 고딕"/>
+              </a:rPr>
+              <a:t>블록 보너스</a:t>
+            </a:r>
+          </a:p>
+        </p:txBody>
+      </p:sp>
+      <p:sp>
+        <p:nvSpPr>
+          <p:cNvPr id="24" name="TextBox 23"/>
+          <p:cNvSpPr txBox="1"/>
+          <p:nvPr/>
+        </p:nvSpPr>
+        <p:spPr>
+          <a:xfrm>
+            <a:off x="2423160" y="3831335"/>
+            <a:ext cx="2606040" cy="256032"/>
+          </a:xfrm>
+          <a:prstGeom prst="rect">
+            <a:avLst/>
+          </a:prstGeom>
+          <a:noFill/>
+        </p:spPr>
+        <p:txBody>
+          <a:bodyPr wrap="square" anchor="t" lIns="36576" rIns="36576" tIns="18288" bIns="18288">
+            <a:spAutoFit/>
+          </a:bodyPr>
+          <a:lstStyle/>
+          <a:p>
+            <a:pPr algn="l">
+              <a:lnSpc>
+                <a:spcPct val="100000"/>
+              </a:lnSpc>
+              <a:spcBef>
+                <a:spcPts val="0"/>
+              </a:spcBef>
+              <a:spcAft>
+                <a:spcPts val="400"/>
+              </a:spcAft>
+            </a:pPr>
+            <a:r>
+              <a:rPr sz="900" b="0">
+                <a:solidFill>
+                  <a:srgbClr val="5C6670"/>
+                </a:solidFill>
+                <a:latin typeface="맑은 고딕"/>
+              </a:rPr>
+              <a:t>w_bulk·min(N/예산,1)</a:t>
+            </a:r>
+          </a:p>
+        </p:txBody>
+      </p:sp>
+      <p:sp>
+        <p:nvSpPr>
+          <p:cNvPr id="25" name="TextBox 24"/>
+          <p:cNvSpPr txBox="1"/>
+          <p:nvPr/>
+        </p:nvSpPr>
+        <p:spPr>
+          <a:xfrm>
+            <a:off x="1024128" y="4069079"/>
+            <a:ext cx="3977639" cy="237744"/>
+          </a:xfrm>
+          <a:prstGeom prst="rect">
+            <a:avLst/>
+          </a:prstGeom>
+          <a:noFill/>
+        </p:spPr>
+        <p:txBody>
+          <a:bodyPr wrap="square" anchor="t" lIns="36576" rIns="36576" tIns="18288" bIns="18288">
+            <a:spAutoFit/>
+          </a:bodyPr>
+          <a:lstStyle/>
+          <a:p>
+            <a:pPr algn="l">
+              <a:lnSpc>
+                <a:spcPct val="100000"/>
+              </a:lnSpc>
+              <a:spcBef>
+                <a:spcPts val="0"/>
+              </a:spcBef>
+              <a:spcAft>
+                <a:spcPts val="400"/>
+              </a:spcAft>
+            </a:pPr>
+            <a:r>
+              <a:rPr sz="950" b="0">
+                <a:solidFill>
+                  <a:srgbClr val="222A33"/>
+                </a:solidFill>
+                <a:latin typeface="맑은 고딕"/>
+              </a:rPr>
+              <a:t>3.0·min(8/8,1) = +3.0</a:t>
+            </a:r>
+          </a:p>
+        </p:txBody>
+      </p:sp>
+      <p:sp>
+        <p:nvSpPr>
+          <p:cNvPr id="26" name="TextBox 25"/>
+          <p:cNvSpPr txBox="1"/>
+          <p:nvPr/>
+        </p:nvSpPr>
+        <p:spPr>
+          <a:xfrm>
+            <a:off x="5074920" y="3922775"/>
+            <a:ext cx="685800" cy="310896"/>
+          </a:xfrm>
+          <a:prstGeom prst="rect">
+            <a:avLst/>
+          </a:prstGeom>
+          <a:noFill/>
+        </p:spPr>
+        <p:txBody>
+          <a:bodyPr wrap="square" anchor="t" lIns="36576" rIns="36576" tIns="18288" bIns="18288">
+            <a:spAutoFit/>
+          </a:bodyPr>
+          <a:lstStyle/>
+          <a:p>
+            <a:pPr algn="r">
+              <a:lnSpc>
+                <a:spcPct val="100000"/>
+              </a:lnSpc>
+              <a:spcBef>
+                <a:spcPts val="0"/>
+              </a:spcBef>
+              <a:spcAft>
+                <a:spcPts val="400"/>
+              </a:spcAft>
+            </a:pPr>
+            <a:r>
               <a:rPr sz="1100" b="1">
                 <a:solidFill>
                   <a:srgbClr val="2E7D4F"/>
                 </a:solidFill>
                 <a:latin typeface="맑은 고딕"/>
               </a:rPr>
-              <a:t>+1.0</a:t>
-            </a:r>
-          </a:p>
-        </p:txBody>
-      </p:sp>
-      <p:sp>
-        <p:nvSpPr>
-          <p:cNvPr id="17" name="TextBox 16"/>
-          <p:cNvSpPr txBox="1"/>
-          <p:nvPr/>
-        </p:nvSpPr>
-        <p:spPr>
-          <a:xfrm>
-            <a:off x="3840480" y="2971800"/>
-            <a:ext cx="2103120" cy="310896"/>
+              <a:t>+3.0</a:t>
+            </a:r>
+          </a:p>
+        </p:txBody>
+      </p:sp>
+      <p:sp>
+        <p:nvSpPr>
+          <p:cNvPr id="27" name="TextBox 26"/>
+          <p:cNvSpPr txBox="1"/>
+          <p:nvPr/>
+        </p:nvSpPr>
+        <p:spPr>
+          <a:xfrm>
+            <a:off x="1024128" y="4306823"/>
+            <a:ext cx="1417320" cy="256032"/>
           </a:xfrm>
           <a:prstGeom prst="rect">
             <a:avLst/>
@@ -23892,27 +27288,72 @@
               </a:spcAft>
             </a:pPr>
             <a:r>
-              <a:rPr sz="1000" b="0">
+              <a:rPr sz="1050" b="1">
+                <a:solidFill>
+                  <a:srgbClr val="1B3255"/>
+                </a:solidFill>
+                <a:latin typeface="맑은 고딕"/>
+              </a:rPr>
+              <a:t>전환</a:t>
+            </a:r>
+          </a:p>
+        </p:txBody>
+      </p:sp>
+      <p:sp>
+        <p:nvSpPr>
+          <p:cNvPr id="28" name="TextBox 27"/>
+          <p:cNvSpPr txBox="1"/>
+          <p:nvPr/>
+        </p:nvSpPr>
+        <p:spPr>
+          <a:xfrm>
+            <a:off x="2423160" y="4306823"/>
+            <a:ext cx="2606040" cy="256032"/>
+          </a:xfrm>
+          <a:prstGeom prst="rect">
+            <a:avLst/>
+          </a:prstGeom>
+          <a:noFill/>
+        </p:spPr>
+        <p:txBody>
+          <a:bodyPr wrap="square" anchor="t" lIns="36576" rIns="36576" tIns="18288" bIns="18288">
+            <a:spAutoFit/>
+          </a:bodyPr>
+          <a:lstStyle/>
+          <a:p>
+            <a:pPr algn="l">
+              <a:lnSpc>
+                <a:spcPct val="100000"/>
+              </a:lnSpc>
+              <a:spcBef>
+                <a:spcPts val="0"/>
+              </a:spcBef>
+              <a:spcAft>
+                <a:spcPts val="400"/>
+              </a:spcAft>
+            </a:pPr>
+            <a:r>
+              <a:rPr sz="900" b="0">
                 <a:solidFill>
                   <a:srgbClr val="5C6670"/>
                 </a:solidFill>
                 <a:latin typeface="맑은 고딕"/>
               </a:rPr>
-              <a:t>제품·공정 동일, 재공 잔존</a:t>
-            </a:r>
-          </a:p>
-        </p:txBody>
-      </p:sp>
-      <p:sp>
-        <p:nvSpPr>
-          <p:cNvPr id="18" name="TextBox 17"/>
-          <p:cNvSpPr txBox="1"/>
-          <p:nvPr/>
-        </p:nvSpPr>
-        <p:spPr>
-          <a:xfrm>
-            <a:off x="1024128" y="3355848"/>
-            <a:ext cx="1737360" cy="310896"/>
+              <a:t>w_conv·1[전환]</a:t>
+            </a:r>
+          </a:p>
+        </p:txBody>
+      </p:sp>
+      <p:sp>
+        <p:nvSpPr>
+          <p:cNvPr id="29" name="TextBox 28"/>
+          <p:cNvSpPr txBox="1"/>
+          <p:nvPr/>
+        </p:nvSpPr>
+        <p:spPr>
+          <a:xfrm>
+            <a:off x="1024128" y="4544567"/>
+            <a:ext cx="3977639" cy="237744"/>
           </a:xfrm>
           <a:prstGeom prst="rect">
             <a:avLst/>
@@ -23937,27 +27378,207 @@
               </a:spcAft>
             </a:pPr>
             <a:r>
+              <a:rPr sz="950" b="0">
+                <a:solidFill>
+                  <a:srgbClr val="222A33"/>
+                </a:solidFill>
+                <a:latin typeface="맑은 고딕"/>
+              </a:rPr>
+              <a:t>셋업 동일 → 0</a:t>
+            </a:r>
+          </a:p>
+        </p:txBody>
+      </p:sp>
+      <p:sp>
+        <p:nvSpPr>
+          <p:cNvPr id="30" name="TextBox 29"/>
+          <p:cNvSpPr txBox="1"/>
+          <p:nvPr/>
+        </p:nvSpPr>
+        <p:spPr>
+          <a:xfrm>
+            <a:off x="5074920" y="4398263"/>
+            <a:ext cx="685800" cy="310896"/>
+          </a:xfrm>
+          <a:prstGeom prst="rect">
+            <a:avLst/>
+          </a:prstGeom>
+          <a:noFill/>
+        </p:spPr>
+        <p:txBody>
+          <a:bodyPr wrap="square" anchor="t" lIns="36576" rIns="36576" tIns="18288" bIns="18288">
+            <a:spAutoFit/>
+          </a:bodyPr>
+          <a:lstStyle/>
+          <a:p>
+            <a:pPr algn="r">
+              <a:lnSpc>
+                <a:spcPct val="100000"/>
+              </a:lnSpc>
+              <a:spcBef>
+                <a:spcPts val="0"/>
+              </a:spcBef>
+              <a:spcAft>
+                <a:spcPts val="400"/>
+              </a:spcAft>
+            </a:pPr>
+            <a:r>
               <a:rPr sz="1100" b="1">
                 <a:solidFill>
+                  <a:srgbClr val="2E7D4F"/>
+                </a:solidFill>
+                <a:latin typeface="맑은 고딕"/>
+              </a:rPr>
+              <a:t>0</a:t>
+            </a:r>
+          </a:p>
+        </p:txBody>
+      </p:sp>
+      <p:sp>
+        <p:nvSpPr>
+          <p:cNvPr id="31" name="TextBox 30"/>
+          <p:cNvSpPr txBox="1"/>
+          <p:nvPr/>
+        </p:nvSpPr>
+        <p:spPr>
+          <a:xfrm>
+            <a:off x="1024128" y="4782311"/>
+            <a:ext cx="1417320" cy="256032"/>
+          </a:xfrm>
+          <a:prstGeom prst="rect">
+            <a:avLst/>
+          </a:prstGeom>
+          <a:noFill/>
+        </p:spPr>
+        <p:txBody>
+          <a:bodyPr wrap="square" anchor="t" lIns="36576" rIns="36576" tIns="18288" bIns="18288">
+            <a:spAutoFit/>
+          </a:bodyPr>
+          <a:lstStyle/>
+          <a:p>
+            <a:pPr algn="l">
+              <a:lnSpc>
+                <a:spcPct val="100000"/>
+              </a:lnSpc>
+              <a:spcBef>
+                <a:spcPts val="0"/>
+              </a:spcBef>
+              <a:spcAft>
+                <a:spcPts val="400"/>
+              </a:spcAft>
+            </a:pPr>
+            <a:r>
+              <a:rPr sz="1050" b="1">
+                <a:solidFill>
+                  <a:srgbClr val="1B3255"/>
+                </a:solidFill>
+                <a:latin typeface="맑은 고딕"/>
+              </a:rPr>
+              <a:t>중복 커버</a:t>
+            </a:r>
+          </a:p>
+        </p:txBody>
+      </p:sp>
+      <p:sp>
+        <p:nvSpPr>
+          <p:cNvPr id="32" name="TextBox 31"/>
+          <p:cNvSpPr txBox="1"/>
+          <p:nvPr/>
+        </p:nvSpPr>
+        <p:spPr>
+          <a:xfrm>
+            <a:off x="2423160" y="4782311"/>
+            <a:ext cx="2606040" cy="256032"/>
+          </a:xfrm>
+          <a:prstGeom prst="rect">
+            <a:avLst/>
+          </a:prstGeom>
+          <a:noFill/>
+        </p:spPr>
+        <p:txBody>
+          <a:bodyPr wrap="square" anchor="t" lIns="36576" rIns="36576" tIns="18288" bIns="18288">
+            <a:spAutoFit/>
+          </a:bodyPr>
+          <a:lstStyle/>
+          <a:p>
+            <a:pPr algn="l">
+              <a:lnSpc>
+                <a:spcPct val="100000"/>
+              </a:lnSpc>
+              <a:spcBef>
+                <a:spcPts val="0"/>
+              </a:spcBef>
+              <a:spcAft>
+                <a:spcPts val="400"/>
+              </a:spcAft>
+            </a:pPr>
+            <a:r>
+              <a:rPr sz="900" b="0">
+                <a:solidFill>
+                  <a:srgbClr val="5C6670"/>
+                </a:solidFill>
+                <a:latin typeface="맑은 고딕"/>
+              </a:rPr>
+              <a:t>w_red·min(cover/need,2)</a:t>
+            </a:r>
+          </a:p>
+        </p:txBody>
+      </p:sp>
+      <p:sp>
+        <p:nvSpPr>
+          <p:cNvPr id="33" name="TextBox 32"/>
+          <p:cNvSpPr txBox="1"/>
+          <p:nvPr/>
+        </p:nvSpPr>
+        <p:spPr>
+          <a:xfrm>
+            <a:off x="1024128" y="5020055"/>
+            <a:ext cx="3977639" cy="237744"/>
+          </a:xfrm>
+          <a:prstGeom prst="rect">
+            <a:avLst/>
+          </a:prstGeom>
+          <a:noFill/>
+        </p:spPr>
+        <p:txBody>
+          <a:bodyPr wrap="square" anchor="t" lIns="36576" rIns="36576" tIns="18288" bIns="18288">
+            <a:spAutoFit/>
+          </a:bodyPr>
+          <a:lstStyle/>
+          <a:p>
+            <a:pPr algn="l">
+              <a:lnSpc>
+                <a:spcPct val="100000"/>
+              </a:lnSpc>
+              <a:spcBef>
+                <a:spcPts val="0"/>
+              </a:spcBef>
+              <a:spcAft>
+                <a:spcPts val="400"/>
+              </a:spcAft>
+            </a:pPr>
+            <a:r>
+              <a:rPr sz="950" b="0">
+                <a:solidFill>
                   <a:srgbClr val="222A33"/>
                 </a:solidFill>
                 <a:latin typeface="맑은 고딕"/>
               </a:rPr>
-              <a:t>페이싱</a:t>
-            </a:r>
-          </a:p>
-        </p:txBody>
-      </p:sp>
-      <p:sp>
-        <p:nvSpPr>
-          <p:cNvPr id="19" name="TextBox 18"/>
-          <p:cNvSpPr txBox="1"/>
-          <p:nvPr/>
-        </p:nvSpPr>
-        <p:spPr>
-          <a:xfrm>
-            <a:off x="2743200" y="3355848"/>
-            <a:ext cx="1143000" cy="310896"/>
+              <a:t>cover=0 → 0</a:t>
+            </a:r>
+          </a:p>
+        </p:txBody>
+      </p:sp>
+      <p:sp>
+        <p:nvSpPr>
+          <p:cNvPr id="34" name="TextBox 33"/>
+          <p:cNvSpPr txBox="1"/>
+          <p:nvPr/>
+        </p:nvSpPr>
+        <p:spPr>
+          <a:xfrm>
+            <a:off x="5074920" y="4873751"/>
+            <a:ext cx="685800" cy="310896"/>
           </a:xfrm>
           <a:prstGeom prst="rect">
             <a:avLst/>
@@ -23970,7 +27591,7 @@
           </a:bodyPr>
           <a:lstStyle/>
           <a:p>
-            <a:pPr algn="l">
+            <a:pPr algn="r">
               <a:lnSpc>
                 <a:spcPct val="100000"/>
               </a:lnSpc>
@@ -23988,276 +27609,6 @@
                 </a:solidFill>
                 <a:latin typeface="맑은 고딕"/>
               </a:rPr>
-              <a:t>+2.5 ×Δ</a:t>
-            </a:r>
-          </a:p>
-        </p:txBody>
-      </p:sp>
-      <p:sp>
-        <p:nvSpPr>
-          <p:cNvPr id="20" name="TextBox 19"/>
-          <p:cNvSpPr txBox="1"/>
-          <p:nvPr/>
-        </p:nvSpPr>
-        <p:spPr>
-          <a:xfrm>
-            <a:off x="3840480" y="3355848"/>
-            <a:ext cx="2103120" cy="310896"/>
-          </a:xfrm>
-          <a:prstGeom prst="rect">
-            <a:avLst/>
-          </a:prstGeom>
-          <a:noFill/>
-        </p:spPr>
-        <p:txBody>
-          <a:bodyPr wrap="square" anchor="t" lIns="36576" rIns="36576" tIns="18288" bIns="18288">
-            <a:spAutoFit/>
-          </a:bodyPr>
-          <a:lstStyle/>
-          <a:p>
-            <a:pPr algn="l">
-              <a:lnSpc>
-                <a:spcPct val="100000"/>
-              </a:lnSpc>
-              <a:spcBef>
-                <a:spcPts val="0"/>
-              </a:spcBef>
-              <a:spcAft>
-                <a:spcPts val="400"/>
-              </a:spcAft>
-            </a:pPr>
-            <a:r>
-              <a:rPr sz="1000" b="0">
-                <a:solidFill>
-                  <a:srgbClr val="5C6670"/>
-                </a:solidFill>
-                <a:latin typeface="맑은 고딕"/>
-              </a:rPr>
-              <a:t>takt 목표선에 근접</a:t>
-            </a:r>
-          </a:p>
-        </p:txBody>
-      </p:sp>
-      <p:sp>
-        <p:nvSpPr>
-          <p:cNvPr id="21" name="TextBox 20"/>
-          <p:cNvSpPr txBox="1"/>
-          <p:nvPr/>
-        </p:nvSpPr>
-        <p:spPr>
-          <a:xfrm>
-            <a:off x="1024128" y="3739896"/>
-            <a:ext cx="1737360" cy="310896"/>
-          </a:xfrm>
-          <a:prstGeom prst="rect">
-            <a:avLst/>
-          </a:prstGeom>
-          <a:noFill/>
-        </p:spPr>
-        <p:txBody>
-          <a:bodyPr wrap="square" anchor="t" lIns="36576" rIns="36576" tIns="18288" bIns="18288">
-            <a:spAutoFit/>
-          </a:bodyPr>
-          <a:lstStyle/>
-          <a:p>
-            <a:pPr algn="l">
-              <a:lnSpc>
-                <a:spcPct val="100000"/>
-              </a:lnSpc>
-              <a:spcBef>
-                <a:spcPts val="0"/>
-              </a:spcBef>
-              <a:spcAft>
-                <a:spcPts val="400"/>
-              </a:spcAft>
-            </a:pPr>
-            <a:r>
-              <a:rPr sz="1100" b="1">
-                <a:solidFill>
-                  <a:srgbClr val="222A33"/>
-                </a:solidFill>
-                <a:latin typeface="맑은 고딕"/>
-              </a:rPr>
-              <a:t>블록 보너스</a:t>
-            </a:r>
-          </a:p>
-        </p:txBody>
-      </p:sp>
-      <p:sp>
-        <p:nvSpPr>
-          <p:cNvPr id="22" name="TextBox 21"/>
-          <p:cNvSpPr txBox="1"/>
-          <p:nvPr/>
-        </p:nvSpPr>
-        <p:spPr>
-          <a:xfrm>
-            <a:off x="2743200" y="3739896"/>
-            <a:ext cx="1143000" cy="310896"/>
-          </a:xfrm>
-          <a:prstGeom prst="rect">
-            <a:avLst/>
-          </a:prstGeom>
-          <a:noFill/>
-        </p:spPr>
-        <p:txBody>
-          <a:bodyPr wrap="square" anchor="t" lIns="36576" rIns="36576" tIns="18288" bIns="18288">
-            <a:spAutoFit/>
-          </a:bodyPr>
-          <a:lstStyle/>
-          <a:p>
-            <a:pPr algn="l">
-              <a:lnSpc>
-                <a:spcPct val="100000"/>
-              </a:lnSpc>
-              <a:spcBef>
-                <a:spcPts val="0"/>
-              </a:spcBef>
-              <a:spcAft>
-                <a:spcPts val="400"/>
-              </a:spcAft>
-            </a:pPr>
-            <a:r>
-              <a:rPr sz="1100" b="1">
-                <a:solidFill>
-                  <a:srgbClr val="2E7D4F"/>
-                </a:solidFill>
-                <a:latin typeface="맑은 고딕"/>
-              </a:rPr>
-              <a:t>+3.0 ×(8/8)</a:t>
-            </a:r>
-          </a:p>
-        </p:txBody>
-      </p:sp>
-      <p:sp>
-        <p:nvSpPr>
-          <p:cNvPr id="23" name="TextBox 22"/>
-          <p:cNvSpPr txBox="1"/>
-          <p:nvPr/>
-        </p:nvSpPr>
-        <p:spPr>
-          <a:xfrm>
-            <a:off x="3840480" y="3739896"/>
-            <a:ext cx="2103120" cy="310896"/>
-          </a:xfrm>
-          <a:prstGeom prst="rect">
-            <a:avLst/>
-          </a:prstGeom>
-          <a:noFill/>
-        </p:spPr>
-        <p:txBody>
-          <a:bodyPr wrap="square" anchor="t" lIns="36576" rIns="36576" tIns="18288" bIns="18288">
-            <a:spAutoFit/>
-          </a:bodyPr>
-          <a:lstStyle/>
-          <a:p>
-            <a:pPr algn="l">
-              <a:lnSpc>
-                <a:spcPct val="100000"/>
-              </a:lnSpc>
-              <a:spcBef>
-                <a:spcPts val="0"/>
-              </a:spcBef>
-              <a:spcAft>
-                <a:spcPts val="400"/>
-              </a:spcAft>
-            </a:pPr>
-            <a:r>
-              <a:rPr sz="1000" b="0">
-                <a:solidFill>
-                  <a:srgbClr val="5C6670"/>
-                </a:solidFill>
-                <a:latin typeface="맑은 고딕"/>
-              </a:rPr>
-              <a:t>= +3.0  (전량 블록)</a:t>
-            </a:r>
-          </a:p>
-        </p:txBody>
-      </p:sp>
-      <p:sp>
-        <p:nvSpPr>
-          <p:cNvPr id="24" name="TextBox 23"/>
-          <p:cNvSpPr txBox="1"/>
-          <p:nvPr/>
-        </p:nvSpPr>
-        <p:spPr>
-          <a:xfrm>
-            <a:off x="1024128" y="4123944"/>
-            <a:ext cx="1737360" cy="310896"/>
-          </a:xfrm>
-          <a:prstGeom prst="rect">
-            <a:avLst/>
-          </a:prstGeom>
-          <a:noFill/>
-        </p:spPr>
-        <p:txBody>
-          <a:bodyPr wrap="square" anchor="t" lIns="36576" rIns="36576" tIns="18288" bIns="18288">
-            <a:spAutoFit/>
-          </a:bodyPr>
-          <a:lstStyle/>
-          <a:p>
-            <a:pPr algn="l">
-              <a:lnSpc>
-                <a:spcPct val="100000"/>
-              </a:lnSpc>
-              <a:spcBef>
-                <a:spcPts val="0"/>
-              </a:spcBef>
-              <a:spcAft>
-                <a:spcPts val="400"/>
-              </a:spcAft>
-            </a:pPr>
-            <a:r>
-              <a:rPr sz="1100" b="1">
-                <a:solidFill>
-                  <a:srgbClr val="222A33"/>
-                </a:solidFill>
-                <a:latin typeface="맑은 고딕"/>
-              </a:rPr>
-              <a:t>전환 패널티</a:t>
-            </a:r>
-          </a:p>
-        </p:txBody>
-      </p:sp>
-      <p:sp>
-        <p:nvSpPr>
-          <p:cNvPr id="25" name="TextBox 24"/>
-          <p:cNvSpPr txBox="1"/>
-          <p:nvPr/>
-        </p:nvSpPr>
-        <p:spPr>
-          <a:xfrm>
-            <a:off x="2743200" y="4123944"/>
-            <a:ext cx="1143000" cy="310896"/>
-          </a:xfrm>
-          <a:prstGeom prst="rect">
-            <a:avLst/>
-          </a:prstGeom>
-          <a:noFill/>
-        </p:spPr>
-        <p:txBody>
-          <a:bodyPr wrap="square" anchor="t" lIns="36576" rIns="36576" tIns="18288" bIns="18288">
-            <a:spAutoFit/>
-          </a:bodyPr>
-          <a:lstStyle/>
-          <a:p>
-            <a:pPr algn="l">
-              <a:lnSpc>
-                <a:spcPct val="100000"/>
-              </a:lnSpc>
-              <a:spcBef>
-                <a:spcPts val="0"/>
-              </a:spcBef>
-              <a:spcAft>
-                <a:spcPts val="400"/>
-              </a:spcAft>
-            </a:pPr>
-            <a:r>
-              <a:rPr sz="1100" b="1">
-                <a:solidFill>
-                  <a:srgbClr val="2E7D4F"/>
-                </a:solidFill>
-                <a:latin typeface="맑은 고딕"/>
-              </a:rPr>
               <a:t>0</a:t>
             </a:r>
           </a:p>
@@ -24265,187 +27616,7 @@
       </p:sp>
       <p:sp>
         <p:nvSpPr>
-          <p:cNvPr id="26" name="TextBox 25"/>
-          <p:cNvSpPr txBox="1"/>
-          <p:nvPr/>
-        </p:nvSpPr>
-        <p:spPr>
-          <a:xfrm>
-            <a:off x="3840480" y="4123944"/>
-            <a:ext cx="2103120" cy="310896"/>
-          </a:xfrm>
-          <a:prstGeom prst="rect">
-            <a:avLst/>
-          </a:prstGeom>
-          <a:noFill/>
-        </p:spPr>
-        <p:txBody>
-          <a:bodyPr wrap="square" anchor="t" lIns="36576" rIns="36576" tIns="18288" bIns="18288">
-            <a:spAutoFit/>
-          </a:bodyPr>
-          <a:lstStyle/>
-          <a:p>
-            <a:pPr algn="l">
-              <a:lnSpc>
-                <a:spcPct val="100000"/>
-              </a:lnSpc>
-              <a:spcBef>
-                <a:spcPts val="0"/>
-              </a:spcBef>
-              <a:spcAft>
-                <a:spcPts val="400"/>
-              </a:spcAft>
-            </a:pPr>
-            <a:r>
-              <a:rPr sz="1000" b="0">
-                <a:solidFill>
-                  <a:srgbClr val="5C6670"/>
-                </a:solidFill>
-                <a:latin typeface="맑은 고딕"/>
-              </a:rPr>
-              <a:t>셋업 변경 없음</a:t>
-            </a:r>
-          </a:p>
-        </p:txBody>
-      </p:sp>
-      <p:sp>
-        <p:nvSpPr>
-          <p:cNvPr id="27" name="TextBox 26"/>
-          <p:cNvSpPr txBox="1"/>
-          <p:nvPr/>
-        </p:nvSpPr>
-        <p:spPr>
-          <a:xfrm>
-            <a:off x="1024128" y="4507992"/>
-            <a:ext cx="1737360" cy="310896"/>
-          </a:xfrm>
-          <a:prstGeom prst="rect">
-            <a:avLst/>
-          </a:prstGeom>
-          <a:noFill/>
-        </p:spPr>
-        <p:txBody>
-          <a:bodyPr wrap="square" anchor="t" lIns="36576" rIns="36576" tIns="18288" bIns="18288">
-            <a:spAutoFit/>
-          </a:bodyPr>
-          <a:lstStyle/>
-          <a:p>
-            <a:pPr algn="l">
-              <a:lnSpc>
-                <a:spcPct val="100000"/>
-              </a:lnSpc>
-              <a:spcBef>
-                <a:spcPts val="0"/>
-              </a:spcBef>
-              <a:spcAft>
-                <a:spcPts val="400"/>
-              </a:spcAft>
-            </a:pPr>
-            <a:r>
-              <a:rPr sz="1100" b="1">
-                <a:solidFill>
-                  <a:srgbClr val="222A33"/>
-                </a:solidFill>
-                <a:latin typeface="맑은 고딕"/>
-              </a:rPr>
-              <a:t>중복 커버</a:t>
-            </a:r>
-          </a:p>
-        </p:txBody>
-      </p:sp>
-      <p:sp>
-        <p:nvSpPr>
-          <p:cNvPr id="28" name="TextBox 27"/>
-          <p:cNvSpPr txBox="1"/>
-          <p:nvPr/>
-        </p:nvSpPr>
-        <p:spPr>
-          <a:xfrm>
-            <a:off x="2743200" y="4507992"/>
-            <a:ext cx="1143000" cy="310896"/>
-          </a:xfrm>
-          <a:prstGeom prst="rect">
-            <a:avLst/>
-          </a:prstGeom>
-          <a:noFill/>
-        </p:spPr>
-        <p:txBody>
-          <a:bodyPr wrap="square" anchor="t" lIns="36576" rIns="36576" tIns="18288" bIns="18288">
-            <a:spAutoFit/>
-          </a:bodyPr>
-          <a:lstStyle/>
-          <a:p>
-            <a:pPr algn="l">
-              <a:lnSpc>
-                <a:spcPct val="100000"/>
-              </a:lnSpc>
-              <a:spcBef>
-                <a:spcPts val="0"/>
-              </a:spcBef>
-              <a:spcAft>
-                <a:spcPts val="400"/>
-              </a:spcAft>
-            </a:pPr>
-            <a:r>
-              <a:rPr sz="1100" b="1">
-                <a:solidFill>
-                  <a:srgbClr val="2E7D4F"/>
-                </a:solidFill>
-                <a:latin typeface="맑은 고딕"/>
-              </a:rPr>
-              <a:t>0</a:t>
-            </a:r>
-          </a:p>
-        </p:txBody>
-      </p:sp>
-      <p:sp>
-        <p:nvSpPr>
-          <p:cNvPr id="29" name="TextBox 28"/>
-          <p:cNvSpPr txBox="1"/>
-          <p:nvPr/>
-        </p:nvSpPr>
-        <p:spPr>
-          <a:xfrm>
-            <a:off x="3840480" y="4507992"/>
-            <a:ext cx="2103120" cy="310896"/>
-          </a:xfrm>
-          <a:prstGeom prst="rect">
-            <a:avLst/>
-          </a:prstGeom>
-          <a:noFill/>
-        </p:spPr>
-        <p:txBody>
-          <a:bodyPr wrap="square" anchor="t" lIns="36576" rIns="36576" tIns="18288" bIns="18288">
-            <a:spAutoFit/>
-          </a:bodyPr>
-          <a:lstStyle/>
-          <a:p>
-            <a:pPr algn="l">
-              <a:lnSpc>
-                <a:spcPct val="100000"/>
-              </a:lnSpc>
-              <a:spcBef>
-                <a:spcPts val="0"/>
-              </a:spcBef>
-              <a:spcAft>
-                <a:spcPts val="400"/>
-              </a:spcAft>
-            </a:pPr>
-            <a:r>
-              <a:rPr sz="1000" b="0">
-                <a:solidFill>
-                  <a:srgbClr val="5C6670"/>
-                </a:solidFill>
-                <a:latin typeface="맑은 고딕"/>
-              </a:rPr>
-              <a:t>다른 설비가 안 덮음</a:t>
-            </a:r>
-          </a:p>
-        </p:txBody>
-      </p:sp>
-      <p:sp>
-        <p:nvSpPr>
-          <p:cNvPr id="30" name="Rectangle 29"/>
+          <p:cNvPr id="35" name="Rectangle 34"/>
           <p:cNvSpPr/>
           <p:nvPr/>
         </p:nvSpPr>
@@ -24489,7 +27660,7 @@
       </p:sp>
       <p:sp>
         <p:nvSpPr>
-          <p:cNvPr id="31" name="TextBox 30"/>
+          <p:cNvPr id="36" name="TextBox 35"/>
           <p:cNvSpPr txBox="1"/>
           <p:nvPr/>
         </p:nvSpPr>
@@ -24543,7 +27714,7 @@
       </p:sp>
       <p:sp>
         <p:nvSpPr>
-          <p:cNvPr id="32" name="TextBox 31"/>
+          <p:cNvPr id="37" name="TextBox 36"/>
           <p:cNvSpPr txBox="1"/>
           <p:nvPr/>
         </p:nvSpPr>
@@ -24588,7 +27759,7 @@
       </p:sp>
       <p:sp>
         <p:nvSpPr>
-          <p:cNvPr id="33" name="Rectangle 32"/>
+          <p:cNvPr id="38" name="Rectangle 37"/>
           <p:cNvSpPr/>
           <p:nvPr/>
         </p:nvSpPr>
@@ -24634,7 +27805,7 @@
       </p:sp>
       <p:sp>
         <p:nvSpPr>
-          <p:cNvPr id="34" name="Rectangle 33"/>
+          <p:cNvPr id="39" name="Rectangle 38"/>
           <p:cNvSpPr/>
           <p:nvPr/>
         </p:nvSpPr>
@@ -24678,7 +27849,7 @@
       </p:sp>
       <p:sp>
         <p:nvSpPr>
-          <p:cNvPr id="35" name="TextBox 34"/>
+          <p:cNvPr id="40" name="TextBox 39"/>
           <p:cNvSpPr txBox="1"/>
           <p:nvPr/>
         </p:nvSpPr>
@@ -24723,7 +27894,7 @@
       </p:sp>
       <p:sp>
         <p:nvSpPr>
-          <p:cNvPr id="36" name="TextBox 35"/>
+          <p:cNvPr id="41" name="TextBox 40"/>
           <p:cNvSpPr txBox="1"/>
           <p:nvPr/>
         </p:nvSpPr>
@@ -24777,14 +27948,14 @@
       </p:sp>
       <p:sp>
         <p:nvSpPr>
-          <p:cNvPr id="37" name="TextBox 36"/>
-          <p:cNvSpPr txBox="1"/>
-          <p:nvPr/>
-        </p:nvSpPr>
-        <p:spPr>
-          <a:xfrm>
-            <a:off x="6327648" y="2971800"/>
-            <a:ext cx="1737360" cy="310896"/>
+          <p:cNvPr id="42" name="TextBox 41"/>
+          <p:cNvSpPr txBox="1"/>
+          <p:nvPr/>
+        </p:nvSpPr>
+        <p:spPr>
+          <a:xfrm>
+            <a:off x="6327648" y="2880360"/>
+            <a:ext cx="1417320" cy="256032"/>
           </a:xfrm>
           <a:prstGeom prst="rect">
             <a:avLst/>
@@ -24809,27 +27980,297 @@
               </a:spcAft>
             </a:pPr>
             <a:r>
+              <a:rPr sz="1050" b="1">
+                <a:solidFill>
+                  <a:srgbClr val="1B3255"/>
+                </a:solidFill>
+                <a:latin typeface="맑은 고딕"/>
+              </a:rPr>
+              <a:t>전환</a:t>
+            </a:r>
+          </a:p>
+        </p:txBody>
+      </p:sp>
+      <p:sp>
+        <p:nvSpPr>
+          <p:cNvPr id="43" name="TextBox 42"/>
+          <p:cNvSpPr txBox="1"/>
+          <p:nvPr/>
+        </p:nvSpPr>
+        <p:spPr>
+          <a:xfrm>
+            <a:off x="7726679" y="2880360"/>
+            <a:ext cx="2606040" cy="256032"/>
+          </a:xfrm>
+          <a:prstGeom prst="rect">
+            <a:avLst/>
+          </a:prstGeom>
+          <a:noFill/>
+        </p:spPr>
+        <p:txBody>
+          <a:bodyPr wrap="square" anchor="t" lIns="36576" rIns="36576" tIns="18288" bIns="18288">
+            <a:spAutoFit/>
+          </a:bodyPr>
+          <a:lstStyle/>
+          <a:p>
+            <a:pPr algn="l">
+              <a:lnSpc>
+                <a:spcPct val="100000"/>
+              </a:lnSpc>
+              <a:spcBef>
+                <a:spcPts val="0"/>
+              </a:spcBef>
+              <a:spcAft>
+                <a:spcPts val="400"/>
+              </a:spcAft>
+            </a:pPr>
+            <a:r>
+              <a:rPr sz="900" b="0">
+                <a:solidFill>
+                  <a:srgbClr val="5C6670"/>
+                </a:solidFill>
+                <a:latin typeface="맑은 고딕"/>
+              </a:rPr>
+              <a:t>w_conv·1[전환]</a:t>
+            </a:r>
+          </a:p>
+        </p:txBody>
+      </p:sp>
+      <p:sp>
+        <p:nvSpPr>
+          <p:cNvPr id="44" name="TextBox 43"/>
+          <p:cNvSpPr txBox="1"/>
+          <p:nvPr/>
+        </p:nvSpPr>
+        <p:spPr>
+          <a:xfrm>
+            <a:off x="6327648" y="3118104"/>
+            <a:ext cx="3977639" cy="237744"/>
+          </a:xfrm>
+          <a:prstGeom prst="rect">
+            <a:avLst/>
+          </a:prstGeom>
+          <a:noFill/>
+        </p:spPr>
+        <p:txBody>
+          <a:bodyPr wrap="square" anchor="t" lIns="36576" rIns="36576" tIns="18288" bIns="18288">
+            <a:spAutoFit/>
+          </a:bodyPr>
+          <a:lstStyle/>
+          <a:p>
+            <a:pPr algn="l">
+              <a:lnSpc>
+                <a:spcPct val="100000"/>
+              </a:lnSpc>
+              <a:spcBef>
+                <a:spcPts val="0"/>
+              </a:spcBef>
+              <a:spcAft>
+                <a:spcPts val="400"/>
+              </a:spcAft>
+            </a:pPr>
+            <a:r>
+              <a:rPr sz="950" b="0">
+                <a:solidFill>
+                  <a:srgbClr val="222A33"/>
+                </a:solidFill>
+                <a:latin typeface="맑은 고딕"/>
+              </a:rPr>
+              <a:t>−10.0·1 = −10.0</a:t>
+            </a:r>
+          </a:p>
+        </p:txBody>
+      </p:sp>
+      <p:sp>
+        <p:nvSpPr>
+          <p:cNvPr id="45" name="TextBox 44"/>
+          <p:cNvSpPr txBox="1"/>
+          <p:nvPr/>
+        </p:nvSpPr>
+        <p:spPr>
+          <a:xfrm>
+            <a:off x="10378440" y="2971800"/>
+            <a:ext cx="685800" cy="310896"/>
+          </a:xfrm>
+          <a:prstGeom prst="rect">
+            <a:avLst/>
+          </a:prstGeom>
+          <a:noFill/>
+        </p:spPr>
+        <p:txBody>
+          <a:bodyPr wrap="square" anchor="t" lIns="36576" rIns="36576" tIns="18288" bIns="18288">
+            <a:spAutoFit/>
+          </a:bodyPr>
+          <a:lstStyle/>
+          <a:p>
+            <a:pPr algn="r">
+              <a:lnSpc>
+                <a:spcPct val="100000"/>
+              </a:lnSpc>
+              <a:spcBef>
+                <a:spcPts val="0"/>
+              </a:spcBef>
+              <a:spcAft>
+                <a:spcPts val="400"/>
+              </a:spcAft>
+            </a:pPr>
+            <a:r>
               <a:rPr sz="1100" b="1">
                 <a:solidFill>
+                  <a:srgbClr val="B33A3A"/>
+                </a:solidFill>
+                <a:latin typeface="맑은 고딕"/>
+              </a:rPr>
+              <a:t>−10.0</a:t>
+            </a:r>
+          </a:p>
+        </p:txBody>
+      </p:sp>
+      <p:sp>
+        <p:nvSpPr>
+          <p:cNvPr id="46" name="TextBox 45"/>
+          <p:cNvSpPr txBox="1"/>
+          <p:nvPr/>
+        </p:nvSpPr>
+        <p:spPr>
+          <a:xfrm>
+            <a:off x="6327648" y="3355848"/>
+            <a:ext cx="1417320" cy="256032"/>
+          </a:xfrm>
+          <a:prstGeom prst="rect">
+            <a:avLst/>
+          </a:prstGeom>
+          <a:noFill/>
+        </p:spPr>
+        <p:txBody>
+          <a:bodyPr wrap="square" anchor="t" lIns="36576" rIns="36576" tIns="18288" bIns="18288">
+            <a:spAutoFit/>
+          </a:bodyPr>
+          <a:lstStyle/>
+          <a:p>
+            <a:pPr algn="l">
+              <a:lnSpc>
+                <a:spcPct val="100000"/>
+              </a:lnSpc>
+              <a:spcBef>
+                <a:spcPts val="0"/>
+              </a:spcBef>
+              <a:spcAft>
+                <a:spcPts val="400"/>
+              </a:spcAft>
+            </a:pPr>
+            <a:r>
+              <a:rPr sz="1050" b="1">
+                <a:solidFill>
+                  <a:srgbClr val="1B3255"/>
+                </a:solidFill>
+                <a:latin typeface="맑은 고딕"/>
+              </a:rPr>
+              <a:t>회피가능 전환</a:t>
+            </a:r>
+          </a:p>
+        </p:txBody>
+      </p:sp>
+      <p:sp>
+        <p:nvSpPr>
+          <p:cNvPr id="47" name="TextBox 46"/>
+          <p:cNvSpPr txBox="1"/>
+          <p:nvPr/>
+        </p:nvSpPr>
+        <p:spPr>
+          <a:xfrm>
+            <a:off x="7726679" y="3355848"/>
+            <a:ext cx="2606040" cy="256032"/>
+          </a:xfrm>
+          <a:prstGeom prst="rect">
+            <a:avLst/>
+          </a:prstGeom>
+          <a:noFill/>
+        </p:spPr>
+        <p:txBody>
+          <a:bodyPr wrap="square" anchor="t" lIns="36576" rIns="36576" tIns="18288" bIns="18288">
+            <a:spAutoFit/>
+          </a:bodyPr>
+          <a:lstStyle/>
+          <a:p>
+            <a:pPr algn="l">
+              <a:lnSpc>
+                <a:spcPct val="100000"/>
+              </a:lnSpc>
+              <a:spcBef>
+                <a:spcPts val="0"/>
+              </a:spcBef>
+              <a:spcAft>
+                <a:spcPts val="400"/>
+              </a:spcAft>
+            </a:pPr>
+            <a:r>
+              <a:rPr sz="900" b="0">
+                <a:solidFill>
+                  <a:srgbClr val="5C6670"/>
+                </a:solidFill>
+                <a:latin typeface="맑은 고딕"/>
+              </a:rPr>
+              <a:t>w_avoid·α</a:t>
+            </a:r>
+          </a:p>
+        </p:txBody>
+      </p:sp>
+      <p:sp>
+        <p:nvSpPr>
+          <p:cNvPr id="48" name="TextBox 47"/>
+          <p:cNvSpPr txBox="1"/>
+          <p:nvPr/>
+        </p:nvSpPr>
+        <p:spPr>
+          <a:xfrm>
+            <a:off x="6327648" y="3593591"/>
+            <a:ext cx="3977639" cy="237744"/>
+          </a:xfrm>
+          <a:prstGeom prst="rect">
+            <a:avLst/>
+          </a:prstGeom>
+          <a:noFill/>
+        </p:spPr>
+        <p:txBody>
+          <a:bodyPr wrap="square" anchor="t" lIns="36576" rIns="36576" tIns="18288" bIns="18288">
+            <a:spAutoFit/>
+          </a:bodyPr>
+          <a:lstStyle/>
+          <a:p>
+            <a:pPr algn="l">
+              <a:lnSpc>
+                <a:spcPct val="100000"/>
+              </a:lnSpc>
+              <a:spcBef>
+                <a:spcPts val="0"/>
+              </a:spcBef>
+              <a:spcAft>
+                <a:spcPts val="400"/>
+              </a:spcAft>
+            </a:pPr>
+            <a:r>
+              <a:rPr sz="950" b="0">
+                <a:solidFill>
                   <a:srgbClr val="222A33"/>
                 </a:solidFill>
                 <a:latin typeface="맑은 고딕"/>
               </a:rPr>
-              <a:t>전환 패널티</a:t>
-            </a:r>
-          </a:p>
-        </p:txBody>
-      </p:sp>
-      <p:sp>
-        <p:nvSpPr>
-          <p:cNvPr id="38" name="TextBox 37"/>
-          <p:cNvSpPr txBox="1"/>
-          <p:nvPr/>
-        </p:nvSpPr>
-        <p:spPr>
-          <a:xfrm>
-            <a:off x="8046720" y="2971800"/>
-            <a:ext cx="1280160" cy="310896"/>
+              <a:t>−8.0·0.7 = −5.6</a:t>
+            </a:r>
+          </a:p>
+        </p:txBody>
+      </p:sp>
+      <p:sp>
+        <p:nvSpPr>
+          <p:cNvPr id="49" name="TextBox 48"/>
+          <p:cNvSpPr txBox="1"/>
+          <p:nvPr/>
+        </p:nvSpPr>
+        <p:spPr>
+          <a:xfrm>
+            <a:off x="10378440" y="3447288"/>
+            <a:ext cx="685800" cy="310896"/>
           </a:xfrm>
           <a:prstGeom prst="rect">
             <a:avLst/>
@@ -24842,6 +28283,51 @@
           </a:bodyPr>
           <a:lstStyle/>
           <a:p>
+            <a:pPr algn="r">
+              <a:lnSpc>
+                <a:spcPct val="100000"/>
+              </a:lnSpc>
+              <a:spcBef>
+                <a:spcPts val="0"/>
+              </a:spcBef>
+              <a:spcAft>
+                <a:spcPts val="400"/>
+              </a:spcAft>
+            </a:pPr>
+            <a:r>
+              <a:rPr sz="1100" b="1">
+                <a:solidFill>
+                  <a:srgbClr val="B33A3A"/>
+                </a:solidFill>
+                <a:latin typeface="맑은 고딕"/>
+              </a:rPr>
+              <a:t>−5.6</a:t>
+            </a:r>
+          </a:p>
+        </p:txBody>
+      </p:sp>
+      <p:sp>
+        <p:nvSpPr>
+          <p:cNvPr id="50" name="TextBox 49"/>
+          <p:cNvSpPr txBox="1"/>
+          <p:nvPr/>
+        </p:nvSpPr>
+        <p:spPr>
+          <a:xfrm>
+            <a:off x="6327648" y="3831335"/>
+            <a:ext cx="1417320" cy="256032"/>
+          </a:xfrm>
+          <a:prstGeom prst="rect">
+            <a:avLst/>
+          </a:prstGeom>
+          <a:noFill/>
+        </p:spPr>
+        <p:txBody>
+          <a:bodyPr wrap="square" anchor="t" lIns="36576" rIns="36576" tIns="18288" bIns="18288">
+            <a:spAutoFit/>
+          </a:bodyPr>
+          <a:lstStyle/>
+          <a:p>
             <a:pPr algn="l">
               <a:lnSpc>
                 <a:spcPct val="100000"/>
@@ -24854,27 +28340,162 @@
               </a:spcAft>
             </a:pPr>
             <a:r>
+              <a:rPr sz="1050" b="1">
+                <a:solidFill>
+                  <a:srgbClr val="1B3255"/>
+                </a:solidFill>
+                <a:latin typeface="맑은 고딕"/>
+              </a:rPr>
+              <a:t>중복 커버</a:t>
+            </a:r>
+          </a:p>
+        </p:txBody>
+      </p:sp>
+      <p:sp>
+        <p:nvSpPr>
+          <p:cNvPr id="51" name="TextBox 50"/>
+          <p:cNvSpPr txBox="1"/>
+          <p:nvPr/>
+        </p:nvSpPr>
+        <p:spPr>
+          <a:xfrm>
+            <a:off x="7726679" y="3831335"/>
+            <a:ext cx="2606040" cy="256032"/>
+          </a:xfrm>
+          <a:prstGeom prst="rect">
+            <a:avLst/>
+          </a:prstGeom>
+          <a:noFill/>
+        </p:spPr>
+        <p:txBody>
+          <a:bodyPr wrap="square" anchor="t" lIns="36576" rIns="36576" tIns="18288" bIns="18288">
+            <a:spAutoFit/>
+          </a:bodyPr>
+          <a:lstStyle/>
+          <a:p>
+            <a:pPr algn="l">
+              <a:lnSpc>
+                <a:spcPct val="100000"/>
+              </a:lnSpc>
+              <a:spcBef>
+                <a:spcPts val="0"/>
+              </a:spcBef>
+              <a:spcAft>
+                <a:spcPts val="400"/>
+              </a:spcAft>
+            </a:pPr>
+            <a:r>
+              <a:rPr sz="900" b="0">
+                <a:solidFill>
+                  <a:srgbClr val="5C6670"/>
+                </a:solidFill>
+                <a:latin typeface="맑은 고딕"/>
+              </a:rPr>
+              <a:t>w_red·min(c/need,2)</a:t>
+            </a:r>
+          </a:p>
+        </p:txBody>
+      </p:sp>
+      <p:sp>
+        <p:nvSpPr>
+          <p:cNvPr id="52" name="TextBox 51"/>
+          <p:cNvSpPr txBox="1"/>
+          <p:nvPr/>
+        </p:nvSpPr>
+        <p:spPr>
+          <a:xfrm>
+            <a:off x="6327648" y="4069079"/>
+            <a:ext cx="3977639" cy="237744"/>
+          </a:xfrm>
+          <a:prstGeom prst="rect">
+            <a:avLst/>
+          </a:prstGeom>
+          <a:noFill/>
+        </p:spPr>
+        <p:txBody>
+          <a:bodyPr wrap="square" anchor="t" lIns="36576" rIns="36576" tIns="18288" bIns="18288">
+            <a:spAutoFit/>
+          </a:bodyPr>
+          <a:lstStyle/>
+          <a:p>
+            <a:pPr algn="l">
+              <a:lnSpc>
+                <a:spcPct val="100000"/>
+              </a:lnSpc>
+              <a:spcBef>
+                <a:spcPts val="0"/>
+              </a:spcBef>
+              <a:spcAft>
+                <a:spcPts val="400"/>
+              </a:spcAft>
+            </a:pPr>
+            <a:r>
+              <a:rPr sz="950" b="0">
+                <a:solidFill>
+                  <a:srgbClr val="222A33"/>
+                </a:solidFill>
+                <a:latin typeface="맑은 고딕"/>
+              </a:rPr>
+              <a:t>−5.0·0.4 ≈ −2.0</a:t>
+            </a:r>
+          </a:p>
+        </p:txBody>
+      </p:sp>
+      <p:sp>
+        <p:nvSpPr>
+          <p:cNvPr id="53" name="TextBox 52"/>
+          <p:cNvSpPr txBox="1"/>
+          <p:nvPr/>
+        </p:nvSpPr>
+        <p:spPr>
+          <a:xfrm>
+            <a:off x="10378440" y="3922775"/>
+            <a:ext cx="685800" cy="310896"/>
+          </a:xfrm>
+          <a:prstGeom prst="rect">
+            <a:avLst/>
+          </a:prstGeom>
+          <a:noFill/>
+        </p:spPr>
+        <p:txBody>
+          <a:bodyPr wrap="square" anchor="t" lIns="36576" rIns="36576" tIns="18288" bIns="18288">
+            <a:spAutoFit/>
+          </a:bodyPr>
+          <a:lstStyle/>
+          <a:p>
+            <a:pPr algn="r">
+              <a:lnSpc>
+                <a:spcPct val="100000"/>
+              </a:lnSpc>
+              <a:spcBef>
+                <a:spcPts val="0"/>
+              </a:spcBef>
+              <a:spcAft>
+                <a:spcPts val="400"/>
+              </a:spcAft>
+            </a:pPr>
+            <a:r>
               <a:rPr sz="1100" b="1">
                 <a:solidFill>
                   <a:srgbClr val="B33A3A"/>
                 </a:solidFill>
                 <a:latin typeface="맑은 고딕"/>
               </a:rPr>
-              <a:t>−10.0</a:t>
-            </a:r>
-          </a:p>
-        </p:txBody>
-      </p:sp>
-      <p:sp>
-        <p:nvSpPr>
-          <p:cNvPr id="39" name="TextBox 38"/>
-          <p:cNvSpPr txBox="1"/>
-          <p:nvPr/>
-        </p:nvSpPr>
-        <p:spPr>
-          <a:xfrm>
-            <a:off x="9281160" y="2971800"/>
-            <a:ext cx="2057400" cy="310896"/>
+              <a:t>−Δ</a:t>
+            </a:r>
+          </a:p>
+        </p:txBody>
+      </p:sp>
+      <p:sp>
+        <p:nvSpPr>
+          <p:cNvPr id="54" name="TextBox 53"/>
+          <p:cNvSpPr txBox="1"/>
+          <p:nvPr/>
+        </p:nvSpPr>
+        <p:spPr>
+          <a:xfrm>
+            <a:off x="6327648" y="4306823"/>
+            <a:ext cx="1417320" cy="256032"/>
           </a:xfrm>
           <a:prstGeom prst="rect">
             <a:avLst/>
@@ -24899,27 +28520,72 @@
               </a:spcAft>
             </a:pPr>
             <a:r>
-              <a:rPr sz="1000" b="0">
+              <a:rPr sz="1050" b="1">
+                <a:solidFill>
+                  <a:srgbClr val="1B3255"/>
+                </a:solidFill>
+                <a:latin typeface="맑은 고딕"/>
+              </a:rPr>
+              <a:t>블록 보너스</a:t>
+            </a:r>
+          </a:p>
+        </p:txBody>
+      </p:sp>
+      <p:sp>
+        <p:nvSpPr>
+          <p:cNvPr id="55" name="TextBox 54"/>
+          <p:cNvSpPr txBox="1"/>
+          <p:nvPr/>
+        </p:nvSpPr>
+        <p:spPr>
+          <a:xfrm>
+            <a:off x="7726679" y="4306823"/>
+            <a:ext cx="2606040" cy="256032"/>
+          </a:xfrm>
+          <a:prstGeom prst="rect">
+            <a:avLst/>
+          </a:prstGeom>
+          <a:noFill/>
+        </p:spPr>
+        <p:txBody>
+          <a:bodyPr wrap="square" anchor="t" lIns="36576" rIns="36576" tIns="18288" bIns="18288">
+            <a:spAutoFit/>
+          </a:bodyPr>
+          <a:lstStyle/>
+          <a:p>
+            <a:pPr algn="l">
+              <a:lnSpc>
+                <a:spcPct val="100000"/>
+              </a:lnSpc>
+              <a:spcBef>
+                <a:spcPts val="0"/>
+              </a:spcBef>
+              <a:spcAft>
+                <a:spcPts val="400"/>
+              </a:spcAft>
+            </a:pPr>
+            <a:r>
+              <a:rPr sz="900" b="0">
                 <a:solidFill>
                   <a:srgbClr val="5C6670"/>
                 </a:solidFill>
                 <a:latin typeface="맑은 고딕"/>
               </a:rPr>
-              <a:t>LOT_CD 변경 1회</a:t>
-            </a:r>
-          </a:p>
-        </p:txBody>
-      </p:sp>
-      <p:sp>
-        <p:nvSpPr>
-          <p:cNvPr id="40" name="TextBox 39"/>
-          <p:cNvSpPr txBox="1"/>
-          <p:nvPr/>
-        </p:nvSpPr>
-        <p:spPr>
-          <a:xfrm>
-            <a:off x="6327648" y="3355848"/>
-            <a:ext cx="1737360" cy="310896"/>
+              <a:t>w_bulk·min(N/B,1)</a:t>
+            </a:r>
+          </a:p>
+        </p:txBody>
+      </p:sp>
+      <p:sp>
+        <p:nvSpPr>
+          <p:cNvPr id="56" name="TextBox 55"/>
+          <p:cNvSpPr txBox="1"/>
+          <p:nvPr/>
+        </p:nvSpPr>
+        <p:spPr>
+          <a:xfrm>
+            <a:off x="6327648" y="4544567"/>
+            <a:ext cx="3977639" cy="237744"/>
           </a:xfrm>
           <a:prstGeom prst="rect">
             <a:avLst/>
@@ -24944,27 +28610,207 @@
               </a:spcAft>
             </a:pPr>
             <a:r>
+              <a:rPr sz="950" b="0">
+                <a:solidFill>
+                  <a:srgbClr val="222A33"/>
+                </a:solidFill>
+                <a:latin typeface="맑은 고딕"/>
+              </a:rPr>
+              <a:t>N=1 → 0</a:t>
+            </a:r>
+          </a:p>
+        </p:txBody>
+      </p:sp>
+      <p:sp>
+        <p:nvSpPr>
+          <p:cNvPr id="57" name="TextBox 56"/>
+          <p:cNvSpPr txBox="1"/>
+          <p:nvPr/>
+        </p:nvSpPr>
+        <p:spPr>
+          <a:xfrm>
+            <a:off x="10378440" y="4398263"/>
+            <a:ext cx="685800" cy="310896"/>
+          </a:xfrm>
+          <a:prstGeom prst="rect">
+            <a:avLst/>
+          </a:prstGeom>
+          <a:noFill/>
+        </p:spPr>
+        <p:txBody>
+          <a:bodyPr wrap="square" anchor="t" lIns="36576" rIns="36576" tIns="18288" bIns="18288">
+            <a:spAutoFit/>
+          </a:bodyPr>
+          <a:lstStyle/>
+          <a:p>
+            <a:pPr algn="r">
+              <a:lnSpc>
+                <a:spcPct val="100000"/>
+              </a:lnSpc>
+              <a:spcBef>
+                <a:spcPts val="0"/>
+              </a:spcBef>
+              <a:spcAft>
+                <a:spcPts val="400"/>
+              </a:spcAft>
+            </a:pPr>
+            <a:r>
               <a:rPr sz="1100" b="1">
                 <a:solidFill>
+                  <a:srgbClr val="B33A3A"/>
+                </a:solidFill>
+                <a:latin typeface="맑은 고딕"/>
+              </a:rPr>
+              <a:t>0</a:t>
+            </a:r>
+          </a:p>
+        </p:txBody>
+      </p:sp>
+      <p:sp>
+        <p:nvSpPr>
+          <p:cNvPr id="58" name="TextBox 57"/>
+          <p:cNvSpPr txBox="1"/>
+          <p:nvPr/>
+        </p:nvSpPr>
+        <p:spPr>
+          <a:xfrm>
+            <a:off x="6327648" y="4782311"/>
+            <a:ext cx="1417320" cy="256032"/>
+          </a:xfrm>
+          <a:prstGeom prst="rect">
+            <a:avLst/>
+          </a:prstGeom>
+          <a:noFill/>
+        </p:spPr>
+        <p:txBody>
+          <a:bodyPr wrap="square" anchor="t" lIns="36576" rIns="36576" tIns="18288" bIns="18288">
+            <a:spAutoFit/>
+          </a:bodyPr>
+          <a:lstStyle/>
+          <a:p>
+            <a:pPr algn="l">
+              <a:lnSpc>
+                <a:spcPct val="100000"/>
+              </a:lnSpc>
+              <a:spcBef>
+                <a:spcPts val="0"/>
+              </a:spcBef>
+              <a:spcAft>
+                <a:spcPts val="400"/>
+              </a:spcAft>
+            </a:pPr>
+            <a:r>
+              <a:rPr sz="1050" b="1">
+                <a:solidFill>
+                  <a:srgbClr val="1B3255"/>
+                </a:solidFill>
+                <a:latin typeface="맑은 고딕"/>
+              </a:rPr>
+              <a:t>동일 셋업</a:t>
+            </a:r>
+          </a:p>
+        </p:txBody>
+      </p:sp>
+      <p:sp>
+        <p:nvSpPr>
+          <p:cNvPr id="59" name="TextBox 58"/>
+          <p:cNvSpPr txBox="1"/>
+          <p:nvPr/>
+        </p:nvSpPr>
+        <p:spPr>
+          <a:xfrm>
+            <a:off x="7726679" y="4782311"/>
+            <a:ext cx="2606040" cy="256032"/>
+          </a:xfrm>
+          <a:prstGeom prst="rect">
+            <a:avLst/>
+          </a:prstGeom>
+          <a:noFill/>
+        </p:spPr>
+        <p:txBody>
+          <a:bodyPr wrap="square" anchor="t" lIns="36576" rIns="36576" tIns="18288" bIns="18288">
+            <a:spAutoFit/>
+          </a:bodyPr>
+          <a:lstStyle/>
+          <a:p>
+            <a:pPr algn="l">
+              <a:lnSpc>
+                <a:spcPct val="100000"/>
+              </a:lnSpc>
+              <a:spcBef>
+                <a:spcPts val="0"/>
+              </a:spcBef>
+              <a:spcAft>
+                <a:spcPts val="400"/>
+              </a:spcAft>
+            </a:pPr>
+            <a:r>
+              <a:rPr sz="900" b="0">
+                <a:solidFill>
+                  <a:srgbClr val="5C6670"/>
+                </a:solidFill>
+                <a:latin typeface="맑은 고딕"/>
+              </a:rPr>
+              <a:t>w·1[동일]</a:t>
+            </a:r>
+          </a:p>
+        </p:txBody>
+      </p:sp>
+      <p:sp>
+        <p:nvSpPr>
+          <p:cNvPr id="60" name="TextBox 59"/>
+          <p:cNvSpPr txBox="1"/>
+          <p:nvPr/>
+        </p:nvSpPr>
+        <p:spPr>
+          <a:xfrm>
+            <a:off x="6327648" y="5020055"/>
+            <a:ext cx="3977639" cy="237744"/>
+          </a:xfrm>
+          <a:prstGeom prst="rect">
+            <a:avLst/>
+          </a:prstGeom>
+          <a:noFill/>
+        </p:spPr>
+        <p:txBody>
+          <a:bodyPr wrap="square" anchor="t" lIns="36576" rIns="36576" tIns="18288" bIns="18288">
+            <a:spAutoFit/>
+          </a:bodyPr>
+          <a:lstStyle/>
+          <a:p>
+            <a:pPr algn="l">
+              <a:lnSpc>
+                <a:spcPct val="100000"/>
+              </a:lnSpc>
+              <a:spcBef>
+                <a:spcPts val="0"/>
+              </a:spcBef>
+              <a:spcAft>
+                <a:spcPts val="400"/>
+              </a:spcAft>
+            </a:pPr>
+            <a:r>
+              <a:rPr sz="950" b="0">
+                <a:solidFill>
                   <a:srgbClr val="222A33"/>
                 </a:solidFill>
                 <a:latin typeface="맑은 고딕"/>
               </a:rPr>
-              <a:t>회피가능 전환</a:t>
-            </a:r>
-          </a:p>
-        </p:txBody>
-      </p:sp>
-      <p:sp>
-        <p:nvSpPr>
-          <p:cNvPr id="41" name="TextBox 40"/>
-          <p:cNvSpPr txBox="1"/>
-          <p:nvPr/>
-        </p:nvSpPr>
-        <p:spPr>
-          <a:xfrm>
-            <a:off x="8046720" y="3355848"/>
-            <a:ext cx="1280160" cy="310896"/>
+              <a:t>셋업 변경 → 0</a:t>
+            </a:r>
+          </a:p>
+        </p:txBody>
+      </p:sp>
+      <p:sp>
+        <p:nvSpPr>
+          <p:cNvPr id="61" name="TextBox 60"/>
+          <p:cNvSpPr txBox="1"/>
+          <p:nvPr/>
+        </p:nvSpPr>
+        <p:spPr>
+          <a:xfrm>
+            <a:off x="10378440" y="4873751"/>
+            <a:ext cx="685800" cy="310896"/>
           </a:xfrm>
           <a:prstGeom prst="rect">
             <a:avLst/>
@@ -24977,7 +28823,7 @@
           </a:bodyPr>
           <a:lstStyle/>
           <a:p>
-            <a:pPr algn="l">
+            <a:pPr algn="r">
               <a:lnSpc>
                 <a:spcPct val="100000"/>
               </a:lnSpc>
@@ -24995,276 +28841,6 @@
                 </a:solidFill>
                 <a:latin typeface="맑은 고딕"/>
               </a:rPr>
-              <a:t>−8.0 ×0.7</a:t>
-            </a:r>
-          </a:p>
-        </p:txBody>
-      </p:sp>
-      <p:sp>
-        <p:nvSpPr>
-          <p:cNvPr id="42" name="TextBox 41"/>
-          <p:cNvSpPr txBox="1"/>
-          <p:nvPr/>
-        </p:nvSpPr>
-        <p:spPr>
-          <a:xfrm>
-            <a:off x="9281160" y="3355848"/>
-            <a:ext cx="2057400" cy="310896"/>
-          </a:xfrm>
-          <a:prstGeom prst="rect">
-            <a:avLst/>
-          </a:prstGeom>
-          <a:noFill/>
-        </p:spPr>
-        <p:txBody>
-          <a:bodyPr wrap="square" anchor="t" lIns="36576" rIns="36576" tIns="18288" bIns="18288">
-            <a:spAutoFit/>
-          </a:bodyPr>
-          <a:lstStyle/>
-          <a:p>
-            <a:pPr algn="l">
-              <a:lnSpc>
-                <a:spcPct val="100000"/>
-              </a:lnSpc>
-              <a:spcBef>
-                <a:spcPts val="0"/>
-              </a:spcBef>
-              <a:spcAft>
-                <a:spcPts val="400"/>
-              </a:spcAft>
-            </a:pPr>
-            <a:r>
-              <a:rPr sz="1000" b="0">
-                <a:solidFill>
-                  <a:srgbClr val="5C6670"/>
-                </a:solidFill>
-                <a:latin typeface="맑은 고딕"/>
-              </a:rPr>
-              <a:t>= −5.6  (커버 가능)</a:t>
-            </a:r>
-          </a:p>
-        </p:txBody>
-      </p:sp>
-      <p:sp>
-        <p:nvSpPr>
-          <p:cNvPr id="43" name="TextBox 42"/>
-          <p:cNvSpPr txBox="1"/>
-          <p:nvPr/>
-        </p:nvSpPr>
-        <p:spPr>
-          <a:xfrm>
-            <a:off x="6327648" y="3739896"/>
-            <a:ext cx="1737360" cy="310896"/>
-          </a:xfrm>
-          <a:prstGeom prst="rect">
-            <a:avLst/>
-          </a:prstGeom>
-          <a:noFill/>
-        </p:spPr>
-        <p:txBody>
-          <a:bodyPr wrap="square" anchor="t" lIns="36576" rIns="36576" tIns="18288" bIns="18288">
-            <a:spAutoFit/>
-          </a:bodyPr>
-          <a:lstStyle/>
-          <a:p>
-            <a:pPr algn="l">
-              <a:lnSpc>
-                <a:spcPct val="100000"/>
-              </a:lnSpc>
-              <a:spcBef>
-                <a:spcPts val="0"/>
-              </a:spcBef>
-              <a:spcAft>
-                <a:spcPts val="400"/>
-              </a:spcAft>
-            </a:pPr>
-            <a:r>
-              <a:rPr sz="1100" b="1">
-                <a:solidFill>
-                  <a:srgbClr val="222A33"/>
-                </a:solidFill>
-                <a:latin typeface="맑은 고딕"/>
-              </a:rPr>
-              <a:t>중복 커버</a:t>
-            </a:r>
-          </a:p>
-        </p:txBody>
-      </p:sp>
-      <p:sp>
-        <p:nvSpPr>
-          <p:cNvPr id="44" name="TextBox 43"/>
-          <p:cNvSpPr txBox="1"/>
-          <p:nvPr/>
-        </p:nvSpPr>
-        <p:spPr>
-          <a:xfrm>
-            <a:off x="8046720" y="3739896"/>
-            <a:ext cx="1280160" cy="310896"/>
-          </a:xfrm>
-          <a:prstGeom prst="rect">
-            <a:avLst/>
-          </a:prstGeom>
-          <a:noFill/>
-        </p:spPr>
-        <p:txBody>
-          <a:bodyPr wrap="square" anchor="t" lIns="36576" rIns="36576" tIns="18288" bIns="18288">
-            <a:spAutoFit/>
-          </a:bodyPr>
-          <a:lstStyle/>
-          <a:p>
-            <a:pPr algn="l">
-              <a:lnSpc>
-                <a:spcPct val="100000"/>
-              </a:lnSpc>
-              <a:spcBef>
-                <a:spcPts val="0"/>
-              </a:spcBef>
-              <a:spcAft>
-                <a:spcPts val="400"/>
-              </a:spcAft>
-            </a:pPr>
-            <a:r>
-              <a:rPr sz="1100" b="1">
-                <a:solidFill>
-                  <a:srgbClr val="B33A3A"/>
-                </a:solidFill>
-                <a:latin typeface="맑은 고딕"/>
-              </a:rPr>
-              <a:t>−5.0 ×비율</a:t>
-            </a:r>
-          </a:p>
-        </p:txBody>
-      </p:sp>
-      <p:sp>
-        <p:nvSpPr>
-          <p:cNvPr id="45" name="TextBox 44"/>
-          <p:cNvSpPr txBox="1"/>
-          <p:nvPr/>
-        </p:nvSpPr>
-        <p:spPr>
-          <a:xfrm>
-            <a:off x="9281160" y="3739896"/>
-            <a:ext cx="2057400" cy="310896"/>
-          </a:xfrm>
-          <a:prstGeom prst="rect">
-            <a:avLst/>
-          </a:prstGeom>
-          <a:noFill/>
-        </p:spPr>
-        <p:txBody>
-          <a:bodyPr wrap="square" anchor="t" lIns="36576" rIns="36576" tIns="18288" bIns="18288">
-            <a:spAutoFit/>
-          </a:bodyPr>
-          <a:lstStyle/>
-          <a:p>
-            <a:pPr algn="l">
-              <a:lnSpc>
-                <a:spcPct val="100000"/>
-              </a:lnSpc>
-              <a:spcBef>
-                <a:spcPts val="0"/>
-              </a:spcBef>
-              <a:spcAft>
-                <a:spcPts val="400"/>
-              </a:spcAft>
-            </a:pPr>
-            <a:r>
-              <a:rPr sz="1000" b="0">
-                <a:solidFill>
-                  <a:srgbClr val="5C6670"/>
-                </a:solidFill>
-                <a:latin typeface="맑은 고딕"/>
-              </a:rPr>
-              <a:t>이미 덮이는 버킷</a:t>
-            </a:r>
-          </a:p>
-        </p:txBody>
-      </p:sp>
-      <p:sp>
-        <p:nvSpPr>
-          <p:cNvPr id="46" name="TextBox 45"/>
-          <p:cNvSpPr txBox="1"/>
-          <p:nvPr/>
-        </p:nvSpPr>
-        <p:spPr>
-          <a:xfrm>
-            <a:off x="6327648" y="4123944"/>
-            <a:ext cx="1737360" cy="310896"/>
-          </a:xfrm>
-          <a:prstGeom prst="rect">
-            <a:avLst/>
-          </a:prstGeom>
-          <a:noFill/>
-        </p:spPr>
-        <p:txBody>
-          <a:bodyPr wrap="square" anchor="t" lIns="36576" rIns="36576" tIns="18288" bIns="18288">
-            <a:spAutoFit/>
-          </a:bodyPr>
-          <a:lstStyle/>
-          <a:p>
-            <a:pPr algn="l">
-              <a:lnSpc>
-                <a:spcPct val="100000"/>
-              </a:lnSpc>
-              <a:spcBef>
-                <a:spcPts val="0"/>
-              </a:spcBef>
-              <a:spcAft>
-                <a:spcPts val="400"/>
-              </a:spcAft>
-            </a:pPr>
-            <a:r>
-              <a:rPr sz="1100" b="1">
-                <a:solidFill>
-                  <a:srgbClr val="222A33"/>
-                </a:solidFill>
-                <a:latin typeface="맑은 고딕"/>
-              </a:rPr>
-              <a:t>블록 보너스</a:t>
-            </a:r>
-          </a:p>
-        </p:txBody>
-      </p:sp>
-      <p:sp>
-        <p:nvSpPr>
-          <p:cNvPr id="47" name="TextBox 46"/>
-          <p:cNvSpPr txBox="1"/>
-          <p:nvPr/>
-        </p:nvSpPr>
-        <p:spPr>
-          <a:xfrm>
-            <a:off x="8046720" y="4123944"/>
-            <a:ext cx="1280160" cy="310896"/>
-          </a:xfrm>
-          <a:prstGeom prst="rect">
-            <a:avLst/>
-          </a:prstGeom>
-          <a:noFill/>
-        </p:spPr>
-        <p:txBody>
-          <a:bodyPr wrap="square" anchor="t" lIns="36576" rIns="36576" tIns="18288" bIns="18288">
-            <a:spAutoFit/>
-          </a:bodyPr>
-          <a:lstStyle/>
-          <a:p>
-            <a:pPr algn="l">
-              <a:lnSpc>
-                <a:spcPct val="100000"/>
-              </a:lnSpc>
-              <a:spcBef>
-                <a:spcPts val="0"/>
-              </a:spcBef>
-              <a:spcAft>
-                <a:spcPts val="400"/>
-              </a:spcAft>
-            </a:pPr>
-            <a:r>
-              <a:rPr sz="1100" b="1">
-                <a:solidFill>
-                  <a:srgbClr val="B33A3A"/>
-                </a:solidFill>
-                <a:latin typeface="맑은 고딕"/>
-              </a:rPr>
               <a:t>0</a:t>
             </a:r>
           </a:p>
@@ -25272,187 +28848,7 @@
       </p:sp>
       <p:sp>
         <p:nvSpPr>
-          <p:cNvPr id="48" name="TextBox 47"/>
-          <p:cNvSpPr txBox="1"/>
-          <p:nvPr/>
-        </p:nvSpPr>
-        <p:spPr>
-          <a:xfrm>
-            <a:off x="9281160" y="4123944"/>
-            <a:ext cx="2057400" cy="310896"/>
-          </a:xfrm>
-          <a:prstGeom prst="rect">
-            <a:avLst/>
-          </a:prstGeom>
-          <a:noFill/>
-        </p:spPr>
-        <p:txBody>
-          <a:bodyPr wrap="square" anchor="t" lIns="36576" rIns="36576" tIns="18288" bIns="18288">
-            <a:spAutoFit/>
-          </a:bodyPr>
-          <a:lstStyle/>
-          <a:p>
-            <a:pPr algn="l">
-              <a:lnSpc>
-                <a:spcPct val="100000"/>
-              </a:lnSpc>
-              <a:spcBef>
-                <a:spcPts val="0"/>
-              </a:spcBef>
-              <a:spcAft>
-                <a:spcPts val="400"/>
-              </a:spcAft>
-            </a:pPr>
-            <a:r>
-              <a:rPr sz="1000" b="0">
-                <a:solidFill>
-                  <a:srgbClr val="5C6670"/>
-                </a:solidFill>
-                <a:latin typeface="맑은 고딕"/>
-              </a:rPr>
-              <a:t>블록 크기 1</a:t>
-            </a:r>
-          </a:p>
-        </p:txBody>
-      </p:sp>
-      <p:sp>
-        <p:nvSpPr>
-          <p:cNvPr id="49" name="TextBox 48"/>
-          <p:cNvSpPr txBox="1"/>
-          <p:nvPr/>
-        </p:nvSpPr>
-        <p:spPr>
-          <a:xfrm>
-            <a:off x="6327648" y="4507992"/>
-            <a:ext cx="1737360" cy="310896"/>
-          </a:xfrm>
-          <a:prstGeom prst="rect">
-            <a:avLst/>
-          </a:prstGeom>
-          <a:noFill/>
-        </p:spPr>
-        <p:txBody>
-          <a:bodyPr wrap="square" anchor="t" lIns="36576" rIns="36576" tIns="18288" bIns="18288">
-            <a:spAutoFit/>
-          </a:bodyPr>
-          <a:lstStyle/>
-          <a:p>
-            <a:pPr algn="l">
-              <a:lnSpc>
-                <a:spcPct val="100000"/>
-              </a:lnSpc>
-              <a:spcBef>
-                <a:spcPts val="0"/>
-              </a:spcBef>
-              <a:spcAft>
-                <a:spcPts val="400"/>
-              </a:spcAft>
-            </a:pPr>
-            <a:r>
-              <a:rPr sz="1100" b="1">
-                <a:solidFill>
-                  <a:srgbClr val="222A33"/>
-                </a:solidFill>
-                <a:latin typeface="맑은 고딕"/>
-              </a:rPr>
-              <a:t>동일 셋업</a:t>
-            </a:r>
-          </a:p>
-        </p:txBody>
-      </p:sp>
-      <p:sp>
-        <p:nvSpPr>
-          <p:cNvPr id="50" name="TextBox 49"/>
-          <p:cNvSpPr txBox="1"/>
-          <p:nvPr/>
-        </p:nvSpPr>
-        <p:spPr>
-          <a:xfrm>
-            <a:off x="8046720" y="4507992"/>
-            <a:ext cx="1280160" cy="310896"/>
-          </a:xfrm>
-          <a:prstGeom prst="rect">
-            <a:avLst/>
-          </a:prstGeom>
-          <a:noFill/>
-        </p:spPr>
-        <p:txBody>
-          <a:bodyPr wrap="square" anchor="t" lIns="36576" rIns="36576" tIns="18288" bIns="18288">
-            <a:spAutoFit/>
-          </a:bodyPr>
-          <a:lstStyle/>
-          <a:p>
-            <a:pPr algn="l">
-              <a:lnSpc>
-                <a:spcPct val="100000"/>
-              </a:lnSpc>
-              <a:spcBef>
-                <a:spcPts val="0"/>
-              </a:spcBef>
-              <a:spcAft>
-                <a:spcPts val="400"/>
-              </a:spcAft>
-            </a:pPr>
-            <a:r>
-              <a:rPr sz="1100" b="1">
-                <a:solidFill>
-                  <a:srgbClr val="B33A3A"/>
-                </a:solidFill>
-                <a:latin typeface="맑은 고딕"/>
-              </a:rPr>
-              <a:t>0</a:t>
-            </a:r>
-          </a:p>
-        </p:txBody>
-      </p:sp>
-      <p:sp>
-        <p:nvSpPr>
-          <p:cNvPr id="51" name="TextBox 50"/>
-          <p:cNvSpPr txBox="1"/>
-          <p:nvPr/>
-        </p:nvSpPr>
-        <p:spPr>
-          <a:xfrm>
-            <a:off x="9281160" y="4507992"/>
-            <a:ext cx="2057400" cy="310896"/>
-          </a:xfrm>
-          <a:prstGeom prst="rect">
-            <a:avLst/>
-          </a:prstGeom>
-          <a:noFill/>
-        </p:spPr>
-        <p:txBody>
-          <a:bodyPr wrap="square" anchor="t" lIns="36576" rIns="36576" tIns="18288" bIns="18288">
-            <a:spAutoFit/>
-          </a:bodyPr>
-          <a:lstStyle/>
-          <a:p>
-            <a:pPr algn="l">
-              <a:lnSpc>
-                <a:spcPct val="100000"/>
-              </a:lnSpc>
-              <a:spcBef>
-                <a:spcPts val="0"/>
-              </a:spcBef>
-              <a:spcAft>
-                <a:spcPts val="400"/>
-              </a:spcAft>
-            </a:pPr>
-            <a:r>
-              <a:rPr sz="1000" b="0">
-                <a:solidFill>
-                  <a:srgbClr val="5C6670"/>
-                </a:solidFill>
-                <a:latin typeface="맑은 고딕"/>
-              </a:rPr>
-              <a:t>셋업이 바뀜</a:t>
-            </a:r>
-          </a:p>
-        </p:txBody>
-      </p:sp>
-      <p:sp>
-        <p:nvSpPr>
-          <p:cNvPr id="52" name="Rectangle 51"/>
+          <p:cNvPr id="62" name="Rectangle 61"/>
           <p:cNvSpPr/>
           <p:nvPr/>
         </p:nvSpPr>
@@ -25496,7 +28892,7 @@
       </p:sp>
       <p:sp>
         <p:nvSpPr>
-          <p:cNvPr id="53" name="TextBox 52"/>
+          <p:cNvPr id="63" name="TextBox 62"/>
           <p:cNvSpPr txBox="1"/>
           <p:nvPr/>
         </p:nvSpPr>
@@ -25550,7 +28946,7 @@
       </p:sp>
       <p:sp>
         <p:nvSpPr>
-          <p:cNvPr id="54" name="TextBox 53"/>
+          <p:cNvPr id="64" name="TextBox 63"/>
           <p:cNvSpPr txBox="1"/>
           <p:nvPr/>
         </p:nvSpPr>
@@ -25595,7 +28991,7 @@
       </p:sp>
       <p:sp>
         <p:nvSpPr>
-          <p:cNvPr id="55" name="Rectangle 54"/>
+          <p:cNvPr id="65" name="Rectangle 64"/>
           <p:cNvSpPr/>
           <p:nvPr/>
         </p:nvSpPr>
@@ -25639,7 +29035,7 @@
       </p:sp>
       <p:sp>
         <p:nvSpPr>
-          <p:cNvPr id="56" name="TextBox 55"/>
+          <p:cNvPr id="66" name="TextBox 65"/>
           <p:cNvSpPr txBox="1"/>
           <p:nvPr/>
         </p:nvSpPr>
@@ -29620,7 +33016,7 @@
         <p:spPr>
           <a:xfrm>
             <a:off x="566928" y="4937759"/>
-            <a:ext cx="11064240" cy="274320"/>
+            <a:ext cx="11064240" cy="320040"/>
           </a:xfrm>
           <a:prstGeom prst="rect">
             <a:avLst/>
@@ -29660,7 +33056,7 @@
                 </a:solidFill>
                 <a:latin typeface="맑은 고딕"/>
               </a:rPr>
-              <a:t>스텝 1~3은 각 설비가 전담 블록을 시작(보상 큼), 4~8은 같은 셋업으로 연속 처리. 전환 0회로 달성률이 단조 증가하고 누적 보상이 꾸준히 쌓입니다.</a:t>
+              <a:t>스텝 1~3은 각 설비 전담 블록 시작(보상 큼), 4~8은 같은 셋업 연속. 상세 State/Action/Reward·간트는 슬라이드 12~17 참고.</a:t>
             </a:r>
           </a:p>
         </p:txBody>

--- a/docs/BulkFill_스케줄링_발표자료.pptx
+++ b/docs/BulkFill_스케줄링_발표자료.pptx
@@ -8521,7 +8521,7 @@
                 </a:solidFill>
                 <a:latin typeface="맑은 고딕"/>
               </a:rPr>
-              <a:t>Step 1 — 블록 시작 (N=6)  (EQP001 → PPK001)</a:t>
+              <a:t>Step 1 — 블록 시작 (N=6 캐리어 커밋)  (EQP001 → PPK001)</a:t>
             </a:r>
           </a:p>
         </p:txBody>
@@ -9960,7 +9960,7 @@
                 </a:solidFill>
                 <a:latin typeface="맑은 고딕"/>
               </a:rPr>
-              <a:t>배정 LOT</a:t>
+              <a:t>블록 진행</a:t>
             </a:r>
           </a:p>
         </p:txBody>
@@ -10005,7 +10005,7 @@
                 </a:solidFill>
                 <a:latin typeface="맑은 고딕"/>
               </a:rPr>
-              <a:t>LOT001</a:t>
+              <a:t>1/6 시작</a:t>
             </a:r>
           </a:p>
         </p:txBody>
@@ -10050,7 +10050,7 @@
                 </a:solidFill>
                 <a:latin typeface="맑은 고딕"/>
               </a:rPr>
-              <a:t>유형</a:t>
+              <a:t>배정 LOT</a:t>
             </a:r>
           </a:p>
         </p:txBody>
@@ -10095,14 +10095,104 @@
                 </a:solidFill>
                 <a:latin typeface="맑은 고딕"/>
               </a:rPr>
-              <a:t>블록 시작 (N=6)</a:t>
+              <a:t>LOT001</a:t>
+            </a:r>
+          </a:p>
+        </p:txBody>
+      </p:sp>
+      <p:sp>
+        <p:nvSpPr>
+          <p:cNvPr id="42" name="TextBox 41"/>
+          <p:cNvSpPr txBox="1"/>
+          <p:nvPr/>
+        </p:nvSpPr>
+        <p:spPr>
+          <a:xfrm>
+            <a:off x="9162288" y="3895344"/>
+            <a:ext cx="1097280" cy="274320"/>
+          </a:xfrm>
+          <a:prstGeom prst="rect">
+            <a:avLst/>
+          </a:prstGeom>
+          <a:noFill/>
+        </p:spPr>
+        <p:txBody>
+          <a:bodyPr wrap="square" anchor="t" lIns="36576" rIns="36576" tIns="18288" bIns="18288">
+            <a:spAutoFit/>
+          </a:bodyPr>
+          <a:lstStyle/>
+          <a:p>
+            <a:pPr algn="l">
+              <a:lnSpc>
+                <a:spcPct val="100000"/>
+              </a:lnSpc>
+              <a:spcBef>
+                <a:spcPts val="0"/>
+              </a:spcBef>
+              <a:spcAft>
+                <a:spcPts val="400"/>
+              </a:spcAft>
+            </a:pPr>
+            <a:r>
+              <a:rPr sz="1000" b="0">
+                <a:solidFill>
+                  <a:srgbClr val="5C6670"/>
+                </a:solidFill>
+                <a:latin typeface="맑은 고딕"/>
+              </a:rPr>
+              <a:t>유형</a:t>
+            </a:r>
+          </a:p>
+        </p:txBody>
+      </p:sp>
+      <p:sp>
+        <p:nvSpPr>
+          <p:cNvPr id="43" name="TextBox 42"/>
+          <p:cNvSpPr txBox="1"/>
+          <p:nvPr/>
+        </p:nvSpPr>
+        <p:spPr>
+          <a:xfrm>
+            <a:off x="10195560" y="3895344"/>
+            <a:ext cx="1417320" cy="274320"/>
+          </a:xfrm>
+          <a:prstGeom prst="rect">
+            <a:avLst/>
+          </a:prstGeom>
+          <a:noFill/>
+        </p:spPr>
+        <p:txBody>
+          <a:bodyPr wrap="square" anchor="t" lIns="36576" rIns="36576" tIns="18288" bIns="18288">
+            <a:spAutoFit/>
+          </a:bodyPr>
+          <a:lstStyle/>
+          <a:p>
+            <a:pPr algn="r">
+              <a:lnSpc>
+                <a:spcPct val="100000"/>
+              </a:lnSpc>
+              <a:spcBef>
+                <a:spcPts val="0"/>
+              </a:spcBef>
+              <a:spcAft>
+                <a:spcPts val="400"/>
+              </a:spcAft>
+            </a:pPr>
+            <a:r>
+              <a:rPr sz="1000" b="1">
+                <a:solidFill>
+                  <a:srgbClr val="1B3255"/>
+                </a:solidFill>
+                <a:latin typeface="맑은 고딕"/>
+              </a:rPr>
+              <a:t>블록 시작 (N=6 캐리어 커밋)</a:t>
             </a:r>
           </a:p>
         </p:txBody>
       </p:sp>
       <p:pic>
         <p:nvPicPr>
-          <p:cNvPr id="42" name="Picture 41" descr="step_01.png"/>
+          <p:cNvPr id="44" name="Picture 43" descr="step_01.png"/>
           <p:cNvPicPr>
             <a:picLocks noChangeAspect="1"/>
           </p:cNvPicPr>
@@ -10126,7 +10216,7 @@
       </p:pic>
       <p:sp>
         <p:nvSpPr>
-          <p:cNvPr id="43" name="Rectangle 42"/>
+          <p:cNvPr id="45" name="Rectangle 44"/>
           <p:cNvSpPr/>
           <p:nvPr/>
         </p:nvSpPr>
@@ -10170,7 +10260,7 @@
       </p:sp>
       <p:sp>
         <p:nvSpPr>
-          <p:cNvPr id="44" name="TextBox 43"/>
+          <p:cNvPr id="46" name="TextBox 45"/>
           <p:cNvSpPr txBox="1"/>
           <p:nvPr/>
         </p:nvSpPr>
@@ -10215,7 +10305,7 @@
       </p:sp>
       <p:sp>
         <p:nvSpPr>
-          <p:cNvPr id="45" name="Rectangle 44"/>
+          <p:cNvPr id="47" name="Rectangle 46"/>
           <p:cNvSpPr/>
           <p:nvPr/>
         </p:nvSpPr>
@@ -10261,7 +10351,7 @@
       </p:sp>
       <p:sp>
         <p:nvSpPr>
-          <p:cNvPr id="46" name="Rectangle 45"/>
+          <p:cNvPr id="48" name="Rectangle 47"/>
           <p:cNvSpPr/>
           <p:nvPr/>
         </p:nvSpPr>
@@ -10305,7 +10395,7 @@
       </p:sp>
       <p:sp>
         <p:nvSpPr>
-          <p:cNvPr id="47" name="TextBox 46"/>
+          <p:cNvPr id="49" name="TextBox 48"/>
           <p:cNvSpPr txBox="1"/>
           <p:nvPr/>
         </p:nvSpPr>
@@ -10350,7 +10440,7 @@
       </p:sp>
       <p:sp>
         <p:nvSpPr>
-          <p:cNvPr id="48" name="TextBox 47"/>
+          <p:cNvPr id="50" name="TextBox 49"/>
           <p:cNvSpPr txBox="1"/>
           <p:nvPr/>
         </p:nvSpPr>
@@ -10395,7 +10485,7 @@
       </p:sp>
       <p:sp>
         <p:nvSpPr>
-          <p:cNvPr id="49" name="TextBox 48"/>
+          <p:cNvPr id="51" name="TextBox 50"/>
           <p:cNvSpPr txBox="1"/>
           <p:nvPr/>
         </p:nvSpPr>
@@ -10440,7 +10530,7 @@
       </p:sp>
       <p:sp>
         <p:nvSpPr>
-          <p:cNvPr id="50" name="TextBox 49"/>
+          <p:cNvPr id="52" name="TextBox 51"/>
           <p:cNvSpPr txBox="1"/>
           <p:nvPr/>
         </p:nvSpPr>
@@ -10485,7 +10575,7 @@
       </p:sp>
       <p:sp>
         <p:nvSpPr>
-          <p:cNvPr id="51" name="TextBox 50"/>
+          <p:cNvPr id="53" name="TextBox 52"/>
           <p:cNvSpPr txBox="1"/>
           <p:nvPr/>
         </p:nvSpPr>
@@ -10530,7 +10620,7 @@
       </p:sp>
       <p:sp>
         <p:nvSpPr>
-          <p:cNvPr id="52" name="Rectangle 51"/>
+          <p:cNvPr id="54" name="Rectangle 53"/>
           <p:cNvSpPr/>
           <p:nvPr/>
         </p:nvSpPr>
@@ -10576,7 +10666,7 @@
       </p:sp>
       <p:sp>
         <p:nvSpPr>
-          <p:cNvPr id="53" name="Rectangle 52"/>
+          <p:cNvPr id="55" name="Rectangle 54"/>
           <p:cNvSpPr/>
           <p:nvPr/>
         </p:nvSpPr>
@@ -10620,7 +10710,7 @@
       </p:sp>
       <p:sp>
         <p:nvSpPr>
-          <p:cNvPr id="54" name="TextBox 53"/>
+          <p:cNvPr id="56" name="TextBox 55"/>
           <p:cNvSpPr txBox="1"/>
           <p:nvPr/>
         </p:nvSpPr>
@@ -10665,7 +10755,7 @@
       </p:sp>
       <p:sp>
         <p:nvSpPr>
-          <p:cNvPr id="55" name="TextBox 54"/>
+          <p:cNvPr id="57" name="TextBox 56"/>
           <p:cNvSpPr txBox="1"/>
           <p:nvPr/>
         </p:nvSpPr>
@@ -10710,7 +10800,7 @@
       </p:sp>
       <p:sp>
         <p:nvSpPr>
-          <p:cNvPr id="56" name="TextBox 55"/>
+          <p:cNvPr id="58" name="TextBox 57"/>
           <p:cNvSpPr txBox="1"/>
           <p:nvPr/>
         </p:nvSpPr>
@@ -10755,7 +10845,7 @@
       </p:sp>
       <p:sp>
         <p:nvSpPr>
-          <p:cNvPr id="57" name="TextBox 56"/>
+          <p:cNvPr id="59" name="TextBox 58"/>
           <p:cNvSpPr txBox="1"/>
           <p:nvPr/>
         </p:nvSpPr>
@@ -10800,7 +10890,7 @@
       </p:sp>
       <p:sp>
         <p:nvSpPr>
-          <p:cNvPr id="58" name="TextBox 57"/>
+          <p:cNvPr id="60" name="TextBox 59"/>
           <p:cNvSpPr txBox="1"/>
           <p:nvPr/>
         </p:nvSpPr>
@@ -10845,7 +10935,7 @@
       </p:sp>
       <p:sp>
         <p:nvSpPr>
-          <p:cNvPr id="59" name="Rectangle 58"/>
+          <p:cNvPr id="61" name="Rectangle 60"/>
           <p:cNvSpPr/>
           <p:nvPr/>
         </p:nvSpPr>
@@ -10891,7 +10981,7 @@
       </p:sp>
       <p:sp>
         <p:nvSpPr>
-          <p:cNvPr id="60" name="Rectangle 59"/>
+          <p:cNvPr id="62" name="Rectangle 61"/>
           <p:cNvSpPr/>
           <p:nvPr/>
         </p:nvSpPr>
@@ -10935,7 +11025,7 @@
       </p:sp>
       <p:sp>
         <p:nvSpPr>
-          <p:cNvPr id="61" name="TextBox 60"/>
+          <p:cNvPr id="63" name="TextBox 62"/>
           <p:cNvSpPr txBox="1"/>
           <p:nvPr/>
         </p:nvSpPr>
@@ -10980,7 +11070,7 @@
       </p:sp>
       <p:sp>
         <p:nvSpPr>
-          <p:cNvPr id="62" name="TextBox 61"/>
+          <p:cNvPr id="64" name="TextBox 63"/>
           <p:cNvSpPr txBox="1"/>
           <p:nvPr/>
         </p:nvSpPr>
@@ -11025,7 +11115,7 @@
       </p:sp>
       <p:sp>
         <p:nvSpPr>
-          <p:cNvPr id="63" name="TextBox 62"/>
+          <p:cNvPr id="65" name="TextBox 64"/>
           <p:cNvSpPr txBox="1"/>
           <p:nvPr/>
         </p:nvSpPr>
@@ -11070,7 +11160,7 @@
       </p:sp>
       <p:sp>
         <p:nvSpPr>
-          <p:cNvPr id="64" name="TextBox 63"/>
+          <p:cNvPr id="66" name="TextBox 65"/>
           <p:cNvSpPr txBox="1"/>
           <p:nvPr/>
         </p:nvSpPr>
@@ -11115,7 +11205,7 @@
       </p:sp>
       <p:sp>
         <p:nvSpPr>
-          <p:cNvPr id="65" name="TextBox 64"/>
+          <p:cNvPr id="67" name="TextBox 66"/>
           <p:cNvSpPr txBox="1"/>
           <p:nvPr/>
         </p:nvSpPr>
@@ -11160,7 +11250,7 @@
       </p:sp>
       <p:sp>
         <p:nvSpPr>
-          <p:cNvPr id="66" name="Rectangle 65"/>
+          <p:cNvPr id="68" name="Rectangle 67"/>
           <p:cNvSpPr/>
           <p:nvPr/>
         </p:nvSpPr>
@@ -11204,7 +11294,7 @@
       </p:sp>
       <p:sp>
         <p:nvSpPr>
-          <p:cNvPr id="67" name="TextBox 66"/>
+          <p:cNvPr id="69" name="TextBox 68"/>
           <p:cNvSpPr txBox="1"/>
           <p:nvPr/>
         </p:nvSpPr>
@@ -11491,7 +11581,7 @@
                 </a:solidFill>
                 <a:latin typeface="맑은 고딕"/>
               </a:rPr>
-              <a:t>Step 2 — 블록 시작 (N=6)  (EQP002 → PPK002)</a:t>
+              <a:t>Step 2 — 블록 시작 (N=6 캐리어 커밋)  (EQP002 → PPK002)</a:t>
             </a:r>
           </a:p>
         </p:txBody>
@@ -12930,7 +13020,7 @@
                 </a:solidFill>
                 <a:latin typeface="맑은 고딕"/>
               </a:rPr>
-              <a:t>배정 LOT</a:t>
+              <a:t>블록 진행</a:t>
             </a:r>
           </a:p>
         </p:txBody>
@@ -12975,7 +13065,7 @@
                 </a:solidFill>
                 <a:latin typeface="맑은 고딕"/>
               </a:rPr>
-              <a:t>LOT009</a:t>
+              <a:t>1/6 시작</a:t>
             </a:r>
           </a:p>
         </p:txBody>
@@ -13020,7 +13110,7 @@
                 </a:solidFill>
                 <a:latin typeface="맑은 고딕"/>
               </a:rPr>
-              <a:t>유형</a:t>
+              <a:t>배정 LOT</a:t>
             </a:r>
           </a:p>
         </p:txBody>
@@ -13065,14 +13155,104 @@
                 </a:solidFill>
                 <a:latin typeface="맑은 고딕"/>
               </a:rPr>
-              <a:t>블록 시작 (N=6)</a:t>
+              <a:t>LOT009</a:t>
+            </a:r>
+          </a:p>
+        </p:txBody>
+      </p:sp>
+      <p:sp>
+        <p:nvSpPr>
+          <p:cNvPr id="42" name="TextBox 41"/>
+          <p:cNvSpPr txBox="1"/>
+          <p:nvPr/>
+        </p:nvSpPr>
+        <p:spPr>
+          <a:xfrm>
+            <a:off x="9162288" y="3895344"/>
+            <a:ext cx="1097280" cy="274320"/>
+          </a:xfrm>
+          <a:prstGeom prst="rect">
+            <a:avLst/>
+          </a:prstGeom>
+          <a:noFill/>
+        </p:spPr>
+        <p:txBody>
+          <a:bodyPr wrap="square" anchor="t" lIns="36576" rIns="36576" tIns="18288" bIns="18288">
+            <a:spAutoFit/>
+          </a:bodyPr>
+          <a:lstStyle/>
+          <a:p>
+            <a:pPr algn="l">
+              <a:lnSpc>
+                <a:spcPct val="100000"/>
+              </a:lnSpc>
+              <a:spcBef>
+                <a:spcPts val="0"/>
+              </a:spcBef>
+              <a:spcAft>
+                <a:spcPts val="400"/>
+              </a:spcAft>
+            </a:pPr>
+            <a:r>
+              <a:rPr sz="1000" b="0">
+                <a:solidFill>
+                  <a:srgbClr val="5C6670"/>
+                </a:solidFill>
+                <a:latin typeface="맑은 고딕"/>
+              </a:rPr>
+              <a:t>유형</a:t>
+            </a:r>
+          </a:p>
+        </p:txBody>
+      </p:sp>
+      <p:sp>
+        <p:nvSpPr>
+          <p:cNvPr id="43" name="TextBox 42"/>
+          <p:cNvSpPr txBox="1"/>
+          <p:nvPr/>
+        </p:nvSpPr>
+        <p:spPr>
+          <a:xfrm>
+            <a:off x="10195560" y="3895344"/>
+            <a:ext cx="1417320" cy="274320"/>
+          </a:xfrm>
+          <a:prstGeom prst="rect">
+            <a:avLst/>
+          </a:prstGeom>
+          <a:noFill/>
+        </p:spPr>
+        <p:txBody>
+          <a:bodyPr wrap="square" anchor="t" lIns="36576" rIns="36576" tIns="18288" bIns="18288">
+            <a:spAutoFit/>
+          </a:bodyPr>
+          <a:lstStyle/>
+          <a:p>
+            <a:pPr algn="r">
+              <a:lnSpc>
+                <a:spcPct val="100000"/>
+              </a:lnSpc>
+              <a:spcBef>
+                <a:spcPts val="0"/>
+              </a:spcBef>
+              <a:spcAft>
+                <a:spcPts val="400"/>
+              </a:spcAft>
+            </a:pPr>
+            <a:r>
+              <a:rPr sz="1000" b="1">
+                <a:solidFill>
+                  <a:srgbClr val="1B3255"/>
+                </a:solidFill>
+                <a:latin typeface="맑은 고딕"/>
+              </a:rPr>
+              <a:t>블록 시작 (N=6 캐리어 커밋)</a:t>
             </a:r>
           </a:p>
         </p:txBody>
       </p:sp>
       <p:pic>
         <p:nvPicPr>
-          <p:cNvPr id="42" name="Picture 41" descr="step_02.png"/>
+          <p:cNvPr id="44" name="Picture 43" descr="step_02.png"/>
           <p:cNvPicPr>
             <a:picLocks noChangeAspect="1"/>
           </p:cNvPicPr>
@@ -13096,7 +13276,7 @@
       </p:pic>
       <p:sp>
         <p:nvSpPr>
-          <p:cNvPr id="43" name="Rectangle 42"/>
+          <p:cNvPr id="45" name="Rectangle 44"/>
           <p:cNvSpPr/>
           <p:nvPr/>
         </p:nvSpPr>
@@ -13140,7 +13320,7 @@
       </p:sp>
       <p:sp>
         <p:nvSpPr>
-          <p:cNvPr id="44" name="TextBox 43"/>
+          <p:cNvPr id="46" name="TextBox 45"/>
           <p:cNvSpPr txBox="1"/>
           <p:nvPr/>
         </p:nvSpPr>
@@ -13185,7 +13365,7 @@
       </p:sp>
       <p:sp>
         <p:nvSpPr>
-          <p:cNvPr id="45" name="Rectangle 44"/>
+          <p:cNvPr id="47" name="Rectangle 46"/>
           <p:cNvSpPr/>
           <p:nvPr/>
         </p:nvSpPr>
@@ -13231,7 +13411,7 @@
       </p:sp>
       <p:sp>
         <p:nvSpPr>
-          <p:cNvPr id="46" name="Rectangle 45"/>
+          <p:cNvPr id="48" name="Rectangle 47"/>
           <p:cNvSpPr/>
           <p:nvPr/>
         </p:nvSpPr>
@@ -13275,7 +13455,7 @@
       </p:sp>
       <p:sp>
         <p:nvSpPr>
-          <p:cNvPr id="47" name="TextBox 46"/>
+          <p:cNvPr id="49" name="TextBox 48"/>
           <p:cNvSpPr txBox="1"/>
           <p:nvPr/>
         </p:nvSpPr>
@@ -13320,7 +13500,7 @@
       </p:sp>
       <p:sp>
         <p:nvSpPr>
-          <p:cNvPr id="48" name="TextBox 47"/>
+          <p:cNvPr id="50" name="TextBox 49"/>
           <p:cNvSpPr txBox="1"/>
           <p:nvPr/>
         </p:nvSpPr>
@@ -13365,7 +13545,7 @@
       </p:sp>
       <p:sp>
         <p:nvSpPr>
-          <p:cNvPr id="49" name="TextBox 48"/>
+          <p:cNvPr id="51" name="TextBox 50"/>
           <p:cNvSpPr txBox="1"/>
           <p:nvPr/>
         </p:nvSpPr>
@@ -13410,7 +13590,7 @@
       </p:sp>
       <p:sp>
         <p:nvSpPr>
-          <p:cNvPr id="50" name="TextBox 49"/>
+          <p:cNvPr id="52" name="TextBox 51"/>
           <p:cNvSpPr txBox="1"/>
           <p:nvPr/>
         </p:nvSpPr>
@@ -13455,7 +13635,7 @@
       </p:sp>
       <p:sp>
         <p:nvSpPr>
-          <p:cNvPr id="51" name="TextBox 50"/>
+          <p:cNvPr id="53" name="TextBox 52"/>
           <p:cNvSpPr txBox="1"/>
           <p:nvPr/>
         </p:nvSpPr>
@@ -13500,7 +13680,7 @@
       </p:sp>
       <p:sp>
         <p:nvSpPr>
-          <p:cNvPr id="52" name="Rectangle 51"/>
+          <p:cNvPr id="54" name="Rectangle 53"/>
           <p:cNvSpPr/>
           <p:nvPr/>
         </p:nvSpPr>
@@ -13546,7 +13726,7 @@
       </p:sp>
       <p:sp>
         <p:nvSpPr>
-          <p:cNvPr id="53" name="Rectangle 52"/>
+          <p:cNvPr id="55" name="Rectangle 54"/>
           <p:cNvSpPr/>
           <p:nvPr/>
         </p:nvSpPr>
@@ -13590,7 +13770,7 @@
       </p:sp>
       <p:sp>
         <p:nvSpPr>
-          <p:cNvPr id="54" name="TextBox 53"/>
+          <p:cNvPr id="56" name="TextBox 55"/>
           <p:cNvSpPr txBox="1"/>
           <p:nvPr/>
         </p:nvSpPr>
@@ -13635,7 +13815,7 @@
       </p:sp>
       <p:sp>
         <p:nvSpPr>
-          <p:cNvPr id="55" name="TextBox 54"/>
+          <p:cNvPr id="57" name="TextBox 56"/>
           <p:cNvSpPr txBox="1"/>
           <p:nvPr/>
         </p:nvSpPr>
@@ -13680,7 +13860,7 @@
       </p:sp>
       <p:sp>
         <p:nvSpPr>
-          <p:cNvPr id="56" name="TextBox 55"/>
+          <p:cNvPr id="58" name="TextBox 57"/>
           <p:cNvSpPr txBox="1"/>
           <p:nvPr/>
         </p:nvSpPr>
@@ -13725,7 +13905,7 @@
       </p:sp>
       <p:sp>
         <p:nvSpPr>
-          <p:cNvPr id="57" name="TextBox 56"/>
+          <p:cNvPr id="59" name="TextBox 58"/>
           <p:cNvSpPr txBox="1"/>
           <p:nvPr/>
         </p:nvSpPr>
@@ -13770,7 +13950,7 @@
       </p:sp>
       <p:sp>
         <p:nvSpPr>
-          <p:cNvPr id="58" name="TextBox 57"/>
+          <p:cNvPr id="60" name="TextBox 59"/>
           <p:cNvSpPr txBox="1"/>
           <p:nvPr/>
         </p:nvSpPr>
@@ -13815,7 +13995,7 @@
       </p:sp>
       <p:sp>
         <p:nvSpPr>
-          <p:cNvPr id="59" name="Rectangle 58"/>
+          <p:cNvPr id="61" name="Rectangle 60"/>
           <p:cNvSpPr/>
           <p:nvPr/>
         </p:nvSpPr>
@@ -13861,7 +14041,7 @@
       </p:sp>
       <p:sp>
         <p:nvSpPr>
-          <p:cNvPr id="60" name="Rectangle 59"/>
+          <p:cNvPr id="62" name="Rectangle 61"/>
           <p:cNvSpPr/>
           <p:nvPr/>
         </p:nvSpPr>
@@ -13905,7 +14085,7 @@
       </p:sp>
       <p:sp>
         <p:nvSpPr>
-          <p:cNvPr id="61" name="TextBox 60"/>
+          <p:cNvPr id="63" name="TextBox 62"/>
           <p:cNvSpPr txBox="1"/>
           <p:nvPr/>
         </p:nvSpPr>
@@ -13950,7 +14130,7 @@
       </p:sp>
       <p:sp>
         <p:nvSpPr>
-          <p:cNvPr id="62" name="TextBox 61"/>
+          <p:cNvPr id="64" name="TextBox 63"/>
           <p:cNvSpPr txBox="1"/>
           <p:nvPr/>
         </p:nvSpPr>
@@ -13995,7 +14175,7 @@
       </p:sp>
       <p:sp>
         <p:nvSpPr>
-          <p:cNvPr id="63" name="TextBox 62"/>
+          <p:cNvPr id="65" name="TextBox 64"/>
           <p:cNvSpPr txBox="1"/>
           <p:nvPr/>
         </p:nvSpPr>
@@ -14040,7 +14220,7 @@
       </p:sp>
       <p:sp>
         <p:nvSpPr>
-          <p:cNvPr id="64" name="TextBox 63"/>
+          <p:cNvPr id="66" name="TextBox 65"/>
           <p:cNvSpPr txBox="1"/>
           <p:nvPr/>
         </p:nvSpPr>
@@ -14085,7 +14265,7 @@
       </p:sp>
       <p:sp>
         <p:nvSpPr>
-          <p:cNvPr id="65" name="TextBox 64"/>
+          <p:cNvPr id="67" name="TextBox 66"/>
           <p:cNvSpPr txBox="1"/>
           <p:nvPr/>
         </p:nvSpPr>
@@ -14130,7 +14310,7 @@
       </p:sp>
       <p:sp>
         <p:nvSpPr>
-          <p:cNvPr id="66" name="Rectangle 65"/>
+          <p:cNvPr id="68" name="Rectangle 67"/>
           <p:cNvSpPr/>
           <p:nvPr/>
         </p:nvSpPr>
@@ -14174,7 +14354,7 @@
       </p:sp>
       <p:sp>
         <p:nvSpPr>
-          <p:cNvPr id="67" name="TextBox 66"/>
+          <p:cNvPr id="69" name="TextBox 68"/>
           <p:cNvSpPr txBox="1"/>
           <p:nvPr/>
         </p:nvSpPr>
@@ -14461,7 +14641,7 @@
                 </a:solidFill>
                 <a:latin typeface="맑은 고딕"/>
               </a:rPr>
-              <a:t>Step 3 — 블록 시작 (N=6)  (EQP003 → PPK003)</a:t>
+              <a:t>Step 3 — 블록 시작 (N=6 캐리어 커밋)  (EQP003 → PPK003)</a:t>
             </a:r>
           </a:p>
         </p:txBody>
@@ -15900,7 +16080,7 @@
                 </a:solidFill>
                 <a:latin typeface="맑은 고딕"/>
               </a:rPr>
-              <a:t>배정 LOT</a:t>
+              <a:t>블록 진행</a:t>
             </a:r>
           </a:p>
         </p:txBody>
@@ -15945,7 +16125,7 @@
                 </a:solidFill>
                 <a:latin typeface="맑은 고딕"/>
               </a:rPr>
-              <a:t>LOT017</a:t>
+              <a:t>1/6 시작</a:t>
             </a:r>
           </a:p>
         </p:txBody>
@@ -15990,7 +16170,7 @@
                 </a:solidFill>
                 <a:latin typeface="맑은 고딕"/>
               </a:rPr>
-              <a:t>유형</a:t>
+              <a:t>배정 LOT</a:t>
             </a:r>
           </a:p>
         </p:txBody>
@@ -16035,14 +16215,104 @@
                 </a:solidFill>
                 <a:latin typeface="맑은 고딕"/>
               </a:rPr>
-              <a:t>블록 시작 (N=6)</a:t>
+              <a:t>LOT017</a:t>
+            </a:r>
+          </a:p>
+        </p:txBody>
+      </p:sp>
+      <p:sp>
+        <p:nvSpPr>
+          <p:cNvPr id="42" name="TextBox 41"/>
+          <p:cNvSpPr txBox="1"/>
+          <p:nvPr/>
+        </p:nvSpPr>
+        <p:spPr>
+          <a:xfrm>
+            <a:off x="9162288" y="3895344"/>
+            <a:ext cx="1097280" cy="274320"/>
+          </a:xfrm>
+          <a:prstGeom prst="rect">
+            <a:avLst/>
+          </a:prstGeom>
+          <a:noFill/>
+        </p:spPr>
+        <p:txBody>
+          <a:bodyPr wrap="square" anchor="t" lIns="36576" rIns="36576" tIns="18288" bIns="18288">
+            <a:spAutoFit/>
+          </a:bodyPr>
+          <a:lstStyle/>
+          <a:p>
+            <a:pPr algn="l">
+              <a:lnSpc>
+                <a:spcPct val="100000"/>
+              </a:lnSpc>
+              <a:spcBef>
+                <a:spcPts val="0"/>
+              </a:spcBef>
+              <a:spcAft>
+                <a:spcPts val="400"/>
+              </a:spcAft>
+            </a:pPr>
+            <a:r>
+              <a:rPr sz="1000" b="0">
+                <a:solidFill>
+                  <a:srgbClr val="5C6670"/>
+                </a:solidFill>
+                <a:latin typeface="맑은 고딕"/>
+              </a:rPr>
+              <a:t>유형</a:t>
+            </a:r>
+          </a:p>
+        </p:txBody>
+      </p:sp>
+      <p:sp>
+        <p:nvSpPr>
+          <p:cNvPr id="43" name="TextBox 42"/>
+          <p:cNvSpPr txBox="1"/>
+          <p:nvPr/>
+        </p:nvSpPr>
+        <p:spPr>
+          <a:xfrm>
+            <a:off x="10195560" y="3895344"/>
+            <a:ext cx="1417320" cy="274320"/>
+          </a:xfrm>
+          <a:prstGeom prst="rect">
+            <a:avLst/>
+          </a:prstGeom>
+          <a:noFill/>
+        </p:spPr>
+        <p:txBody>
+          <a:bodyPr wrap="square" anchor="t" lIns="36576" rIns="36576" tIns="18288" bIns="18288">
+            <a:spAutoFit/>
+          </a:bodyPr>
+          <a:lstStyle/>
+          <a:p>
+            <a:pPr algn="r">
+              <a:lnSpc>
+                <a:spcPct val="100000"/>
+              </a:lnSpc>
+              <a:spcBef>
+                <a:spcPts val="0"/>
+              </a:spcBef>
+              <a:spcAft>
+                <a:spcPts val="400"/>
+              </a:spcAft>
+            </a:pPr>
+            <a:r>
+              <a:rPr sz="1000" b="1">
+                <a:solidFill>
+                  <a:srgbClr val="1B3255"/>
+                </a:solidFill>
+                <a:latin typeface="맑은 고딕"/>
+              </a:rPr>
+              <a:t>블록 시작 (N=6 캐리어 커밋)</a:t>
             </a:r>
           </a:p>
         </p:txBody>
       </p:sp>
       <p:pic>
         <p:nvPicPr>
-          <p:cNvPr id="42" name="Picture 41" descr="step_03.png"/>
+          <p:cNvPr id="44" name="Picture 43" descr="step_03.png"/>
           <p:cNvPicPr>
             <a:picLocks noChangeAspect="1"/>
           </p:cNvPicPr>
@@ -16066,7 +16336,7 @@
       </p:pic>
       <p:sp>
         <p:nvSpPr>
-          <p:cNvPr id="43" name="Rectangle 42"/>
+          <p:cNvPr id="45" name="Rectangle 44"/>
           <p:cNvSpPr/>
           <p:nvPr/>
         </p:nvSpPr>
@@ -16110,7 +16380,7 @@
       </p:sp>
       <p:sp>
         <p:nvSpPr>
-          <p:cNvPr id="44" name="TextBox 43"/>
+          <p:cNvPr id="46" name="TextBox 45"/>
           <p:cNvSpPr txBox="1"/>
           <p:nvPr/>
         </p:nvSpPr>
@@ -16155,7 +16425,7 @@
       </p:sp>
       <p:sp>
         <p:nvSpPr>
-          <p:cNvPr id="45" name="Rectangle 44"/>
+          <p:cNvPr id="47" name="Rectangle 46"/>
           <p:cNvSpPr/>
           <p:nvPr/>
         </p:nvSpPr>
@@ -16201,7 +16471,7 @@
       </p:sp>
       <p:sp>
         <p:nvSpPr>
-          <p:cNvPr id="46" name="Rectangle 45"/>
+          <p:cNvPr id="48" name="Rectangle 47"/>
           <p:cNvSpPr/>
           <p:nvPr/>
         </p:nvSpPr>
@@ -16245,7 +16515,7 @@
       </p:sp>
       <p:sp>
         <p:nvSpPr>
-          <p:cNvPr id="47" name="TextBox 46"/>
+          <p:cNvPr id="49" name="TextBox 48"/>
           <p:cNvSpPr txBox="1"/>
           <p:nvPr/>
         </p:nvSpPr>
@@ -16290,7 +16560,7 @@
       </p:sp>
       <p:sp>
         <p:nvSpPr>
-          <p:cNvPr id="48" name="TextBox 47"/>
+          <p:cNvPr id="50" name="TextBox 49"/>
           <p:cNvSpPr txBox="1"/>
           <p:nvPr/>
         </p:nvSpPr>
@@ -16335,7 +16605,7 @@
       </p:sp>
       <p:sp>
         <p:nvSpPr>
-          <p:cNvPr id="49" name="TextBox 48"/>
+          <p:cNvPr id="51" name="TextBox 50"/>
           <p:cNvSpPr txBox="1"/>
           <p:nvPr/>
         </p:nvSpPr>
@@ -16380,7 +16650,7 @@
       </p:sp>
       <p:sp>
         <p:nvSpPr>
-          <p:cNvPr id="50" name="TextBox 49"/>
+          <p:cNvPr id="52" name="TextBox 51"/>
           <p:cNvSpPr txBox="1"/>
           <p:nvPr/>
         </p:nvSpPr>
@@ -16425,7 +16695,7 @@
       </p:sp>
       <p:sp>
         <p:nvSpPr>
-          <p:cNvPr id="51" name="TextBox 50"/>
+          <p:cNvPr id="53" name="TextBox 52"/>
           <p:cNvSpPr txBox="1"/>
           <p:nvPr/>
         </p:nvSpPr>
@@ -16470,7 +16740,7 @@
       </p:sp>
       <p:sp>
         <p:nvSpPr>
-          <p:cNvPr id="52" name="Rectangle 51"/>
+          <p:cNvPr id="54" name="Rectangle 53"/>
           <p:cNvSpPr/>
           <p:nvPr/>
         </p:nvSpPr>
@@ -16516,7 +16786,7 @@
       </p:sp>
       <p:sp>
         <p:nvSpPr>
-          <p:cNvPr id="53" name="Rectangle 52"/>
+          <p:cNvPr id="55" name="Rectangle 54"/>
           <p:cNvSpPr/>
           <p:nvPr/>
         </p:nvSpPr>
@@ -16560,7 +16830,7 @@
       </p:sp>
       <p:sp>
         <p:nvSpPr>
-          <p:cNvPr id="54" name="TextBox 53"/>
+          <p:cNvPr id="56" name="TextBox 55"/>
           <p:cNvSpPr txBox="1"/>
           <p:nvPr/>
         </p:nvSpPr>
@@ -16605,7 +16875,7 @@
       </p:sp>
       <p:sp>
         <p:nvSpPr>
-          <p:cNvPr id="55" name="TextBox 54"/>
+          <p:cNvPr id="57" name="TextBox 56"/>
           <p:cNvSpPr txBox="1"/>
           <p:nvPr/>
         </p:nvSpPr>
@@ -16650,7 +16920,7 @@
       </p:sp>
       <p:sp>
         <p:nvSpPr>
-          <p:cNvPr id="56" name="TextBox 55"/>
+          <p:cNvPr id="58" name="TextBox 57"/>
           <p:cNvSpPr txBox="1"/>
           <p:nvPr/>
         </p:nvSpPr>
@@ -16695,7 +16965,7 @@
       </p:sp>
       <p:sp>
         <p:nvSpPr>
-          <p:cNvPr id="57" name="TextBox 56"/>
+          <p:cNvPr id="59" name="TextBox 58"/>
           <p:cNvSpPr txBox="1"/>
           <p:nvPr/>
         </p:nvSpPr>
@@ -16740,7 +17010,7 @@
       </p:sp>
       <p:sp>
         <p:nvSpPr>
-          <p:cNvPr id="58" name="TextBox 57"/>
+          <p:cNvPr id="60" name="TextBox 59"/>
           <p:cNvSpPr txBox="1"/>
           <p:nvPr/>
         </p:nvSpPr>
@@ -16785,7 +17055,7 @@
       </p:sp>
       <p:sp>
         <p:nvSpPr>
-          <p:cNvPr id="59" name="Rectangle 58"/>
+          <p:cNvPr id="61" name="Rectangle 60"/>
           <p:cNvSpPr/>
           <p:nvPr/>
         </p:nvSpPr>
@@ -16831,7 +17101,7 @@
       </p:sp>
       <p:sp>
         <p:nvSpPr>
-          <p:cNvPr id="60" name="Rectangle 59"/>
+          <p:cNvPr id="62" name="Rectangle 61"/>
           <p:cNvSpPr/>
           <p:nvPr/>
         </p:nvSpPr>
@@ -16875,7 +17145,7 @@
       </p:sp>
       <p:sp>
         <p:nvSpPr>
-          <p:cNvPr id="61" name="TextBox 60"/>
+          <p:cNvPr id="63" name="TextBox 62"/>
           <p:cNvSpPr txBox="1"/>
           <p:nvPr/>
         </p:nvSpPr>
@@ -16920,7 +17190,7 @@
       </p:sp>
       <p:sp>
         <p:nvSpPr>
-          <p:cNvPr id="62" name="TextBox 61"/>
+          <p:cNvPr id="64" name="TextBox 63"/>
           <p:cNvSpPr txBox="1"/>
           <p:nvPr/>
         </p:nvSpPr>
@@ -16965,7 +17235,7 @@
       </p:sp>
       <p:sp>
         <p:nvSpPr>
-          <p:cNvPr id="63" name="TextBox 62"/>
+          <p:cNvPr id="65" name="TextBox 64"/>
           <p:cNvSpPr txBox="1"/>
           <p:nvPr/>
         </p:nvSpPr>
@@ -17010,7 +17280,7 @@
       </p:sp>
       <p:sp>
         <p:nvSpPr>
-          <p:cNvPr id="64" name="TextBox 63"/>
+          <p:cNvPr id="66" name="TextBox 65"/>
           <p:cNvSpPr txBox="1"/>
           <p:nvPr/>
         </p:nvSpPr>
@@ -17055,7 +17325,7 @@
       </p:sp>
       <p:sp>
         <p:nvSpPr>
-          <p:cNvPr id="65" name="TextBox 64"/>
+          <p:cNvPr id="67" name="TextBox 66"/>
           <p:cNvSpPr txBox="1"/>
           <p:nvPr/>
         </p:nvSpPr>
@@ -17100,7 +17370,7 @@
       </p:sp>
       <p:sp>
         <p:nvSpPr>
-          <p:cNvPr id="66" name="Rectangle 65"/>
+          <p:cNvPr id="68" name="Rectangle 67"/>
           <p:cNvSpPr/>
           <p:nvPr/>
         </p:nvSpPr>
@@ -17144,7 +17414,7 @@
       </p:sp>
       <p:sp>
         <p:nvSpPr>
-          <p:cNvPr id="67" name="TextBox 66"/>
+          <p:cNvPr id="69" name="TextBox 68"/>
           <p:cNvSpPr txBox="1"/>
           <p:nvPr/>
         </p:nvSpPr>
@@ -17431,7 +17701,7 @@
                 </a:solidFill>
                 <a:latin typeface="맑은 고딕"/>
               </a:rPr>
-              <a:t>Step 4 — 단일 배정  (EQP001 → PPK001)</a:t>
+              <a:t>Step 4 — 블록 연속 (2/6 · 같은 셋업·장비 점유)  (EQP001 → PPK001)</a:t>
             </a:r>
           </a:p>
         </p:txBody>
@@ -18825,7 +19095,7 @@
                 </a:solidFill>
                 <a:latin typeface="맑은 고딕"/>
               </a:rPr>
-              <a:t>-</a:t>
+              <a:t>6</a:t>
             </a:r>
           </a:p>
         </p:txBody>
@@ -18870,7 +19140,7 @@
                 </a:solidFill>
                 <a:latin typeface="맑은 고딕"/>
               </a:rPr>
-              <a:t>배정 LOT</a:t>
+              <a:t>블록 진행</a:t>
             </a:r>
           </a:p>
         </p:txBody>
@@ -18915,7 +19185,7 @@
                 </a:solidFill>
                 <a:latin typeface="맑은 고딕"/>
               </a:rPr>
-              <a:t>LOT004</a:t>
+              <a:t>2/6  (잔여 4)</a:t>
             </a:r>
           </a:p>
         </p:txBody>
@@ -18960,7 +19230,7 @@
                 </a:solidFill>
                 <a:latin typeface="맑은 고딕"/>
               </a:rPr>
-              <a:t>유형</a:t>
+              <a:t>배정 LOT</a:t>
             </a:r>
           </a:p>
         </p:txBody>
@@ -19005,14 +19275,104 @@
                 </a:solidFill>
                 <a:latin typeface="맑은 고딕"/>
               </a:rPr>
-              <a:t>단일 배정</a:t>
+              <a:t>LOT004</a:t>
+            </a:r>
+          </a:p>
+        </p:txBody>
+      </p:sp>
+      <p:sp>
+        <p:nvSpPr>
+          <p:cNvPr id="42" name="TextBox 41"/>
+          <p:cNvSpPr txBox="1"/>
+          <p:nvPr/>
+        </p:nvSpPr>
+        <p:spPr>
+          <a:xfrm>
+            <a:off x="9162288" y="3895344"/>
+            <a:ext cx="1097280" cy="274320"/>
+          </a:xfrm>
+          <a:prstGeom prst="rect">
+            <a:avLst/>
+          </a:prstGeom>
+          <a:noFill/>
+        </p:spPr>
+        <p:txBody>
+          <a:bodyPr wrap="square" anchor="t" lIns="36576" rIns="36576" tIns="18288" bIns="18288">
+            <a:spAutoFit/>
+          </a:bodyPr>
+          <a:lstStyle/>
+          <a:p>
+            <a:pPr algn="l">
+              <a:lnSpc>
+                <a:spcPct val="100000"/>
+              </a:lnSpc>
+              <a:spcBef>
+                <a:spcPts val="0"/>
+              </a:spcBef>
+              <a:spcAft>
+                <a:spcPts val="400"/>
+              </a:spcAft>
+            </a:pPr>
+            <a:r>
+              <a:rPr sz="1000" b="0">
+                <a:solidFill>
+                  <a:srgbClr val="5C6670"/>
+                </a:solidFill>
+                <a:latin typeface="맑은 고딕"/>
+              </a:rPr>
+              <a:t>유형</a:t>
+            </a:r>
+          </a:p>
+        </p:txBody>
+      </p:sp>
+      <p:sp>
+        <p:nvSpPr>
+          <p:cNvPr id="43" name="TextBox 42"/>
+          <p:cNvSpPr txBox="1"/>
+          <p:nvPr/>
+        </p:nvSpPr>
+        <p:spPr>
+          <a:xfrm>
+            <a:off x="10195560" y="3895344"/>
+            <a:ext cx="1417320" cy="274320"/>
+          </a:xfrm>
+          <a:prstGeom prst="rect">
+            <a:avLst/>
+          </a:prstGeom>
+          <a:noFill/>
+        </p:spPr>
+        <p:txBody>
+          <a:bodyPr wrap="square" anchor="t" lIns="36576" rIns="36576" tIns="18288" bIns="18288">
+            <a:spAutoFit/>
+          </a:bodyPr>
+          <a:lstStyle/>
+          <a:p>
+            <a:pPr algn="r">
+              <a:lnSpc>
+                <a:spcPct val="100000"/>
+              </a:lnSpc>
+              <a:spcBef>
+                <a:spcPts val="0"/>
+              </a:spcBef>
+              <a:spcAft>
+                <a:spcPts val="400"/>
+              </a:spcAft>
+            </a:pPr>
+            <a:r>
+              <a:rPr sz="1000" b="1">
+                <a:solidFill>
+                  <a:srgbClr val="1B3255"/>
+                </a:solidFill>
+                <a:latin typeface="맑은 고딕"/>
+              </a:rPr>
+              <a:t>블록 연속 (2/6 · 같은 셋업·장비 점유)</a:t>
             </a:r>
           </a:p>
         </p:txBody>
       </p:sp>
       <p:pic>
         <p:nvPicPr>
-          <p:cNvPr id="42" name="Picture 41" descr="step_04.png"/>
+          <p:cNvPr id="44" name="Picture 43" descr="step_04.png"/>
           <p:cNvPicPr>
             <a:picLocks noChangeAspect="1"/>
           </p:cNvPicPr>
@@ -19036,7 +19396,7 @@
       </p:pic>
       <p:sp>
         <p:nvSpPr>
-          <p:cNvPr id="43" name="Rectangle 42"/>
+          <p:cNvPr id="45" name="Rectangle 44"/>
           <p:cNvSpPr/>
           <p:nvPr/>
         </p:nvSpPr>
@@ -19080,7 +19440,7 @@
       </p:sp>
       <p:sp>
         <p:nvSpPr>
-          <p:cNvPr id="44" name="TextBox 43"/>
+          <p:cNvPr id="46" name="TextBox 45"/>
           <p:cNvSpPr txBox="1"/>
           <p:nvPr/>
         </p:nvSpPr>
@@ -19125,7 +19485,7 @@
       </p:sp>
       <p:sp>
         <p:nvSpPr>
-          <p:cNvPr id="45" name="Rectangle 44"/>
+          <p:cNvPr id="47" name="Rectangle 46"/>
           <p:cNvSpPr/>
           <p:nvPr/>
         </p:nvSpPr>
@@ -19171,7 +19531,7 @@
       </p:sp>
       <p:sp>
         <p:nvSpPr>
-          <p:cNvPr id="46" name="Rectangle 45"/>
+          <p:cNvPr id="48" name="Rectangle 47"/>
           <p:cNvSpPr/>
           <p:nvPr/>
         </p:nvSpPr>
@@ -19215,7 +19575,7 @@
       </p:sp>
       <p:sp>
         <p:nvSpPr>
-          <p:cNvPr id="47" name="TextBox 46"/>
+          <p:cNvPr id="49" name="TextBox 48"/>
           <p:cNvSpPr txBox="1"/>
           <p:nvPr/>
         </p:nvSpPr>
@@ -19260,7 +19620,7 @@
       </p:sp>
       <p:sp>
         <p:nvSpPr>
-          <p:cNvPr id="48" name="TextBox 47"/>
+          <p:cNvPr id="50" name="TextBox 49"/>
           <p:cNvSpPr txBox="1"/>
           <p:nvPr/>
         </p:nvSpPr>
@@ -19305,7 +19665,7 @@
       </p:sp>
       <p:sp>
         <p:nvSpPr>
-          <p:cNvPr id="49" name="TextBox 48"/>
+          <p:cNvPr id="51" name="TextBox 50"/>
           <p:cNvSpPr txBox="1"/>
           <p:nvPr/>
         </p:nvSpPr>
@@ -19350,7 +19710,7 @@
       </p:sp>
       <p:sp>
         <p:nvSpPr>
-          <p:cNvPr id="50" name="TextBox 49"/>
+          <p:cNvPr id="52" name="TextBox 51"/>
           <p:cNvSpPr txBox="1"/>
           <p:nvPr/>
         </p:nvSpPr>
@@ -19395,7 +19755,7 @@
       </p:sp>
       <p:sp>
         <p:nvSpPr>
-          <p:cNvPr id="51" name="TextBox 50"/>
+          <p:cNvPr id="53" name="TextBox 52"/>
           <p:cNvSpPr txBox="1"/>
           <p:nvPr/>
         </p:nvSpPr>
@@ -19440,7 +19800,7 @@
       </p:sp>
       <p:sp>
         <p:nvSpPr>
-          <p:cNvPr id="52" name="Rectangle 51"/>
+          <p:cNvPr id="54" name="Rectangle 53"/>
           <p:cNvSpPr/>
           <p:nvPr/>
         </p:nvSpPr>
@@ -19486,7 +19846,7 @@
       </p:sp>
       <p:sp>
         <p:nvSpPr>
-          <p:cNvPr id="53" name="Rectangle 52"/>
+          <p:cNvPr id="55" name="Rectangle 54"/>
           <p:cNvSpPr/>
           <p:nvPr/>
         </p:nvSpPr>
@@ -19530,7 +19890,7 @@
       </p:sp>
       <p:sp>
         <p:nvSpPr>
-          <p:cNvPr id="54" name="TextBox 53"/>
+          <p:cNvPr id="56" name="TextBox 55"/>
           <p:cNvSpPr txBox="1"/>
           <p:nvPr/>
         </p:nvSpPr>
@@ -19575,7 +19935,7 @@
       </p:sp>
       <p:sp>
         <p:nvSpPr>
-          <p:cNvPr id="55" name="TextBox 54"/>
+          <p:cNvPr id="57" name="TextBox 56"/>
           <p:cNvSpPr txBox="1"/>
           <p:nvPr/>
         </p:nvSpPr>
@@ -19620,7 +19980,7 @@
       </p:sp>
       <p:sp>
         <p:nvSpPr>
-          <p:cNvPr id="56" name="TextBox 55"/>
+          <p:cNvPr id="58" name="TextBox 57"/>
           <p:cNvSpPr txBox="1"/>
           <p:nvPr/>
         </p:nvSpPr>
@@ -19665,7 +20025,7 @@
       </p:sp>
       <p:sp>
         <p:nvSpPr>
-          <p:cNvPr id="57" name="TextBox 56"/>
+          <p:cNvPr id="59" name="TextBox 58"/>
           <p:cNvSpPr txBox="1"/>
           <p:nvPr/>
         </p:nvSpPr>
@@ -19710,7 +20070,7 @@
       </p:sp>
       <p:sp>
         <p:nvSpPr>
-          <p:cNvPr id="58" name="TextBox 57"/>
+          <p:cNvPr id="60" name="TextBox 59"/>
           <p:cNvSpPr txBox="1"/>
           <p:nvPr/>
         </p:nvSpPr>
@@ -19755,7 +20115,7 @@
       </p:sp>
       <p:sp>
         <p:nvSpPr>
-          <p:cNvPr id="59" name="Rectangle 58"/>
+          <p:cNvPr id="61" name="Rectangle 60"/>
           <p:cNvSpPr/>
           <p:nvPr/>
         </p:nvSpPr>
@@ -19801,7 +20161,7 @@
       </p:sp>
       <p:sp>
         <p:nvSpPr>
-          <p:cNvPr id="60" name="Rectangle 59"/>
+          <p:cNvPr id="62" name="Rectangle 61"/>
           <p:cNvSpPr/>
           <p:nvPr/>
         </p:nvSpPr>
@@ -19845,7 +20205,7 @@
       </p:sp>
       <p:sp>
         <p:nvSpPr>
-          <p:cNvPr id="61" name="TextBox 60"/>
+          <p:cNvPr id="63" name="TextBox 62"/>
           <p:cNvSpPr txBox="1"/>
           <p:nvPr/>
         </p:nvSpPr>
@@ -19890,7 +20250,7 @@
       </p:sp>
       <p:sp>
         <p:nvSpPr>
-          <p:cNvPr id="62" name="TextBox 61"/>
+          <p:cNvPr id="64" name="TextBox 63"/>
           <p:cNvSpPr txBox="1"/>
           <p:nvPr/>
         </p:nvSpPr>
@@ -19935,7 +20295,7 @@
       </p:sp>
       <p:sp>
         <p:nvSpPr>
-          <p:cNvPr id="63" name="TextBox 62"/>
+          <p:cNvPr id="65" name="TextBox 64"/>
           <p:cNvSpPr txBox="1"/>
           <p:nvPr/>
         </p:nvSpPr>
@@ -19980,7 +20340,7 @@
       </p:sp>
       <p:sp>
         <p:nvSpPr>
-          <p:cNvPr id="64" name="TextBox 63"/>
+          <p:cNvPr id="66" name="TextBox 65"/>
           <p:cNvSpPr txBox="1"/>
           <p:nvPr/>
         </p:nvSpPr>
@@ -20025,7 +20385,7 @@
       </p:sp>
       <p:sp>
         <p:nvSpPr>
-          <p:cNvPr id="65" name="TextBox 64"/>
+          <p:cNvPr id="67" name="TextBox 66"/>
           <p:cNvSpPr txBox="1"/>
           <p:nvPr/>
         </p:nvSpPr>
@@ -20070,7 +20430,7 @@
       </p:sp>
       <p:sp>
         <p:nvSpPr>
-          <p:cNvPr id="66" name="Rectangle 65"/>
+          <p:cNvPr id="68" name="Rectangle 67"/>
           <p:cNvSpPr/>
           <p:nvPr/>
         </p:nvSpPr>
@@ -20114,7 +20474,7 @@
       </p:sp>
       <p:sp>
         <p:nvSpPr>
-          <p:cNvPr id="67" name="TextBox 66"/>
+          <p:cNvPr id="69" name="TextBox 68"/>
           <p:cNvSpPr txBox="1"/>
           <p:nvPr/>
         </p:nvSpPr>
@@ -20401,7 +20761,7 @@
                 </a:solidFill>
                 <a:latin typeface="맑은 고딕"/>
               </a:rPr>
-              <a:t>Step 6 — 단일 배정  (EQP003 → PPK003)</a:t>
+              <a:t>Step 6 — 블록 연속 (2/6 · 같은 셋업·장비 점유)  (EQP003 → PPK003)</a:t>
             </a:r>
           </a:p>
         </p:txBody>
@@ -21795,7 +22155,7 @@
                 </a:solidFill>
                 <a:latin typeface="맑은 고딕"/>
               </a:rPr>
-              <a:t>-</a:t>
+              <a:t>6</a:t>
             </a:r>
           </a:p>
         </p:txBody>
@@ -21840,7 +22200,7 @@
                 </a:solidFill>
                 <a:latin typeface="맑은 고딕"/>
               </a:rPr>
-              <a:t>배정 LOT</a:t>
+              <a:t>블록 진행</a:t>
             </a:r>
           </a:p>
         </p:txBody>
@@ -21885,7 +22245,7 @@
                 </a:solidFill>
                 <a:latin typeface="맑은 고딕"/>
               </a:rPr>
-              <a:t>LOT018</a:t>
+              <a:t>2/6  (잔여 4)</a:t>
             </a:r>
           </a:p>
         </p:txBody>
@@ -21930,7 +22290,7 @@
                 </a:solidFill>
                 <a:latin typeface="맑은 고딕"/>
               </a:rPr>
-              <a:t>유형</a:t>
+              <a:t>배정 LOT</a:t>
             </a:r>
           </a:p>
         </p:txBody>
@@ -21975,14 +22335,104 @@
                 </a:solidFill>
                 <a:latin typeface="맑은 고딕"/>
               </a:rPr>
-              <a:t>단일 배정</a:t>
+              <a:t>LOT018</a:t>
+            </a:r>
+          </a:p>
+        </p:txBody>
+      </p:sp>
+      <p:sp>
+        <p:nvSpPr>
+          <p:cNvPr id="42" name="TextBox 41"/>
+          <p:cNvSpPr txBox="1"/>
+          <p:nvPr/>
+        </p:nvSpPr>
+        <p:spPr>
+          <a:xfrm>
+            <a:off x="9162288" y="3895344"/>
+            <a:ext cx="1097280" cy="274320"/>
+          </a:xfrm>
+          <a:prstGeom prst="rect">
+            <a:avLst/>
+          </a:prstGeom>
+          <a:noFill/>
+        </p:spPr>
+        <p:txBody>
+          <a:bodyPr wrap="square" anchor="t" lIns="36576" rIns="36576" tIns="18288" bIns="18288">
+            <a:spAutoFit/>
+          </a:bodyPr>
+          <a:lstStyle/>
+          <a:p>
+            <a:pPr algn="l">
+              <a:lnSpc>
+                <a:spcPct val="100000"/>
+              </a:lnSpc>
+              <a:spcBef>
+                <a:spcPts val="0"/>
+              </a:spcBef>
+              <a:spcAft>
+                <a:spcPts val="400"/>
+              </a:spcAft>
+            </a:pPr>
+            <a:r>
+              <a:rPr sz="1000" b="0">
+                <a:solidFill>
+                  <a:srgbClr val="5C6670"/>
+                </a:solidFill>
+                <a:latin typeface="맑은 고딕"/>
+              </a:rPr>
+              <a:t>유형</a:t>
+            </a:r>
+          </a:p>
+        </p:txBody>
+      </p:sp>
+      <p:sp>
+        <p:nvSpPr>
+          <p:cNvPr id="43" name="TextBox 42"/>
+          <p:cNvSpPr txBox="1"/>
+          <p:nvPr/>
+        </p:nvSpPr>
+        <p:spPr>
+          <a:xfrm>
+            <a:off x="10195560" y="3895344"/>
+            <a:ext cx="1417320" cy="274320"/>
+          </a:xfrm>
+          <a:prstGeom prst="rect">
+            <a:avLst/>
+          </a:prstGeom>
+          <a:noFill/>
+        </p:spPr>
+        <p:txBody>
+          <a:bodyPr wrap="square" anchor="t" lIns="36576" rIns="36576" tIns="18288" bIns="18288">
+            <a:spAutoFit/>
+          </a:bodyPr>
+          <a:lstStyle/>
+          <a:p>
+            <a:pPr algn="r">
+              <a:lnSpc>
+                <a:spcPct val="100000"/>
+              </a:lnSpc>
+              <a:spcBef>
+                <a:spcPts val="0"/>
+              </a:spcBef>
+              <a:spcAft>
+                <a:spcPts val="400"/>
+              </a:spcAft>
+            </a:pPr>
+            <a:r>
+              <a:rPr sz="1000" b="1">
+                <a:solidFill>
+                  <a:srgbClr val="1B3255"/>
+                </a:solidFill>
+                <a:latin typeface="맑은 고딕"/>
+              </a:rPr>
+              <a:t>블록 연속 (2/6 · 같은 셋업·장비 점유)</a:t>
             </a:r>
           </a:p>
         </p:txBody>
       </p:sp>
       <p:pic>
         <p:nvPicPr>
-          <p:cNvPr id="42" name="Picture 41" descr="step_06.png"/>
+          <p:cNvPr id="44" name="Picture 43" descr="step_06.png"/>
           <p:cNvPicPr>
             <a:picLocks noChangeAspect="1"/>
           </p:cNvPicPr>
@@ -22006,7 +22456,7 @@
       </p:pic>
       <p:sp>
         <p:nvSpPr>
-          <p:cNvPr id="43" name="Rectangle 42"/>
+          <p:cNvPr id="45" name="Rectangle 44"/>
           <p:cNvSpPr/>
           <p:nvPr/>
         </p:nvSpPr>
@@ -22050,7 +22500,7 @@
       </p:sp>
       <p:sp>
         <p:nvSpPr>
-          <p:cNvPr id="44" name="TextBox 43"/>
+          <p:cNvPr id="46" name="TextBox 45"/>
           <p:cNvSpPr txBox="1"/>
           <p:nvPr/>
         </p:nvSpPr>
@@ -22095,7 +22545,7 @@
       </p:sp>
       <p:sp>
         <p:nvSpPr>
-          <p:cNvPr id="45" name="Rectangle 44"/>
+          <p:cNvPr id="47" name="Rectangle 46"/>
           <p:cNvSpPr/>
           <p:nvPr/>
         </p:nvSpPr>
@@ -22141,7 +22591,7 @@
       </p:sp>
       <p:sp>
         <p:nvSpPr>
-          <p:cNvPr id="46" name="Rectangle 45"/>
+          <p:cNvPr id="48" name="Rectangle 47"/>
           <p:cNvSpPr/>
           <p:nvPr/>
         </p:nvSpPr>
@@ -22185,7 +22635,7 @@
       </p:sp>
       <p:sp>
         <p:nvSpPr>
-          <p:cNvPr id="47" name="TextBox 46"/>
+          <p:cNvPr id="49" name="TextBox 48"/>
           <p:cNvSpPr txBox="1"/>
           <p:nvPr/>
         </p:nvSpPr>
@@ -22230,7 +22680,7 @@
       </p:sp>
       <p:sp>
         <p:nvSpPr>
-          <p:cNvPr id="48" name="TextBox 47"/>
+          <p:cNvPr id="50" name="TextBox 49"/>
           <p:cNvSpPr txBox="1"/>
           <p:nvPr/>
         </p:nvSpPr>
@@ -22275,7 +22725,7 @@
       </p:sp>
       <p:sp>
         <p:nvSpPr>
-          <p:cNvPr id="49" name="TextBox 48"/>
+          <p:cNvPr id="51" name="TextBox 50"/>
           <p:cNvSpPr txBox="1"/>
           <p:nvPr/>
         </p:nvSpPr>
@@ -22320,7 +22770,7 @@
       </p:sp>
       <p:sp>
         <p:nvSpPr>
-          <p:cNvPr id="50" name="TextBox 49"/>
+          <p:cNvPr id="52" name="TextBox 51"/>
           <p:cNvSpPr txBox="1"/>
           <p:nvPr/>
         </p:nvSpPr>
@@ -22365,7 +22815,7 @@
       </p:sp>
       <p:sp>
         <p:nvSpPr>
-          <p:cNvPr id="51" name="TextBox 50"/>
+          <p:cNvPr id="53" name="TextBox 52"/>
           <p:cNvSpPr txBox="1"/>
           <p:nvPr/>
         </p:nvSpPr>
@@ -22410,7 +22860,7 @@
       </p:sp>
       <p:sp>
         <p:nvSpPr>
-          <p:cNvPr id="52" name="Rectangle 51"/>
+          <p:cNvPr id="54" name="Rectangle 53"/>
           <p:cNvSpPr/>
           <p:nvPr/>
         </p:nvSpPr>
@@ -22456,7 +22906,7 @@
       </p:sp>
       <p:sp>
         <p:nvSpPr>
-          <p:cNvPr id="53" name="Rectangle 52"/>
+          <p:cNvPr id="55" name="Rectangle 54"/>
           <p:cNvSpPr/>
           <p:nvPr/>
         </p:nvSpPr>
@@ -22500,7 +22950,7 @@
       </p:sp>
       <p:sp>
         <p:nvSpPr>
-          <p:cNvPr id="54" name="TextBox 53"/>
+          <p:cNvPr id="56" name="TextBox 55"/>
           <p:cNvSpPr txBox="1"/>
           <p:nvPr/>
         </p:nvSpPr>
@@ -22545,7 +22995,7 @@
       </p:sp>
       <p:sp>
         <p:nvSpPr>
-          <p:cNvPr id="55" name="TextBox 54"/>
+          <p:cNvPr id="57" name="TextBox 56"/>
           <p:cNvSpPr txBox="1"/>
           <p:nvPr/>
         </p:nvSpPr>
@@ -22590,7 +23040,7 @@
       </p:sp>
       <p:sp>
         <p:nvSpPr>
-          <p:cNvPr id="56" name="TextBox 55"/>
+          <p:cNvPr id="58" name="TextBox 57"/>
           <p:cNvSpPr txBox="1"/>
           <p:nvPr/>
         </p:nvSpPr>
@@ -22635,7 +23085,7 @@
       </p:sp>
       <p:sp>
         <p:nvSpPr>
-          <p:cNvPr id="57" name="TextBox 56"/>
+          <p:cNvPr id="59" name="TextBox 58"/>
           <p:cNvSpPr txBox="1"/>
           <p:nvPr/>
         </p:nvSpPr>
@@ -22680,7 +23130,7 @@
       </p:sp>
       <p:sp>
         <p:nvSpPr>
-          <p:cNvPr id="58" name="TextBox 57"/>
+          <p:cNvPr id="60" name="TextBox 59"/>
           <p:cNvSpPr txBox="1"/>
           <p:nvPr/>
         </p:nvSpPr>
@@ -22725,7 +23175,7 @@
       </p:sp>
       <p:sp>
         <p:nvSpPr>
-          <p:cNvPr id="59" name="Rectangle 58"/>
+          <p:cNvPr id="61" name="Rectangle 60"/>
           <p:cNvSpPr/>
           <p:nvPr/>
         </p:nvSpPr>
@@ -22771,7 +23221,7 @@
       </p:sp>
       <p:sp>
         <p:nvSpPr>
-          <p:cNvPr id="60" name="Rectangle 59"/>
+          <p:cNvPr id="62" name="Rectangle 61"/>
           <p:cNvSpPr/>
           <p:nvPr/>
         </p:nvSpPr>
@@ -22815,7 +23265,7 @@
       </p:sp>
       <p:sp>
         <p:nvSpPr>
-          <p:cNvPr id="61" name="TextBox 60"/>
+          <p:cNvPr id="63" name="TextBox 62"/>
           <p:cNvSpPr txBox="1"/>
           <p:nvPr/>
         </p:nvSpPr>
@@ -22860,7 +23310,7 @@
       </p:sp>
       <p:sp>
         <p:nvSpPr>
-          <p:cNvPr id="62" name="TextBox 61"/>
+          <p:cNvPr id="64" name="TextBox 63"/>
           <p:cNvSpPr txBox="1"/>
           <p:nvPr/>
         </p:nvSpPr>
@@ -22905,7 +23355,7 @@
       </p:sp>
       <p:sp>
         <p:nvSpPr>
-          <p:cNvPr id="63" name="TextBox 62"/>
+          <p:cNvPr id="65" name="TextBox 64"/>
           <p:cNvSpPr txBox="1"/>
           <p:nvPr/>
         </p:nvSpPr>
@@ -22950,7 +23400,7 @@
       </p:sp>
       <p:sp>
         <p:nvSpPr>
-          <p:cNvPr id="64" name="TextBox 63"/>
+          <p:cNvPr id="66" name="TextBox 65"/>
           <p:cNvSpPr txBox="1"/>
           <p:nvPr/>
         </p:nvSpPr>
@@ -22995,7 +23445,7 @@
       </p:sp>
       <p:sp>
         <p:nvSpPr>
-          <p:cNvPr id="65" name="TextBox 64"/>
+          <p:cNvPr id="67" name="TextBox 66"/>
           <p:cNvSpPr txBox="1"/>
           <p:nvPr/>
         </p:nvSpPr>
@@ -23040,7 +23490,7 @@
       </p:sp>
       <p:sp>
         <p:nvSpPr>
-          <p:cNvPr id="66" name="Rectangle 65"/>
+          <p:cNvPr id="68" name="Rectangle 67"/>
           <p:cNvSpPr/>
           <p:nvPr/>
         </p:nvSpPr>
@@ -23084,7 +23534,7 @@
       </p:sp>
       <p:sp>
         <p:nvSpPr>
-          <p:cNvPr id="67" name="TextBox 66"/>
+          <p:cNvPr id="69" name="TextBox 68"/>
           <p:cNvSpPr txBox="1"/>
           <p:nvPr/>
         </p:nvSpPr>
@@ -23371,7 +23821,7 @@
                 </a:solidFill>
                 <a:latin typeface="맑은 고딕"/>
               </a:rPr>
-              <a:t>Step 8 — 단일 배정  (EQP002 → PPK002)</a:t>
+              <a:t>Step 8 — 블록 연속 (3/6 · 같은 셋업·장비 점유)  (EQP002 → PPK002)</a:t>
             </a:r>
           </a:p>
         </p:txBody>
@@ -24765,7 +25215,7 @@
                 </a:solidFill>
                 <a:latin typeface="맑은 고딕"/>
               </a:rPr>
-              <a:t>-</a:t>
+              <a:t>6</a:t>
             </a:r>
           </a:p>
         </p:txBody>
@@ -24810,7 +25260,7 @@
                 </a:solidFill>
                 <a:latin typeface="맑은 고딕"/>
               </a:rPr>
-              <a:t>배정 LOT</a:t>
+              <a:t>블록 진행</a:t>
             </a:r>
           </a:p>
         </p:txBody>
@@ -24855,7 +25305,7 @@
                 </a:solidFill>
                 <a:latin typeface="맑은 고딕"/>
               </a:rPr>
-              <a:t>LOT015</a:t>
+              <a:t>3/6  (잔여 3)</a:t>
             </a:r>
           </a:p>
         </p:txBody>
@@ -24900,7 +25350,7 @@
                 </a:solidFill>
                 <a:latin typeface="맑은 고딕"/>
               </a:rPr>
-              <a:t>유형</a:t>
+              <a:t>배정 LOT</a:t>
             </a:r>
           </a:p>
         </p:txBody>
@@ -24945,14 +25395,104 @@
                 </a:solidFill>
                 <a:latin typeface="맑은 고딕"/>
               </a:rPr>
-              <a:t>단일 배정</a:t>
+              <a:t>LOT015</a:t>
+            </a:r>
+          </a:p>
+        </p:txBody>
+      </p:sp>
+      <p:sp>
+        <p:nvSpPr>
+          <p:cNvPr id="42" name="TextBox 41"/>
+          <p:cNvSpPr txBox="1"/>
+          <p:nvPr/>
+        </p:nvSpPr>
+        <p:spPr>
+          <a:xfrm>
+            <a:off x="9162288" y="3895344"/>
+            <a:ext cx="1097280" cy="274320"/>
+          </a:xfrm>
+          <a:prstGeom prst="rect">
+            <a:avLst/>
+          </a:prstGeom>
+          <a:noFill/>
+        </p:spPr>
+        <p:txBody>
+          <a:bodyPr wrap="square" anchor="t" lIns="36576" rIns="36576" tIns="18288" bIns="18288">
+            <a:spAutoFit/>
+          </a:bodyPr>
+          <a:lstStyle/>
+          <a:p>
+            <a:pPr algn="l">
+              <a:lnSpc>
+                <a:spcPct val="100000"/>
+              </a:lnSpc>
+              <a:spcBef>
+                <a:spcPts val="0"/>
+              </a:spcBef>
+              <a:spcAft>
+                <a:spcPts val="400"/>
+              </a:spcAft>
+            </a:pPr>
+            <a:r>
+              <a:rPr sz="1000" b="0">
+                <a:solidFill>
+                  <a:srgbClr val="5C6670"/>
+                </a:solidFill>
+                <a:latin typeface="맑은 고딕"/>
+              </a:rPr>
+              <a:t>유형</a:t>
+            </a:r>
+          </a:p>
+        </p:txBody>
+      </p:sp>
+      <p:sp>
+        <p:nvSpPr>
+          <p:cNvPr id="43" name="TextBox 42"/>
+          <p:cNvSpPr txBox="1"/>
+          <p:nvPr/>
+        </p:nvSpPr>
+        <p:spPr>
+          <a:xfrm>
+            <a:off x="10195560" y="3895344"/>
+            <a:ext cx="1417320" cy="274320"/>
+          </a:xfrm>
+          <a:prstGeom prst="rect">
+            <a:avLst/>
+          </a:prstGeom>
+          <a:noFill/>
+        </p:spPr>
+        <p:txBody>
+          <a:bodyPr wrap="square" anchor="t" lIns="36576" rIns="36576" tIns="18288" bIns="18288">
+            <a:spAutoFit/>
+          </a:bodyPr>
+          <a:lstStyle/>
+          <a:p>
+            <a:pPr algn="r">
+              <a:lnSpc>
+                <a:spcPct val="100000"/>
+              </a:lnSpc>
+              <a:spcBef>
+                <a:spcPts val="0"/>
+              </a:spcBef>
+              <a:spcAft>
+                <a:spcPts val="400"/>
+              </a:spcAft>
+            </a:pPr>
+            <a:r>
+              <a:rPr sz="1000" b="1">
+                <a:solidFill>
+                  <a:srgbClr val="1B3255"/>
+                </a:solidFill>
+                <a:latin typeface="맑은 고딕"/>
+              </a:rPr>
+              <a:t>블록 연속 (3/6 · 같은 셋업·장비 점유)</a:t>
             </a:r>
           </a:p>
         </p:txBody>
       </p:sp>
       <p:pic>
         <p:nvPicPr>
-          <p:cNvPr id="42" name="Picture 41" descr="step_08.png"/>
+          <p:cNvPr id="44" name="Picture 43" descr="step_08.png"/>
           <p:cNvPicPr>
             <a:picLocks noChangeAspect="1"/>
           </p:cNvPicPr>
@@ -24976,7 +25516,7 @@
       </p:pic>
       <p:sp>
         <p:nvSpPr>
-          <p:cNvPr id="43" name="Rectangle 42"/>
+          <p:cNvPr id="45" name="Rectangle 44"/>
           <p:cNvSpPr/>
           <p:nvPr/>
         </p:nvSpPr>
@@ -25020,7 +25560,7 @@
       </p:sp>
       <p:sp>
         <p:nvSpPr>
-          <p:cNvPr id="44" name="TextBox 43"/>
+          <p:cNvPr id="46" name="TextBox 45"/>
           <p:cNvSpPr txBox="1"/>
           <p:nvPr/>
         </p:nvSpPr>
@@ -25065,7 +25605,7 @@
       </p:sp>
       <p:sp>
         <p:nvSpPr>
-          <p:cNvPr id="45" name="Rectangle 44"/>
+          <p:cNvPr id="47" name="Rectangle 46"/>
           <p:cNvSpPr/>
           <p:nvPr/>
         </p:nvSpPr>
@@ -25111,7 +25651,7 @@
       </p:sp>
       <p:sp>
         <p:nvSpPr>
-          <p:cNvPr id="46" name="Rectangle 45"/>
+          <p:cNvPr id="48" name="Rectangle 47"/>
           <p:cNvSpPr/>
           <p:nvPr/>
         </p:nvSpPr>
@@ -25155,7 +25695,7 @@
       </p:sp>
       <p:sp>
         <p:nvSpPr>
-          <p:cNvPr id="47" name="TextBox 46"/>
+          <p:cNvPr id="49" name="TextBox 48"/>
           <p:cNvSpPr txBox="1"/>
           <p:nvPr/>
         </p:nvSpPr>
@@ -25200,7 +25740,7 @@
       </p:sp>
       <p:sp>
         <p:nvSpPr>
-          <p:cNvPr id="48" name="TextBox 47"/>
+          <p:cNvPr id="50" name="TextBox 49"/>
           <p:cNvSpPr txBox="1"/>
           <p:nvPr/>
         </p:nvSpPr>
@@ -25245,7 +25785,7 @@
       </p:sp>
       <p:sp>
         <p:nvSpPr>
-          <p:cNvPr id="49" name="TextBox 48"/>
+          <p:cNvPr id="51" name="TextBox 50"/>
           <p:cNvSpPr txBox="1"/>
           <p:nvPr/>
         </p:nvSpPr>
@@ -25290,7 +25830,7 @@
       </p:sp>
       <p:sp>
         <p:nvSpPr>
-          <p:cNvPr id="50" name="TextBox 49"/>
+          <p:cNvPr id="52" name="TextBox 51"/>
           <p:cNvSpPr txBox="1"/>
           <p:nvPr/>
         </p:nvSpPr>
@@ -25335,7 +25875,7 @@
       </p:sp>
       <p:sp>
         <p:nvSpPr>
-          <p:cNvPr id="51" name="TextBox 50"/>
+          <p:cNvPr id="53" name="TextBox 52"/>
           <p:cNvSpPr txBox="1"/>
           <p:nvPr/>
         </p:nvSpPr>
@@ -25380,7 +25920,7 @@
       </p:sp>
       <p:sp>
         <p:nvSpPr>
-          <p:cNvPr id="52" name="Rectangle 51"/>
+          <p:cNvPr id="54" name="Rectangle 53"/>
           <p:cNvSpPr/>
           <p:nvPr/>
         </p:nvSpPr>
@@ -25426,7 +25966,7 @@
       </p:sp>
       <p:sp>
         <p:nvSpPr>
-          <p:cNvPr id="53" name="Rectangle 52"/>
+          <p:cNvPr id="55" name="Rectangle 54"/>
           <p:cNvSpPr/>
           <p:nvPr/>
         </p:nvSpPr>
@@ -25470,7 +26010,7 @@
       </p:sp>
       <p:sp>
         <p:nvSpPr>
-          <p:cNvPr id="54" name="TextBox 53"/>
+          <p:cNvPr id="56" name="TextBox 55"/>
           <p:cNvSpPr txBox="1"/>
           <p:nvPr/>
         </p:nvSpPr>
@@ -25515,7 +26055,7 @@
       </p:sp>
       <p:sp>
         <p:nvSpPr>
-          <p:cNvPr id="55" name="TextBox 54"/>
+          <p:cNvPr id="57" name="TextBox 56"/>
           <p:cNvSpPr txBox="1"/>
           <p:nvPr/>
         </p:nvSpPr>
@@ -25560,7 +26100,7 @@
       </p:sp>
       <p:sp>
         <p:nvSpPr>
-          <p:cNvPr id="56" name="TextBox 55"/>
+          <p:cNvPr id="58" name="TextBox 57"/>
           <p:cNvSpPr txBox="1"/>
           <p:nvPr/>
         </p:nvSpPr>
@@ -25605,7 +26145,7 @@
       </p:sp>
       <p:sp>
         <p:nvSpPr>
-          <p:cNvPr id="57" name="TextBox 56"/>
+          <p:cNvPr id="59" name="TextBox 58"/>
           <p:cNvSpPr txBox="1"/>
           <p:nvPr/>
         </p:nvSpPr>
@@ -25650,7 +26190,7 @@
       </p:sp>
       <p:sp>
         <p:nvSpPr>
-          <p:cNvPr id="58" name="TextBox 57"/>
+          <p:cNvPr id="60" name="TextBox 59"/>
           <p:cNvSpPr txBox="1"/>
           <p:nvPr/>
         </p:nvSpPr>
@@ -25695,7 +26235,7 @@
       </p:sp>
       <p:sp>
         <p:nvSpPr>
-          <p:cNvPr id="59" name="Rectangle 58"/>
+          <p:cNvPr id="61" name="Rectangle 60"/>
           <p:cNvSpPr/>
           <p:nvPr/>
         </p:nvSpPr>
@@ -25741,7 +26281,7 @@
       </p:sp>
       <p:sp>
         <p:nvSpPr>
-          <p:cNvPr id="60" name="Rectangle 59"/>
+          <p:cNvPr id="62" name="Rectangle 61"/>
           <p:cNvSpPr/>
           <p:nvPr/>
         </p:nvSpPr>
@@ -25785,7 +26325,7 @@
       </p:sp>
       <p:sp>
         <p:nvSpPr>
-          <p:cNvPr id="61" name="TextBox 60"/>
+          <p:cNvPr id="63" name="TextBox 62"/>
           <p:cNvSpPr txBox="1"/>
           <p:nvPr/>
         </p:nvSpPr>
@@ -25830,7 +26370,7 @@
       </p:sp>
       <p:sp>
         <p:nvSpPr>
-          <p:cNvPr id="62" name="TextBox 61"/>
+          <p:cNvPr id="64" name="TextBox 63"/>
           <p:cNvSpPr txBox="1"/>
           <p:nvPr/>
         </p:nvSpPr>
@@ -25875,7 +26415,7 @@
       </p:sp>
       <p:sp>
         <p:nvSpPr>
-          <p:cNvPr id="63" name="TextBox 62"/>
+          <p:cNvPr id="65" name="TextBox 64"/>
           <p:cNvSpPr txBox="1"/>
           <p:nvPr/>
         </p:nvSpPr>
@@ -25920,7 +26460,7 @@
       </p:sp>
       <p:sp>
         <p:nvSpPr>
-          <p:cNvPr id="64" name="TextBox 63"/>
+          <p:cNvPr id="66" name="TextBox 65"/>
           <p:cNvSpPr txBox="1"/>
           <p:nvPr/>
         </p:nvSpPr>
@@ -25965,7 +26505,7 @@
       </p:sp>
       <p:sp>
         <p:nvSpPr>
-          <p:cNvPr id="65" name="TextBox 64"/>
+          <p:cNvPr id="67" name="TextBox 66"/>
           <p:cNvSpPr txBox="1"/>
           <p:nvPr/>
         </p:nvSpPr>
@@ -26010,7 +26550,7 @@
       </p:sp>
       <p:sp>
         <p:nvSpPr>
-          <p:cNvPr id="66" name="Rectangle 65"/>
+          <p:cNvPr id="68" name="Rectangle 67"/>
           <p:cNvSpPr/>
           <p:nvPr/>
         </p:nvSpPr>
@@ -26054,7 +26594,7 @@
       </p:sp>
       <p:sp>
         <p:nvSpPr>
-          <p:cNvPr id="67" name="TextBox 66"/>
+          <p:cNvPr id="69" name="TextBox 68"/>
           <p:cNvSpPr txBox="1"/>
           <p:nvPr/>
         </p:nvSpPr>

--- a/docs/BulkFill_스케줄링_발표자료.pptx
+++ b/docs/BulkFill_스케줄링_발표자료.pptx
@@ -8521,7 +8521,7 @@
                 </a:solidFill>
                 <a:latin typeface="맑은 고딕"/>
               </a:rPr>
-              <a:t>Step 1 — 블록 시작 (N=6 캐리어 커밋)  (EQP001 → PPK001)</a:t>
+              <a:t>Step 1 — 블록 시작 (N=6 캐리어 연속 커밋)  (EQP001 → PPK001)</a:t>
             </a:r>
           </a:p>
         </p:txBody>
@@ -9960,7 +9960,7 @@
                 </a:solidFill>
                 <a:latin typeface="맑은 고딕"/>
               </a:rPr>
-              <a:t>블록 진행</a:t>
+              <a:t>블록 커밋</a:t>
             </a:r>
           </a:p>
         </p:txBody>
@@ -10005,7 +10005,7 @@
                 </a:solidFill>
                 <a:latin typeface="맑은 고딕"/>
               </a:rPr>
-              <a:t>1/6 시작</a:t>
+              <a:t>6캐리어 한번에 연속 점유</a:t>
             </a:r>
           </a:p>
         </p:txBody>
@@ -10185,7 +10185,7 @@
                 </a:solidFill>
                 <a:latin typeface="맑은 고딕"/>
               </a:rPr>
-              <a:t>블록 시작 (N=6 캐리어 커밋)</a:t>
+              <a:t>블록 시작 (N=6 캐리어 연속 커밋)</a:t>
             </a:r>
           </a:p>
         </p:txBody>
@@ -11581,7 +11581,7 @@
                 </a:solidFill>
                 <a:latin typeface="맑은 고딕"/>
               </a:rPr>
-              <a:t>Step 2 — 블록 시작 (N=6 캐리어 커밋)  (EQP002 → PPK002)</a:t>
+              <a:t>Step 2 — 블록 시작 (N=6 캐리어 연속 커밋)  (EQP002 → PPK002)</a:t>
             </a:r>
           </a:p>
         </p:txBody>
@@ -13020,7 +13020,7 @@
                 </a:solidFill>
                 <a:latin typeface="맑은 고딕"/>
               </a:rPr>
-              <a:t>블록 진행</a:t>
+              <a:t>블록 커밋</a:t>
             </a:r>
           </a:p>
         </p:txBody>
@@ -13065,7 +13065,7 @@
                 </a:solidFill>
                 <a:latin typeface="맑은 고딕"/>
               </a:rPr>
-              <a:t>1/6 시작</a:t>
+              <a:t>6캐리어 한번에 연속 점유</a:t>
             </a:r>
           </a:p>
         </p:txBody>
@@ -13245,7 +13245,7 @@
                 </a:solidFill>
                 <a:latin typeface="맑은 고딕"/>
               </a:rPr>
-              <a:t>블록 시작 (N=6 캐리어 커밋)</a:t>
+              <a:t>블록 시작 (N=6 캐리어 연속 커밋)</a:t>
             </a:r>
           </a:p>
         </p:txBody>
@@ -14641,7 +14641,7 @@
                 </a:solidFill>
                 <a:latin typeface="맑은 고딕"/>
               </a:rPr>
-              <a:t>Step 3 — 블록 시작 (N=6 캐리어 커밋)  (EQP003 → PPK003)</a:t>
+              <a:t>Step 3 — 블록 시작 (N=6 캐리어 연속 커밋)  (EQP003 → PPK003)</a:t>
             </a:r>
           </a:p>
         </p:txBody>
@@ -16080,7 +16080,7 @@
                 </a:solidFill>
                 <a:latin typeface="맑은 고딕"/>
               </a:rPr>
-              <a:t>블록 진행</a:t>
+              <a:t>블록 커밋</a:t>
             </a:r>
           </a:p>
         </p:txBody>
@@ -16125,7 +16125,7 @@
                 </a:solidFill>
                 <a:latin typeface="맑은 고딕"/>
               </a:rPr>
-              <a:t>1/6 시작</a:t>
+              <a:t>6캐리어 한번에 연속 점유</a:t>
             </a:r>
           </a:p>
         </p:txBody>
@@ -16305,7 +16305,7 @@
                 </a:solidFill>
                 <a:latin typeface="맑은 고딕"/>
               </a:rPr>
-              <a:t>블록 시작 (N=6 캐리어 커밋)</a:t>
+              <a:t>블록 시작 (N=6 캐리어 연속 커밋)</a:t>
             </a:r>
           </a:p>
         </p:txBody>
@@ -19185,7 +19185,7 @@
                 </a:solidFill>
                 <a:latin typeface="맑은 고딕"/>
               </a:rPr>
-              <a:t>2/6  (잔여 4)</a:t>
+              <a:t>LOT 2/6 배정 (동일 블록)</a:t>
             </a:r>
           </a:p>
         </p:txBody>
@@ -22245,7 +22245,7 @@
                 </a:solidFill>
                 <a:latin typeface="맑은 고딕"/>
               </a:rPr>
-              <a:t>2/6  (잔여 4)</a:t>
+              <a:t>LOT 2/6 배정 (동일 블록)</a:t>
             </a:r>
           </a:p>
         </p:txBody>
@@ -25305,7 +25305,7 @@
                 </a:solidFill>
                 <a:latin typeface="맑은 고딕"/>
               </a:rPr>
-              <a:t>3/6  (잔여 3)</a:t>
+              <a:t>LOT 3/6 배정 (동일 블록)</a:t>
             </a:r>
           </a:p>
         </p:txBody>

--- a/docs/BulkFill_스케줄링_발표자료.pptx
+++ b/docs/BulkFill_스케줄링_발표자료.pptx
@@ -8521,7 +8521,7 @@
                 </a:solidFill>
                 <a:latin typeface="맑은 고딕"/>
               </a:rPr>
-              <a:t>Step 1 — 블록 시작 (N=6 캐리어 연속 커밋)  (EQP001 → PPK001)</a:t>
+              <a:t>Step 1 — 블록 시작 (N=6 커밋 · 이번 1LOT)  (EQP001 → PPK001)</a:t>
             </a:r>
           </a:p>
         </p:txBody>
@@ -9658,7 +9658,7 @@
         </p:nvSpPr>
         <p:spPr>
           <a:xfrm>
-            <a:off x="9162288" y="2157984"/>
+            <a:off x="9162288" y="2121408"/>
             <a:ext cx="1097280" cy="274320"/>
           </a:xfrm>
           <a:prstGeom prst="rect">
@@ -9703,7 +9703,7 @@
         </p:nvSpPr>
         <p:spPr>
           <a:xfrm>
-            <a:off x="10195560" y="2157984"/>
+            <a:off x="10195560" y="2121408"/>
             <a:ext cx="1417320" cy="274320"/>
           </a:xfrm>
           <a:prstGeom prst="rect">
@@ -9748,7 +9748,7 @@
         </p:nvSpPr>
         <p:spPr>
           <a:xfrm>
-            <a:off x="9162288" y="2505456"/>
+            <a:off x="9162288" y="2432303"/>
             <a:ext cx="1097280" cy="274320"/>
           </a:xfrm>
           <a:prstGeom prst="rect">
@@ -9793,7 +9793,7 @@
         </p:nvSpPr>
         <p:spPr>
           <a:xfrm>
-            <a:off x="10195560" y="2505456"/>
+            <a:off x="10195560" y="2432303"/>
             <a:ext cx="1417320" cy="274320"/>
           </a:xfrm>
           <a:prstGeom prst="rect">
@@ -9838,7 +9838,7 @@
         </p:nvSpPr>
         <p:spPr>
           <a:xfrm>
-            <a:off x="9162288" y="2852927"/>
+            <a:off x="9162288" y="2743199"/>
             <a:ext cx="1097280" cy="274320"/>
           </a:xfrm>
           <a:prstGeom prst="rect">
@@ -9870,7 +9870,7 @@
                 </a:solidFill>
                 <a:latin typeface="맑은 고딕"/>
               </a:rPr>
-              <a:t>블록 크기 N</a:t>
+              <a:t>블록 커밋</a:t>
             </a:r>
           </a:p>
         </p:txBody>
@@ -9883,7 +9883,7 @@
         </p:nvSpPr>
         <p:spPr>
           <a:xfrm>
-            <a:off x="10195560" y="2852927"/>
+            <a:off x="10195560" y="2743199"/>
             <a:ext cx="1417320" cy="274320"/>
           </a:xfrm>
           <a:prstGeom prst="rect">
@@ -9915,7 +9915,7 @@
                 </a:solidFill>
                 <a:latin typeface="맑은 고딕"/>
               </a:rPr>
-              <a:t>6</a:t>
+              <a:t>N=6 연속 처리 약속</a:t>
             </a:r>
           </a:p>
         </p:txBody>
@@ -9928,7 +9928,7 @@
         </p:nvSpPr>
         <p:spPr>
           <a:xfrm>
-            <a:off x="9162288" y="3200399"/>
+            <a:off x="9162288" y="3054095"/>
             <a:ext cx="1097280" cy="274320"/>
           </a:xfrm>
           <a:prstGeom prst="rect">
@@ -9960,7 +9960,7 @@
                 </a:solidFill>
                 <a:latin typeface="맑은 고딕"/>
               </a:rPr>
-              <a:t>블록 커밋</a:t>
+              <a:t>remaining</a:t>
             </a:r>
           </a:p>
         </p:txBody>
@@ -9973,7 +9973,7 @@
         </p:nvSpPr>
         <p:spPr>
           <a:xfrm>
-            <a:off x="10195560" y="3200399"/>
+            <a:off x="10195560" y="3054095"/>
             <a:ext cx="1417320" cy="274320"/>
           </a:xfrm>
           <a:prstGeom prst="rect">
@@ -10005,7 +10005,7 @@
                 </a:solidFill>
                 <a:latin typeface="맑은 고딕"/>
               </a:rPr>
-              <a:t>6캐리어 한번에 연속 점유</a:t>
+              <a:t>5 (다음 idle마다)</a:t>
             </a:r>
           </a:p>
         </p:txBody>
@@ -10018,7 +10018,7 @@
         </p:nvSpPr>
         <p:spPr>
           <a:xfrm>
-            <a:off x="9162288" y="3547871"/>
+            <a:off x="9162288" y="3364991"/>
             <a:ext cx="1097280" cy="274320"/>
           </a:xfrm>
           <a:prstGeom prst="rect">
@@ -10063,7 +10063,7 @@
         </p:nvSpPr>
         <p:spPr>
           <a:xfrm>
-            <a:off x="10195560" y="3547871"/>
+            <a:off x="10195560" y="3364991"/>
             <a:ext cx="1417320" cy="274320"/>
           </a:xfrm>
           <a:prstGeom prst="rect">
@@ -10108,7 +10108,7 @@
         </p:nvSpPr>
         <p:spPr>
           <a:xfrm>
-            <a:off x="9162288" y="3895344"/>
+            <a:off x="9162288" y="3675887"/>
             <a:ext cx="1097280" cy="274320"/>
           </a:xfrm>
           <a:prstGeom prst="rect">
@@ -10153,7 +10153,7 @@
         </p:nvSpPr>
         <p:spPr>
           <a:xfrm>
-            <a:off x="10195560" y="3895344"/>
+            <a:off x="10195560" y="3675887"/>
             <a:ext cx="1417320" cy="274320"/>
           </a:xfrm>
           <a:prstGeom prst="rect">
@@ -10185,7 +10185,7 @@
                 </a:solidFill>
                 <a:latin typeface="맑은 고딕"/>
               </a:rPr>
-              <a:t>블록 시작 (N=6 캐리어 연속 커밋)</a:t>
+              <a:t>블록 시작 (N=6 커밋 · 이번 1LOT)</a:t>
             </a:r>
           </a:p>
         </p:txBody>
@@ -10206,8 +10206,8 @@
         </p:blipFill>
         <p:spPr>
           <a:xfrm>
-            <a:off x="3337560" y="1325880"/>
-            <a:ext cx="5532120" cy="2240280"/>
+            <a:off x="3337560" y="1298448"/>
+            <a:ext cx="5532120" cy="2176272"/>
           </a:xfrm>
           <a:prstGeom prst="rect">
             <a:avLst/>
@@ -10216,7 +10216,52 @@
       </p:pic>
       <p:sp>
         <p:nvSpPr>
-          <p:cNvPr id="45" name="Rectangle 44"/>
+          <p:cNvPr id="45" name="TextBox 44"/>
+          <p:cNvSpPr txBox="1"/>
+          <p:nvPr/>
+        </p:nvSpPr>
+        <p:spPr>
+          <a:xfrm>
+            <a:off x="3337560" y="3511296"/>
+            <a:ext cx="5532120" cy="201168"/>
+          </a:xfrm>
+          <a:prstGeom prst="rect">
+            <a:avLst/>
+          </a:prstGeom>
+          <a:noFill/>
+        </p:spPr>
+        <p:txBody>
+          <a:bodyPr wrap="square" anchor="t" lIns="36576" rIns="36576" tIns="18288" bIns="18288">
+            <a:spAutoFit/>
+          </a:bodyPr>
+          <a:lstStyle/>
+          <a:p>
+            <a:pPr algn="ctr">
+              <a:lnSpc>
+                <a:spcPct val="100000"/>
+              </a:lnSpc>
+              <a:spcBef>
+                <a:spcPts val="0"/>
+              </a:spcBef>
+              <a:spcAft>
+                <a:spcPts val="400"/>
+              </a:spcAft>
+            </a:pPr>
+            <a:r>
+              <a:rPr sz="819" b="0">
+                <a:solidFill>
+                  <a:srgbClr val="5C6670"/>
+                </a:solidFill>
+                <a:latin typeface="맑은 고딕"/>
+              </a:rPr>
+              <a:t>연한 해칭 = N캐리어 커밋 구간  ·  실선 = 스케줄 등록 LOT (스텝마다 1개씩)</a:t>
+            </a:r>
+          </a:p>
+        </p:txBody>
+      </p:sp>
+      <p:sp>
+        <p:nvSpPr>
+          <p:cNvPr id="46" name="Rectangle 45"/>
           <p:cNvSpPr/>
           <p:nvPr/>
         </p:nvSpPr>
@@ -10260,7 +10305,7 @@
       </p:sp>
       <p:sp>
         <p:nvSpPr>
-          <p:cNvPr id="46" name="TextBox 45"/>
+          <p:cNvPr id="47" name="TextBox 46"/>
           <p:cNvSpPr txBox="1"/>
           <p:nvPr/>
         </p:nvSpPr>
@@ -10305,7 +10350,7 @@
       </p:sp>
       <p:sp>
         <p:nvSpPr>
-          <p:cNvPr id="47" name="Rectangle 46"/>
+          <p:cNvPr id="48" name="Rectangle 47"/>
           <p:cNvSpPr/>
           <p:nvPr/>
         </p:nvSpPr>
@@ -10351,7 +10396,7 @@
       </p:sp>
       <p:sp>
         <p:nvSpPr>
-          <p:cNvPr id="48" name="Rectangle 47"/>
+          <p:cNvPr id="49" name="Rectangle 48"/>
           <p:cNvSpPr/>
           <p:nvPr/>
         </p:nvSpPr>
@@ -10395,7 +10440,7 @@
       </p:sp>
       <p:sp>
         <p:nvSpPr>
-          <p:cNvPr id="49" name="TextBox 48"/>
+          <p:cNvPr id="50" name="TextBox 49"/>
           <p:cNvSpPr txBox="1"/>
           <p:nvPr/>
         </p:nvSpPr>
@@ -10440,7 +10485,7 @@
       </p:sp>
       <p:sp>
         <p:nvSpPr>
-          <p:cNvPr id="50" name="TextBox 49"/>
+          <p:cNvPr id="51" name="TextBox 50"/>
           <p:cNvSpPr txBox="1"/>
           <p:nvPr/>
         </p:nvSpPr>
@@ -10485,7 +10530,7 @@
       </p:sp>
       <p:sp>
         <p:nvSpPr>
-          <p:cNvPr id="51" name="TextBox 50"/>
+          <p:cNvPr id="52" name="TextBox 51"/>
           <p:cNvSpPr txBox="1"/>
           <p:nvPr/>
         </p:nvSpPr>
@@ -10530,7 +10575,7 @@
       </p:sp>
       <p:sp>
         <p:nvSpPr>
-          <p:cNvPr id="52" name="TextBox 51"/>
+          <p:cNvPr id="53" name="TextBox 52"/>
           <p:cNvSpPr txBox="1"/>
           <p:nvPr/>
         </p:nvSpPr>
@@ -10575,7 +10620,7 @@
       </p:sp>
       <p:sp>
         <p:nvSpPr>
-          <p:cNvPr id="53" name="TextBox 52"/>
+          <p:cNvPr id="54" name="TextBox 53"/>
           <p:cNvSpPr txBox="1"/>
           <p:nvPr/>
         </p:nvSpPr>
@@ -10620,7 +10665,7 @@
       </p:sp>
       <p:sp>
         <p:nvSpPr>
-          <p:cNvPr id="54" name="Rectangle 53"/>
+          <p:cNvPr id="55" name="Rectangle 54"/>
           <p:cNvSpPr/>
           <p:nvPr/>
         </p:nvSpPr>
@@ -10666,7 +10711,7 @@
       </p:sp>
       <p:sp>
         <p:nvSpPr>
-          <p:cNvPr id="55" name="Rectangle 54"/>
+          <p:cNvPr id="56" name="Rectangle 55"/>
           <p:cNvSpPr/>
           <p:nvPr/>
         </p:nvSpPr>
@@ -10710,7 +10755,7 @@
       </p:sp>
       <p:sp>
         <p:nvSpPr>
-          <p:cNvPr id="56" name="TextBox 55"/>
+          <p:cNvPr id="57" name="TextBox 56"/>
           <p:cNvSpPr txBox="1"/>
           <p:nvPr/>
         </p:nvSpPr>
@@ -10755,7 +10800,7 @@
       </p:sp>
       <p:sp>
         <p:nvSpPr>
-          <p:cNvPr id="57" name="TextBox 56"/>
+          <p:cNvPr id="58" name="TextBox 57"/>
           <p:cNvSpPr txBox="1"/>
           <p:nvPr/>
         </p:nvSpPr>
@@ -10800,7 +10845,7 @@
       </p:sp>
       <p:sp>
         <p:nvSpPr>
-          <p:cNvPr id="58" name="TextBox 57"/>
+          <p:cNvPr id="59" name="TextBox 58"/>
           <p:cNvSpPr txBox="1"/>
           <p:nvPr/>
         </p:nvSpPr>
@@ -10845,7 +10890,7 @@
       </p:sp>
       <p:sp>
         <p:nvSpPr>
-          <p:cNvPr id="59" name="TextBox 58"/>
+          <p:cNvPr id="60" name="TextBox 59"/>
           <p:cNvSpPr txBox="1"/>
           <p:nvPr/>
         </p:nvSpPr>
@@ -10890,7 +10935,7 @@
       </p:sp>
       <p:sp>
         <p:nvSpPr>
-          <p:cNvPr id="60" name="TextBox 59"/>
+          <p:cNvPr id="61" name="TextBox 60"/>
           <p:cNvSpPr txBox="1"/>
           <p:nvPr/>
         </p:nvSpPr>
@@ -10935,7 +10980,7 @@
       </p:sp>
       <p:sp>
         <p:nvSpPr>
-          <p:cNvPr id="61" name="Rectangle 60"/>
+          <p:cNvPr id="62" name="Rectangle 61"/>
           <p:cNvSpPr/>
           <p:nvPr/>
         </p:nvSpPr>
@@ -10981,7 +11026,7 @@
       </p:sp>
       <p:sp>
         <p:nvSpPr>
-          <p:cNvPr id="62" name="Rectangle 61"/>
+          <p:cNvPr id="63" name="Rectangle 62"/>
           <p:cNvSpPr/>
           <p:nvPr/>
         </p:nvSpPr>
@@ -11025,7 +11070,7 @@
       </p:sp>
       <p:sp>
         <p:nvSpPr>
-          <p:cNvPr id="63" name="TextBox 62"/>
+          <p:cNvPr id="64" name="TextBox 63"/>
           <p:cNvSpPr txBox="1"/>
           <p:nvPr/>
         </p:nvSpPr>
@@ -11070,7 +11115,7 @@
       </p:sp>
       <p:sp>
         <p:nvSpPr>
-          <p:cNvPr id="64" name="TextBox 63"/>
+          <p:cNvPr id="65" name="TextBox 64"/>
           <p:cNvSpPr txBox="1"/>
           <p:nvPr/>
         </p:nvSpPr>
@@ -11115,7 +11160,7 @@
       </p:sp>
       <p:sp>
         <p:nvSpPr>
-          <p:cNvPr id="65" name="TextBox 64"/>
+          <p:cNvPr id="66" name="TextBox 65"/>
           <p:cNvSpPr txBox="1"/>
           <p:nvPr/>
         </p:nvSpPr>
@@ -11160,7 +11205,7 @@
       </p:sp>
       <p:sp>
         <p:nvSpPr>
-          <p:cNvPr id="66" name="TextBox 65"/>
+          <p:cNvPr id="67" name="TextBox 66"/>
           <p:cNvSpPr txBox="1"/>
           <p:nvPr/>
         </p:nvSpPr>
@@ -11205,7 +11250,7 @@
       </p:sp>
       <p:sp>
         <p:nvSpPr>
-          <p:cNvPr id="67" name="TextBox 66"/>
+          <p:cNvPr id="68" name="TextBox 67"/>
           <p:cNvSpPr txBox="1"/>
           <p:nvPr/>
         </p:nvSpPr>
@@ -11250,7 +11295,7 @@
       </p:sp>
       <p:sp>
         <p:nvSpPr>
-          <p:cNvPr id="68" name="Rectangle 67"/>
+          <p:cNvPr id="69" name="Rectangle 68"/>
           <p:cNvSpPr/>
           <p:nvPr/>
         </p:nvSpPr>
@@ -11294,7 +11339,7 @@
       </p:sp>
       <p:sp>
         <p:nvSpPr>
-          <p:cNvPr id="69" name="TextBox 68"/>
+          <p:cNvPr id="70" name="TextBox 69"/>
           <p:cNvSpPr txBox="1"/>
           <p:nvPr/>
         </p:nvSpPr>
@@ -11581,7 +11626,7 @@
                 </a:solidFill>
                 <a:latin typeface="맑은 고딕"/>
               </a:rPr>
-              <a:t>Step 2 — 블록 시작 (N=6 캐리어 연속 커밋)  (EQP002 → PPK002)</a:t>
+              <a:t>Step 2 — 블록 시작 (N=6 커밋 · 이번 1LOT)  (EQP002 → PPK002)</a:t>
             </a:r>
           </a:p>
         </p:txBody>
@@ -12718,7 +12763,7 @@
         </p:nvSpPr>
         <p:spPr>
           <a:xfrm>
-            <a:off x="9162288" y="2157984"/>
+            <a:off x="9162288" y="2121408"/>
             <a:ext cx="1097280" cy="274320"/>
           </a:xfrm>
           <a:prstGeom prst="rect">
@@ -12763,7 +12808,7 @@
         </p:nvSpPr>
         <p:spPr>
           <a:xfrm>
-            <a:off x="10195560" y="2157984"/>
+            <a:off x="10195560" y="2121408"/>
             <a:ext cx="1417320" cy="274320"/>
           </a:xfrm>
           <a:prstGeom prst="rect">
@@ -12808,7 +12853,7 @@
         </p:nvSpPr>
         <p:spPr>
           <a:xfrm>
-            <a:off x="9162288" y="2505456"/>
+            <a:off x="9162288" y="2432303"/>
             <a:ext cx="1097280" cy="274320"/>
           </a:xfrm>
           <a:prstGeom prst="rect">
@@ -12853,7 +12898,7 @@
         </p:nvSpPr>
         <p:spPr>
           <a:xfrm>
-            <a:off x="10195560" y="2505456"/>
+            <a:off x="10195560" y="2432303"/>
             <a:ext cx="1417320" cy="274320"/>
           </a:xfrm>
           <a:prstGeom prst="rect">
@@ -12898,7 +12943,7 @@
         </p:nvSpPr>
         <p:spPr>
           <a:xfrm>
-            <a:off x="9162288" y="2852927"/>
+            <a:off x="9162288" y="2743199"/>
             <a:ext cx="1097280" cy="274320"/>
           </a:xfrm>
           <a:prstGeom prst="rect">
@@ -12930,7 +12975,7 @@
                 </a:solidFill>
                 <a:latin typeface="맑은 고딕"/>
               </a:rPr>
-              <a:t>블록 크기 N</a:t>
+              <a:t>블록 커밋</a:t>
             </a:r>
           </a:p>
         </p:txBody>
@@ -12943,7 +12988,7 @@
         </p:nvSpPr>
         <p:spPr>
           <a:xfrm>
-            <a:off x="10195560" y="2852927"/>
+            <a:off x="10195560" y="2743199"/>
             <a:ext cx="1417320" cy="274320"/>
           </a:xfrm>
           <a:prstGeom prst="rect">
@@ -12975,7 +13020,7 @@
                 </a:solidFill>
                 <a:latin typeface="맑은 고딕"/>
               </a:rPr>
-              <a:t>6</a:t>
+              <a:t>N=6 연속 처리 약속</a:t>
             </a:r>
           </a:p>
         </p:txBody>
@@ -12988,7 +13033,7 @@
         </p:nvSpPr>
         <p:spPr>
           <a:xfrm>
-            <a:off x="9162288" y="3200399"/>
+            <a:off x="9162288" y="3054095"/>
             <a:ext cx="1097280" cy="274320"/>
           </a:xfrm>
           <a:prstGeom prst="rect">
@@ -13020,7 +13065,7 @@
                 </a:solidFill>
                 <a:latin typeface="맑은 고딕"/>
               </a:rPr>
-              <a:t>블록 커밋</a:t>
+              <a:t>remaining</a:t>
             </a:r>
           </a:p>
         </p:txBody>
@@ -13033,7 +13078,7 @@
         </p:nvSpPr>
         <p:spPr>
           <a:xfrm>
-            <a:off x="10195560" y="3200399"/>
+            <a:off x="10195560" y="3054095"/>
             <a:ext cx="1417320" cy="274320"/>
           </a:xfrm>
           <a:prstGeom prst="rect">
@@ -13065,7 +13110,7 @@
                 </a:solidFill>
                 <a:latin typeface="맑은 고딕"/>
               </a:rPr>
-              <a:t>6캐리어 한번에 연속 점유</a:t>
+              <a:t>5 (다음 idle마다)</a:t>
             </a:r>
           </a:p>
         </p:txBody>
@@ -13078,7 +13123,7 @@
         </p:nvSpPr>
         <p:spPr>
           <a:xfrm>
-            <a:off x="9162288" y="3547871"/>
+            <a:off x="9162288" y="3364991"/>
             <a:ext cx="1097280" cy="274320"/>
           </a:xfrm>
           <a:prstGeom prst="rect">
@@ -13123,7 +13168,7 @@
         </p:nvSpPr>
         <p:spPr>
           <a:xfrm>
-            <a:off x="10195560" y="3547871"/>
+            <a:off x="10195560" y="3364991"/>
             <a:ext cx="1417320" cy="274320"/>
           </a:xfrm>
           <a:prstGeom prst="rect">
@@ -13168,7 +13213,7 @@
         </p:nvSpPr>
         <p:spPr>
           <a:xfrm>
-            <a:off x="9162288" y="3895344"/>
+            <a:off x="9162288" y="3675887"/>
             <a:ext cx="1097280" cy="274320"/>
           </a:xfrm>
           <a:prstGeom prst="rect">
@@ -13213,7 +13258,7 @@
         </p:nvSpPr>
         <p:spPr>
           <a:xfrm>
-            <a:off x="10195560" y="3895344"/>
+            <a:off x="10195560" y="3675887"/>
             <a:ext cx="1417320" cy="274320"/>
           </a:xfrm>
           <a:prstGeom prst="rect">
@@ -13245,7 +13290,7 @@
                 </a:solidFill>
                 <a:latin typeface="맑은 고딕"/>
               </a:rPr>
-              <a:t>블록 시작 (N=6 캐리어 연속 커밋)</a:t>
+              <a:t>블록 시작 (N=6 커밋 · 이번 1LOT)</a:t>
             </a:r>
           </a:p>
         </p:txBody>
@@ -13266,8 +13311,8 @@
         </p:blipFill>
         <p:spPr>
           <a:xfrm>
-            <a:off x="3337560" y="1325880"/>
-            <a:ext cx="5532120" cy="2240280"/>
+            <a:off x="3337560" y="1298448"/>
+            <a:ext cx="5532120" cy="2176272"/>
           </a:xfrm>
           <a:prstGeom prst="rect">
             <a:avLst/>
@@ -13276,7 +13321,52 @@
       </p:pic>
       <p:sp>
         <p:nvSpPr>
-          <p:cNvPr id="45" name="Rectangle 44"/>
+          <p:cNvPr id="45" name="TextBox 44"/>
+          <p:cNvSpPr txBox="1"/>
+          <p:nvPr/>
+        </p:nvSpPr>
+        <p:spPr>
+          <a:xfrm>
+            <a:off x="3337560" y="3511296"/>
+            <a:ext cx="5532120" cy="201168"/>
+          </a:xfrm>
+          <a:prstGeom prst="rect">
+            <a:avLst/>
+          </a:prstGeom>
+          <a:noFill/>
+        </p:spPr>
+        <p:txBody>
+          <a:bodyPr wrap="square" anchor="t" lIns="36576" rIns="36576" tIns="18288" bIns="18288">
+            <a:spAutoFit/>
+          </a:bodyPr>
+          <a:lstStyle/>
+          <a:p>
+            <a:pPr algn="ctr">
+              <a:lnSpc>
+                <a:spcPct val="100000"/>
+              </a:lnSpc>
+              <a:spcBef>
+                <a:spcPts val="0"/>
+              </a:spcBef>
+              <a:spcAft>
+                <a:spcPts val="400"/>
+              </a:spcAft>
+            </a:pPr>
+            <a:r>
+              <a:rPr sz="819" b="0">
+                <a:solidFill>
+                  <a:srgbClr val="5C6670"/>
+                </a:solidFill>
+                <a:latin typeface="맑은 고딕"/>
+              </a:rPr>
+              <a:t>연한 해칭 = N캐리어 커밋 구간  ·  실선 = 스케줄 등록 LOT (스텝마다 1개씩)</a:t>
+            </a:r>
+          </a:p>
+        </p:txBody>
+      </p:sp>
+      <p:sp>
+        <p:nvSpPr>
+          <p:cNvPr id="46" name="Rectangle 45"/>
           <p:cNvSpPr/>
           <p:nvPr/>
         </p:nvSpPr>
@@ -13320,7 +13410,7 @@
       </p:sp>
       <p:sp>
         <p:nvSpPr>
-          <p:cNvPr id="46" name="TextBox 45"/>
+          <p:cNvPr id="47" name="TextBox 46"/>
           <p:cNvSpPr txBox="1"/>
           <p:nvPr/>
         </p:nvSpPr>
@@ -13365,7 +13455,7 @@
       </p:sp>
       <p:sp>
         <p:nvSpPr>
-          <p:cNvPr id="47" name="Rectangle 46"/>
+          <p:cNvPr id="48" name="Rectangle 47"/>
           <p:cNvSpPr/>
           <p:nvPr/>
         </p:nvSpPr>
@@ -13411,7 +13501,7 @@
       </p:sp>
       <p:sp>
         <p:nvSpPr>
-          <p:cNvPr id="48" name="Rectangle 47"/>
+          <p:cNvPr id="49" name="Rectangle 48"/>
           <p:cNvSpPr/>
           <p:nvPr/>
         </p:nvSpPr>
@@ -13455,7 +13545,7 @@
       </p:sp>
       <p:sp>
         <p:nvSpPr>
-          <p:cNvPr id="49" name="TextBox 48"/>
+          <p:cNvPr id="50" name="TextBox 49"/>
           <p:cNvSpPr txBox="1"/>
           <p:nvPr/>
         </p:nvSpPr>
@@ -13500,7 +13590,7 @@
       </p:sp>
       <p:sp>
         <p:nvSpPr>
-          <p:cNvPr id="50" name="TextBox 49"/>
+          <p:cNvPr id="51" name="TextBox 50"/>
           <p:cNvSpPr txBox="1"/>
           <p:nvPr/>
         </p:nvSpPr>
@@ -13545,7 +13635,7 @@
       </p:sp>
       <p:sp>
         <p:nvSpPr>
-          <p:cNvPr id="51" name="TextBox 50"/>
+          <p:cNvPr id="52" name="TextBox 51"/>
           <p:cNvSpPr txBox="1"/>
           <p:nvPr/>
         </p:nvSpPr>
@@ -13590,7 +13680,7 @@
       </p:sp>
       <p:sp>
         <p:nvSpPr>
-          <p:cNvPr id="52" name="TextBox 51"/>
+          <p:cNvPr id="53" name="TextBox 52"/>
           <p:cNvSpPr txBox="1"/>
           <p:nvPr/>
         </p:nvSpPr>
@@ -13635,7 +13725,7 @@
       </p:sp>
       <p:sp>
         <p:nvSpPr>
-          <p:cNvPr id="53" name="TextBox 52"/>
+          <p:cNvPr id="54" name="TextBox 53"/>
           <p:cNvSpPr txBox="1"/>
           <p:nvPr/>
         </p:nvSpPr>
@@ -13680,7 +13770,7 @@
       </p:sp>
       <p:sp>
         <p:nvSpPr>
-          <p:cNvPr id="54" name="Rectangle 53"/>
+          <p:cNvPr id="55" name="Rectangle 54"/>
           <p:cNvSpPr/>
           <p:nvPr/>
         </p:nvSpPr>
@@ -13726,7 +13816,7 @@
       </p:sp>
       <p:sp>
         <p:nvSpPr>
-          <p:cNvPr id="55" name="Rectangle 54"/>
+          <p:cNvPr id="56" name="Rectangle 55"/>
           <p:cNvSpPr/>
           <p:nvPr/>
         </p:nvSpPr>
@@ -13770,7 +13860,7 @@
       </p:sp>
       <p:sp>
         <p:nvSpPr>
-          <p:cNvPr id="56" name="TextBox 55"/>
+          <p:cNvPr id="57" name="TextBox 56"/>
           <p:cNvSpPr txBox="1"/>
           <p:nvPr/>
         </p:nvSpPr>
@@ -13815,7 +13905,7 @@
       </p:sp>
       <p:sp>
         <p:nvSpPr>
-          <p:cNvPr id="57" name="TextBox 56"/>
+          <p:cNvPr id="58" name="TextBox 57"/>
           <p:cNvSpPr txBox="1"/>
           <p:nvPr/>
         </p:nvSpPr>
@@ -13860,7 +13950,7 @@
       </p:sp>
       <p:sp>
         <p:nvSpPr>
-          <p:cNvPr id="58" name="TextBox 57"/>
+          <p:cNvPr id="59" name="TextBox 58"/>
           <p:cNvSpPr txBox="1"/>
           <p:nvPr/>
         </p:nvSpPr>
@@ -13905,7 +13995,7 @@
       </p:sp>
       <p:sp>
         <p:nvSpPr>
-          <p:cNvPr id="59" name="TextBox 58"/>
+          <p:cNvPr id="60" name="TextBox 59"/>
           <p:cNvSpPr txBox="1"/>
           <p:nvPr/>
         </p:nvSpPr>
@@ -13950,7 +14040,7 @@
       </p:sp>
       <p:sp>
         <p:nvSpPr>
-          <p:cNvPr id="60" name="TextBox 59"/>
+          <p:cNvPr id="61" name="TextBox 60"/>
           <p:cNvSpPr txBox="1"/>
           <p:nvPr/>
         </p:nvSpPr>
@@ -13995,7 +14085,7 @@
       </p:sp>
       <p:sp>
         <p:nvSpPr>
-          <p:cNvPr id="61" name="Rectangle 60"/>
+          <p:cNvPr id="62" name="Rectangle 61"/>
           <p:cNvSpPr/>
           <p:nvPr/>
         </p:nvSpPr>
@@ -14041,7 +14131,7 @@
       </p:sp>
       <p:sp>
         <p:nvSpPr>
-          <p:cNvPr id="62" name="Rectangle 61"/>
+          <p:cNvPr id="63" name="Rectangle 62"/>
           <p:cNvSpPr/>
           <p:nvPr/>
         </p:nvSpPr>
@@ -14085,7 +14175,7 @@
       </p:sp>
       <p:sp>
         <p:nvSpPr>
-          <p:cNvPr id="63" name="TextBox 62"/>
+          <p:cNvPr id="64" name="TextBox 63"/>
           <p:cNvSpPr txBox="1"/>
           <p:nvPr/>
         </p:nvSpPr>
@@ -14130,7 +14220,7 @@
       </p:sp>
       <p:sp>
         <p:nvSpPr>
-          <p:cNvPr id="64" name="TextBox 63"/>
+          <p:cNvPr id="65" name="TextBox 64"/>
           <p:cNvSpPr txBox="1"/>
           <p:nvPr/>
         </p:nvSpPr>
@@ -14175,7 +14265,7 @@
       </p:sp>
       <p:sp>
         <p:nvSpPr>
-          <p:cNvPr id="65" name="TextBox 64"/>
+          <p:cNvPr id="66" name="TextBox 65"/>
           <p:cNvSpPr txBox="1"/>
           <p:nvPr/>
         </p:nvSpPr>
@@ -14220,7 +14310,7 @@
       </p:sp>
       <p:sp>
         <p:nvSpPr>
-          <p:cNvPr id="66" name="TextBox 65"/>
+          <p:cNvPr id="67" name="TextBox 66"/>
           <p:cNvSpPr txBox="1"/>
           <p:nvPr/>
         </p:nvSpPr>
@@ -14265,7 +14355,7 @@
       </p:sp>
       <p:sp>
         <p:nvSpPr>
-          <p:cNvPr id="67" name="TextBox 66"/>
+          <p:cNvPr id="68" name="TextBox 67"/>
           <p:cNvSpPr txBox="1"/>
           <p:nvPr/>
         </p:nvSpPr>
@@ -14310,7 +14400,7 @@
       </p:sp>
       <p:sp>
         <p:nvSpPr>
-          <p:cNvPr id="68" name="Rectangle 67"/>
+          <p:cNvPr id="69" name="Rectangle 68"/>
           <p:cNvSpPr/>
           <p:nvPr/>
         </p:nvSpPr>
@@ -14354,7 +14444,7 @@
       </p:sp>
       <p:sp>
         <p:nvSpPr>
-          <p:cNvPr id="69" name="TextBox 68"/>
+          <p:cNvPr id="70" name="TextBox 69"/>
           <p:cNvSpPr txBox="1"/>
           <p:nvPr/>
         </p:nvSpPr>
@@ -14641,7 +14731,7 @@
                 </a:solidFill>
                 <a:latin typeface="맑은 고딕"/>
               </a:rPr>
-              <a:t>Step 3 — 블록 시작 (N=6 캐리어 연속 커밋)  (EQP003 → PPK003)</a:t>
+              <a:t>Step 3 — 블록 시작 (N=6 커밋 · 이번 1LOT)  (EQP003 → PPK003)</a:t>
             </a:r>
           </a:p>
         </p:txBody>
@@ -15778,7 +15868,7 @@
         </p:nvSpPr>
         <p:spPr>
           <a:xfrm>
-            <a:off x="9162288" y="2157984"/>
+            <a:off x="9162288" y="2121408"/>
             <a:ext cx="1097280" cy="274320"/>
           </a:xfrm>
           <a:prstGeom prst="rect">
@@ -15823,7 +15913,7 @@
         </p:nvSpPr>
         <p:spPr>
           <a:xfrm>
-            <a:off x="10195560" y="2157984"/>
+            <a:off x="10195560" y="2121408"/>
             <a:ext cx="1417320" cy="274320"/>
           </a:xfrm>
           <a:prstGeom prst="rect">
@@ -15868,7 +15958,7 @@
         </p:nvSpPr>
         <p:spPr>
           <a:xfrm>
-            <a:off x="9162288" y="2505456"/>
+            <a:off x="9162288" y="2432303"/>
             <a:ext cx="1097280" cy="274320"/>
           </a:xfrm>
           <a:prstGeom prst="rect">
@@ -15913,7 +16003,7 @@
         </p:nvSpPr>
         <p:spPr>
           <a:xfrm>
-            <a:off x="10195560" y="2505456"/>
+            <a:off x="10195560" y="2432303"/>
             <a:ext cx="1417320" cy="274320"/>
           </a:xfrm>
           <a:prstGeom prst="rect">
@@ -15958,7 +16048,7 @@
         </p:nvSpPr>
         <p:spPr>
           <a:xfrm>
-            <a:off x="9162288" y="2852927"/>
+            <a:off x="9162288" y="2743199"/>
             <a:ext cx="1097280" cy="274320"/>
           </a:xfrm>
           <a:prstGeom prst="rect">
@@ -15990,7 +16080,7 @@
                 </a:solidFill>
                 <a:latin typeface="맑은 고딕"/>
               </a:rPr>
-              <a:t>블록 크기 N</a:t>
+              <a:t>블록 커밋</a:t>
             </a:r>
           </a:p>
         </p:txBody>
@@ -16003,7 +16093,7 @@
         </p:nvSpPr>
         <p:spPr>
           <a:xfrm>
-            <a:off x="10195560" y="2852927"/>
+            <a:off x="10195560" y="2743199"/>
             <a:ext cx="1417320" cy="274320"/>
           </a:xfrm>
           <a:prstGeom prst="rect">
@@ -16035,7 +16125,7 @@
                 </a:solidFill>
                 <a:latin typeface="맑은 고딕"/>
               </a:rPr>
-              <a:t>6</a:t>
+              <a:t>N=6 연속 처리 약속</a:t>
             </a:r>
           </a:p>
         </p:txBody>
@@ -16048,7 +16138,7 @@
         </p:nvSpPr>
         <p:spPr>
           <a:xfrm>
-            <a:off x="9162288" y="3200399"/>
+            <a:off x="9162288" y="3054095"/>
             <a:ext cx="1097280" cy="274320"/>
           </a:xfrm>
           <a:prstGeom prst="rect">
@@ -16080,7 +16170,7 @@
                 </a:solidFill>
                 <a:latin typeface="맑은 고딕"/>
               </a:rPr>
-              <a:t>블록 커밋</a:t>
+              <a:t>remaining</a:t>
             </a:r>
           </a:p>
         </p:txBody>
@@ -16093,7 +16183,7 @@
         </p:nvSpPr>
         <p:spPr>
           <a:xfrm>
-            <a:off x="10195560" y="3200399"/>
+            <a:off x="10195560" y="3054095"/>
             <a:ext cx="1417320" cy="274320"/>
           </a:xfrm>
           <a:prstGeom prst="rect">
@@ -16125,7 +16215,7 @@
                 </a:solidFill>
                 <a:latin typeface="맑은 고딕"/>
               </a:rPr>
-              <a:t>6캐리어 한번에 연속 점유</a:t>
+              <a:t>5 (다음 idle마다)</a:t>
             </a:r>
           </a:p>
         </p:txBody>
@@ -16138,7 +16228,7 @@
         </p:nvSpPr>
         <p:spPr>
           <a:xfrm>
-            <a:off x="9162288" y="3547871"/>
+            <a:off x="9162288" y="3364991"/>
             <a:ext cx="1097280" cy="274320"/>
           </a:xfrm>
           <a:prstGeom prst="rect">
@@ -16183,7 +16273,7 @@
         </p:nvSpPr>
         <p:spPr>
           <a:xfrm>
-            <a:off x="10195560" y="3547871"/>
+            <a:off x="10195560" y="3364991"/>
             <a:ext cx="1417320" cy="274320"/>
           </a:xfrm>
           <a:prstGeom prst="rect">
@@ -16228,7 +16318,7 @@
         </p:nvSpPr>
         <p:spPr>
           <a:xfrm>
-            <a:off x="9162288" y="3895344"/>
+            <a:off x="9162288" y="3675887"/>
             <a:ext cx="1097280" cy="274320"/>
           </a:xfrm>
           <a:prstGeom prst="rect">
@@ -16273,7 +16363,7 @@
         </p:nvSpPr>
         <p:spPr>
           <a:xfrm>
-            <a:off x="10195560" y="3895344"/>
+            <a:off x="10195560" y="3675887"/>
             <a:ext cx="1417320" cy="274320"/>
           </a:xfrm>
           <a:prstGeom prst="rect">
@@ -16305,7 +16395,7 @@
                 </a:solidFill>
                 <a:latin typeface="맑은 고딕"/>
               </a:rPr>
-              <a:t>블록 시작 (N=6 캐리어 연속 커밋)</a:t>
+              <a:t>블록 시작 (N=6 커밋 · 이번 1LOT)</a:t>
             </a:r>
           </a:p>
         </p:txBody>
@@ -16326,8 +16416,8 @@
         </p:blipFill>
         <p:spPr>
           <a:xfrm>
-            <a:off x="3337560" y="1325880"/>
-            <a:ext cx="5532120" cy="2240280"/>
+            <a:off x="3337560" y="1298448"/>
+            <a:ext cx="5532120" cy="2176272"/>
           </a:xfrm>
           <a:prstGeom prst="rect">
             <a:avLst/>
@@ -16336,7 +16426,52 @@
       </p:pic>
       <p:sp>
         <p:nvSpPr>
-          <p:cNvPr id="45" name="Rectangle 44"/>
+          <p:cNvPr id="45" name="TextBox 44"/>
+          <p:cNvSpPr txBox="1"/>
+          <p:nvPr/>
+        </p:nvSpPr>
+        <p:spPr>
+          <a:xfrm>
+            <a:off x="3337560" y="3511296"/>
+            <a:ext cx="5532120" cy="201168"/>
+          </a:xfrm>
+          <a:prstGeom prst="rect">
+            <a:avLst/>
+          </a:prstGeom>
+          <a:noFill/>
+        </p:spPr>
+        <p:txBody>
+          <a:bodyPr wrap="square" anchor="t" lIns="36576" rIns="36576" tIns="18288" bIns="18288">
+            <a:spAutoFit/>
+          </a:bodyPr>
+          <a:lstStyle/>
+          <a:p>
+            <a:pPr algn="ctr">
+              <a:lnSpc>
+                <a:spcPct val="100000"/>
+              </a:lnSpc>
+              <a:spcBef>
+                <a:spcPts val="0"/>
+              </a:spcBef>
+              <a:spcAft>
+                <a:spcPts val="400"/>
+              </a:spcAft>
+            </a:pPr>
+            <a:r>
+              <a:rPr sz="819" b="0">
+                <a:solidFill>
+                  <a:srgbClr val="5C6670"/>
+                </a:solidFill>
+                <a:latin typeface="맑은 고딕"/>
+              </a:rPr>
+              <a:t>연한 해칭 = N캐리어 커밋 구간  ·  실선 = 스케줄 등록 LOT (스텝마다 1개씩)</a:t>
+            </a:r>
+          </a:p>
+        </p:txBody>
+      </p:sp>
+      <p:sp>
+        <p:nvSpPr>
+          <p:cNvPr id="46" name="Rectangle 45"/>
           <p:cNvSpPr/>
           <p:nvPr/>
         </p:nvSpPr>
@@ -16380,7 +16515,7 @@
       </p:sp>
       <p:sp>
         <p:nvSpPr>
-          <p:cNvPr id="46" name="TextBox 45"/>
+          <p:cNvPr id="47" name="TextBox 46"/>
           <p:cNvSpPr txBox="1"/>
           <p:nvPr/>
         </p:nvSpPr>
@@ -16425,7 +16560,7 @@
       </p:sp>
       <p:sp>
         <p:nvSpPr>
-          <p:cNvPr id="47" name="Rectangle 46"/>
+          <p:cNvPr id="48" name="Rectangle 47"/>
           <p:cNvSpPr/>
           <p:nvPr/>
         </p:nvSpPr>
@@ -16471,7 +16606,7 @@
       </p:sp>
       <p:sp>
         <p:nvSpPr>
-          <p:cNvPr id="48" name="Rectangle 47"/>
+          <p:cNvPr id="49" name="Rectangle 48"/>
           <p:cNvSpPr/>
           <p:nvPr/>
         </p:nvSpPr>
@@ -16515,7 +16650,7 @@
       </p:sp>
       <p:sp>
         <p:nvSpPr>
-          <p:cNvPr id="49" name="TextBox 48"/>
+          <p:cNvPr id="50" name="TextBox 49"/>
           <p:cNvSpPr txBox="1"/>
           <p:nvPr/>
         </p:nvSpPr>
@@ -16560,7 +16695,7 @@
       </p:sp>
       <p:sp>
         <p:nvSpPr>
-          <p:cNvPr id="50" name="TextBox 49"/>
+          <p:cNvPr id="51" name="TextBox 50"/>
           <p:cNvSpPr txBox="1"/>
           <p:nvPr/>
         </p:nvSpPr>
@@ -16605,7 +16740,7 @@
       </p:sp>
       <p:sp>
         <p:nvSpPr>
-          <p:cNvPr id="51" name="TextBox 50"/>
+          <p:cNvPr id="52" name="TextBox 51"/>
           <p:cNvSpPr txBox="1"/>
           <p:nvPr/>
         </p:nvSpPr>
@@ -16650,7 +16785,7 @@
       </p:sp>
       <p:sp>
         <p:nvSpPr>
-          <p:cNvPr id="52" name="TextBox 51"/>
+          <p:cNvPr id="53" name="TextBox 52"/>
           <p:cNvSpPr txBox="1"/>
           <p:nvPr/>
         </p:nvSpPr>
@@ -16695,7 +16830,7 @@
       </p:sp>
       <p:sp>
         <p:nvSpPr>
-          <p:cNvPr id="53" name="TextBox 52"/>
+          <p:cNvPr id="54" name="TextBox 53"/>
           <p:cNvSpPr txBox="1"/>
           <p:nvPr/>
         </p:nvSpPr>
@@ -16740,7 +16875,7 @@
       </p:sp>
       <p:sp>
         <p:nvSpPr>
-          <p:cNvPr id="54" name="Rectangle 53"/>
+          <p:cNvPr id="55" name="Rectangle 54"/>
           <p:cNvSpPr/>
           <p:nvPr/>
         </p:nvSpPr>
@@ -16786,7 +16921,7 @@
       </p:sp>
       <p:sp>
         <p:nvSpPr>
-          <p:cNvPr id="55" name="Rectangle 54"/>
+          <p:cNvPr id="56" name="Rectangle 55"/>
           <p:cNvSpPr/>
           <p:nvPr/>
         </p:nvSpPr>
@@ -16830,7 +16965,7 @@
       </p:sp>
       <p:sp>
         <p:nvSpPr>
-          <p:cNvPr id="56" name="TextBox 55"/>
+          <p:cNvPr id="57" name="TextBox 56"/>
           <p:cNvSpPr txBox="1"/>
           <p:nvPr/>
         </p:nvSpPr>
@@ -16875,7 +17010,7 @@
       </p:sp>
       <p:sp>
         <p:nvSpPr>
-          <p:cNvPr id="57" name="TextBox 56"/>
+          <p:cNvPr id="58" name="TextBox 57"/>
           <p:cNvSpPr txBox="1"/>
           <p:nvPr/>
         </p:nvSpPr>
@@ -16920,7 +17055,7 @@
       </p:sp>
       <p:sp>
         <p:nvSpPr>
-          <p:cNvPr id="58" name="TextBox 57"/>
+          <p:cNvPr id="59" name="TextBox 58"/>
           <p:cNvSpPr txBox="1"/>
           <p:nvPr/>
         </p:nvSpPr>
@@ -16965,7 +17100,7 @@
       </p:sp>
       <p:sp>
         <p:nvSpPr>
-          <p:cNvPr id="59" name="TextBox 58"/>
+          <p:cNvPr id="60" name="TextBox 59"/>
           <p:cNvSpPr txBox="1"/>
           <p:nvPr/>
         </p:nvSpPr>
@@ -17010,7 +17145,7 @@
       </p:sp>
       <p:sp>
         <p:nvSpPr>
-          <p:cNvPr id="60" name="TextBox 59"/>
+          <p:cNvPr id="61" name="TextBox 60"/>
           <p:cNvSpPr txBox="1"/>
           <p:nvPr/>
         </p:nvSpPr>
@@ -17055,7 +17190,7 @@
       </p:sp>
       <p:sp>
         <p:nvSpPr>
-          <p:cNvPr id="61" name="Rectangle 60"/>
+          <p:cNvPr id="62" name="Rectangle 61"/>
           <p:cNvSpPr/>
           <p:nvPr/>
         </p:nvSpPr>
@@ -17101,7 +17236,7 @@
       </p:sp>
       <p:sp>
         <p:nvSpPr>
-          <p:cNvPr id="62" name="Rectangle 61"/>
+          <p:cNvPr id="63" name="Rectangle 62"/>
           <p:cNvSpPr/>
           <p:nvPr/>
         </p:nvSpPr>
@@ -17145,7 +17280,7 @@
       </p:sp>
       <p:sp>
         <p:nvSpPr>
-          <p:cNvPr id="63" name="TextBox 62"/>
+          <p:cNvPr id="64" name="TextBox 63"/>
           <p:cNvSpPr txBox="1"/>
           <p:nvPr/>
         </p:nvSpPr>
@@ -17190,7 +17325,7 @@
       </p:sp>
       <p:sp>
         <p:nvSpPr>
-          <p:cNvPr id="64" name="TextBox 63"/>
+          <p:cNvPr id="65" name="TextBox 64"/>
           <p:cNvSpPr txBox="1"/>
           <p:nvPr/>
         </p:nvSpPr>
@@ -17235,7 +17370,7 @@
       </p:sp>
       <p:sp>
         <p:nvSpPr>
-          <p:cNvPr id="65" name="TextBox 64"/>
+          <p:cNvPr id="66" name="TextBox 65"/>
           <p:cNvSpPr txBox="1"/>
           <p:nvPr/>
         </p:nvSpPr>
@@ -17280,7 +17415,7 @@
       </p:sp>
       <p:sp>
         <p:nvSpPr>
-          <p:cNvPr id="66" name="TextBox 65"/>
+          <p:cNvPr id="67" name="TextBox 66"/>
           <p:cNvSpPr txBox="1"/>
           <p:nvPr/>
         </p:nvSpPr>
@@ -17325,7 +17460,7 @@
       </p:sp>
       <p:sp>
         <p:nvSpPr>
-          <p:cNvPr id="67" name="TextBox 66"/>
+          <p:cNvPr id="68" name="TextBox 67"/>
           <p:cNvSpPr txBox="1"/>
           <p:nvPr/>
         </p:nvSpPr>
@@ -17370,7 +17505,7 @@
       </p:sp>
       <p:sp>
         <p:nvSpPr>
-          <p:cNvPr id="68" name="Rectangle 67"/>
+          <p:cNvPr id="69" name="Rectangle 68"/>
           <p:cNvSpPr/>
           <p:nvPr/>
         </p:nvSpPr>
@@ -17414,7 +17549,7 @@
       </p:sp>
       <p:sp>
         <p:nvSpPr>
-          <p:cNvPr id="69" name="TextBox 68"/>
+          <p:cNvPr id="70" name="TextBox 69"/>
           <p:cNvSpPr txBox="1"/>
           <p:nvPr/>
         </p:nvSpPr>
@@ -17701,7 +17836,7 @@
                 </a:solidFill>
                 <a:latin typeface="맑은 고딕"/>
               </a:rPr>
-              <a:t>Step 4 — 블록 연속 (2/6 · 같은 셋업·장비 점유)  (EQP001 → PPK001)</a:t>
+              <a:t>Step 4 — 블록 연속 (LOT 2/6 · masked replay)  (EQP001 → PPK001)</a:t>
             </a:r>
           </a:p>
         </p:txBody>
@@ -19050,7 +19185,7 @@
                 </a:solidFill>
                 <a:latin typeface="맑은 고딕"/>
               </a:rPr>
-              <a:t>블록 크기 N</a:t>
+              <a:t>블록 진행</a:t>
             </a:r>
           </a:p>
         </p:txBody>
@@ -19095,7 +19230,7 @@
                 </a:solidFill>
                 <a:latin typeface="맑은 고딕"/>
               </a:rPr>
-              <a:t>6</a:t>
+              <a:t>LOT 2/6 추가 배정</a:t>
             </a:r>
           </a:p>
         </p:txBody>
@@ -19140,7 +19275,7 @@
                 </a:solidFill>
                 <a:latin typeface="맑은 고딕"/>
               </a:rPr>
-              <a:t>블록 진행</a:t>
+              <a:t>배정 LOT</a:t>
             </a:r>
           </a:p>
         </p:txBody>
@@ -19185,7 +19320,7 @@
                 </a:solidFill>
                 <a:latin typeface="맑은 고딕"/>
               </a:rPr>
-              <a:t>LOT 2/6 배정 (동일 블록)</a:t>
+              <a:t>LOT004</a:t>
             </a:r>
           </a:p>
         </p:txBody>
@@ -19230,7 +19365,7 @@
                 </a:solidFill>
                 <a:latin typeface="맑은 고딕"/>
               </a:rPr>
-              <a:t>배정 LOT</a:t>
+              <a:t>유형</a:t>
             </a:r>
           </a:p>
         </p:txBody>
@@ -19275,104 +19410,14 @@
                 </a:solidFill>
                 <a:latin typeface="맑은 고딕"/>
               </a:rPr>
-              <a:t>LOT004</a:t>
-            </a:r>
-          </a:p>
-        </p:txBody>
-      </p:sp>
-      <p:sp>
-        <p:nvSpPr>
-          <p:cNvPr id="42" name="TextBox 41"/>
-          <p:cNvSpPr txBox="1"/>
-          <p:nvPr/>
-        </p:nvSpPr>
-        <p:spPr>
-          <a:xfrm>
-            <a:off x="9162288" y="3895344"/>
-            <a:ext cx="1097280" cy="274320"/>
-          </a:xfrm>
-          <a:prstGeom prst="rect">
-            <a:avLst/>
-          </a:prstGeom>
-          <a:noFill/>
-        </p:spPr>
-        <p:txBody>
-          <a:bodyPr wrap="square" anchor="t" lIns="36576" rIns="36576" tIns="18288" bIns="18288">
-            <a:spAutoFit/>
-          </a:bodyPr>
-          <a:lstStyle/>
-          <a:p>
-            <a:pPr algn="l">
-              <a:lnSpc>
-                <a:spcPct val="100000"/>
-              </a:lnSpc>
-              <a:spcBef>
-                <a:spcPts val="0"/>
-              </a:spcBef>
-              <a:spcAft>
-                <a:spcPts val="400"/>
-              </a:spcAft>
-            </a:pPr>
-            <a:r>
-              <a:rPr sz="1000" b="0">
-                <a:solidFill>
-                  <a:srgbClr val="5C6670"/>
-                </a:solidFill>
-                <a:latin typeface="맑은 고딕"/>
-              </a:rPr>
-              <a:t>유형</a:t>
-            </a:r>
-          </a:p>
-        </p:txBody>
-      </p:sp>
-      <p:sp>
-        <p:nvSpPr>
-          <p:cNvPr id="43" name="TextBox 42"/>
-          <p:cNvSpPr txBox="1"/>
-          <p:nvPr/>
-        </p:nvSpPr>
-        <p:spPr>
-          <a:xfrm>
-            <a:off x="10195560" y="3895344"/>
-            <a:ext cx="1417320" cy="274320"/>
-          </a:xfrm>
-          <a:prstGeom prst="rect">
-            <a:avLst/>
-          </a:prstGeom>
-          <a:noFill/>
-        </p:spPr>
-        <p:txBody>
-          <a:bodyPr wrap="square" anchor="t" lIns="36576" rIns="36576" tIns="18288" bIns="18288">
-            <a:spAutoFit/>
-          </a:bodyPr>
-          <a:lstStyle/>
-          <a:p>
-            <a:pPr algn="r">
-              <a:lnSpc>
-                <a:spcPct val="100000"/>
-              </a:lnSpc>
-              <a:spcBef>
-                <a:spcPts val="0"/>
-              </a:spcBef>
-              <a:spcAft>
-                <a:spcPts val="400"/>
-              </a:spcAft>
-            </a:pPr>
-            <a:r>
-              <a:rPr sz="1000" b="1">
-                <a:solidFill>
-                  <a:srgbClr val="1B3255"/>
-                </a:solidFill>
-                <a:latin typeface="맑은 고딕"/>
-              </a:rPr>
-              <a:t>블록 연속 (2/6 · 같은 셋업·장비 점유)</a:t>
+              <a:t>블록 연속 (LOT 2/6 · masked replay)</a:t>
             </a:r>
           </a:p>
         </p:txBody>
       </p:sp>
       <p:pic>
         <p:nvPicPr>
-          <p:cNvPr id="44" name="Picture 43" descr="step_04.png"/>
+          <p:cNvPr id="42" name="Picture 41" descr="step_04.png"/>
           <p:cNvPicPr>
             <a:picLocks noChangeAspect="1"/>
           </p:cNvPicPr>
@@ -19386,8 +19431,8 @@
         </p:blipFill>
         <p:spPr>
           <a:xfrm>
-            <a:off x="3337560" y="1325880"/>
-            <a:ext cx="5532120" cy="2240280"/>
+            <a:off x="3337560" y="1298448"/>
+            <a:ext cx="5532120" cy="2176272"/>
           </a:xfrm>
           <a:prstGeom prst="rect">
             <a:avLst/>
@@ -19396,7 +19441,52 @@
       </p:pic>
       <p:sp>
         <p:nvSpPr>
-          <p:cNvPr id="45" name="Rectangle 44"/>
+          <p:cNvPr id="43" name="TextBox 42"/>
+          <p:cNvSpPr txBox="1"/>
+          <p:nvPr/>
+        </p:nvSpPr>
+        <p:spPr>
+          <a:xfrm>
+            <a:off x="3337560" y="3511296"/>
+            <a:ext cx="5532120" cy="201168"/>
+          </a:xfrm>
+          <a:prstGeom prst="rect">
+            <a:avLst/>
+          </a:prstGeom>
+          <a:noFill/>
+        </p:spPr>
+        <p:txBody>
+          <a:bodyPr wrap="square" anchor="t" lIns="36576" rIns="36576" tIns="18288" bIns="18288">
+            <a:spAutoFit/>
+          </a:bodyPr>
+          <a:lstStyle/>
+          <a:p>
+            <a:pPr algn="ctr">
+              <a:lnSpc>
+                <a:spcPct val="100000"/>
+              </a:lnSpc>
+              <a:spcBef>
+                <a:spcPts val="0"/>
+              </a:spcBef>
+              <a:spcAft>
+                <a:spcPts val="400"/>
+              </a:spcAft>
+            </a:pPr>
+            <a:r>
+              <a:rPr sz="819" b="0">
+                <a:solidFill>
+                  <a:srgbClr val="5C6670"/>
+                </a:solidFill>
+                <a:latin typeface="맑은 고딕"/>
+              </a:rPr>
+              <a:t>연한 해칭 = N캐리어 커밋 구간  ·  실선 = 스케줄 등록 LOT (스텝마다 1개씩)</a:t>
+            </a:r>
+          </a:p>
+        </p:txBody>
+      </p:sp>
+      <p:sp>
+        <p:nvSpPr>
+          <p:cNvPr id="44" name="Rectangle 43"/>
           <p:cNvSpPr/>
           <p:nvPr/>
         </p:nvSpPr>
@@ -19440,7 +19530,7 @@
       </p:sp>
       <p:sp>
         <p:nvSpPr>
-          <p:cNvPr id="46" name="TextBox 45"/>
+          <p:cNvPr id="45" name="TextBox 44"/>
           <p:cNvSpPr txBox="1"/>
           <p:nvPr/>
         </p:nvSpPr>
@@ -19485,7 +19575,7 @@
       </p:sp>
       <p:sp>
         <p:nvSpPr>
-          <p:cNvPr id="47" name="Rectangle 46"/>
+          <p:cNvPr id="46" name="Rectangle 45"/>
           <p:cNvSpPr/>
           <p:nvPr/>
         </p:nvSpPr>
@@ -19531,7 +19621,7 @@
       </p:sp>
       <p:sp>
         <p:nvSpPr>
-          <p:cNvPr id="48" name="Rectangle 47"/>
+          <p:cNvPr id="47" name="Rectangle 46"/>
           <p:cNvSpPr/>
           <p:nvPr/>
         </p:nvSpPr>
@@ -19575,7 +19665,7 @@
       </p:sp>
       <p:sp>
         <p:nvSpPr>
-          <p:cNvPr id="49" name="TextBox 48"/>
+          <p:cNvPr id="48" name="TextBox 47"/>
           <p:cNvSpPr txBox="1"/>
           <p:nvPr/>
         </p:nvSpPr>
@@ -19620,7 +19710,7 @@
       </p:sp>
       <p:sp>
         <p:nvSpPr>
-          <p:cNvPr id="50" name="TextBox 49"/>
+          <p:cNvPr id="49" name="TextBox 48"/>
           <p:cNvSpPr txBox="1"/>
           <p:nvPr/>
         </p:nvSpPr>
@@ -19665,7 +19755,7 @@
       </p:sp>
       <p:sp>
         <p:nvSpPr>
-          <p:cNvPr id="51" name="TextBox 50"/>
+          <p:cNvPr id="50" name="TextBox 49"/>
           <p:cNvSpPr txBox="1"/>
           <p:nvPr/>
         </p:nvSpPr>
@@ -19710,7 +19800,7 @@
       </p:sp>
       <p:sp>
         <p:nvSpPr>
-          <p:cNvPr id="52" name="TextBox 51"/>
+          <p:cNvPr id="51" name="TextBox 50"/>
           <p:cNvSpPr txBox="1"/>
           <p:nvPr/>
         </p:nvSpPr>
@@ -19755,7 +19845,7 @@
       </p:sp>
       <p:sp>
         <p:nvSpPr>
-          <p:cNvPr id="53" name="TextBox 52"/>
+          <p:cNvPr id="52" name="TextBox 51"/>
           <p:cNvSpPr txBox="1"/>
           <p:nvPr/>
         </p:nvSpPr>
@@ -19800,7 +19890,7 @@
       </p:sp>
       <p:sp>
         <p:nvSpPr>
-          <p:cNvPr id="54" name="Rectangle 53"/>
+          <p:cNvPr id="53" name="Rectangle 52"/>
           <p:cNvSpPr/>
           <p:nvPr/>
         </p:nvSpPr>
@@ -19846,7 +19936,7 @@
       </p:sp>
       <p:sp>
         <p:nvSpPr>
-          <p:cNvPr id="55" name="Rectangle 54"/>
+          <p:cNvPr id="54" name="Rectangle 53"/>
           <p:cNvSpPr/>
           <p:nvPr/>
         </p:nvSpPr>
@@ -19890,7 +19980,7 @@
       </p:sp>
       <p:sp>
         <p:nvSpPr>
-          <p:cNvPr id="56" name="TextBox 55"/>
+          <p:cNvPr id="55" name="TextBox 54"/>
           <p:cNvSpPr txBox="1"/>
           <p:nvPr/>
         </p:nvSpPr>
@@ -19935,7 +20025,7 @@
       </p:sp>
       <p:sp>
         <p:nvSpPr>
-          <p:cNvPr id="57" name="TextBox 56"/>
+          <p:cNvPr id="56" name="TextBox 55"/>
           <p:cNvSpPr txBox="1"/>
           <p:nvPr/>
         </p:nvSpPr>
@@ -19980,7 +20070,7 @@
       </p:sp>
       <p:sp>
         <p:nvSpPr>
-          <p:cNvPr id="58" name="TextBox 57"/>
+          <p:cNvPr id="57" name="TextBox 56"/>
           <p:cNvSpPr txBox="1"/>
           <p:nvPr/>
         </p:nvSpPr>
@@ -20025,7 +20115,7 @@
       </p:sp>
       <p:sp>
         <p:nvSpPr>
-          <p:cNvPr id="59" name="TextBox 58"/>
+          <p:cNvPr id="58" name="TextBox 57"/>
           <p:cNvSpPr txBox="1"/>
           <p:nvPr/>
         </p:nvSpPr>
@@ -20070,7 +20160,7 @@
       </p:sp>
       <p:sp>
         <p:nvSpPr>
-          <p:cNvPr id="60" name="TextBox 59"/>
+          <p:cNvPr id="59" name="TextBox 58"/>
           <p:cNvSpPr txBox="1"/>
           <p:nvPr/>
         </p:nvSpPr>
@@ -20115,7 +20205,7 @@
       </p:sp>
       <p:sp>
         <p:nvSpPr>
-          <p:cNvPr id="61" name="Rectangle 60"/>
+          <p:cNvPr id="60" name="Rectangle 59"/>
           <p:cNvSpPr/>
           <p:nvPr/>
         </p:nvSpPr>
@@ -20161,7 +20251,7 @@
       </p:sp>
       <p:sp>
         <p:nvSpPr>
-          <p:cNvPr id="62" name="Rectangle 61"/>
+          <p:cNvPr id="61" name="Rectangle 60"/>
           <p:cNvSpPr/>
           <p:nvPr/>
         </p:nvSpPr>
@@ -20205,7 +20295,7 @@
       </p:sp>
       <p:sp>
         <p:nvSpPr>
-          <p:cNvPr id="63" name="TextBox 62"/>
+          <p:cNvPr id="62" name="TextBox 61"/>
           <p:cNvSpPr txBox="1"/>
           <p:nvPr/>
         </p:nvSpPr>
@@ -20250,7 +20340,7 @@
       </p:sp>
       <p:sp>
         <p:nvSpPr>
-          <p:cNvPr id="64" name="TextBox 63"/>
+          <p:cNvPr id="63" name="TextBox 62"/>
           <p:cNvSpPr txBox="1"/>
           <p:nvPr/>
         </p:nvSpPr>
@@ -20295,7 +20385,7 @@
       </p:sp>
       <p:sp>
         <p:nvSpPr>
-          <p:cNvPr id="65" name="TextBox 64"/>
+          <p:cNvPr id="64" name="TextBox 63"/>
           <p:cNvSpPr txBox="1"/>
           <p:nvPr/>
         </p:nvSpPr>
@@ -20340,7 +20430,7 @@
       </p:sp>
       <p:sp>
         <p:nvSpPr>
-          <p:cNvPr id="66" name="TextBox 65"/>
+          <p:cNvPr id="65" name="TextBox 64"/>
           <p:cNvSpPr txBox="1"/>
           <p:nvPr/>
         </p:nvSpPr>
@@ -20385,7 +20475,7 @@
       </p:sp>
       <p:sp>
         <p:nvSpPr>
-          <p:cNvPr id="67" name="TextBox 66"/>
+          <p:cNvPr id="66" name="TextBox 65"/>
           <p:cNvSpPr txBox="1"/>
           <p:nvPr/>
         </p:nvSpPr>
@@ -20430,7 +20520,7 @@
       </p:sp>
       <p:sp>
         <p:nvSpPr>
-          <p:cNvPr id="68" name="Rectangle 67"/>
+          <p:cNvPr id="67" name="Rectangle 66"/>
           <p:cNvSpPr/>
           <p:nvPr/>
         </p:nvSpPr>
@@ -20474,7 +20564,7 @@
       </p:sp>
       <p:sp>
         <p:nvSpPr>
-          <p:cNvPr id="69" name="TextBox 68"/>
+          <p:cNvPr id="68" name="TextBox 67"/>
           <p:cNvSpPr txBox="1"/>
           <p:nvPr/>
         </p:nvSpPr>
@@ -20761,7 +20851,7 @@
                 </a:solidFill>
                 <a:latin typeface="맑은 고딕"/>
               </a:rPr>
-              <a:t>Step 6 — 블록 연속 (2/6 · 같은 셋업·장비 점유)  (EQP003 → PPK003)</a:t>
+              <a:t>Step 6 — 블록 연속 (LOT 2/6 · masked replay)  (EQP003 → PPK003)</a:t>
             </a:r>
           </a:p>
         </p:txBody>
@@ -22110,7 +22200,7 @@
                 </a:solidFill>
                 <a:latin typeface="맑은 고딕"/>
               </a:rPr>
-              <a:t>블록 크기 N</a:t>
+              <a:t>블록 진행</a:t>
             </a:r>
           </a:p>
         </p:txBody>
@@ -22155,7 +22245,7 @@
                 </a:solidFill>
                 <a:latin typeface="맑은 고딕"/>
               </a:rPr>
-              <a:t>6</a:t>
+              <a:t>LOT 2/6 추가 배정</a:t>
             </a:r>
           </a:p>
         </p:txBody>
@@ -22200,7 +22290,7 @@
                 </a:solidFill>
                 <a:latin typeface="맑은 고딕"/>
               </a:rPr>
-              <a:t>블록 진행</a:t>
+              <a:t>배정 LOT</a:t>
             </a:r>
           </a:p>
         </p:txBody>
@@ -22245,7 +22335,7 @@
                 </a:solidFill>
                 <a:latin typeface="맑은 고딕"/>
               </a:rPr>
-              <a:t>LOT 2/6 배정 (동일 블록)</a:t>
+              <a:t>LOT018</a:t>
             </a:r>
           </a:p>
         </p:txBody>
@@ -22290,7 +22380,7 @@
                 </a:solidFill>
                 <a:latin typeface="맑은 고딕"/>
               </a:rPr>
-              <a:t>배정 LOT</a:t>
+              <a:t>유형</a:t>
             </a:r>
           </a:p>
         </p:txBody>
@@ -22335,104 +22425,14 @@
                 </a:solidFill>
                 <a:latin typeface="맑은 고딕"/>
               </a:rPr>
-              <a:t>LOT018</a:t>
-            </a:r>
-          </a:p>
-        </p:txBody>
-      </p:sp>
-      <p:sp>
-        <p:nvSpPr>
-          <p:cNvPr id="42" name="TextBox 41"/>
-          <p:cNvSpPr txBox="1"/>
-          <p:nvPr/>
-        </p:nvSpPr>
-        <p:spPr>
-          <a:xfrm>
-            <a:off x="9162288" y="3895344"/>
-            <a:ext cx="1097280" cy="274320"/>
-          </a:xfrm>
-          <a:prstGeom prst="rect">
-            <a:avLst/>
-          </a:prstGeom>
-          <a:noFill/>
-        </p:spPr>
-        <p:txBody>
-          <a:bodyPr wrap="square" anchor="t" lIns="36576" rIns="36576" tIns="18288" bIns="18288">
-            <a:spAutoFit/>
-          </a:bodyPr>
-          <a:lstStyle/>
-          <a:p>
-            <a:pPr algn="l">
-              <a:lnSpc>
-                <a:spcPct val="100000"/>
-              </a:lnSpc>
-              <a:spcBef>
-                <a:spcPts val="0"/>
-              </a:spcBef>
-              <a:spcAft>
-                <a:spcPts val="400"/>
-              </a:spcAft>
-            </a:pPr>
-            <a:r>
-              <a:rPr sz="1000" b="0">
-                <a:solidFill>
-                  <a:srgbClr val="5C6670"/>
-                </a:solidFill>
-                <a:latin typeface="맑은 고딕"/>
-              </a:rPr>
-              <a:t>유형</a:t>
-            </a:r>
-          </a:p>
-        </p:txBody>
-      </p:sp>
-      <p:sp>
-        <p:nvSpPr>
-          <p:cNvPr id="43" name="TextBox 42"/>
-          <p:cNvSpPr txBox="1"/>
-          <p:nvPr/>
-        </p:nvSpPr>
-        <p:spPr>
-          <a:xfrm>
-            <a:off x="10195560" y="3895344"/>
-            <a:ext cx="1417320" cy="274320"/>
-          </a:xfrm>
-          <a:prstGeom prst="rect">
-            <a:avLst/>
-          </a:prstGeom>
-          <a:noFill/>
-        </p:spPr>
-        <p:txBody>
-          <a:bodyPr wrap="square" anchor="t" lIns="36576" rIns="36576" tIns="18288" bIns="18288">
-            <a:spAutoFit/>
-          </a:bodyPr>
-          <a:lstStyle/>
-          <a:p>
-            <a:pPr algn="r">
-              <a:lnSpc>
-                <a:spcPct val="100000"/>
-              </a:lnSpc>
-              <a:spcBef>
-                <a:spcPts val="0"/>
-              </a:spcBef>
-              <a:spcAft>
-                <a:spcPts val="400"/>
-              </a:spcAft>
-            </a:pPr>
-            <a:r>
-              <a:rPr sz="1000" b="1">
-                <a:solidFill>
-                  <a:srgbClr val="1B3255"/>
-                </a:solidFill>
-                <a:latin typeface="맑은 고딕"/>
-              </a:rPr>
-              <a:t>블록 연속 (2/6 · 같은 셋업·장비 점유)</a:t>
+              <a:t>블록 연속 (LOT 2/6 · masked replay)</a:t>
             </a:r>
           </a:p>
         </p:txBody>
       </p:sp>
       <p:pic>
         <p:nvPicPr>
-          <p:cNvPr id="44" name="Picture 43" descr="step_06.png"/>
+          <p:cNvPr id="42" name="Picture 41" descr="step_06.png"/>
           <p:cNvPicPr>
             <a:picLocks noChangeAspect="1"/>
           </p:cNvPicPr>
@@ -22446,8 +22446,8 @@
         </p:blipFill>
         <p:spPr>
           <a:xfrm>
-            <a:off x="3337560" y="1325880"/>
-            <a:ext cx="5532120" cy="2240280"/>
+            <a:off x="3337560" y="1298448"/>
+            <a:ext cx="5532120" cy="2176272"/>
           </a:xfrm>
           <a:prstGeom prst="rect">
             <a:avLst/>
@@ -22456,7 +22456,52 @@
       </p:pic>
       <p:sp>
         <p:nvSpPr>
-          <p:cNvPr id="45" name="Rectangle 44"/>
+          <p:cNvPr id="43" name="TextBox 42"/>
+          <p:cNvSpPr txBox="1"/>
+          <p:nvPr/>
+        </p:nvSpPr>
+        <p:spPr>
+          <a:xfrm>
+            <a:off x="3337560" y="3511296"/>
+            <a:ext cx="5532120" cy="201168"/>
+          </a:xfrm>
+          <a:prstGeom prst="rect">
+            <a:avLst/>
+          </a:prstGeom>
+          <a:noFill/>
+        </p:spPr>
+        <p:txBody>
+          <a:bodyPr wrap="square" anchor="t" lIns="36576" rIns="36576" tIns="18288" bIns="18288">
+            <a:spAutoFit/>
+          </a:bodyPr>
+          <a:lstStyle/>
+          <a:p>
+            <a:pPr algn="ctr">
+              <a:lnSpc>
+                <a:spcPct val="100000"/>
+              </a:lnSpc>
+              <a:spcBef>
+                <a:spcPts val="0"/>
+              </a:spcBef>
+              <a:spcAft>
+                <a:spcPts val="400"/>
+              </a:spcAft>
+            </a:pPr>
+            <a:r>
+              <a:rPr sz="819" b="0">
+                <a:solidFill>
+                  <a:srgbClr val="5C6670"/>
+                </a:solidFill>
+                <a:latin typeface="맑은 고딕"/>
+              </a:rPr>
+              <a:t>연한 해칭 = N캐리어 커밋 구간  ·  실선 = 스케줄 등록 LOT (스텝마다 1개씩)</a:t>
+            </a:r>
+          </a:p>
+        </p:txBody>
+      </p:sp>
+      <p:sp>
+        <p:nvSpPr>
+          <p:cNvPr id="44" name="Rectangle 43"/>
           <p:cNvSpPr/>
           <p:nvPr/>
         </p:nvSpPr>
@@ -22500,7 +22545,7 @@
       </p:sp>
       <p:sp>
         <p:nvSpPr>
-          <p:cNvPr id="46" name="TextBox 45"/>
+          <p:cNvPr id="45" name="TextBox 44"/>
           <p:cNvSpPr txBox="1"/>
           <p:nvPr/>
         </p:nvSpPr>
@@ -22545,7 +22590,7 @@
       </p:sp>
       <p:sp>
         <p:nvSpPr>
-          <p:cNvPr id="47" name="Rectangle 46"/>
+          <p:cNvPr id="46" name="Rectangle 45"/>
           <p:cNvSpPr/>
           <p:nvPr/>
         </p:nvSpPr>
@@ -22591,7 +22636,7 @@
       </p:sp>
       <p:sp>
         <p:nvSpPr>
-          <p:cNvPr id="48" name="Rectangle 47"/>
+          <p:cNvPr id="47" name="Rectangle 46"/>
           <p:cNvSpPr/>
           <p:nvPr/>
         </p:nvSpPr>
@@ -22635,7 +22680,7 @@
       </p:sp>
       <p:sp>
         <p:nvSpPr>
-          <p:cNvPr id="49" name="TextBox 48"/>
+          <p:cNvPr id="48" name="TextBox 47"/>
           <p:cNvSpPr txBox="1"/>
           <p:nvPr/>
         </p:nvSpPr>
@@ -22680,7 +22725,7 @@
       </p:sp>
       <p:sp>
         <p:nvSpPr>
-          <p:cNvPr id="50" name="TextBox 49"/>
+          <p:cNvPr id="49" name="TextBox 48"/>
           <p:cNvSpPr txBox="1"/>
           <p:nvPr/>
         </p:nvSpPr>
@@ -22725,7 +22770,7 @@
       </p:sp>
       <p:sp>
         <p:nvSpPr>
-          <p:cNvPr id="51" name="TextBox 50"/>
+          <p:cNvPr id="50" name="TextBox 49"/>
           <p:cNvSpPr txBox="1"/>
           <p:nvPr/>
         </p:nvSpPr>
@@ -22770,7 +22815,7 @@
       </p:sp>
       <p:sp>
         <p:nvSpPr>
-          <p:cNvPr id="52" name="TextBox 51"/>
+          <p:cNvPr id="51" name="TextBox 50"/>
           <p:cNvSpPr txBox="1"/>
           <p:nvPr/>
         </p:nvSpPr>
@@ -22815,7 +22860,7 @@
       </p:sp>
       <p:sp>
         <p:nvSpPr>
-          <p:cNvPr id="53" name="TextBox 52"/>
+          <p:cNvPr id="52" name="TextBox 51"/>
           <p:cNvSpPr txBox="1"/>
           <p:nvPr/>
         </p:nvSpPr>
@@ -22860,7 +22905,7 @@
       </p:sp>
       <p:sp>
         <p:nvSpPr>
-          <p:cNvPr id="54" name="Rectangle 53"/>
+          <p:cNvPr id="53" name="Rectangle 52"/>
           <p:cNvSpPr/>
           <p:nvPr/>
         </p:nvSpPr>
@@ -22906,7 +22951,7 @@
       </p:sp>
       <p:sp>
         <p:nvSpPr>
-          <p:cNvPr id="55" name="Rectangle 54"/>
+          <p:cNvPr id="54" name="Rectangle 53"/>
           <p:cNvSpPr/>
           <p:nvPr/>
         </p:nvSpPr>
@@ -22950,7 +22995,7 @@
       </p:sp>
       <p:sp>
         <p:nvSpPr>
-          <p:cNvPr id="56" name="TextBox 55"/>
+          <p:cNvPr id="55" name="TextBox 54"/>
           <p:cNvSpPr txBox="1"/>
           <p:nvPr/>
         </p:nvSpPr>
@@ -22995,7 +23040,7 @@
       </p:sp>
       <p:sp>
         <p:nvSpPr>
-          <p:cNvPr id="57" name="TextBox 56"/>
+          <p:cNvPr id="56" name="TextBox 55"/>
           <p:cNvSpPr txBox="1"/>
           <p:nvPr/>
         </p:nvSpPr>
@@ -23040,7 +23085,7 @@
       </p:sp>
       <p:sp>
         <p:nvSpPr>
-          <p:cNvPr id="58" name="TextBox 57"/>
+          <p:cNvPr id="57" name="TextBox 56"/>
           <p:cNvSpPr txBox="1"/>
           <p:nvPr/>
         </p:nvSpPr>
@@ -23085,7 +23130,7 @@
       </p:sp>
       <p:sp>
         <p:nvSpPr>
-          <p:cNvPr id="59" name="TextBox 58"/>
+          <p:cNvPr id="58" name="TextBox 57"/>
           <p:cNvSpPr txBox="1"/>
           <p:nvPr/>
         </p:nvSpPr>
@@ -23130,7 +23175,7 @@
       </p:sp>
       <p:sp>
         <p:nvSpPr>
-          <p:cNvPr id="60" name="TextBox 59"/>
+          <p:cNvPr id="59" name="TextBox 58"/>
           <p:cNvSpPr txBox="1"/>
           <p:nvPr/>
         </p:nvSpPr>
@@ -23175,7 +23220,7 @@
       </p:sp>
       <p:sp>
         <p:nvSpPr>
-          <p:cNvPr id="61" name="Rectangle 60"/>
+          <p:cNvPr id="60" name="Rectangle 59"/>
           <p:cNvSpPr/>
           <p:nvPr/>
         </p:nvSpPr>
@@ -23221,7 +23266,7 @@
       </p:sp>
       <p:sp>
         <p:nvSpPr>
-          <p:cNvPr id="62" name="Rectangle 61"/>
+          <p:cNvPr id="61" name="Rectangle 60"/>
           <p:cNvSpPr/>
           <p:nvPr/>
         </p:nvSpPr>
@@ -23265,7 +23310,7 @@
       </p:sp>
       <p:sp>
         <p:nvSpPr>
-          <p:cNvPr id="63" name="TextBox 62"/>
+          <p:cNvPr id="62" name="TextBox 61"/>
           <p:cNvSpPr txBox="1"/>
           <p:nvPr/>
         </p:nvSpPr>
@@ -23310,7 +23355,7 @@
       </p:sp>
       <p:sp>
         <p:nvSpPr>
-          <p:cNvPr id="64" name="TextBox 63"/>
+          <p:cNvPr id="63" name="TextBox 62"/>
           <p:cNvSpPr txBox="1"/>
           <p:nvPr/>
         </p:nvSpPr>
@@ -23355,7 +23400,7 @@
       </p:sp>
       <p:sp>
         <p:nvSpPr>
-          <p:cNvPr id="65" name="TextBox 64"/>
+          <p:cNvPr id="64" name="TextBox 63"/>
           <p:cNvSpPr txBox="1"/>
           <p:nvPr/>
         </p:nvSpPr>
@@ -23400,7 +23445,7 @@
       </p:sp>
       <p:sp>
         <p:nvSpPr>
-          <p:cNvPr id="66" name="TextBox 65"/>
+          <p:cNvPr id="65" name="TextBox 64"/>
           <p:cNvSpPr txBox="1"/>
           <p:nvPr/>
         </p:nvSpPr>
@@ -23445,7 +23490,7 @@
       </p:sp>
       <p:sp>
         <p:nvSpPr>
-          <p:cNvPr id="67" name="TextBox 66"/>
+          <p:cNvPr id="66" name="TextBox 65"/>
           <p:cNvSpPr txBox="1"/>
           <p:nvPr/>
         </p:nvSpPr>
@@ -23490,7 +23535,7 @@
       </p:sp>
       <p:sp>
         <p:nvSpPr>
-          <p:cNvPr id="68" name="Rectangle 67"/>
+          <p:cNvPr id="67" name="Rectangle 66"/>
           <p:cNvSpPr/>
           <p:nvPr/>
         </p:nvSpPr>
@@ -23534,7 +23579,7 @@
       </p:sp>
       <p:sp>
         <p:nvSpPr>
-          <p:cNvPr id="69" name="TextBox 68"/>
+          <p:cNvPr id="68" name="TextBox 67"/>
           <p:cNvSpPr txBox="1"/>
           <p:nvPr/>
         </p:nvSpPr>
@@ -23821,7 +23866,7 @@
                 </a:solidFill>
                 <a:latin typeface="맑은 고딕"/>
               </a:rPr>
-              <a:t>Step 8 — 블록 연속 (3/6 · 같은 셋업·장비 점유)  (EQP002 → PPK002)</a:t>
+              <a:t>Step 8 — 블록 연속 (LOT 3/6 · masked replay)  (EQP002 → PPK002)</a:t>
             </a:r>
           </a:p>
         </p:txBody>
@@ -25170,7 +25215,7 @@
                 </a:solidFill>
                 <a:latin typeface="맑은 고딕"/>
               </a:rPr>
-              <a:t>블록 크기 N</a:t>
+              <a:t>블록 진행</a:t>
             </a:r>
           </a:p>
         </p:txBody>
@@ -25215,7 +25260,7 @@
                 </a:solidFill>
                 <a:latin typeface="맑은 고딕"/>
               </a:rPr>
-              <a:t>6</a:t>
+              <a:t>LOT 3/6 추가 배정</a:t>
             </a:r>
           </a:p>
         </p:txBody>
@@ -25260,7 +25305,7 @@
                 </a:solidFill>
                 <a:latin typeface="맑은 고딕"/>
               </a:rPr>
-              <a:t>블록 진행</a:t>
+              <a:t>배정 LOT</a:t>
             </a:r>
           </a:p>
         </p:txBody>
@@ -25305,7 +25350,7 @@
                 </a:solidFill>
                 <a:latin typeface="맑은 고딕"/>
               </a:rPr>
-              <a:t>LOT 3/6 배정 (동일 블록)</a:t>
+              <a:t>LOT015</a:t>
             </a:r>
           </a:p>
         </p:txBody>
@@ -25350,7 +25395,7 @@
                 </a:solidFill>
                 <a:latin typeface="맑은 고딕"/>
               </a:rPr>
-              <a:t>배정 LOT</a:t>
+              <a:t>유형</a:t>
             </a:r>
           </a:p>
         </p:txBody>
@@ -25395,104 +25440,14 @@
                 </a:solidFill>
                 <a:latin typeface="맑은 고딕"/>
               </a:rPr>
-              <a:t>LOT015</a:t>
-            </a:r>
-          </a:p>
-        </p:txBody>
-      </p:sp>
-      <p:sp>
-        <p:nvSpPr>
-          <p:cNvPr id="42" name="TextBox 41"/>
-          <p:cNvSpPr txBox="1"/>
-          <p:nvPr/>
-        </p:nvSpPr>
-        <p:spPr>
-          <a:xfrm>
-            <a:off x="9162288" y="3895344"/>
-            <a:ext cx="1097280" cy="274320"/>
-          </a:xfrm>
-          <a:prstGeom prst="rect">
-            <a:avLst/>
-          </a:prstGeom>
-          <a:noFill/>
-        </p:spPr>
-        <p:txBody>
-          <a:bodyPr wrap="square" anchor="t" lIns="36576" rIns="36576" tIns="18288" bIns="18288">
-            <a:spAutoFit/>
-          </a:bodyPr>
-          <a:lstStyle/>
-          <a:p>
-            <a:pPr algn="l">
-              <a:lnSpc>
-                <a:spcPct val="100000"/>
-              </a:lnSpc>
-              <a:spcBef>
-                <a:spcPts val="0"/>
-              </a:spcBef>
-              <a:spcAft>
-                <a:spcPts val="400"/>
-              </a:spcAft>
-            </a:pPr>
-            <a:r>
-              <a:rPr sz="1000" b="0">
-                <a:solidFill>
-                  <a:srgbClr val="5C6670"/>
-                </a:solidFill>
-                <a:latin typeface="맑은 고딕"/>
-              </a:rPr>
-              <a:t>유형</a:t>
-            </a:r>
-          </a:p>
-        </p:txBody>
-      </p:sp>
-      <p:sp>
-        <p:nvSpPr>
-          <p:cNvPr id="43" name="TextBox 42"/>
-          <p:cNvSpPr txBox="1"/>
-          <p:nvPr/>
-        </p:nvSpPr>
-        <p:spPr>
-          <a:xfrm>
-            <a:off x="10195560" y="3895344"/>
-            <a:ext cx="1417320" cy="274320"/>
-          </a:xfrm>
-          <a:prstGeom prst="rect">
-            <a:avLst/>
-          </a:prstGeom>
-          <a:noFill/>
-        </p:spPr>
-        <p:txBody>
-          <a:bodyPr wrap="square" anchor="t" lIns="36576" rIns="36576" tIns="18288" bIns="18288">
-            <a:spAutoFit/>
-          </a:bodyPr>
-          <a:lstStyle/>
-          <a:p>
-            <a:pPr algn="r">
-              <a:lnSpc>
-                <a:spcPct val="100000"/>
-              </a:lnSpc>
-              <a:spcBef>
-                <a:spcPts val="0"/>
-              </a:spcBef>
-              <a:spcAft>
-                <a:spcPts val="400"/>
-              </a:spcAft>
-            </a:pPr>
-            <a:r>
-              <a:rPr sz="1000" b="1">
-                <a:solidFill>
-                  <a:srgbClr val="1B3255"/>
-                </a:solidFill>
-                <a:latin typeface="맑은 고딕"/>
-              </a:rPr>
-              <a:t>블록 연속 (3/6 · 같은 셋업·장비 점유)</a:t>
+              <a:t>블록 연속 (LOT 3/6 · masked replay)</a:t>
             </a:r>
           </a:p>
         </p:txBody>
       </p:sp>
       <p:pic>
         <p:nvPicPr>
-          <p:cNvPr id="44" name="Picture 43" descr="step_08.png"/>
+          <p:cNvPr id="42" name="Picture 41" descr="step_08.png"/>
           <p:cNvPicPr>
             <a:picLocks noChangeAspect="1"/>
           </p:cNvPicPr>
@@ -25506,8 +25461,8 @@
         </p:blipFill>
         <p:spPr>
           <a:xfrm>
-            <a:off x="3337560" y="1325880"/>
-            <a:ext cx="5532120" cy="2240280"/>
+            <a:off x="3337560" y="1298448"/>
+            <a:ext cx="5532120" cy="2176272"/>
           </a:xfrm>
           <a:prstGeom prst="rect">
             <a:avLst/>
@@ -25516,7 +25471,52 @@
       </p:pic>
       <p:sp>
         <p:nvSpPr>
-          <p:cNvPr id="45" name="Rectangle 44"/>
+          <p:cNvPr id="43" name="TextBox 42"/>
+          <p:cNvSpPr txBox="1"/>
+          <p:nvPr/>
+        </p:nvSpPr>
+        <p:spPr>
+          <a:xfrm>
+            <a:off x="3337560" y="3511296"/>
+            <a:ext cx="5532120" cy="201168"/>
+          </a:xfrm>
+          <a:prstGeom prst="rect">
+            <a:avLst/>
+          </a:prstGeom>
+          <a:noFill/>
+        </p:spPr>
+        <p:txBody>
+          <a:bodyPr wrap="square" anchor="t" lIns="36576" rIns="36576" tIns="18288" bIns="18288">
+            <a:spAutoFit/>
+          </a:bodyPr>
+          <a:lstStyle/>
+          <a:p>
+            <a:pPr algn="ctr">
+              <a:lnSpc>
+                <a:spcPct val="100000"/>
+              </a:lnSpc>
+              <a:spcBef>
+                <a:spcPts val="0"/>
+              </a:spcBef>
+              <a:spcAft>
+                <a:spcPts val="400"/>
+              </a:spcAft>
+            </a:pPr>
+            <a:r>
+              <a:rPr sz="819" b="0">
+                <a:solidFill>
+                  <a:srgbClr val="5C6670"/>
+                </a:solidFill>
+                <a:latin typeface="맑은 고딕"/>
+              </a:rPr>
+              <a:t>연한 해칭 = N캐리어 커밋 구간  ·  실선 = 스케줄 등록 LOT (스텝마다 1개씩)</a:t>
+            </a:r>
+          </a:p>
+        </p:txBody>
+      </p:sp>
+      <p:sp>
+        <p:nvSpPr>
+          <p:cNvPr id="44" name="Rectangle 43"/>
           <p:cNvSpPr/>
           <p:nvPr/>
         </p:nvSpPr>
@@ -25560,7 +25560,7 @@
       </p:sp>
       <p:sp>
         <p:nvSpPr>
-          <p:cNvPr id="46" name="TextBox 45"/>
+          <p:cNvPr id="45" name="TextBox 44"/>
           <p:cNvSpPr txBox="1"/>
           <p:nvPr/>
         </p:nvSpPr>
@@ -25605,7 +25605,7 @@
       </p:sp>
       <p:sp>
         <p:nvSpPr>
-          <p:cNvPr id="47" name="Rectangle 46"/>
+          <p:cNvPr id="46" name="Rectangle 45"/>
           <p:cNvSpPr/>
           <p:nvPr/>
         </p:nvSpPr>
@@ -25651,7 +25651,7 @@
       </p:sp>
       <p:sp>
         <p:nvSpPr>
-          <p:cNvPr id="48" name="Rectangle 47"/>
+          <p:cNvPr id="47" name="Rectangle 46"/>
           <p:cNvSpPr/>
           <p:nvPr/>
         </p:nvSpPr>
@@ -25695,7 +25695,7 @@
       </p:sp>
       <p:sp>
         <p:nvSpPr>
-          <p:cNvPr id="49" name="TextBox 48"/>
+          <p:cNvPr id="48" name="TextBox 47"/>
           <p:cNvSpPr txBox="1"/>
           <p:nvPr/>
         </p:nvSpPr>
@@ -25740,7 +25740,7 @@
       </p:sp>
       <p:sp>
         <p:nvSpPr>
-          <p:cNvPr id="50" name="TextBox 49"/>
+          <p:cNvPr id="49" name="TextBox 48"/>
           <p:cNvSpPr txBox="1"/>
           <p:nvPr/>
         </p:nvSpPr>
@@ -25785,7 +25785,7 @@
       </p:sp>
       <p:sp>
         <p:nvSpPr>
-          <p:cNvPr id="51" name="TextBox 50"/>
+          <p:cNvPr id="50" name="TextBox 49"/>
           <p:cNvSpPr txBox="1"/>
           <p:nvPr/>
         </p:nvSpPr>
@@ -25830,7 +25830,7 @@
       </p:sp>
       <p:sp>
         <p:nvSpPr>
-          <p:cNvPr id="52" name="TextBox 51"/>
+          <p:cNvPr id="51" name="TextBox 50"/>
           <p:cNvSpPr txBox="1"/>
           <p:nvPr/>
         </p:nvSpPr>
@@ -25875,7 +25875,7 @@
       </p:sp>
       <p:sp>
         <p:nvSpPr>
-          <p:cNvPr id="53" name="TextBox 52"/>
+          <p:cNvPr id="52" name="TextBox 51"/>
           <p:cNvSpPr txBox="1"/>
           <p:nvPr/>
         </p:nvSpPr>
@@ -25920,7 +25920,7 @@
       </p:sp>
       <p:sp>
         <p:nvSpPr>
-          <p:cNvPr id="54" name="Rectangle 53"/>
+          <p:cNvPr id="53" name="Rectangle 52"/>
           <p:cNvSpPr/>
           <p:nvPr/>
         </p:nvSpPr>
@@ -25966,7 +25966,7 @@
       </p:sp>
       <p:sp>
         <p:nvSpPr>
-          <p:cNvPr id="55" name="Rectangle 54"/>
+          <p:cNvPr id="54" name="Rectangle 53"/>
           <p:cNvSpPr/>
           <p:nvPr/>
         </p:nvSpPr>
@@ -26010,7 +26010,7 @@
       </p:sp>
       <p:sp>
         <p:nvSpPr>
-          <p:cNvPr id="56" name="TextBox 55"/>
+          <p:cNvPr id="55" name="TextBox 54"/>
           <p:cNvSpPr txBox="1"/>
           <p:nvPr/>
         </p:nvSpPr>
@@ -26055,7 +26055,7 @@
       </p:sp>
       <p:sp>
         <p:nvSpPr>
-          <p:cNvPr id="57" name="TextBox 56"/>
+          <p:cNvPr id="56" name="TextBox 55"/>
           <p:cNvSpPr txBox="1"/>
           <p:nvPr/>
         </p:nvSpPr>
@@ -26100,7 +26100,7 @@
       </p:sp>
       <p:sp>
         <p:nvSpPr>
-          <p:cNvPr id="58" name="TextBox 57"/>
+          <p:cNvPr id="57" name="TextBox 56"/>
           <p:cNvSpPr txBox="1"/>
           <p:nvPr/>
         </p:nvSpPr>
@@ -26145,7 +26145,7 @@
       </p:sp>
       <p:sp>
         <p:nvSpPr>
-          <p:cNvPr id="59" name="TextBox 58"/>
+          <p:cNvPr id="58" name="TextBox 57"/>
           <p:cNvSpPr txBox="1"/>
           <p:nvPr/>
         </p:nvSpPr>
@@ -26190,7 +26190,7 @@
       </p:sp>
       <p:sp>
         <p:nvSpPr>
-          <p:cNvPr id="60" name="TextBox 59"/>
+          <p:cNvPr id="59" name="TextBox 58"/>
           <p:cNvSpPr txBox="1"/>
           <p:nvPr/>
         </p:nvSpPr>
@@ -26235,7 +26235,7 @@
       </p:sp>
       <p:sp>
         <p:nvSpPr>
-          <p:cNvPr id="61" name="Rectangle 60"/>
+          <p:cNvPr id="60" name="Rectangle 59"/>
           <p:cNvSpPr/>
           <p:nvPr/>
         </p:nvSpPr>
@@ -26281,7 +26281,7 @@
       </p:sp>
       <p:sp>
         <p:nvSpPr>
-          <p:cNvPr id="62" name="Rectangle 61"/>
+          <p:cNvPr id="61" name="Rectangle 60"/>
           <p:cNvSpPr/>
           <p:nvPr/>
         </p:nvSpPr>
@@ -26325,7 +26325,7 @@
       </p:sp>
       <p:sp>
         <p:nvSpPr>
-          <p:cNvPr id="63" name="TextBox 62"/>
+          <p:cNvPr id="62" name="TextBox 61"/>
           <p:cNvSpPr txBox="1"/>
           <p:nvPr/>
         </p:nvSpPr>
@@ -26370,7 +26370,7 @@
       </p:sp>
       <p:sp>
         <p:nvSpPr>
-          <p:cNvPr id="64" name="TextBox 63"/>
+          <p:cNvPr id="63" name="TextBox 62"/>
           <p:cNvSpPr txBox="1"/>
           <p:nvPr/>
         </p:nvSpPr>
@@ -26415,7 +26415,7 @@
       </p:sp>
       <p:sp>
         <p:nvSpPr>
-          <p:cNvPr id="65" name="TextBox 64"/>
+          <p:cNvPr id="64" name="TextBox 63"/>
           <p:cNvSpPr txBox="1"/>
           <p:nvPr/>
         </p:nvSpPr>
@@ -26460,7 +26460,7 @@
       </p:sp>
       <p:sp>
         <p:nvSpPr>
-          <p:cNvPr id="66" name="TextBox 65"/>
+          <p:cNvPr id="65" name="TextBox 64"/>
           <p:cNvSpPr txBox="1"/>
           <p:nvPr/>
         </p:nvSpPr>
@@ -26505,7 +26505,7 @@
       </p:sp>
       <p:sp>
         <p:nvSpPr>
-          <p:cNvPr id="67" name="TextBox 66"/>
+          <p:cNvPr id="66" name="TextBox 65"/>
           <p:cNvSpPr txBox="1"/>
           <p:nvPr/>
         </p:nvSpPr>
@@ -26550,7 +26550,7 @@
       </p:sp>
       <p:sp>
         <p:nvSpPr>
-          <p:cNvPr id="68" name="Rectangle 67"/>
+          <p:cNvPr id="67" name="Rectangle 66"/>
           <p:cNvSpPr/>
           <p:nvPr/>
         </p:nvSpPr>
@@ -26594,7 +26594,7 @@
       </p:sp>
       <p:sp>
         <p:nvSpPr>
-          <p:cNvPr id="69" name="TextBox 68"/>
+          <p:cNvPr id="68" name="TextBox 67"/>
           <p:cNvSpPr txBox="1"/>
           <p:nvPr/>
         </p:nvSpPr>
